--- a/activities/Activity-06-Generate-and-Refine-an-AI-Assisted-Infographic/A06-Generate-and-Refine-an-AI-Assisted-Infographic-Sample.pptx
+++ b/activities/Activity-06-Generate-and-Refine-an-AI-Assisted-Infographic/A06-Generate-and-Refine-an-AI-Assisted-Infographic-Sample.pptx
@@ -10,6 +10,7 @@
     <p:sldId id="258" r:id="rId9"/>
     <p:sldId id="259" r:id="rId10"/>
     <p:sldId id="260" r:id="rId11"/>
+    <p:sldId id="261" r:id="rId12"/>
   </p:sldIdLst>
   <p:sldSz cx="12191695" cy="6858000" type="screen4x3"/>
   <p:notesSz cx="6858000" cy="9144000"/>
@@ -3292,7 +3293,7 @@
                 </a:solidFill>
                 <a:latin typeface="Arial"/>
               </a:rPr>
-              <a:t>Generate and Refine an AI-Assisted Infographic</a:t>
+              <a:t>Compare Microsoft 365 Copilot and Gemini Notebook</a:t>
             </a:r>
           </a:p>
         </p:txBody>
@@ -3442,7 +3443,7 @@
                 </a:solidFill>
                 <a:latin typeface="Arial"/>
               </a:rPr>
-              <a:t>Copilot / AI Designer + PowerPoint</a:t>
+              <a:t>Microsoft 365 Copilot + Gemini Notebook + PowerPoint</a:t>
             </a:r>
           </a:p>
         </p:txBody>
@@ -3525,6 +3526,246 @@
             <a:avLst/>
           </a:prstGeom>
           <a:solidFill>
+            <a:srgbClr val="7C3AED"/>
+          </a:solidFill>
+          <a:ln>
+            <a:solidFill>
+              <a:srgbClr val="7C3AED"/>
+            </a:solidFill>
+          </a:ln>
+        </p:spPr>
+        <p:style>
+          <a:lnRef idx="1">
+            <a:schemeClr val="accent1"/>
+          </a:lnRef>
+          <a:fillRef idx="3">
+            <a:schemeClr val="accent1"/>
+          </a:fillRef>
+          <a:effectRef idx="2">
+            <a:schemeClr val="accent1"/>
+          </a:effectRef>
+          <a:fontRef idx="minor">
+            <a:schemeClr val="lt1"/>
+          </a:fontRef>
+        </p:style>
+        <p:txBody>
+          <a:bodyPr rtlCol="0" anchor="ctr"/>
+          <a:lstStyle/>
+          <a:p>
+            <a:pPr algn="ctr"/>
+          </a:p>
+        </p:txBody>
+      </p:sp>
+      <p:sp>
+        <p:nvSpPr>
+          <p:cNvPr id="4" name="TextBox 3"/>
+          <p:cNvSpPr txBox="1"/>
+          <p:nvPr/>
+        </p:nvSpPr>
+        <p:spPr>
+          <a:xfrm>
+            <a:off x="658368" y="384048"/>
+            <a:ext cx="10789920" cy="320040"/>
+          </a:xfrm>
+          <a:prstGeom prst="rect">
+            <a:avLst/>
+          </a:prstGeom>
+          <a:noFill/>
+        </p:spPr>
+        <p:txBody>
+          <a:bodyPr wrap="square" anchor="t">
+            <a:spAutoFit/>
+          </a:bodyPr>
+          <a:lstStyle/>
+          <a:p>
+            <a:pPr algn="l"/>
+            <a:r>
+              <a:rPr sz="1100" b="1">
+                <a:solidFill>
+                  <a:srgbClr val="7C3AED"/>
+                </a:solidFill>
+                <a:latin typeface="Arial"/>
+              </a:rPr>
+              <a:t>ACTIVITY 06 · FULL COPY-READY TEXT IN PROMPTS.MD AND AI PROMPT LAB</a:t>
+            </a:r>
+          </a:p>
+        </p:txBody>
+      </p:sp>
+      <p:sp>
+        <p:nvSpPr>
+          <p:cNvPr id="5" name="TextBox 4"/>
+          <p:cNvSpPr txBox="1"/>
+          <p:nvPr/>
+        </p:nvSpPr>
+        <p:spPr>
+          <a:xfrm>
+            <a:off x="658368" y="749808"/>
+            <a:ext cx="10789920" cy="658368"/>
+          </a:xfrm>
+          <a:prstGeom prst="rect">
+            <a:avLst/>
+          </a:prstGeom>
+          <a:noFill/>
+        </p:spPr>
+        <p:txBody>
+          <a:bodyPr wrap="square" anchor="t">
+            <a:spAutoFit/>
+          </a:bodyPr>
+          <a:lstStyle/>
+          <a:p>
+            <a:pPr algn="l"/>
+            <a:r>
+              <a:rPr sz="2700" b="1">
+                <a:solidFill>
+                  <a:srgbClr val="161B26"/>
+                </a:solidFill>
+                <a:latin typeface="Arial"/>
+              </a:rPr>
+              <a:t>AI Prompt Starters</a:t>
+            </a:r>
+          </a:p>
+        </p:txBody>
+      </p:sp>
+      <p:sp>
+        <p:nvSpPr>
+          <p:cNvPr id="6" name="Rectangle 5"/>
+          <p:cNvSpPr/>
+          <p:nvPr/>
+        </p:nvSpPr>
+        <p:spPr>
+          <a:xfrm>
+            <a:off x="658368" y="1444752"/>
+            <a:ext cx="10881360" cy="18288"/>
+          </a:xfrm>
+          <a:prstGeom prst="rect">
+            <a:avLst/>
+          </a:prstGeom>
+          <a:solidFill>
+            <a:srgbClr val="E2E8F0"/>
+          </a:solidFill>
+          <a:ln>
+            <a:solidFill>
+              <a:srgbClr val="E2E8F0"/>
+            </a:solidFill>
+          </a:ln>
+        </p:spPr>
+        <p:style>
+          <a:lnRef idx="1">
+            <a:schemeClr val="accent1"/>
+          </a:lnRef>
+          <a:fillRef idx="3">
+            <a:schemeClr val="accent1"/>
+          </a:fillRef>
+          <a:effectRef idx="2">
+            <a:schemeClr val="accent1"/>
+          </a:effectRef>
+          <a:fontRef idx="minor">
+            <a:schemeClr val="lt1"/>
+          </a:fontRef>
+        </p:style>
+        <p:txBody>
+          <a:bodyPr rtlCol="0" anchor="ctr"/>
+          <a:lstStyle/>
+          <a:p>
+            <a:pPr algn="ctr"/>
+          </a:p>
+        </p:txBody>
+      </p:sp>
+      <p:sp>
+        <p:nvSpPr>
+          <p:cNvPr id="7" name="TextBox 6"/>
+          <p:cNvSpPr txBox="1"/>
+          <p:nvPr/>
+        </p:nvSpPr>
+        <p:spPr>
+          <a:xfrm>
+            <a:off x="658368" y="6473952"/>
+            <a:ext cx="9875520" cy="201168"/>
+          </a:xfrm>
+          <a:prstGeom prst="rect">
+            <a:avLst/>
+          </a:prstGeom>
+          <a:noFill/>
+        </p:spPr>
+        <p:txBody>
+          <a:bodyPr wrap="square" anchor="t">
+            <a:spAutoFit/>
+          </a:bodyPr>
+          <a:lstStyle/>
+          <a:p>
+            <a:pPr algn="l"/>
+            <a:r>
+              <a:rPr sz="800" b="0">
+                <a:solidFill>
+                  <a:srgbClr val="5B6372"/>
+                </a:solidFill>
+                <a:latin typeface="Arial"/>
+              </a:rPr>
+              <a:t>TGS-2026064178 · ACTIVITY PRACTICE · Tertiary Infotech Academy Pte Ltd</a:t>
+            </a:r>
+          </a:p>
+        </p:txBody>
+      </p:sp>
+      <p:sp>
+        <p:nvSpPr>
+          <p:cNvPr id="8" name="Rounded Rectangle 7"/>
+          <p:cNvSpPr/>
+          <p:nvPr/>
+        </p:nvSpPr>
+        <p:spPr>
+          <a:xfrm>
+            <a:off x="731520" y="1755648"/>
+            <a:ext cx="5166360" cy="1847088"/>
+          </a:xfrm>
+          <a:prstGeom prst="roundRect">
+            <a:avLst/>
+          </a:prstGeom>
+          <a:solidFill>
+            <a:srgbClr val="F5F8FC"/>
+          </a:solidFill>
+          <a:ln>
+            <a:solidFill>
+              <a:srgbClr val="E2E8F0"/>
+            </a:solidFill>
+          </a:ln>
+        </p:spPr>
+        <p:style>
+          <a:lnRef idx="1">
+            <a:schemeClr val="accent1"/>
+          </a:lnRef>
+          <a:fillRef idx="3">
+            <a:schemeClr val="accent1"/>
+          </a:fillRef>
+          <a:effectRef idx="2">
+            <a:schemeClr val="accent1"/>
+          </a:effectRef>
+          <a:fontRef idx="minor">
+            <a:schemeClr val="lt1"/>
+          </a:fontRef>
+        </p:style>
+        <p:txBody>
+          <a:bodyPr rtlCol="0" anchor="ctr"/>
+          <a:lstStyle/>
+          <a:p>
+            <a:pPr algn="ctr"/>
+          </a:p>
+        </p:txBody>
+      </p:sp>
+      <p:sp>
+        <p:nvSpPr>
+          <p:cNvPr id="9" name="Rectangle 8"/>
+          <p:cNvSpPr/>
+          <p:nvPr/>
+        </p:nvSpPr>
+        <p:spPr>
+          <a:xfrm>
+            <a:off x="731520" y="1755648"/>
+            <a:ext cx="73152" cy="1847088"/>
+          </a:xfrm>
+          <a:prstGeom prst="rect">
+            <a:avLst/>
+          </a:prstGeom>
+          <a:solidFill>
             <a:srgbClr val="1F6FEB"/>
           </a:solidFill>
           <a:ln>
@@ -3557,14 +3798,94 @@
       </p:sp>
       <p:sp>
         <p:nvSpPr>
-          <p:cNvPr id="4" name="TextBox 3"/>
+          <p:cNvPr id="10" name="Rounded Rectangle 9"/>
+          <p:cNvSpPr/>
+          <p:nvPr/>
+        </p:nvSpPr>
+        <p:spPr>
+          <a:xfrm>
+            <a:off x="932688" y="1975104"/>
+            <a:ext cx="438912" cy="438912"/>
+          </a:xfrm>
+          <a:prstGeom prst="roundRect">
+            <a:avLst/>
+          </a:prstGeom>
+          <a:solidFill>
+            <a:srgbClr val="1F6FEB"/>
+          </a:solidFill>
+          <a:ln>
+            <a:solidFill>
+              <a:srgbClr val="1F6FEB"/>
+            </a:solidFill>
+          </a:ln>
+        </p:spPr>
+        <p:style>
+          <a:lnRef idx="1">
+            <a:schemeClr val="accent1"/>
+          </a:lnRef>
+          <a:fillRef idx="3">
+            <a:schemeClr val="accent1"/>
+          </a:fillRef>
+          <a:effectRef idx="2">
+            <a:schemeClr val="accent1"/>
+          </a:effectRef>
+          <a:fontRef idx="minor">
+            <a:schemeClr val="lt1"/>
+          </a:fontRef>
+        </p:style>
+        <p:txBody>
+          <a:bodyPr rtlCol="0" anchor="ctr"/>
+          <a:lstStyle/>
+          <a:p>
+            <a:pPr algn="ctr"/>
+          </a:p>
+        </p:txBody>
+      </p:sp>
+      <p:sp>
+        <p:nvSpPr>
+          <p:cNvPr id="11" name="TextBox 10"/>
           <p:cNvSpPr txBox="1"/>
           <p:nvPr/>
         </p:nvSpPr>
         <p:spPr>
           <a:xfrm>
-            <a:off x="658368" y="384048"/>
-            <a:ext cx="10789920" cy="320040"/>
+            <a:off x="932688" y="1984248"/>
+            <a:ext cx="438912" cy="420624"/>
+          </a:xfrm>
+          <a:prstGeom prst="rect">
+            <a:avLst/>
+          </a:prstGeom>
+          <a:noFill/>
+        </p:spPr>
+        <p:txBody>
+          <a:bodyPr wrap="square" anchor="ctr">
+            <a:spAutoFit/>
+          </a:bodyPr>
+          <a:lstStyle/>
+          <a:p>
+            <a:pPr algn="ctr"/>
+            <a:r>
+              <a:rPr sz="1400" b="1">
+                <a:solidFill>
+                  <a:srgbClr val="FFFFFF"/>
+                </a:solidFill>
+                <a:latin typeface="Arial"/>
+              </a:rPr>
+              <a:t>1</a:t>
+            </a:r>
+          </a:p>
+        </p:txBody>
+      </p:sp>
+      <p:sp>
+        <p:nvSpPr>
+          <p:cNvPr id="12" name="TextBox 11"/>
+          <p:cNvSpPr txBox="1"/>
+          <p:nvPr/>
+        </p:nvSpPr>
+        <p:spPr>
+          <a:xfrm>
+            <a:off x="1536192" y="1938528"/>
+            <a:ext cx="4178808" cy="329184"/>
           </a:xfrm>
           <a:prstGeom prst="rect">
             <a:avLst/>
@@ -3579,27 +3900,27 @@
           <a:p>
             <a:pPr algn="l"/>
             <a:r>
-              <a:rPr sz="1100" b="1">
+              <a:rPr sz="1400" b="1">
                 <a:solidFill>
                   <a:srgbClr val="1F6FEB"/>
                 </a:solidFill>
                 <a:latin typeface="Arial"/>
               </a:rPr>
-              <a:t>ACTIVITY 06 · CONTEXT</a:t>
-            </a:r>
-          </a:p>
-        </p:txBody>
-      </p:sp>
-      <p:sp>
-        <p:nvSpPr>
-          <p:cNvPr id="5" name="TextBox 4"/>
+              <a:t>Data analyst</a:t>
+            </a:r>
+          </a:p>
+        </p:txBody>
+      </p:sp>
+      <p:sp>
+        <p:nvSpPr>
+          <p:cNvPr id="13" name="TextBox 12"/>
           <p:cNvSpPr txBox="1"/>
           <p:nvPr/>
         </p:nvSpPr>
         <p:spPr>
           <a:xfrm>
-            <a:off x="658368" y="749808"/>
-            <a:ext cx="10789920" cy="658368"/>
+            <a:off x="1536192" y="2322576"/>
+            <a:ext cx="4178808" cy="1133856"/>
           </a:xfrm>
           <a:prstGeom prst="rect">
             <a:avLst/>
@@ -3614,33 +3935,33 @@
           <a:p>
             <a:pPr algn="l"/>
             <a:r>
-              <a:rPr sz="2700" b="1">
+              <a:rPr sz="1150" b="0">
                 <a:solidFill>
                   <a:srgbClr val="161B26"/>
                 </a:solidFill>
                 <a:latin typeface="Arial"/>
               </a:rPr>
-              <a:t>The Scenario</a:t>
-            </a:r>
-          </a:p>
-        </p:txBody>
-      </p:sp>
-      <p:sp>
-        <p:nvSpPr>
-          <p:cNvPr id="6" name="Rectangle 5"/>
+              <a:t>Using only the attached approved sources, create a source register, identify duplicates or conflicting definitions, clean the table, show formulas or transformations, and return five candidate insights with citations, caveats and a con…</a:t>
+            </a:r>
+          </a:p>
+        </p:txBody>
+      </p:sp>
+      <p:sp>
+        <p:nvSpPr>
+          <p:cNvPr id="14" name="Rounded Rectangle 13"/>
           <p:cNvSpPr/>
           <p:nvPr/>
         </p:nvSpPr>
         <p:spPr>
           <a:xfrm>
-            <a:off x="658368" y="1444752"/>
-            <a:ext cx="10881360" cy="18288"/>
-          </a:xfrm>
-          <a:prstGeom prst="rect">
-            <a:avLst/>
-          </a:prstGeom>
-          <a:solidFill>
-            <a:srgbClr val="E2E8F0"/>
+            <a:off x="6144768" y="1755648"/>
+            <a:ext cx="5166360" cy="1847088"/>
+          </a:xfrm>
+          <a:prstGeom prst="roundRect">
+            <a:avLst/>
+          </a:prstGeom>
+          <a:solidFill>
+            <a:srgbClr val="F5F8FC"/>
           </a:solidFill>
           <a:ln>
             <a:solidFill>
@@ -3672,14 +3993,139 @@
       </p:sp>
       <p:sp>
         <p:nvSpPr>
-          <p:cNvPr id="7" name="TextBox 6"/>
+          <p:cNvPr id="15" name="Rectangle 14"/>
+          <p:cNvSpPr/>
+          <p:nvPr/>
+        </p:nvSpPr>
+        <p:spPr>
+          <a:xfrm>
+            <a:off x="6144768" y="1755648"/>
+            <a:ext cx="73152" cy="1847088"/>
+          </a:xfrm>
+          <a:prstGeom prst="rect">
+            <a:avLst/>
+          </a:prstGeom>
+          <a:solidFill>
+            <a:srgbClr val="10B981"/>
+          </a:solidFill>
+          <a:ln>
+            <a:solidFill>
+              <a:srgbClr val="10B981"/>
+            </a:solidFill>
+          </a:ln>
+        </p:spPr>
+        <p:style>
+          <a:lnRef idx="1">
+            <a:schemeClr val="accent1"/>
+          </a:lnRef>
+          <a:fillRef idx="3">
+            <a:schemeClr val="accent1"/>
+          </a:fillRef>
+          <a:effectRef idx="2">
+            <a:schemeClr val="accent1"/>
+          </a:effectRef>
+          <a:fontRef idx="minor">
+            <a:schemeClr val="lt1"/>
+          </a:fontRef>
+        </p:style>
+        <p:txBody>
+          <a:bodyPr rtlCol="0" anchor="ctr"/>
+          <a:lstStyle/>
+          <a:p>
+            <a:pPr algn="ctr"/>
+          </a:p>
+        </p:txBody>
+      </p:sp>
+      <p:sp>
+        <p:nvSpPr>
+          <p:cNvPr id="16" name="Rounded Rectangle 15"/>
+          <p:cNvSpPr/>
+          <p:nvPr/>
+        </p:nvSpPr>
+        <p:spPr>
+          <a:xfrm>
+            <a:off x="6345936" y="1975104"/>
+            <a:ext cx="438912" cy="438912"/>
+          </a:xfrm>
+          <a:prstGeom prst="roundRect">
+            <a:avLst/>
+          </a:prstGeom>
+          <a:solidFill>
+            <a:srgbClr val="10B981"/>
+          </a:solidFill>
+          <a:ln>
+            <a:solidFill>
+              <a:srgbClr val="10B981"/>
+            </a:solidFill>
+          </a:ln>
+        </p:spPr>
+        <p:style>
+          <a:lnRef idx="1">
+            <a:schemeClr val="accent1"/>
+          </a:lnRef>
+          <a:fillRef idx="3">
+            <a:schemeClr val="accent1"/>
+          </a:fillRef>
+          <a:effectRef idx="2">
+            <a:schemeClr val="accent1"/>
+          </a:effectRef>
+          <a:fontRef idx="minor">
+            <a:schemeClr val="lt1"/>
+          </a:fontRef>
+        </p:style>
+        <p:txBody>
+          <a:bodyPr rtlCol="0" anchor="ctr"/>
+          <a:lstStyle/>
+          <a:p>
+            <a:pPr algn="ctr"/>
+          </a:p>
+        </p:txBody>
+      </p:sp>
+      <p:sp>
+        <p:nvSpPr>
+          <p:cNvPr id="17" name="TextBox 16"/>
           <p:cNvSpPr txBox="1"/>
           <p:nvPr/>
         </p:nvSpPr>
         <p:spPr>
           <a:xfrm>
-            <a:off x="658368" y="6473952"/>
-            <a:ext cx="9875520" cy="201168"/>
+            <a:off x="6345936" y="1984248"/>
+            <a:ext cx="438912" cy="420624"/>
+          </a:xfrm>
+          <a:prstGeom prst="rect">
+            <a:avLst/>
+          </a:prstGeom>
+          <a:noFill/>
+        </p:spPr>
+        <p:txBody>
+          <a:bodyPr wrap="square" anchor="ctr">
+            <a:spAutoFit/>
+          </a:bodyPr>
+          <a:lstStyle/>
+          <a:p>
+            <a:pPr algn="ctr"/>
+            <a:r>
+              <a:rPr sz="1400" b="1">
+                <a:solidFill>
+                  <a:srgbClr val="FFFFFF"/>
+                </a:solidFill>
+                <a:latin typeface="Arial"/>
+              </a:rPr>
+              <a:t>2</a:t>
+            </a:r>
+          </a:p>
+        </p:txBody>
+      </p:sp>
+      <p:sp>
+        <p:nvSpPr>
+          <p:cNvPr id="18" name="TextBox 17"/>
+          <p:cNvSpPr txBox="1"/>
+          <p:nvPr/>
+        </p:nvSpPr>
+        <p:spPr>
+          <a:xfrm>
+            <a:off x="6949440" y="1938528"/>
+            <a:ext cx="4178808" cy="329184"/>
           </a:xfrm>
           <a:prstGeom prst="rect">
             <a:avLst/>
@@ -3694,27 +4140,62 @@
           <a:p>
             <a:pPr algn="l"/>
             <a:r>
-              <a:rPr sz="800" b="0">
-                <a:solidFill>
-                  <a:srgbClr val="5B6372"/>
+              <a:rPr sz="1400" b="1">
+                <a:solidFill>
+                  <a:srgbClr val="10B981"/>
                 </a:solidFill>
                 <a:latin typeface="Arial"/>
               </a:rPr>
-              <a:t>TGS-2024048310 · ACTIVITY PRACTICE · Tertiary Infotech Academy Pte Ltd</a:t>
-            </a:r>
-          </a:p>
-        </p:txBody>
-      </p:sp>
-      <p:sp>
-        <p:nvSpPr>
-          <p:cNvPr id="8" name="Rounded Rectangle 7"/>
+              <a:t>Infographic</a:t>
+            </a:r>
+          </a:p>
+        </p:txBody>
+      </p:sp>
+      <p:sp>
+        <p:nvSpPr>
+          <p:cNvPr id="19" name="TextBox 18"/>
+          <p:cNvSpPr txBox="1"/>
+          <p:nvPr/>
+        </p:nvSpPr>
+        <p:spPr>
+          <a:xfrm>
+            <a:off x="6949440" y="2322576"/>
+            <a:ext cx="4178808" cy="1133856"/>
+          </a:xfrm>
+          <a:prstGeom prst="rect">
+            <a:avLst/>
+          </a:prstGeom>
+          <a:noFill/>
+        </p:spPr>
+        <p:txBody>
+          <a:bodyPr wrap="square" anchor="t">
+            <a:spAutoFit/>
+          </a:bodyPr>
+          <a:lstStyle/>
+          <a:p>
+            <a:pPr algn="l"/>
+            <a:r>
+              <a:rPr sz="1150" b="0">
+                <a:solidFill>
+                  <a:srgbClr val="161B26"/>
+                </a:solidFill>
+                <a:latin typeface="Arial"/>
+              </a:rPr>
+              <a:t>Create a one-page executive infographic for Singapore retail managers. Lead with one decision insight, show three supporting metrics, include a five-stage flow and a source footer. Use a clean professional style, strong hierarchy and n…</a:t>
+            </a:r>
+          </a:p>
+        </p:txBody>
+      </p:sp>
+      <p:sp>
+        <p:nvSpPr>
+          <p:cNvPr id="20" name="Rounded Rectangle 19"/>
           <p:cNvSpPr/>
           <p:nvPr/>
         </p:nvSpPr>
         <p:spPr>
           <a:xfrm>
-            <a:off x="731520" y="1783080"/>
-            <a:ext cx="10698480" cy="1691640"/>
+            <a:off x="731520" y="3877056"/>
+            <a:ext cx="5166360" cy="1847088"/>
           </a:xfrm>
           <a:prstGeom prst="roundRect">
             <a:avLst/>
@@ -3752,24 +4233,24 @@
       </p:sp>
       <p:sp>
         <p:nvSpPr>
-          <p:cNvPr id="9" name="Rectangle 8"/>
+          <p:cNvPr id="21" name="Rectangle 20"/>
           <p:cNvSpPr/>
           <p:nvPr/>
         </p:nvSpPr>
         <p:spPr>
           <a:xfrm>
-            <a:off x="731520" y="1783080"/>
-            <a:ext cx="73152" cy="1691640"/>
-          </a:xfrm>
-          <a:prstGeom prst="rect">
-            <a:avLst/>
-          </a:prstGeom>
-          <a:solidFill>
-            <a:srgbClr val="1F6FEB"/>
+            <a:off x="731520" y="3877056"/>
+            <a:ext cx="73152" cy="1847088"/>
+          </a:xfrm>
+          <a:prstGeom prst="rect">
+            <a:avLst/>
+          </a:prstGeom>
+          <a:solidFill>
+            <a:srgbClr val="7C3AED"/>
           </a:solidFill>
           <a:ln>
             <a:solidFill>
-              <a:srgbClr val="1F6FEB"/>
+              <a:srgbClr val="7C3AED"/>
             </a:solidFill>
           </a:ln>
         </p:spPr>
@@ -3797,24 +4278,24 @@
       </p:sp>
       <p:sp>
         <p:nvSpPr>
-          <p:cNvPr id="10" name="Rounded Rectangle 9"/>
+          <p:cNvPr id="22" name="Rounded Rectangle 21"/>
           <p:cNvSpPr/>
           <p:nvPr/>
         </p:nvSpPr>
         <p:spPr>
           <a:xfrm>
-            <a:off x="932688" y="2002536"/>
+            <a:off x="932688" y="4096512"/>
             <a:ext cx="438912" cy="438912"/>
           </a:xfrm>
           <a:prstGeom prst="roundRect">
             <a:avLst/>
           </a:prstGeom>
           <a:solidFill>
-            <a:srgbClr val="1F6FEB"/>
+            <a:srgbClr val="7C3AED"/>
           </a:solidFill>
           <a:ln>
             <a:solidFill>
-              <a:srgbClr val="1F6FEB"/>
+              <a:srgbClr val="7C3AED"/>
             </a:solidFill>
           </a:ln>
         </p:spPr>
@@ -3842,13 +4323,13 @@
       </p:sp>
       <p:sp>
         <p:nvSpPr>
-          <p:cNvPr id="11" name="TextBox 10"/>
+          <p:cNvPr id="23" name="TextBox 22"/>
           <p:cNvSpPr txBox="1"/>
           <p:nvPr/>
         </p:nvSpPr>
         <p:spPr>
           <a:xfrm>
-            <a:off x="932688" y="2011680"/>
+            <a:off x="932688" y="4105656"/>
             <a:ext cx="438912" cy="420624"/>
           </a:xfrm>
           <a:prstGeom prst="rect">
@@ -3870,21 +4351,21 @@
                 </a:solidFill>
                 <a:latin typeface="Arial"/>
               </a:rPr>
-              <a:t>1</a:t>
-            </a:r>
-          </a:p>
-        </p:txBody>
-      </p:sp>
-      <p:sp>
-        <p:nvSpPr>
-          <p:cNvPr id="12" name="TextBox 11"/>
+              <a:t>3</a:t>
+            </a:r>
+          </a:p>
+        </p:txBody>
+      </p:sp>
+      <p:sp>
+        <p:nvSpPr>
+          <p:cNvPr id="24" name="TextBox 23"/>
           <p:cNvSpPr txBox="1"/>
           <p:nvPr/>
         </p:nvSpPr>
         <p:spPr>
           <a:xfrm>
-            <a:off x="1536192" y="1965960"/>
-            <a:ext cx="9710928" cy="329184"/>
+            <a:off x="1536192" y="4059936"/>
+            <a:ext cx="4178808" cy="329184"/>
           </a:xfrm>
           <a:prstGeom prst="rect">
             <a:avLst/>
@@ -3901,25 +4382,25 @@
             <a:r>
               <a:rPr sz="1400" b="1">
                 <a:solidFill>
-                  <a:srgbClr val="1F6FEB"/>
+                  <a:srgbClr val="7C3AED"/>
                 </a:solidFill>
                 <a:latin typeface="Arial"/>
               </a:rPr>
-              <a:t>Context</a:t>
-            </a:r>
-          </a:p>
-        </p:txBody>
-      </p:sp>
-      <p:sp>
-        <p:nvSpPr>
-          <p:cNvPr id="13" name="TextBox 12"/>
+              <a:t>Text to image</a:t>
+            </a:r>
+          </a:p>
+        </p:txBody>
+      </p:sp>
+      <p:sp>
+        <p:nvSpPr>
+          <p:cNvPr id="25" name="TextBox 24"/>
           <p:cNvSpPr txBox="1"/>
           <p:nvPr/>
         </p:nvSpPr>
         <p:spPr>
           <a:xfrm>
-            <a:off x="1536192" y="2350008"/>
-            <a:ext cx="9710928" cy="978408"/>
+            <a:off x="1536192" y="4443984"/>
+            <a:ext cx="4178808" cy="1133856"/>
           </a:xfrm>
           <a:prstGeom prst="rect">
             <a:avLst/>
@@ -3940,21 +4421,21 @@
                 </a:solidFill>
                 <a:latin typeface="Arial"/>
               </a:rPr>
-              <a:t>Northstar wants an executive one-slide infographic summarising the sustainable-delivery pilot. Copilot or AI Designer may generate a layout, section titles and supporting image ideas from the approved source pack.</a:t>
-            </a:r>
-          </a:p>
-        </p:txBody>
-      </p:sp>
-      <p:sp>
-        <p:nvSpPr>
-          <p:cNvPr id="14" name="Rounded Rectangle 13"/>
+              <a:t>Create a clean vector-like sustainability delivery illustration for a PowerPoint infographic: one electric van, one reusable parcel, a simple route and a feedback symbol. Transparent background, consistent blue/teal/violet/amber palett…</a:t>
+            </a:r>
+          </a:p>
+        </p:txBody>
+      </p:sp>
+      <p:sp>
+        <p:nvSpPr>
+          <p:cNvPr id="26" name="Rounded Rectangle 25"/>
           <p:cNvSpPr/>
           <p:nvPr/>
         </p:nvSpPr>
         <p:spPr>
           <a:xfrm>
-            <a:off x="731520" y="3776472"/>
-            <a:ext cx="10698480" cy="1691640"/>
+            <a:off x="6144768" y="3877056"/>
+            <a:ext cx="5166360" cy="1847088"/>
           </a:xfrm>
           <a:prstGeom prst="roundRect">
             <a:avLst/>
@@ -3992,24 +4473,24 @@
       </p:sp>
       <p:sp>
         <p:nvSpPr>
-          <p:cNvPr id="15" name="Rectangle 14"/>
+          <p:cNvPr id="27" name="Rectangle 26"/>
           <p:cNvSpPr/>
           <p:nvPr/>
         </p:nvSpPr>
         <p:spPr>
           <a:xfrm>
-            <a:off x="731520" y="3776472"/>
-            <a:ext cx="73152" cy="1691640"/>
-          </a:xfrm>
-          <a:prstGeom prst="rect">
-            <a:avLst/>
-          </a:prstGeom>
-          <a:solidFill>
-            <a:srgbClr val="10B981"/>
+            <a:off x="6144768" y="3877056"/>
+            <a:ext cx="73152" cy="1847088"/>
+          </a:xfrm>
+          <a:prstGeom prst="rect">
+            <a:avLst/>
+          </a:prstGeom>
+          <a:solidFill>
+            <a:srgbClr val="F59E0B"/>
           </a:solidFill>
           <a:ln>
             <a:solidFill>
-              <a:srgbClr val="10B981"/>
+              <a:srgbClr val="F59E0B"/>
             </a:solidFill>
           </a:ln>
         </p:spPr>
@@ -4037,24 +4518,24 @@
       </p:sp>
       <p:sp>
         <p:nvSpPr>
-          <p:cNvPr id="16" name="Rounded Rectangle 15"/>
+          <p:cNvPr id="28" name="Rounded Rectangle 27"/>
           <p:cNvSpPr/>
           <p:nvPr/>
         </p:nvSpPr>
         <p:spPr>
           <a:xfrm>
-            <a:off x="932688" y="3995928"/>
+            <a:off x="6345936" y="4096512"/>
             <a:ext cx="438912" cy="438912"/>
           </a:xfrm>
           <a:prstGeom prst="roundRect">
             <a:avLst/>
           </a:prstGeom>
           <a:solidFill>
-            <a:srgbClr val="10B981"/>
+            <a:srgbClr val="F59E0B"/>
           </a:solidFill>
           <a:ln>
             <a:solidFill>
-              <a:srgbClr val="10B981"/>
+              <a:srgbClr val="F59E0B"/>
             </a:solidFill>
           </a:ln>
         </p:spPr>
@@ -4082,13 +4563,13 @@
       </p:sp>
       <p:sp>
         <p:nvSpPr>
-          <p:cNvPr id="17" name="TextBox 16"/>
+          <p:cNvPr id="29" name="TextBox 28"/>
           <p:cNvSpPr txBox="1"/>
           <p:nvPr/>
         </p:nvSpPr>
         <p:spPr>
           <a:xfrm>
-            <a:off x="932688" y="4005072"/>
+            <a:off x="6345936" y="4105656"/>
             <a:ext cx="438912" cy="420624"/>
           </a:xfrm>
           <a:prstGeom prst="rect">
@@ -4110,21 +4591,21 @@
                 </a:solidFill>
                 <a:latin typeface="Arial"/>
               </a:rPr>
-              <a:t>2</a:t>
-            </a:r>
-          </a:p>
-        </p:txBody>
-      </p:sp>
-      <p:sp>
-        <p:nvSpPr>
-          <p:cNvPr id="18" name="TextBox 17"/>
+              <a:t>4</a:t>
+            </a:r>
+          </a:p>
+        </p:txBody>
+      </p:sp>
+      <p:sp>
+        <p:nvSpPr>
+          <p:cNvPr id="30" name="TextBox 29"/>
           <p:cNvSpPr txBox="1"/>
           <p:nvPr/>
         </p:nvSpPr>
         <p:spPr>
           <a:xfrm>
-            <a:off x="1536192" y="3959352"/>
-            <a:ext cx="9710928" cy="329184"/>
+            <a:off x="6949440" y="4059936"/>
+            <a:ext cx="4178808" cy="329184"/>
           </a:xfrm>
           <a:prstGeom prst="rect">
             <a:avLst/>
@@ -4141,25 +4622,25 @@
             <a:r>
               <a:rPr sz="1400" b="1">
                 <a:solidFill>
-                  <a:srgbClr val="10B981"/>
+                  <a:srgbClr val="F59E0B"/>
                 </a:solidFill>
                 <a:latin typeface="Arial"/>
               </a:rPr>
-              <a:t>Decision pressure</a:t>
-            </a:r>
-          </a:p>
-        </p:txBody>
-      </p:sp>
-      <p:sp>
-        <p:nvSpPr>
-          <p:cNvPr id="19" name="TextBox 18"/>
+              <a:t>Gemini Notebook deck</a:t>
+            </a:r>
+          </a:p>
+        </p:txBody>
+      </p:sp>
+      <p:sp>
+        <p:nvSpPr>
+          <p:cNvPr id="31" name="TextBox 30"/>
           <p:cNvSpPr txBox="1"/>
           <p:nvPr/>
         </p:nvSpPr>
         <p:spPr>
           <a:xfrm>
-            <a:off x="1536192" y="4343400"/>
-            <a:ext cx="9710928" cy="978408"/>
+            <a:off x="6949440" y="4443984"/>
+            <a:ext cx="4178808" cy="1133856"/>
           </a:xfrm>
           <a:prstGeom prst="rect">
             <a:avLst/>
@@ -4180,7 +4661,7 @@
                 </a:solidFill>
                 <a:latin typeface="Arial"/>
               </a:rPr>
-              <a:t>Generate two options, compare them, then rebuild the selected direction into an editable, verified and accessible PowerPoint slide.</a:t>
+              <a:t>Create Presenter Slides for business stakeholders. Focus on the verified decision insight, use a concise professional style, include source-grounded comparisons and a final recommendation. Avoid claims not supported by selected sources…</a:t>
             </a:r>
           </a:p>
         </p:txBody>
@@ -4263,6 +4744,486 @@
             <a:avLst/>
           </a:prstGeom>
           <a:solidFill>
+            <a:srgbClr val="1F6FEB"/>
+          </a:solidFill>
+          <a:ln>
+            <a:solidFill>
+              <a:srgbClr val="1F6FEB"/>
+            </a:solidFill>
+          </a:ln>
+        </p:spPr>
+        <p:style>
+          <a:lnRef idx="1">
+            <a:schemeClr val="accent1"/>
+          </a:lnRef>
+          <a:fillRef idx="3">
+            <a:schemeClr val="accent1"/>
+          </a:fillRef>
+          <a:effectRef idx="2">
+            <a:schemeClr val="accent1"/>
+          </a:effectRef>
+          <a:fontRef idx="minor">
+            <a:schemeClr val="lt1"/>
+          </a:fontRef>
+        </p:style>
+        <p:txBody>
+          <a:bodyPr rtlCol="0" anchor="ctr"/>
+          <a:lstStyle/>
+          <a:p>
+            <a:pPr algn="ctr"/>
+          </a:p>
+        </p:txBody>
+      </p:sp>
+      <p:sp>
+        <p:nvSpPr>
+          <p:cNvPr id="4" name="TextBox 3"/>
+          <p:cNvSpPr txBox="1"/>
+          <p:nvPr/>
+        </p:nvSpPr>
+        <p:spPr>
+          <a:xfrm>
+            <a:off x="658368" y="384048"/>
+            <a:ext cx="10789920" cy="320040"/>
+          </a:xfrm>
+          <a:prstGeom prst="rect">
+            <a:avLst/>
+          </a:prstGeom>
+          <a:noFill/>
+        </p:spPr>
+        <p:txBody>
+          <a:bodyPr wrap="square" anchor="t">
+            <a:spAutoFit/>
+          </a:bodyPr>
+          <a:lstStyle/>
+          <a:p>
+            <a:pPr algn="l"/>
+            <a:r>
+              <a:rPr sz="1100" b="1">
+                <a:solidFill>
+                  <a:srgbClr val="1F6FEB"/>
+                </a:solidFill>
+                <a:latin typeface="Arial"/>
+              </a:rPr>
+              <a:t>ACTIVITY 06 · CONTEXT</a:t>
+            </a:r>
+          </a:p>
+        </p:txBody>
+      </p:sp>
+      <p:sp>
+        <p:nvSpPr>
+          <p:cNvPr id="5" name="TextBox 4"/>
+          <p:cNvSpPr txBox="1"/>
+          <p:nvPr/>
+        </p:nvSpPr>
+        <p:spPr>
+          <a:xfrm>
+            <a:off x="658368" y="749808"/>
+            <a:ext cx="10789920" cy="658368"/>
+          </a:xfrm>
+          <a:prstGeom prst="rect">
+            <a:avLst/>
+          </a:prstGeom>
+          <a:noFill/>
+        </p:spPr>
+        <p:txBody>
+          <a:bodyPr wrap="square" anchor="t">
+            <a:spAutoFit/>
+          </a:bodyPr>
+          <a:lstStyle/>
+          <a:p>
+            <a:pPr algn="l"/>
+            <a:r>
+              <a:rPr sz="2700" b="1">
+                <a:solidFill>
+                  <a:srgbClr val="161B26"/>
+                </a:solidFill>
+                <a:latin typeface="Arial"/>
+              </a:rPr>
+              <a:t>The Scenario</a:t>
+            </a:r>
+          </a:p>
+        </p:txBody>
+      </p:sp>
+      <p:sp>
+        <p:nvSpPr>
+          <p:cNvPr id="6" name="Rectangle 5"/>
+          <p:cNvSpPr/>
+          <p:nvPr/>
+        </p:nvSpPr>
+        <p:spPr>
+          <a:xfrm>
+            <a:off x="658368" y="1444752"/>
+            <a:ext cx="10881360" cy="18288"/>
+          </a:xfrm>
+          <a:prstGeom prst="rect">
+            <a:avLst/>
+          </a:prstGeom>
+          <a:solidFill>
+            <a:srgbClr val="E2E8F0"/>
+          </a:solidFill>
+          <a:ln>
+            <a:solidFill>
+              <a:srgbClr val="E2E8F0"/>
+            </a:solidFill>
+          </a:ln>
+        </p:spPr>
+        <p:style>
+          <a:lnRef idx="1">
+            <a:schemeClr val="accent1"/>
+          </a:lnRef>
+          <a:fillRef idx="3">
+            <a:schemeClr val="accent1"/>
+          </a:fillRef>
+          <a:effectRef idx="2">
+            <a:schemeClr val="accent1"/>
+          </a:effectRef>
+          <a:fontRef idx="minor">
+            <a:schemeClr val="lt1"/>
+          </a:fontRef>
+        </p:style>
+        <p:txBody>
+          <a:bodyPr rtlCol="0" anchor="ctr"/>
+          <a:lstStyle/>
+          <a:p>
+            <a:pPr algn="ctr"/>
+          </a:p>
+        </p:txBody>
+      </p:sp>
+      <p:sp>
+        <p:nvSpPr>
+          <p:cNvPr id="7" name="TextBox 6"/>
+          <p:cNvSpPr txBox="1"/>
+          <p:nvPr/>
+        </p:nvSpPr>
+        <p:spPr>
+          <a:xfrm>
+            <a:off x="658368" y="6473952"/>
+            <a:ext cx="9875520" cy="201168"/>
+          </a:xfrm>
+          <a:prstGeom prst="rect">
+            <a:avLst/>
+          </a:prstGeom>
+          <a:noFill/>
+        </p:spPr>
+        <p:txBody>
+          <a:bodyPr wrap="square" anchor="t">
+            <a:spAutoFit/>
+          </a:bodyPr>
+          <a:lstStyle/>
+          <a:p>
+            <a:pPr algn="l"/>
+            <a:r>
+              <a:rPr sz="800" b="0">
+                <a:solidFill>
+                  <a:srgbClr val="5B6372"/>
+                </a:solidFill>
+                <a:latin typeface="Arial"/>
+              </a:rPr>
+              <a:t>TGS-2026064178 · ACTIVITY PRACTICE · Tertiary Infotech Academy Pte Ltd</a:t>
+            </a:r>
+          </a:p>
+        </p:txBody>
+      </p:sp>
+      <p:sp>
+        <p:nvSpPr>
+          <p:cNvPr id="8" name="Rounded Rectangle 7"/>
+          <p:cNvSpPr/>
+          <p:nvPr/>
+        </p:nvSpPr>
+        <p:spPr>
+          <a:xfrm>
+            <a:off x="731520" y="1783080"/>
+            <a:ext cx="10698480" cy="1691640"/>
+          </a:xfrm>
+          <a:prstGeom prst="roundRect">
+            <a:avLst/>
+          </a:prstGeom>
+          <a:solidFill>
+            <a:srgbClr val="F5F8FC"/>
+          </a:solidFill>
+          <a:ln>
+            <a:solidFill>
+              <a:srgbClr val="E2E8F0"/>
+            </a:solidFill>
+          </a:ln>
+        </p:spPr>
+        <p:style>
+          <a:lnRef idx="1">
+            <a:schemeClr val="accent1"/>
+          </a:lnRef>
+          <a:fillRef idx="3">
+            <a:schemeClr val="accent1"/>
+          </a:fillRef>
+          <a:effectRef idx="2">
+            <a:schemeClr val="accent1"/>
+          </a:effectRef>
+          <a:fontRef idx="minor">
+            <a:schemeClr val="lt1"/>
+          </a:fontRef>
+        </p:style>
+        <p:txBody>
+          <a:bodyPr rtlCol="0" anchor="ctr"/>
+          <a:lstStyle/>
+          <a:p>
+            <a:pPr algn="ctr"/>
+          </a:p>
+        </p:txBody>
+      </p:sp>
+      <p:sp>
+        <p:nvSpPr>
+          <p:cNvPr id="9" name="Rectangle 8"/>
+          <p:cNvSpPr/>
+          <p:nvPr/>
+        </p:nvSpPr>
+        <p:spPr>
+          <a:xfrm>
+            <a:off x="731520" y="1783080"/>
+            <a:ext cx="73152" cy="1691640"/>
+          </a:xfrm>
+          <a:prstGeom prst="rect">
+            <a:avLst/>
+          </a:prstGeom>
+          <a:solidFill>
+            <a:srgbClr val="1F6FEB"/>
+          </a:solidFill>
+          <a:ln>
+            <a:solidFill>
+              <a:srgbClr val="1F6FEB"/>
+            </a:solidFill>
+          </a:ln>
+        </p:spPr>
+        <p:style>
+          <a:lnRef idx="1">
+            <a:schemeClr val="accent1"/>
+          </a:lnRef>
+          <a:fillRef idx="3">
+            <a:schemeClr val="accent1"/>
+          </a:fillRef>
+          <a:effectRef idx="2">
+            <a:schemeClr val="accent1"/>
+          </a:effectRef>
+          <a:fontRef idx="minor">
+            <a:schemeClr val="lt1"/>
+          </a:fontRef>
+        </p:style>
+        <p:txBody>
+          <a:bodyPr rtlCol="0" anchor="ctr"/>
+          <a:lstStyle/>
+          <a:p>
+            <a:pPr algn="ctr"/>
+          </a:p>
+        </p:txBody>
+      </p:sp>
+      <p:sp>
+        <p:nvSpPr>
+          <p:cNvPr id="10" name="Rounded Rectangle 9"/>
+          <p:cNvSpPr/>
+          <p:nvPr/>
+        </p:nvSpPr>
+        <p:spPr>
+          <a:xfrm>
+            <a:off x="932688" y="2002536"/>
+            <a:ext cx="438912" cy="438912"/>
+          </a:xfrm>
+          <a:prstGeom prst="roundRect">
+            <a:avLst/>
+          </a:prstGeom>
+          <a:solidFill>
+            <a:srgbClr val="1F6FEB"/>
+          </a:solidFill>
+          <a:ln>
+            <a:solidFill>
+              <a:srgbClr val="1F6FEB"/>
+            </a:solidFill>
+          </a:ln>
+        </p:spPr>
+        <p:style>
+          <a:lnRef idx="1">
+            <a:schemeClr val="accent1"/>
+          </a:lnRef>
+          <a:fillRef idx="3">
+            <a:schemeClr val="accent1"/>
+          </a:fillRef>
+          <a:effectRef idx="2">
+            <a:schemeClr val="accent1"/>
+          </a:effectRef>
+          <a:fontRef idx="minor">
+            <a:schemeClr val="lt1"/>
+          </a:fontRef>
+        </p:style>
+        <p:txBody>
+          <a:bodyPr rtlCol="0" anchor="ctr"/>
+          <a:lstStyle/>
+          <a:p>
+            <a:pPr algn="ctr"/>
+          </a:p>
+        </p:txBody>
+      </p:sp>
+      <p:sp>
+        <p:nvSpPr>
+          <p:cNvPr id="11" name="TextBox 10"/>
+          <p:cNvSpPr txBox="1"/>
+          <p:nvPr/>
+        </p:nvSpPr>
+        <p:spPr>
+          <a:xfrm>
+            <a:off x="932688" y="2011680"/>
+            <a:ext cx="438912" cy="420624"/>
+          </a:xfrm>
+          <a:prstGeom prst="rect">
+            <a:avLst/>
+          </a:prstGeom>
+          <a:noFill/>
+        </p:spPr>
+        <p:txBody>
+          <a:bodyPr wrap="square" anchor="ctr">
+            <a:spAutoFit/>
+          </a:bodyPr>
+          <a:lstStyle/>
+          <a:p>
+            <a:pPr algn="ctr"/>
+            <a:r>
+              <a:rPr sz="1400" b="1">
+                <a:solidFill>
+                  <a:srgbClr val="FFFFFF"/>
+                </a:solidFill>
+                <a:latin typeface="Arial"/>
+              </a:rPr>
+              <a:t>1</a:t>
+            </a:r>
+          </a:p>
+        </p:txBody>
+      </p:sp>
+      <p:sp>
+        <p:nvSpPr>
+          <p:cNvPr id="12" name="TextBox 11"/>
+          <p:cNvSpPr txBox="1"/>
+          <p:nvPr/>
+        </p:nvSpPr>
+        <p:spPr>
+          <a:xfrm>
+            <a:off x="1536192" y="1965960"/>
+            <a:ext cx="9710928" cy="329184"/>
+          </a:xfrm>
+          <a:prstGeom prst="rect">
+            <a:avLst/>
+          </a:prstGeom>
+          <a:noFill/>
+        </p:spPr>
+        <p:txBody>
+          <a:bodyPr wrap="square" anchor="t">
+            <a:spAutoFit/>
+          </a:bodyPr>
+          <a:lstStyle/>
+          <a:p>
+            <a:pPr algn="l"/>
+            <a:r>
+              <a:rPr sz="1400" b="1">
+                <a:solidFill>
+                  <a:srgbClr val="1F6FEB"/>
+                </a:solidFill>
+                <a:latin typeface="Arial"/>
+              </a:rPr>
+              <a:t>Context</a:t>
+            </a:r>
+          </a:p>
+        </p:txBody>
+      </p:sp>
+      <p:sp>
+        <p:nvSpPr>
+          <p:cNvPr id="13" name="TextBox 12"/>
+          <p:cNvSpPr txBox="1"/>
+          <p:nvPr/>
+        </p:nvSpPr>
+        <p:spPr>
+          <a:xfrm>
+            <a:off x="1536192" y="2350008"/>
+            <a:ext cx="9710928" cy="978408"/>
+          </a:xfrm>
+          <a:prstGeom prst="rect">
+            <a:avLst/>
+          </a:prstGeom>
+          <a:noFill/>
+        </p:spPr>
+        <p:txBody>
+          <a:bodyPr wrap="square" anchor="t">
+            <a:spAutoFit/>
+          </a:bodyPr>
+          <a:lstStyle/>
+          <a:p>
+            <a:pPr algn="l"/>
+            <a:r>
+              <a:rPr sz="1150" b="0">
+                <a:solidFill>
+                  <a:srgbClr val="161B26"/>
+                </a:solidFill>
+                <a:latin typeface="Arial"/>
+              </a:rPr>
+              <a:t>Northstar wants an executive infographic and short slide narrative summarising the sustainable-delivery pilot from a spreadsheet, policy note and stakeholder feedback summary.</a:t>
+            </a:r>
+          </a:p>
+        </p:txBody>
+      </p:sp>
+      <p:sp>
+        <p:nvSpPr>
+          <p:cNvPr id="14" name="Rounded Rectangle 13"/>
+          <p:cNvSpPr/>
+          <p:nvPr/>
+        </p:nvSpPr>
+        <p:spPr>
+          <a:xfrm>
+            <a:off x="731520" y="3776472"/>
+            <a:ext cx="10698480" cy="1691640"/>
+          </a:xfrm>
+          <a:prstGeom prst="roundRect">
+            <a:avLst/>
+          </a:prstGeom>
+          <a:solidFill>
+            <a:srgbClr val="F5F8FC"/>
+          </a:solidFill>
+          <a:ln>
+            <a:solidFill>
+              <a:srgbClr val="E2E8F0"/>
+            </a:solidFill>
+          </a:ln>
+        </p:spPr>
+        <p:style>
+          <a:lnRef idx="1">
+            <a:schemeClr val="accent1"/>
+          </a:lnRef>
+          <a:fillRef idx="3">
+            <a:schemeClr val="accent1"/>
+          </a:fillRef>
+          <a:effectRef idx="2">
+            <a:schemeClr val="accent1"/>
+          </a:effectRef>
+          <a:fontRef idx="minor">
+            <a:schemeClr val="lt1"/>
+          </a:fontRef>
+        </p:style>
+        <p:txBody>
+          <a:bodyPr rtlCol="0" anchor="ctr"/>
+          <a:lstStyle/>
+          <a:p>
+            <a:pPr algn="ctr"/>
+          </a:p>
+        </p:txBody>
+      </p:sp>
+      <p:sp>
+        <p:nvSpPr>
+          <p:cNvPr id="15" name="Rectangle 14"/>
+          <p:cNvSpPr/>
+          <p:nvPr/>
+        </p:nvSpPr>
+        <p:spPr>
+          <a:xfrm>
+            <a:off x="731520" y="3776472"/>
+            <a:ext cx="73152" cy="1691640"/>
+          </a:xfrm>
+          <a:prstGeom prst="rect">
+            <a:avLst/>
+          </a:prstGeom>
+          <a:solidFill>
             <a:srgbClr val="10B981"/>
           </a:solidFill>
           <a:ln>
@@ -4295,94 +5256,24 @@
       </p:sp>
       <p:sp>
         <p:nvSpPr>
-          <p:cNvPr id="4" name="TextBox 3"/>
-          <p:cNvSpPr txBox="1"/>
-          <p:nvPr/>
-        </p:nvSpPr>
-        <p:spPr>
-          <a:xfrm>
-            <a:off x="658368" y="384048"/>
-            <a:ext cx="10789920" cy="320040"/>
-          </a:xfrm>
-          <a:prstGeom prst="rect">
-            <a:avLst/>
-          </a:prstGeom>
-          <a:noFill/>
-        </p:spPr>
-        <p:txBody>
-          <a:bodyPr wrap="square" anchor="t">
-            <a:spAutoFit/>
-          </a:bodyPr>
-          <a:lstStyle/>
-          <a:p>
-            <a:pPr algn="l"/>
-            <a:r>
-              <a:rPr sz="1100" b="1">
-                <a:solidFill>
-                  <a:srgbClr val="10B981"/>
-                </a:solidFill>
-                <a:latin typeface="Arial"/>
-              </a:rPr>
-              <a:t>ACTIVITY 06 · FRAMEWORK</a:t>
-            </a:r>
-          </a:p>
-        </p:txBody>
-      </p:sp>
-      <p:sp>
-        <p:nvSpPr>
-          <p:cNvPr id="5" name="TextBox 4"/>
-          <p:cNvSpPr txBox="1"/>
-          <p:nvPr/>
-        </p:nvSpPr>
-        <p:spPr>
-          <a:xfrm>
-            <a:off x="658368" y="749808"/>
-            <a:ext cx="10789920" cy="658368"/>
-          </a:xfrm>
-          <a:prstGeom prst="rect">
-            <a:avLst/>
-          </a:prstGeom>
-          <a:noFill/>
-        </p:spPr>
-        <p:txBody>
-          <a:bodyPr wrap="square" anchor="t">
-            <a:spAutoFit/>
-          </a:bodyPr>
-          <a:lstStyle/>
-          <a:p>
-            <a:pPr algn="l"/>
-            <a:r>
-              <a:rPr sz="2700" b="1">
-                <a:solidFill>
-                  <a:srgbClr val="161B26"/>
-                </a:solidFill>
-                <a:latin typeface="Arial"/>
-              </a:rPr>
-              <a:t>Prompt, Generate, Verify, Rebuild</a:t>
-            </a:r>
-          </a:p>
-        </p:txBody>
-      </p:sp>
-      <p:sp>
-        <p:nvSpPr>
-          <p:cNvPr id="6" name="Rectangle 5"/>
+          <p:cNvPr id="16" name="Rounded Rectangle 15"/>
           <p:cNvSpPr/>
           <p:nvPr/>
         </p:nvSpPr>
         <p:spPr>
           <a:xfrm>
-            <a:off x="658368" y="1444752"/>
-            <a:ext cx="10881360" cy="18288"/>
-          </a:xfrm>
-          <a:prstGeom prst="rect">
-            <a:avLst/>
-          </a:prstGeom>
-          <a:solidFill>
-            <a:srgbClr val="E2E8F0"/>
+            <a:off x="932688" y="3995928"/>
+            <a:ext cx="438912" cy="438912"/>
+          </a:xfrm>
+          <a:prstGeom prst="roundRect">
+            <a:avLst/>
+          </a:prstGeom>
+          <a:solidFill>
+            <a:srgbClr val="10B981"/>
           </a:solidFill>
           <a:ln>
             <a:solidFill>
-              <a:srgbClr val="E2E8F0"/>
+              <a:srgbClr val="10B981"/>
             </a:solidFill>
           </a:ln>
         </p:spPr>
@@ -4410,14 +5301,49 @@
       </p:sp>
       <p:sp>
         <p:nvSpPr>
-          <p:cNvPr id="7" name="TextBox 6"/>
+          <p:cNvPr id="17" name="TextBox 16"/>
           <p:cNvSpPr txBox="1"/>
           <p:nvPr/>
         </p:nvSpPr>
         <p:spPr>
           <a:xfrm>
-            <a:off x="658368" y="6473952"/>
-            <a:ext cx="9875520" cy="201168"/>
+            <a:off x="932688" y="4005072"/>
+            <a:ext cx="438912" cy="420624"/>
+          </a:xfrm>
+          <a:prstGeom prst="rect">
+            <a:avLst/>
+          </a:prstGeom>
+          <a:noFill/>
+        </p:spPr>
+        <p:txBody>
+          <a:bodyPr wrap="square" anchor="ctr">
+            <a:spAutoFit/>
+          </a:bodyPr>
+          <a:lstStyle/>
+          <a:p>
+            <a:pPr algn="ctr"/>
+            <a:r>
+              <a:rPr sz="1400" b="1">
+                <a:solidFill>
+                  <a:srgbClr val="FFFFFF"/>
+                </a:solidFill>
+                <a:latin typeface="Arial"/>
+              </a:rPr>
+              <a:t>2</a:t>
+            </a:r>
+          </a:p>
+        </p:txBody>
+      </p:sp>
+      <p:sp>
+        <p:nvSpPr>
+          <p:cNvPr id="18" name="TextBox 17"/>
+          <p:cNvSpPr txBox="1"/>
+          <p:nvPr/>
+        </p:nvSpPr>
+        <p:spPr>
+          <a:xfrm>
+            <a:off x="1536192" y="3959352"/>
+            <a:ext cx="9710928" cy="329184"/>
           </a:xfrm>
           <a:prstGeom prst="rect">
             <a:avLst/>
@@ -4432,197 +5358,27 @@
           <a:p>
             <a:pPr algn="l"/>
             <a:r>
-              <a:rPr sz="800" b="0">
-                <a:solidFill>
-                  <a:srgbClr val="5B6372"/>
+              <a:rPr sz="1400" b="1">
+                <a:solidFill>
+                  <a:srgbClr val="10B981"/>
                 </a:solidFill>
                 <a:latin typeface="Arial"/>
               </a:rPr>
-              <a:t>TGS-2024048310 · ACTIVITY PRACTICE · Tertiary Infotech Academy Pte Ltd</a:t>
-            </a:r>
-          </a:p>
-        </p:txBody>
-      </p:sp>
-      <p:sp>
-        <p:nvSpPr>
-          <p:cNvPr id="8" name="Rounded Rectangle 7"/>
-          <p:cNvSpPr/>
-          <p:nvPr/>
-        </p:nvSpPr>
-        <p:spPr>
-          <a:xfrm>
-            <a:off x="685800" y="1920240"/>
-            <a:ext cx="1997049" cy="3566160"/>
-          </a:xfrm>
-          <a:prstGeom prst="roundRect">
-            <a:avLst/>
-          </a:prstGeom>
-          <a:solidFill>
-            <a:srgbClr val="F5F8FC"/>
-          </a:solidFill>
-          <a:ln>
-            <a:solidFill>
-              <a:srgbClr val="E2E8F0"/>
-            </a:solidFill>
-          </a:ln>
-        </p:spPr>
-        <p:style>
-          <a:lnRef idx="1">
-            <a:schemeClr val="accent1"/>
-          </a:lnRef>
-          <a:fillRef idx="3">
-            <a:schemeClr val="accent1"/>
-          </a:fillRef>
-          <a:effectRef idx="2">
-            <a:schemeClr val="accent1"/>
-          </a:effectRef>
-          <a:fontRef idx="minor">
-            <a:schemeClr val="lt1"/>
-          </a:fontRef>
-        </p:style>
-        <p:txBody>
-          <a:bodyPr rtlCol="0" anchor="ctr"/>
-          <a:lstStyle/>
-          <a:p>
-            <a:pPr algn="ctr"/>
-          </a:p>
-        </p:txBody>
-      </p:sp>
-      <p:sp>
-        <p:nvSpPr>
-          <p:cNvPr id="9" name="Rectangle 8"/>
-          <p:cNvSpPr/>
-          <p:nvPr/>
-        </p:nvSpPr>
-        <p:spPr>
-          <a:xfrm>
-            <a:off x="685800" y="1920240"/>
-            <a:ext cx="73152" cy="3566160"/>
-          </a:xfrm>
-          <a:prstGeom prst="rect">
-            <a:avLst/>
-          </a:prstGeom>
-          <a:solidFill>
-            <a:srgbClr val="1F6FEB"/>
-          </a:solidFill>
-          <a:ln>
-            <a:solidFill>
-              <a:srgbClr val="1F6FEB"/>
-            </a:solidFill>
-          </a:ln>
-        </p:spPr>
-        <p:style>
-          <a:lnRef idx="1">
-            <a:schemeClr val="accent1"/>
-          </a:lnRef>
-          <a:fillRef idx="3">
-            <a:schemeClr val="accent1"/>
-          </a:fillRef>
-          <a:effectRef idx="2">
-            <a:schemeClr val="accent1"/>
-          </a:effectRef>
-          <a:fontRef idx="minor">
-            <a:schemeClr val="lt1"/>
-          </a:fontRef>
-        </p:style>
-        <p:txBody>
-          <a:bodyPr rtlCol="0" anchor="ctr"/>
-          <a:lstStyle/>
-          <a:p>
-            <a:pPr algn="ctr"/>
-          </a:p>
-        </p:txBody>
-      </p:sp>
-      <p:sp>
-        <p:nvSpPr>
-          <p:cNvPr id="10" name="Rounded Rectangle 9"/>
-          <p:cNvSpPr/>
-          <p:nvPr/>
-        </p:nvSpPr>
-        <p:spPr>
-          <a:xfrm>
-            <a:off x="886968" y="2139696"/>
-            <a:ext cx="438912" cy="438912"/>
-          </a:xfrm>
-          <a:prstGeom prst="roundRect">
-            <a:avLst/>
-          </a:prstGeom>
-          <a:solidFill>
-            <a:srgbClr val="1F6FEB"/>
-          </a:solidFill>
-          <a:ln>
-            <a:solidFill>
-              <a:srgbClr val="1F6FEB"/>
-            </a:solidFill>
-          </a:ln>
-        </p:spPr>
-        <p:style>
-          <a:lnRef idx="1">
-            <a:schemeClr val="accent1"/>
-          </a:lnRef>
-          <a:fillRef idx="3">
-            <a:schemeClr val="accent1"/>
-          </a:fillRef>
-          <a:effectRef idx="2">
-            <a:schemeClr val="accent1"/>
-          </a:effectRef>
-          <a:fontRef idx="minor">
-            <a:schemeClr val="lt1"/>
-          </a:fontRef>
-        </p:style>
-        <p:txBody>
-          <a:bodyPr rtlCol="0" anchor="ctr"/>
-          <a:lstStyle/>
-          <a:p>
-            <a:pPr algn="ctr"/>
-          </a:p>
-        </p:txBody>
-      </p:sp>
-      <p:sp>
-        <p:nvSpPr>
-          <p:cNvPr id="11" name="TextBox 10"/>
+              <a:t>Decision pressure</a:t>
+            </a:r>
+          </a:p>
+        </p:txBody>
+      </p:sp>
+      <p:sp>
+        <p:nvSpPr>
+          <p:cNvPr id="19" name="TextBox 18"/>
           <p:cNvSpPr txBox="1"/>
           <p:nvPr/>
         </p:nvSpPr>
         <p:spPr>
           <a:xfrm>
-            <a:off x="886968" y="2148840"/>
-            <a:ext cx="438912" cy="420624"/>
-          </a:xfrm>
-          <a:prstGeom prst="rect">
-            <a:avLst/>
-          </a:prstGeom>
-          <a:noFill/>
-        </p:spPr>
-        <p:txBody>
-          <a:bodyPr wrap="square" anchor="ctr">
-            <a:spAutoFit/>
-          </a:bodyPr>
-          <a:lstStyle/>
-          <a:p>
-            <a:pPr algn="ctr"/>
-            <a:r>
-              <a:rPr sz="1400" b="1">
-                <a:solidFill>
-                  <a:srgbClr val="FFFFFF"/>
-                </a:solidFill>
-                <a:latin typeface="Arial"/>
-              </a:rPr>
-              <a:t>1</a:t>
-            </a:r>
-          </a:p>
-        </p:txBody>
-      </p:sp>
-      <p:sp>
-        <p:nvSpPr>
-          <p:cNvPr id="12" name="TextBox 11"/>
-          <p:cNvSpPr txBox="1"/>
-          <p:nvPr/>
-        </p:nvSpPr>
-        <p:spPr>
-          <a:xfrm>
-            <a:off x="1490472" y="2103120"/>
-            <a:ext cx="1009497" cy="329184"/>
+            <a:off x="1536192" y="4343400"/>
+            <a:ext cx="9710928" cy="978408"/>
           </a:xfrm>
           <a:prstGeom prst="rect">
             <a:avLst/>
@@ -4637,1008 +5393,13 @@
           <a:p>
             <a:pPr algn="l"/>
             <a:r>
-              <a:rPr sz="1400" b="1">
-                <a:solidFill>
-                  <a:srgbClr val="1F6FEB"/>
+              <a:rPr sz="1150" b="0">
+                <a:solidFill>
+                  <a:srgbClr val="161B26"/>
                 </a:solidFill>
                 <a:latin typeface="Arial"/>
               </a:rPr>
-              <a:t>Prompt</a:t>
-            </a:r>
-          </a:p>
-        </p:txBody>
-      </p:sp>
-      <p:sp>
-        <p:nvSpPr>
-          <p:cNvPr id="13" name="TextBox 12"/>
-          <p:cNvSpPr txBox="1"/>
-          <p:nvPr/>
-        </p:nvSpPr>
-        <p:spPr>
-          <a:xfrm>
-            <a:off x="1490472" y="2487168"/>
-            <a:ext cx="1009497" cy="2852928"/>
-          </a:xfrm>
-          <a:prstGeom prst="rect">
-            <a:avLst/>
-          </a:prstGeom>
-          <a:noFill/>
-        </p:spPr>
-        <p:txBody>
-          <a:bodyPr wrap="square" anchor="t">
-            <a:spAutoFit/>
-          </a:bodyPr>
-          <a:lstStyle/>
-          <a:p>
-            <a:pPr algn="l"/>
-            <a:r>
-              <a:rPr sz="1150" b="0">
-                <a:solidFill>
-                  <a:srgbClr val="161B26"/>
-                </a:solidFill>
-                <a:latin typeface="Arial"/>
-              </a:rPr>
-              <a:t>Specify role, audience, purpose, data and constraints.</a:t>
-            </a:r>
-          </a:p>
-        </p:txBody>
-      </p:sp>
-      <p:sp>
-        <p:nvSpPr>
-          <p:cNvPr id="14" name="Rounded Rectangle 13"/>
-          <p:cNvSpPr/>
-          <p:nvPr/>
-        </p:nvSpPr>
-        <p:spPr>
-          <a:xfrm>
-            <a:off x="2884017" y="1920240"/>
-            <a:ext cx="1997049" cy="3566160"/>
-          </a:xfrm>
-          <a:prstGeom prst="roundRect">
-            <a:avLst/>
-          </a:prstGeom>
-          <a:solidFill>
-            <a:srgbClr val="F5F8FC"/>
-          </a:solidFill>
-          <a:ln>
-            <a:solidFill>
-              <a:srgbClr val="E2E8F0"/>
-            </a:solidFill>
-          </a:ln>
-        </p:spPr>
-        <p:style>
-          <a:lnRef idx="1">
-            <a:schemeClr val="accent1"/>
-          </a:lnRef>
-          <a:fillRef idx="3">
-            <a:schemeClr val="accent1"/>
-          </a:fillRef>
-          <a:effectRef idx="2">
-            <a:schemeClr val="accent1"/>
-          </a:effectRef>
-          <a:fontRef idx="minor">
-            <a:schemeClr val="lt1"/>
-          </a:fontRef>
-        </p:style>
-        <p:txBody>
-          <a:bodyPr rtlCol="0" anchor="ctr"/>
-          <a:lstStyle/>
-          <a:p>
-            <a:pPr algn="ctr"/>
-          </a:p>
-        </p:txBody>
-      </p:sp>
-      <p:sp>
-        <p:nvSpPr>
-          <p:cNvPr id="15" name="Rectangle 14"/>
-          <p:cNvSpPr/>
-          <p:nvPr/>
-        </p:nvSpPr>
-        <p:spPr>
-          <a:xfrm>
-            <a:off x="2884017" y="1920240"/>
-            <a:ext cx="73152" cy="3566160"/>
-          </a:xfrm>
-          <a:prstGeom prst="rect">
-            <a:avLst/>
-          </a:prstGeom>
-          <a:solidFill>
-            <a:srgbClr val="10B981"/>
-          </a:solidFill>
-          <a:ln>
-            <a:solidFill>
-              <a:srgbClr val="10B981"/>
-            </a:solidFill>
-          </a:ln>
-        </p:spPr>
-        <p:style>
-          <a:lnRef idx="1">
-            <a:schemeClr val="accent1"/>
-          </a:lnRef>
-          <a:fillRef idx="3">
-            <a:schemeClr val="accent1"/>
-          </a:fillRef>
-          <a:effectRef idx="2">
-            <a:schemeClr val="accent1"/>
-          </a:effectRef>
-          <a:fontRef idx="minor">
-            <a:schemeClr val="lt1"/>
-          </a:fontRef>
-        </p:style>
-        <p:txBody>
-          <a:bodyPr rtlCol="0" anchor="ctr"/>
-          <a:lstStyle/>
-          <a:p>
-            <a:pPr algn="ctr"/>
-          </a:p>
-        </p:txBody>
-      </p:sp>
-      <p:sp>
-        <p:nvSpPr>
-          <p:cNvPr id="16" name="Rounded Rectangle 15"/>
-          <p:cNvSpPr/>
-          <p:nvPr/>
-        </p:nvSpPr>
-        <p:spPr>
-          <a:xfrm>
-            <a:off x="3085185" y="2139696"/>
-            <a:ext cx="438912" cy="438912"/>
-          </a:xfrm>
-          <a:prstGeom prst="roundRect">
-            <a:avLst/>
-          </a:prstGeom>
-          <a:solidFill>
-            <a:srgbClr val="10B981"/>
-          </a:solidFill>
-          <a:ln>
-            <a:solidFill>
-              <a:srgbClr val="10B981"/>
-            </a:solidFill>
-          </a:ln>
-        </p:spPr>
-        <p:style>
-          <a:lnRef idx="1">
-            <a:schemeClr val="accent1"/>
-          </a:lnRef>
-          <a:fillRef idx="3">
-            <a:schemeClr val="accent1"/>
-          </a:fillRef>
-          <a:effectRef idx="2">
-            <a:schemeClr val="accent1"/>
-          </a:effectRef>
-          <a:fontRef idx="minor">
-            <a:schemeClr val="lt1"/>
-          </a:fontRef>
-        </p:style>
-        <p:txBody>
-          <a:bodyPr rtlCol="0" anchor="ctr"/>
-          <a:lstStyle/>
-          <a:p>
-            <a:pPr algn="ctr"/>
-          </a:p>
-        </p:txBody>
-      </p:sp>
-      <p:sp>
-        <p:nvSpPr>
-          <p:cNvPr id="17" name="TextBox 16"/>
-          <p:cNvSpPr txBox="1"/>
-          <p:nvPr/>
-        </p:nvSpPr>
-        <p:spPr>
-          <a:xfrm>
-            <a:off x="3085185" y="2148840"/>
-            <a:ext cx="438912" cy="420624"/>
-          </a:xfrm>
-          <a:prstGeom prst="rect">
-            <a:avLst/>
-          </a:prstGeom>
-          <a:noFill/>
-        </p:spPr>
-        <p:txBody>
-          <a:bodyPr wrap="square" anchor="ctr">
-            <a:spAutoFit/>
-          </a:bodyPr>
-          <a:lstStyle/>
-          <a:p>
-            <a:pPr algn="ctr"/>
-            <a:r>
-              <a:rPr sz="1400" b="1">
-                <a:solidFill>
-                  <a:srgbClr val="FFFFFF"/>
-                </a:solidFill>
-                <a:latin typeface="Arial"/>
-              </a:rPr>
-              <a:t>2</a:t>
-            </a:r>
-          </a:p>
-        </p:txBody>
-      </p:sp>
-      <p:sp>
-        <p:nvSpPr>
-          <p:cNvPr id="18" name="TextBox 17"/>
-          <p:cNvSpPr txBox="1"/>
-          <p:nvPr/>
-        </p:nvSpPr>
-        <p:spPr>
-          <a:xfrm>
-            <a:off x="3688689" y="2103120"/>
-            <a:ext cx="1009497" cy="329184"/>
-          </a:xfrm>
-          <a:prstGeom prst="rect">
-            <a:avLst/>
-          </a:prstGeom>
-          <a:noFill/>
-        </p:spPr>
-        <p:txBody>
-          <a:bodyPr wrap="square" anchor="t">
-            <a:spAutoFit/>
-          </a:bodyPr>
-          <a:lstStyle/>
-          <a:p>
-            <a:pPr algn="l"/>
-            <a:r>
-              <a:rPr sz="1400" b="1">
-                <a:solidFill>
-                  <a:srgbClr val="10B981"/>
-                </a:solidFill>
-                <a:latin typeface="Arial"/>
-              </a:rPr>
-              <a:t>Generate</a:t>
-            </a:r>
-          </a:p>
-        </p:txBody>
-      </p:sp>
-      <p:sp>
-        <p:nvSpPr>
-          <p:cNvPr id="19" name="TextBox 18"/>
-          <p:cNvSpPr txBox="1"/>
-          <p:nvPr/>
-        </p:nvSpPr>
-        <p:spPr>
-          <a:xfrm>
-            <a:off x="3688689" y="2487168"/>
-            <a:ext cx="1009497" cy="2852928"/>
-          </a:xfrm>
-          <a:prstGeom prst="rect">
-            <a:avLst/>
-          </a:prstGeom>
-          <a:noFill/>
-        </p:spPr>
-        <p:txBody>
-          <a:bodyPr wrap="square" anchor="t">
-            <a:spAutoFit/>
-          </a:bodyPr>
-          <a:lstStyle/>
-          <a:p>
-            <a:pPr algn="l"/>
-            <a:r>
-              <a:rPr sz="1150" b="0">
-                <a:solidFill>
-                  <a:srgbClr val="161B26"/>
-                </a:solidFill>
-                <a:latin typeface="Arial"/>
-              </a:rPr>
-              <a:t>Request two visual directions or a single-slide concept.</a:t>
-            </a:r>
-          </a:p>
-        </p:txBody>
-      </p:sp>
-      <p:sp>
-        <p:nvSpPr>
-          <p:cNvPr id="20" name="Rounded Rectangle 19"/>
-          <p:cNvSpPr/>
-          <p:nvPr/>
-        </p:nvSpPr>
-        <p:spPr>
-          <a:xfrm>
-            <a:off x="5082235" y="1920240"/>
-            <a:ext cx="1997049" cy="3566160"/>
-          </a:xfrm>
-          <a:prstGeom prst="roundRect">
-            <a:avLst/>
-          </a:prstGeom>
-          <a:solidFill>
-            <a:srgbClr val="F5F8FC"/>
-          </a:solidFill>
-          <a:ln>
-            <a:solidFill>
-              <a:srgbClr val="E2E8F0"/>
-            </a:solidFill>
-          </a:ln>
-        </p:spPr>
-        <p:style>
-          <a:lnRef idx="1">
-            <a:schemeClr val="accent1"/>
-          </a:lnRef>
-          <a:fillRef idx="3">
-            <a:schemeClr val="accent1"/>
-          </a:fillRef>
-          <a:effectRef idx="2">
-            <a:schemeClr val="accent1"/>
-          </a:effectRef>
-          <a:fontRef idx="minor">
-            <a:schemeClr val="lt1"/>
-          </a:fontRef>
-        </p:style>
-        <p:txBody>
-          <a:bodyPr rtlCol="0" anchor="ctr"/>
-          <a:lstStyle/>
-          <a:p>
-            <a:pPr algn="ctr"/>
-          </a:p>
-        </p:txBody>
-      </p:sp>
-      <p:sp>
-        <p:nvSpPr>
-          <p:cNvPr id="21" name="Rectangle 20"/>
-          <p:cNvSpPr/>
-          <p:nvPr/>
-        </p:nvSpPr>
-        <p:spPr>
-          <a:xfrm>
-            <a:off x="5082235" y="1920240"/>
-            <a:ext cx="73152" cy="3566160"/>
-          </a:xfrm>
-          <a:prstGeom prst="rect">
-            <a:avLst/>
-          </a:prstGeom>
-          <a:solidFill>
-            <a:srgbClr val="7C3AED"/>
-          </a:solidFill>
-          <a:ln>
-            <a:solidFill>
-              <a:srgbClr val="7C3AED"/>
-            </a:solidFill>
-          </a:ln>
-        </p:spPr>
-        <p:style>
-          <a:lnRef idx="1">
-            <a:schemeClr val="accent1"/>
-          </a:lnRef>
-          <a:fillRef idx="3">
-            <a:schemeClr val="accent1"/>
-          </a:fillRef>
-          <a:effectRef idx="2">
-            <a:schemeClr val="accent1"/>
-          </a:effectRef>
-          <a:fontRef idx="minor">
-            <a:schemeClr val="lt1"/>
-          </a:fontRef>
-        </p:style>
-        <p:txBody>
-          <a:bodyPr rtlCol="0" anchor="ctr"/>
-          <a:lstStyle/>
-          <a:p>
-            <a:pPr algn="ctr"/>
-          </a:p>
-        </p:txBody>
-      </p:sp>
-      <p:sp>
-        <p:nvSpPr>
-          <p:cNvPr id="22" name="Rounded Rectangle 21"/>
-          <p:cNvSpPr/>
-          <p:nvPr/>
-        </p:nvSpPr>
-        <p:spPr>
-          <a:xfrm>
-            <a:off x="5283403" y="2139696"/>
-            <a:ext cx="438912" cy="438912"/>
-          </a:xfrm>
-          <a:prstGeom prst="roundRect">
-            <a:avLst/>
-          </a:prstGeom>
-          <a:solidFill>
-            <a:srgbClr val="7C3AED"/>
-          </a:solidFill>
-          <a:ln>
-            <a:solidFill>
-              <a:srgbClr val="7C3AED"/>
-            </a:solidFill>
-          </a:ln>
-        </p:spPr>
-        <p:style>
-          <a:lnRef idx="1">
-            <a:schemeClr val="accent1"/>
-          </a:lnRef>
-          <a:fillRef idx="3">
-            <a:schemeClr val="accent1"/>
-          </a:fillRef>
-          <a:effectRef idx="2">
-            <a:schemeClr val="accent1"/>
-          </a:effectRef>
-          <a:fontRef idx="minor">
-            <a:schemeClr val="lt1"/>
-          </a:fontRef>
-        </p:style>
-        <p:txBody>
-          <a:bodyPr rtlCol="0" anchor="ctr"/>
-          <a:lstStyle/>
-          <a:p>
-            <a:pPr algn="ctr"/>
-          </a:p>
-        </p:txBody>
-      </p:sp>
-      <p:sp>
-        <p:nvSpPr>
-          <p:cNvPr id="23" name="TextBox 22"/>
-          <p:cNvSpPr txBox="1"/>
-          <p:nvPr/>
-        </p:nvSpPr>
-        <p:spPr>
-          <a:xfrm>
-            <a:off x="5283403" y="2148840"/>
-            <a:ext cx="438912" cy="420624"/>
-          </a:xfrm>
-          <a:prstGeom prst="rect">
-            <a:avLst/>
-          </a:prstGeom>
-          <a:noFill/>
-        </p:spPr>
-        <p:txBody>
-          <a:bodyPr wrap="square" anchor="ctr">
-            <a:spAutoFit/>
-          </a:bodyPr>
-          <a:lstStyle/>
-          <a:p>
-            <a:pPr algn="ctr"/>
-            <a:r>
-              <a:rPr sz="1400" b="1">
-                <a:solidFill>
-                  <a:srgbClr val="FFFFFF"/>
-                </a:solidFill>
-                <a:latin typeface="Arial"/>
-              </a:rPr>
-              <a:t>3</a:t>
-            </a:r>
-          </a:p>
-        </p:txBody>
-      </p:sp>
-      <p:sp>
-        <p:nvSpPr>
-          <p:cNvPr id="24" name="TextBox 23"/>
-          <p:cNvSpPr txBox="1"/>
-          <p:nvPr/>
-        </p:nvSpPr>
-        <p:spPr>
-          <a:xfrm>
-            <a:off x="5886907" y="2103120"/>
-            <a:ext cx="1009497" cy="329184"/>
-          </a:xfrm>
-          <a:prstGeom prst="rect">
-            <a:avLst/>
-          </a:prstGeom>
-          <a:noFill/>
-        </p:spPr>
-        <p:txBody>
-          <a:bodyPr wrap="square" anchor="t">
-            <a:spAutoFit/>
-          </a:bodyPr>
-          <a:lstStyle/>
-          <a:p>
-            <a:pPr algn="l"/>
-            <a:r>
-              <a:rPr sz="1400" b="1">
-                <a:solidFill>
-                  <a:srgbClr val="7C3AED"/>
-                </a:solidFill>
-                <a:latin typeface="Arial"/>
-              </a:rPr>
-              <a:t>Verify</a:t>
-            </a:r>
-          </a:p>
-        </p:txBody>
-      </p:sp>
-      <p:sp>
-        <p:nvSpPr>
-          <p:cNvPr id="25" name="TextBox 24"/>
-          <p:cNvSpPr txBox="1"/>
-          <p:nvPr/>
-        </p:nvSpPr>
-        <p:spPr>
-          <a:xfrm>
-            <a:off x="5886907" y="2487168"/>
-            <a:ext cx="1009497" cy="2852928"/>
-          </a:xfrm>
-          <a:prstGeom prst="rect">
-            <a:avLst/>
-          </a:prstGeom>
-          <a:noFill/>
-        </p:spPr>
-        <p:txBody>
-          <a:bodyPr wrap="square" anchor="t">
-            <a:spAutoFit/>
-          </a:bodyPr>
-          <a:lstStyle/>
-          <a:p>
-            <a:pPr algn="l"/>
-            <a:r>
-              <a:rPr sz="1150" b="0">
-                <a:solidFill>
-                  <a:srgbClr val="161B26"/>
-                </a:solidFill>
-                <a:latin typeface="Arial"/>
-              </a:rPr>
-              <a:t>Check every claim, number and generated image.</a:t>
-            </a:r>
-          </a:p>
-        </p:txBody>
-      </p:sp>
-      <p:sp>
-        <p:nvSpPr>
-          <p:cNvPr id="26" name="Rounded Rectangle 25"/>
-          <p:cNvSpPr/>
-          <p:nvPr/>
-        </p:nvSpPr>
-        <p:spPr>
-          <a:xfrm>
-            <a:off x="7280452" y="1920240"/>
-            <a:ext cx="1997049" cy="3566160"/>
-          </a:xfrm>
-          <a:prstGeom prst="roundRect">
-            <a:avLst/>
-          </a:prstGeom>
-          <a:solidFill>
-            <a:srgbClr val="F5F8FC"/>
-          </a:solidFill>
-          <a:ln>
-            <a:solidFill>
-              <a:srgbClr val="E2E8F0"/>
-            </a:solidFill>
-          </a:ln>
-        </p:spPr>
-        <p:style>
-          <a:lnRef idx="1">
-            <a:schemeClr val="accent1"/>
-          </a:lnRef>
-          <a:fillRef idx="3">
-            <a:schemeClr val="accent1"/>
-          </a:fillRef>
-          <a:effectRef idx="2">
-            <a:schemeClr val="accent1"/>
-          </a:effectRef>
-          <a:fontRef idx="minor">
-            <a:schemeClr val="lt1"/>
-          </a:fontRef>
-        </p:style>
-        <p:txBody>
-          <a:bodyPr rtlCol="0" anchor="ctr"/>
-          <a:lstStyle/>
-          <a:p>
-            <a:pPr algn="ctr"/>
-          </a:p>
-        </p:txBody>
-      </p:sp>
-      <p:sp>
-        <p:nvSpPr>
-          <p:cNvPr id="27" name="Rectangle 26"/>
-          <p:cNvSpPr/>
-          <p:nvPr/>
-        </p:nvSpPr>
-        <p:spPr>
-          <a:xfrm>
-            <a:off x="7280452" y="1920240"/>
-            <a:ext cx="73152" cy="3566160"/>
-          </a:xfrm>
-          <a:prstGeom prst="rect">
-            <a:avLst/>
-          </a:prstGeom>
-          <a:solidFill>
-            <a:srgbClr val="F59E0B"/>
-          </a:solidFill>
-          <a:ln>
-            <a:solidFill>
-              <a:srgbClr val="F59E0B"/>
-            </a:solidFill>
-          </a:ln>
-        </p:spPr>
-        <p:style>
-          <a:lnRef idx="1">
-            <a:schemeClr val="accent1"/>
-          </a:lnRef>
-          <a:fillRef idx="3">
-            <a:schemeClr val="accent1"/>
-          </a:fillRef>
-          <a:effectRef idx="2">
-            <a:schemeClr val="accent1"/>
-          </a:effectRef>
-          <a:fontRef idx="minor">
-            <a:schemeClr val="lt1"/>
-          </a:fontRef>
-        </p:style>
-        <p:txBody>
-          <a:bodyPr rtlCol="0" anchor="ctr"/>
-          <a:lstStyle/>
-          <a:p>
-            <a:pPr algn="ctr"/>
-          </a:p>
-        </p:txBody>
-      </p:sp>
-      <p:sp>
-        <p:nvSpPr>
-          <p:cNvPr id="28" name="Rounded Rectangle 27"/>
-          <p:cNvSpPr/>
-          <p:nvPr/>
-        </p:nvSpPr>
-        <p:spPr>
-          <a:xfrm>
-            <a:off x="7481620" y="2139696"/>
-            <a:ext cx="438912" cy="438912"/>
-          </a:xfrm>
-          <a:prstGeom prst="roundRect">
-            <a:avLst/>
-          </a:prstGeom>
-          <a:solidFill>
-            <a:srgbClr val="F59E0B"/>
-          </a:solidFill>
-          <a:ln>
-            <a:solidFill>
-              <a:srgbClr val="F59E0B"/>
-            </a:solidFill>
-          </a:ln>
-        </p:spPr>
-        <p:style>
-          <a:lnRef idx="1">
-            <a:schemeClr val="accent1"/>
-          </a:lnRef>
-          <a:fillRef idx="3">
-            <a:schemeClr val="accent1"/>
-          </a:fillRef>
-          <a:effectRef idx="2">
-            <a:schemeClr val="accent1"/>
-          </a:effectRef>
-          <a:fontRef idx="minor">
-            <a:schemeClr val="lt1"/>
-          </a:fontRef>
-        </p:style>
-        <p:txBody>
-          <a:bodyPr rtlCol="0" anchor="ctr"/>
-          <a:lstStyle/>
-          <a:p>
-            <a:pPr algn="ctr"/>
-          </a:p>
-        </p:txBody>
-      </p:sp>
-      <p:sp>
-        <p:nvSpPr>
-          <p:cNvPr id="29" name="TextBox 28"/>
-          <p:cNvSpPr txBox="1"/>
-          <p:nvPr/>
-        </p:nvSpPr>
-        <p:spPr>
-          <a:xfrm>
-            <a:off x="7481620" y="2148840"/>
-            <a:ext cx="438912" cy="420624"/>
-          </a:xfrm>
-          <a:prstGeom prst="rect">
-            <a:avLst/>
-          </a:prstGeom>
-          <a:noFill/>
-        </p:spPr>
-        <p:txBody>
-          <a:bodyPr wrap="square" anchor="ctr">
-            <a:spAutoFit/>
-          </a:bodyPr>
-          <a:lstStyle/>
-          <a:p>
-            <a:pPr algn="ctr"/>
-            <a:r>
-              <a:rPr sz="1400" b="1">
-                <a:solidFill>
-                  <a:srgbClr val="FFFFFF"/>
-                </a:solidFill>
-                <a:latin typeface="Arial"/>
-              </a:rPr>
-              <a:t>4</a:t>
-            </a:r>
-          </a:p>
-        </p:txBody>
-      </p:sp>
-      <p:sp>
-        <p:nvSpPr>
-          <p:cNvPr id="30" name="TextBox 29"/>
-          <p:cNvSpPr txBox="1"/>
-          <p:nvPr/>
-        </p:nvSpPr>
-        <p:spPr>
-          <a:xfrm>
-            <a:off x="8085124" y="2103120"/>
-            <a:ext cx="1009497" cy="329184"/>
-          </a:xfrm>
-          <a:prstGeom prst="rect">
-            <a:avLst/>
-          </a:prstGeom>
-          <a:noFill/>
-        </p:spPr>
-        <p:txBody>
-          <a:bodyPr wrap="square" anchor="t">
-            <a:spAutoFit/>
-          </a:bodyPr>
-          <a:lstStyle/>
-          <a:p>
-            <a:pPr algn="l"/>
-            <a:r>
-              <a:rPr sz="1400" b="1">
-                <a:solidFill>
-                  <a:srgbClr val="F59E0B"/>
-                </a:solidFill>
-                <a:latin typeface="Arial"/>
-              </a:rPr>
-              <a:t>Rebuild</a:t>
-            </a:r>
-          </a:p>
-        </p:txBody>
-      </p:sp>
-      <p:sp>
-        <p:nvSpPr>
-          <p:cNvPr id="31" name="TextBox 30"/>
-          <p:cNvSpPr txBox="1"/>
-          <p:nvPr/>
-        </p:nvSpPr>
-        <p:spPr>
-          <a:xfrm>
-            <a:off x="8085124" y="2487168"/>
-            <a:ext cx="1009497" cy="2852928"/>
-          </a:xfrm>
-          <a:prstGeom prst="rect">
-            <a:avLst/>
-          </a:prstGeom>
-          <a:noFill/>
-        </p:spPr>
-        <p:txBody>
-          <a:bodyPr wrap="square" anchor="t">
-            <a:spAutoFit/>
-          </a:bodyPr>
-          <a:lstStyle/>
-          <a:p>
-            <a:pPr algn="l"/>
-            <a:r>
-              <a:rPr sz="1150" b="0">
-                <a:solidFill>
-                  <a:srgbClr val="161B26"/>
-                </a:solidFill>
-                <a:latin typeface="Arial"/>
-              </a:rPr>
-              <a:t>Replace weak layouts with editable native objects.</a:t>
-            </a:r>
-          </a:p>
-        </p:txBody>
-      </p:sp>
-      <p:sp>
-        <p:nvSpPr>
-          <p:cNvPr id="32" name="Rounded Rectangle 31"/>
-          <p:cNvSpPr/>
-          <p:nvPr/>
-        </p:nvSpPr>
-        <p:spPr>
-          <a:xfrm>
-            <a:off x="9478670" y="1920240"/>
-            <a:ext cx="1997049" cy="3566160"/>
-          </a:xfrm>
-          <a:prstGeom prst="roundRect">
-            <a:avLst/>
-          </a:prstGeom>
-          <a:solidFill>
-            <a:srgbClr val="F5F8FC"/>
-          </a:solidFill>
-          <a:ln>
-            <a:solidFill>
-              <a:srgbClr val="E2E8F0"/>
-            </a:solidFill>
-          </a:ln>
-        </p:spPr>
-        <p:style>
-          <a:lnRef idx="1">
-            <a:schemeClr val="accent1"/>
-          </a:lnRef>
-          <a:fillRef idx="3">
-            <a:schemeClr val="accent1"/>
-          </a:fillRef>
-          <a:effectRef idx="2">
-            <a:schemeClr val="accent1"/>
-          </a:effectRef>
-          <a:fontRef idx="minor">
-            <a:schemeClr val="lt1"/>
-          </a:fontRef>
-        </p:style>
-        <p:txBody>
-          <a:bodyPr rtlCol="0" anchor="ctr"/>
-          <a:lstStyle/>
-          <a:p>
-            <a:pPr algn="ctr"/>
-          </a:p>
-        </p:txBody>
-      </p:sp>
-      <p:sp>
-        <p:nvSpPr>
-          <p:cNvPr id="33" name="Rectangle 32"/>
-          <p:cNvSpPr/>
-          <p:nvPr/>
-        </p:nvSpPr>
-        <p:spPr>
-          <a:xfrm>
-            <a:off x="9478670" y="1920240"/>
-            <a:ext cx="73152" cy="3566160"/>
-          </a:xfrm>
-          <a:prstGeom prst="rect">
-            <a:avLst/>
-          </a:prstGeom>
-          <a:solidFill>
-            <a:srgbClr val="1F6FEB"/>
-          </a:solidFill>
-          <a:ln>
-            <a:solidFill>
-              <a:srgbClr val="1F6FEB"/>
-            </a:solidFill>
-          </a:ln>
-        </p:spPr>
-        <p:style>
-          <a:lnRef idx="1">
-            <a:schemeClr val="accent1"/>
-          </a:lnRef>
-          <a:fillRef idx="3">
-            <a:schemeClr val="accent1"/>
-          </a:fillRef>
-          <a:effectRef idx="2">
-            <a:schemeClr val="accent1"/>
-          </a:effectRef>
-          <a:fontRef idx="minor">
-            <a:schemeClr val="lt1"/>
-          </a:fontRef>
-        </p:style>
-        <p:txBody>
-          <a:bodyPr rtlCol="0" anchor="ctr"/>
-          <a:lstStyle/>
-          <a:p>
-            <a:pPr algn="ctr"/>
-          </a:p>
-        </p:txBody>
-      </p:sp>
-      <p:sp>
-        <p:nvSpPr>
-          <p:cNvPr id="34" name="Rounded Rectangle 33"/>
-          <p:cNvSpPr/>
-          <p:nvPr/>
-        </p:nvSpPr>
-        <p:spPr>
-          <a:xfrm>
-            <a:off x="9679838" y="2139696"/>
-            <a:ext cx="438912" cy="438912"/>
-          </a:xfrm>
-          <a:prstGeom prst="roundRect">
-            <a:avLst/>
-          </a:prstGeom>
-          <a:solidFill>
-            <a:srgbClr val="1F6FEB"/>
-          </a:solidFill>
-          <a:ln>
-            <a:solidFill>
-              <a:srgbClr val="1F6FEB"/>
-            </a:solidFill>
-          </a:ln>
-        </p:spPr>
-        <p:style>
-          <a:lnRef idx="1">
-            <a:schemeClr val="accent1"/>
-          </a:lnRef>
-          <a:fillRef idx="3">
-            <a:schemeClr val="accent1"/>
-          </a:fillRef>
-          <a:effectRef idx="2">
-            <a:schemeClr val="accent1"/>
-          </a:effectRef>
-          <a:fontRef idx="minor">
-            <a:schemeClr val="lt1"/>
-          </a:fontRef>
-        </p:style>
-        <p:txBody>
-          <a:bodyPr rtlCol="0" anchor="ctr"/>
-          <a:lstStyle/>
-          <a:p>
-            <a:pPr algn="ctr"/>
-          </a:p>
-        </p:txBody>
-      </p:sp>
-      <p:sp>
-        <p:nvSpPr>
-          <p:cNvPr id="35" name="TextBox 34"/>
-          <p:cNvSpPr txBox="1"/>
-          <p:nvPr/>
-        </p:nvSpPr>
-        <p:spPr>
-          <a:xfrm>
-            <a:off x="9679838" y="2148840"/>
-            <a:ext cx="438912" cy="420624"/>
-          </a:xfrm>
-          <a:prstGeom prst="rect">
-            <a:avLst/>
-          </a:prstGeom>
-          <a:noFill/>
-        </p:spPr>
-        <p:txBody>
-          <a:bodyPr wrap="square" anchor="ctr">
-            <a:spAutoFit/>
-          </a:bodyPr>
-          <a:lstStyle/>
-          <a:p>
-            <a:pPr algn="ctr"/>
-            <a:r>
-              <a:rPr sz="1400" b="1">
-                <a:solidFill>
-                  <a:srgbClr val="FFFFFF"/>
-                </a:solidFill>
-                <a:latin typeface="Arial"/>
-              </a:rPr>
-              <a:t>5</a:t>
-            </a:r>
-          </a:p>
-        </p:txBody>
-      </p:sp>
-      <p:sp>
-        <p:nvSpPr>
-          <p:cNvPr id="36" name="TextBox 35"/>
-          <p:cNvSpPr txBox="1"/>
-          <p:nvPr/>
-        </p:nvSpPr>
-        <p:spPr>
-          <a:xfrm>
-            <a:off x="10283342" y="2103120"/>
-            <a:ext cx="1009497" cy="329184"/>
-          </a:xfrm>
-          <a:prstGeom prst="rect">
-            <a:avLst/>
-          </a:prstGeom>
-          <a:noFill/>
-        </p:spPr>
-        <p:txBody>
-          <a:bodyPr wrap="square" anchor="t">
-            <a:spAutoFit/>
-          </a:bodyPr>
-          <a:lstStyle/>
-          <a:p>
-            <a:pPr algn="l"/>
-            <a:r>
-              <a:rPr sz="1400" b="1">
-                <a:solidFill>
-                  <a:srgbClr val="1F6FEB"/>
-                </a:solidFill>
-                <a:latin typeface="Arial"/>
-              </a:rPr>
-              <a:t>Approve</a:t>
-            </a:r>
-          </a:p>
-        </p:txBody>
-      </p:sp>
-      <p:sp>
-        <p:nvSpPr>
-          <p:cNvPr id="37" name="TextBox 36"/>
-          <p:cNvSpPr txBox="1"/>
-          <p:nvPr/>
-        </p:nvSpPr>
-        <p:spPr>
-          <a:xfrm>
-            <a:off x="10283342" y="2487168"/>
-            <a:ext cx="1009497" cy="2852928"/>
-          </a:xfrm>
-          <a:prstGeom prst="rect">
-            <a:avLst/>
-          </a:prstGeom>
-          <a:noFill/>
-        </p:spPr>
-        <p:txBody>
-          <a:bodyPr wrap="square" anchor="t">
-            <a:spAutoFit/>
-          </a:bodyPr>
-          <a:lstStyle/>
-          <a:p>
-            <a:pPr algn="l"/>
-            <a:r>
-              <a:rPr sz="1150" b="0">
-                <a:solidFill>
-                  <a:srgbClr val="161B26"/>
-                </a:solidFill>
-                <a:latin typeface="Arial"/>
-              </a:rPr>
-              <a:t>Record source, prompt, human changes and final owner.</a:t>
+              <a:t>Run the same verified brief through Microsoft 365 Copilot and Gemini Notebook. Generate a Gemini Notebook Infographic plus Presenter Slides, preserve the deck as PPTX where available or PDF with a documented rebuild route, compare both routes and refine the selected master in PowerPoint.</a:t>
             </a:r>
           </a:p>
         </p:txBody>
@@ -5721,6 +5482,726 @@
             <a:avLst/>
           </a:prstGeom>
           <a:solidFill>
+            <a:srgbClr val="10B981"/>
+          </a:solidFill>
+          <a:ln>
+            <a:solidFill>
+              <a:srgbClr val="10B981"/>
+            </a:solidFill>
+          </a:ln>
+        </p:spPr>
+        <p:style>
+          <a:lnRef idx="1">
+            <a:schemeClr val="accent1"/>
+          </a:lnRef>
+          <a:fillRef idx="3">
+            <a:schemeClr val="accent1"/>
+          </a:fillRef>
+          <a:effectRef idx="2">
+            <a:schemeClr val="accent1"/>
+          </a:effectRef>
+          <a:fontRef idx="minor">
+            <a:schemeClr val="lt1"/>
+          </a:fontRef>
+        </p:style>
+        <p:txBody>
+          <a:bodyPr rtlCol="0" anchor="ctr"/>
+          <a:lstStyle/>
+          <a:p>
+            <a:pPr algn="ctr"/>
+          </a:p>
+        </p:txBody>
+      </p:sp>
+      <p:sp>
+        <p:nvSpPr>
+          <p:cNvPr id="4" name="TextBox 3"/>
+          <p:cNvSpPr txBox="1"/>
+          <p:nvPr/>
+        </p:nvSpPr>
+        <p:spPr>
+          <a:xfrm>
+            <a:off x="658368" y="384048"/>
+            <a:ext cx="10789920" cy="320040"/>
+          </a:xfrm>
+          <a:prstGeom prst="rect">
+            <a:avLst/>
+          </a:prstGeom>
+          <a:noFill/>
+        </p:spPr>
+        <p:txBody>
+          <a:bodyPr wrap="square" anchor="t">
+            <a:spAutoFit/>
+          </a:bodyPr>
+          <a:lstStyle/>
+          <a:p>
+            <a:pPr algn="l"/>
+            <a:r>
+              <a:rPr sz="1100" b="1">
+                <a:solidFill>
+                  <a:srgbClr val="10B981"/>
+                </a:solidFill>
+                <a:latin typeface="Arial"/>
+              </a:rPr>
+              <a:t>ACTIVITY 06 · FRAMEWORK</a:t>
+            </a:r>
+          </a:p>
+        </p:txBody>
+      </p:sp>
+      <p:sp>
+        <p:nvSpPr>
+          <p:cNvPr id="5" name="TextBox 4"/>
+          <p:cNvSpPr txBox="1"/>
+          <p:nvPr/>
+        </p:nvSpPr>
+        <p:spPr>
+          <a:xfrm>
+            <a:off x="658368" y="749808"/>
+            <a:ext cx="10789920" cy="658368"/>
+          </a:xfrm>
+          <a:prstGeom prst="rect">
+            <a:avLst/>
+          </a:prstGeom>
+          <a:noFill/>
+        </p:spPr>
+        <p:txBody>
+          <a:bodyPr wrap="square" anchor="t">
+            <a:spAutoFit/>
+          </a:bodyPr>
+          <a:lstStyle/>
+          <a:p>
+            <a:pPr algn="l"/>
+            <a:r>
+              <a:rPr sz="2700" b="1">
+                <a:solidFill>
+                  <a:srgbClr val="161B26"/>
+                </a:solidFill>
+                <a:latin typeface="Arial"/>
+              </a:rPr>
+              <a:t>One Brief, Two AI Routes, One PPTX Master</a:t>
+            </a:r>
+          </a:p>
+        </p:txBody>
+      </p:sp>
+      <p:sp>
+        <p:nvSpPr>
+          <p:cNvPr id="6" name="Rectangle 5"/>
+          <p:cNvSpPr/>
+          <p:nvPr/>
+        </p:nvSpPr>
+        <p:spPr>
+          <a:xfrm>
+            <a:off x="658368" y="1444752"/>
+            <a:ext cx="10881360" cy="18288"/>
+          </a:xfrm>
+          <a:prstGeom prst="rect">
+            <a:avLst/>
+          </a:prstGeom>
+          <a:solidFill>
+            <a:srgbClr val="E2E8F0"/>
+          </a:solidFill>
+          <a:ln>
+            <a:solidFill>
+              <a:srgbClr val="E2E8F0"/>
+            </a:solidFill>
+          </a:ln>
+        </p:spPr>
+        <p:style>
+          <a:lnRef idx="1">
+            <a:schemeClr val="accent1"/>
+          </a:lnRef>
+          <a:fillRef idx="3">
+            <a:schemeClr val="accent1"/>
+          </a:fillRef>
+          <a:effectRef idx="2">
+            <a:schemeClr val="accent1"/>
+          </a:effectRef>
+          <a:fontRef idx="minor">
+            <a:schemeClr val="lt1"/>
+          </a:fontRef>
+        </p:style>
+        <p:txBody>
+          <a:bodyPr rtlCol="0" anchor="ctr"/>
+          <a:lstStyle/>
+          <a:p>
+            <a:pPr algn="ctr"/>
+          </a:p>
+        </p:txBody>
+      </p:sp>
+      <p:sp>
+        <p:nvSpPr>
+          <p:cNvPr id="7" name="TextBox 6"/>
+          <p:cNvSpPr txBox="1"/>
+          <p:nvPr/>
+        </p:nvSpPr>
+        <p:spPr>
+          <a:xfrm>
+            <a:off x="658368" y="6473952"/>
+            <a:ext cx="9875520" cy="201168"/>
+          </a:xfrm>
+          <a:prstGeom prst="rect">
+            <a:avLst/>
+          </a:prstGeom>
+          <a:noFill/>
+        </p:spPr>
+        <p:txBody>
+          <a:bodyPr wrap="square" anchor="t">
+            <a:spAutoFit/>
+          </a:bodyPr>
+          <a:lstStyle/>
+          <a:p>
+            <a:pPr algn="l"/>
+            <a:r>
+              <a:rPr sz="800" b="0">
+                <a:solidFill>
+                  <a:srgbClr val="5B6372"/>
+                </a:solidFill>
+                <a:latin typeface="Arial"/>
+              </a:rPr>
+              <a:t>TGS-2026064178 · ACTIVITY PRACTICE · Tertiary Infotech Academy Pte Ltd</a:t>
+            </a:r>
+          </a:p>
+        </p:txBody>
+      </p:sp>
+      <p:sp>
+        <p:nvSpPr>
+          <p:cNvPr id="8" name="Rounded Rectangle 7"/>
+          <p:cNvSpPr/>
+          <p:nvPr/>
+        </p:nvSpPr>
+        <p:spPr>
+          <a:xfrm>
+            <a:off x="685800" y="1920240"/>
+            <a:ext cx="1997049" cy="3566160"/>
+          </a:xfrm>
+          <a:prstGeom prst="roundRect">
+            <a:avLst/>
+          </a:prstGeom>
+          <a:solidFill>
+            <a:srgbClr val="F5F8FC"/>
+          </a:solidFill>
+          <a:ln>
+            <a:solidFill>
+              <a:srgbClr val="E2E8F0"/>
+            </a:solidFill>
+          </a:ln>
+        </p:spPr>
+        <p:style>
+          <a:lnRef idx="1">
+            <a:schemeClr val="accent1"/>
+          </a:lnRef>
+          <a:fillRef idx="3">
+            <a:schemeClr val="accent1"/>
+          </a:fillRef>
+          <a:effectRef idx="2">
+            <a:schemeClr val="accent1"/>
+          </a:effectRef>
+          <a:fontRef idx="minor">
+            <a:schemeClr val="lt1"/>
+          </a:fontRef>
+        </p:style>
+        <p:txBody>
+          <a:bodyPr rtlCol="0" anchor="ctr"/>
+          <a:lstStyle/>
+          <a:p>
+            <a:pPr algn="ctr"/>
+          </a:p>
+        </p:txBody>
+      </p:sp>
+      <p:sp>
+        <p:nvSpPr>
+          <p:cNvPr id="9" name="Rectangle 8"/>
+          <p:cNvSpPr/>
+          <p:nvPr/>
+        </p:nvSpPr>
+        <p:spPr>
+          <a:xfrm>
+            <a:off x="685800" y="1920240"/>
+            <a:ext cx="73152" cy="3566160"/>
+          </a:xfrm>
+          <a:prstGeom prst="rect">
+            <a:avLst/>
+          </a:prstGeom>
+          <a:solidFill>
+            <a:srgbClr val="1F6FEB"/>
+          </a:solidFill>
+          <a:ln>
+            <a:solidFill>
+              <a:srgbClr val="1F6FEB"/>
+            </a:solidFill>
+          </a:ln>
+        </p:spPr>
+        <p:style>
+          <a:lnRef idx="1">
+            <a:schemeClr val="accent1"/>
+          </a:lnRef>
+          <a:fillRef idx="3">
+            <a:schemeClr val="accent1"/>
+          </a:fillRef>
+          <a:effectRef idx="2">
+            <a:schemeClr val="accent1"/>
+          </a:effectRef>
+          <a:fontRef idx="minor">
+            <a:schemeClr val="lt1"/>
+          </a:fontRef>
+        </p:style>
+        <p:txBody>
+          <a:bodyPr rtlCol="0" anchor="ctr"/>
+          <a:lstStyle/>
+          <a:p>
+            <a:pPr algn="ctr"/>
+          </a:p>
+        </p:txBody>
+      </p:sp>
+      <p:sp>
+        <p:nvSpPr>
+          <p:cNvPr id="10" name="Rounded Rectangle 9"/>
+          <p:cNvSpPr/>
+          <p:nvPr/>
+        </p:nvSpPr>
+        <p:spPr>
+          <a:xfrm>
+            <a:off x="886968" y="2139696"/>
+            <a:ext cx="438912" cy="438912"/>
+          </a:xfrm>
+          <a:prstGeom prst="roundRect">
+            <a:avLst/>
+          </a:prstGeom>
+          <a:solidFill>
+            <a:srgbClr val="1F6FEB"/>
+          </a:solidFill>
+          <a:ln>
+            <a:solidFill>
+              <a:srgbClr val="1F6FEB"/>
+            </a:solidFill>
+          </a:ln>
+        </p:spPr>
+        <p:style>
+          <a:lnRef idx="1">
+            <a:schemeClr val="accent1"/>
+          </a:lnRef>
+          <a:fillRef idx="3">
+            <a:schemeClr val="accent1"/>
+          </a:fillRef>
+          <a:effectRef idx="2">
+            <a:schemeClr val="accent1"/>
+          </a:effectRef>
+          <a:fontRef idx="minor">
+            <a:schemeClr val="lt1"/>
+          </a:fontRef>
+        </p:style>
+        <p:txBody>
+          <a:bodyPr rtlCol="0" anchor="ctr"/>
+          <a:lstStyle/>
+          <a:p>
+            <a:pPr algn="ctr"/>
+          </a:p>
+        </p:txBody>
+      </p:sp>
+      <p:sp>
+        <p:nvSpPr>
+          <p:cNvPr id="11" name="TextBox 10"/>
+          <p:cNvSpPr txBox="1"/>
+          <p:nvPr/>
+        </p:nvSpPr>
+        <p:spPr>
+          <a:xfrm>
+            <a:off x="886968" y="2148840"/>
+            <a:ext cx="438912" cy="420624"/>
+          </a:xfrm>
+          <a:prstGeom prst="rect">
+            <a:avLst/>
+          </a:prstGeom>
+          <a:noFill/>
+        </p:spPr>
+        <p:txBody>
+          <a:bodyPr wrap="square" anchor="ctr">
+            <a:spAutoFit/>
+          </a:bodyPr>
+          <a:lstStyle/>
+          <a:p>
+            <a:pPr algn="ctr"/>
+            <a:r>
+              <a:rPr sz="1400" b="1">
+                <a:solidFill>
+                  <a:srgbClr val="FFFFFF"/>
+                </a:solidFill>
+                <a:latin typeface="Arial"/>
+              </a:rPr>
+              <a:t>1</a:t>
+            </a:r>
+          </a:p>
+        </p:txBody>
+      </p:sp>
+      <p:sp>
+        <p:nvSpPr>
+          <p:cNvPr id="12" name="TextBox 11"/>
+          <p:cNvSpPr txBox="1"/>
+          <p:nvPr/>
+        </p:nvSpPr>
+        <p:spPr>
+          <a:xfrm>
+            <a:off x="1490472" y="2103120"/>
+            <a:ext cx="1009497" cy="329184"/>
+          </a:xfrm>
+          <a:prstGeom prst="rect">
+            <a:avLst/>
+          </a:prstGeom>
+          <a:noFill/>
+        </p:spPr>
+        <p:txBody>
+          <a:bodyPr wrap="square" anchor="t">
+            <a:spAutoFit/>
+          </a:bodyPr>
+          <a:lstStyle/>
+          <a:p>
+            <a:pPr algn="l"/>
+            <a:r>
+              <a:rPr sz="1400" b="1">
+                <a:solidFill>
+                  <a:srgbClr val="1F6FEB"/>
+                </a:solidFill>
+                <a:latin typeface="Arial"/>
+              </a:rPr>
+              <a:t>Ground</a:t>
+            </a:r>
+          </a:p>
+        </p:txBody>
+      </p:sp>
+      <p:sp>
+        <p:nvSpPr>
+          <p:cNvPr id="13" name="TextBox 12"/>
+          <p:cNvSpPr txBox="1"/>
+          <p:nvPr/>
+        </p:nvSpPr>
+        <p:spPr>
+          <a:xfrm>
+            <a:off x="1490472" y="2487168"/>
+            <a:ext cx="1009497" cy="2852928"/>
+          </a:xfrm>
+          <a:prstGeom prst="rect">
+            <a:avLst/>
+          </a:prstGeom>
+          <a:noFill/>
+        </p:spPr>
+        <p:txBody>
+          <a:bodyPr wrap="square" anchor="t">
+            <a:spAutoFit/>
+          </a:bodyPr>
+          <a:lstStyle/>
+          <a:p>
+            <a:pPr algn="l"/>
+            <a:r>
+              <a:rPr sz="1150" b="0">
+                <a:solidFill>
+                  <a:srgbClr val="161B26"/>
+                </a:solidFill>
+                <a:latin typeface="Arial"/>
+              </a:rPr>
+              <a:t>Load the approved source pack and freeze one comparison brief.</a:t>
+            </a:r>
+          </a:p>
+        </p:txBody>
+      </p:sp>
+      <p:sp>
+        <p:nvSpPr>
+          <p:cNvPr id="14" name="Rounded Rectangle 13"/>
+          <p:cNvSpPr/>
+          <p:nvPr/>
+        </p:nvSpPr>
+        <p:spPr>
+          <a:xfrm>
+            <a:off x="2884017" y="1920240"/>
+            <a:ext cx="1997049" cy="3566160"/>
+          </a:xfrm>
+          <a:prstGeom prst="roundRect">
+            <a:avLst/>
+          </a:prstGeom>
+          <a:solidFill>
+            <a:srgbClr val="F5F8FC"/>
+          </a:solidFill>
+          <a:ln>
+            <a:solidFill>
+              <a:srgbClr val="E2E8F0"/>
+            </a:solidFill>
+          </a:ln>
+        </p:spPr>
+        <p:style>
+          <a:lnRef idx="1">
+            <a:schemeClr val="accent1"/>
+          </a:lnRef>
+          <a:fillRef idx="3">
+            <a:schemeClr val="accent1"/>
+          </a:fillRef>
+          <a:effectRef idx="2">
+            <a:schemeClr val="accent1"/>
+          </a:effectRef>
+          <a:fontRef idx="minor">
+            <a:schemeClr val="lt1"/>
+          </a:fontRef>
+        </p:style>
+        <p:txBody>
+          <a:bodyPr rtlCol="0" anchor="ctr"/>
+          <a:lstStyle/>
+          <a:p>
+            <a:pPr algn="ctr"/>
+          </a:p>
+        </p:txBody>
+      </p:sp>
+      <p:sp>
+        <p:nvSpPr>
+          <p:cNvPr id="15" name="Rectangle 14"/>
+          <p:cNvSpPr/>
+          <p:nvPr/>
+        </p:nvSpPr>
+        <p:spPr>
+          <a:xfrm>
+            <a:off x="2884017" y="1920240"/>
+            <a:ext cx="73152" cy="3566160"/>
+          </a:xfrm>
+          <a:prstGeom prst="rect">
+            <a:avLst/>
+          </a:prstGeom>
+          <a:solidFill>
+            <a:srgbClr val="10B981"/>
+          </a:solidFill>
+          <a:ln>
+            <a:solidFill>
+              <a:srgbClr val="10B981"/>
+            </a:solidFill>
+          </a:ln>
+        </p:spPr>
+        <p:style>
+          <a:lnRef idx="1">
+            <a:schemeClr val="accent1"/>
+          </a:lnRef>
+          <a:fillRef idx="3">
+            <a:schemeClr val="accent1"/>
+          </a:fillRef>
+          <a:effectRef idx="2">
+            <a:schemeClr val="accent1"/>
+          </a:effectRef>
+          <a:fontRef idx="minor">
+            <a:schemeClr val="lt1"/>
+          </a:fontRef>
+        </p:style>
+        <p:txBody>
+          <a:bodyPr rtlCol="0" anchor="ctr"/>
+          <a:lstStyle/>
+          <a:p>
+            <a:pPr algn="ctr"/>
+          </a:p>
+        </p:txBody>
+      </p:sp>
+      <p:sp>
+        <p:nvSpPr>
+          <p:cNvPr id="16" name="Rounded Rectangle 15"/>
+          <p:cNvSpPr/>
+          <p:nvPr/>
+        </p:nvSpPr>
+        <p:spPr>
+          <a:xfrm>
+            <a:off x="3085185" y="2139696"/>
+            <a:ext cx="438912" cy="438912"/>
+          </a:xfrm>
+          <a:prstGeom prst="roundRect">
+            <a:avLst/>
+          </a:prstGeom>
+          <a:solidFill>
+            <a:srgbClr val="10B981"/>
+          </a:solidFill>
+          <a:ln>
+            <a:solidFill>
+              <a:srgbClr val="10B981"/>
+            </a:solidFill>
+          </a:ln>
+        </p:spPr>
+        <p:style>
+          <a:lnRef idx="1">
+            <a:schemeClr val="accent1"/>
+          </a:lnRef>
+          <a:fillRef idx="3">
+            <a:schemeClr val="accent1"/>
+          </a:fillRef>
+          <a:effectRef idx="2">
+            <a:schemeClr val="accent1"/>
+          </a:effectRef>
+          <a:fontRef idx="minor">
+            <a:schemeClr val="lt1"/>
+          </a:fontRef>
+        </p:style>
+        <p:txBody>
+          <a:bodyPr rtlCol="0" anchor="ctr"/>
+          <a:lstStyle/>
+          <a:p>
+            <a:pPr algn="ctr"/>
+          </a:p>
+        </p:txBody>
+      </p:sp>
+      <p:sp>
+        <p:nvSpPr>
+          <p:cNvPr id="17" name="TextBox 16"/>
+          <p:cNvSpPr txBox="1"/>
+          <p:nvPr/>
+        </p:nvSpPr>
+        <p:spPr>
+          <a:xfrm>
+            <a:off x="3085185" y="2148840"/>
+            <a:ext cx="438912" cy="420624"/>
+          </a:xfrm>
+          <a:prstGeom prst="rect">
+            <a:avLst/>
+          </a:prstGeom>
+          <a:noFill/>
+        </p:spPr>
+        <p:txBody>
+          <a:bodyPr wrap="square" anchor="ctr">
+            <a:spAutoFit/>
+          </a:bodyPr>
+          <a:lstStyle/>
+          <a:p>
+            <a:pPr algn="ctr"/>
+            <a:r>
+              <a:rPr sz="1400" b="1">
+                <a:solidFill>
+                  <a:srgbClr val="FFFFFF"/>
+                </a:solidFill>
+                <a:latin typeface="Arial"/>
+              </a:rPr>
+              <a:t>2</a:t>
+            </a:r>
+          </a:p>
+        </p:txBody>
+      </p:sp>
+      <p:sp>
+        <p:nvSpPr>
+          <p:cNvPr id="18" name="TextBox 17"/>
+          <p:cNvSpPr txBox="1"/>
+          <p:nvPr/>
+        </p:nvSpPr>
+        <p:spPr>
+          <a:xfrm>
+            <a:off x="3688689" y="2103120"/>
+            <a:ext cx="1009497" cy="329184"/>
+          </a:xfrm>
+          <a:prstGeom prst="rect">
+            <a:avLst/>
+          </a:prstGeom>
+          <a:noFill/>
+        </p:spPr>
+        <p:txBody>
+          <a:bodyPr wrap="square" anchor="t">
+            <a:spAutoFit/>
+          </a:bodyPr>
+          <a:lstStyle/>
+          <a:p>
+            <a:pPr algn="l"/>
+            <a:r>
+              <a:rPr sz="1400" b="1">
+                <a:solidFill>
+                  <a:srgbClr val="10B981"/>
+                </a:solidFill>
+                <a:latin typeface="Arial"/>
+              </a:rPr>
+              <a:t>Microsoft</a:t>
+            </a:r>
+          </a:p>
+        </p:txBody>
+      </p:sp>
+      <p:sp>
+        <p:nvSpPr>
+          <p:cNvPr id="19" name="TextBox 18"/>
+          <p:cNvSpPr txBox="1"/>
+          <p:nvPr/>
+        </p:nvSpPr>
+        <p:spPr>
+          <a:xfrm>
+            <a:off x="3688689" y="2487168"/>
+            <a:ext cx="1009497" cy="2852928"/>
+          </a:xfrm>
+          <a:prstGeom prst="rect">
+            <a:avLst/>
+          </a:prstGeom>
+          <a:noFill/>
+        </p:spPr>
+        <p:txBody>
+          <a:bodyPr wrap="square" anchor="t">
+            <a:spAutoFit/>
+          </a:bodyPr>
+          <a:lstStyle/>
+          <a:p>
+            <a:pPr algn="l"/>
+            <a:r>
+              <a:rPr sz="1150" b="0">
+                <a:solidFill>
+                  <a:srgbClr val="161B26"/>
+                </a:solidFill>
+                <a:latin typeface="Arial"/>
+              </a:rPr>
+              <a:t>Generate an infographic or presentation direction with Copilot.</a:t>
+            </a:r>
+          </a:p>
+        </p:txBody>
+      </p:sp>
+      <p:sp>
+        <p:nvSpPr>
+          <p:cNvPr id="20" name="Rounded Rectangle 19"/>
+          <p:cNvSpPr/>
+          <p:nvPr/>
+        </p:nvSpPr>
+        <p:spPr>
+          <a:xfrm>
+            <a:off x="5082235" y="1920240"/>
+            <a:ext cx="1997049" cy="3566160"/>
+          </a:xfrm>
+          <a:prstGeom prst="roundRect">
+            <a:avLst/>
+          </a:prstGeom>
+          <a:solidFill>
+            <a:srgbClr val="F5F8FC"/>
+          </a:solidFill>
+          <a:ln>
+            <a:solidFill>
+              <a:srgbClr val="E2E8F0"/>
+            </a:solidFill>
+          </a:ln>
+        </p:spPr>
+        <p:style>
+          <a:lnRef idx="1">
+            <a:schemeClr val="accent1"/>
+          </a:lnRef>
+          <a:fillRef idx="3">
+            <a:schemeClr val="accent1"/>
+          </a:fillRef>
+          <a:effectRef idx="2">
+            <a:schemeClr val="accent1"/>
+          </a:effectRef>
+          <a:fontRef idx="minor">
+            <a:schemeClr val="lt1"/>
+          </a:fontRef>
+        </p:style>
+        <p:txBody>
+          <a:bodyPr rtlCol="0" anchor="ctr"/>
+          <a:lstStyle/>
+          <a:p>
+            <a:pPr algn="ctr"/>
+          </a:p>
+        </p:txBody>
+      </p:sp>
+      <p:sp>
+        <p:nvSpPr>
+          <p:cNvPr id="21" name="Rectangle 20"/>
+          <p:cNvSpPr/>
+          <p:nvPr/>
+        </p:nvSpPr>
+        <p:spPr>
+          <a:xfrm>
+            <a:off x="5082235" y="1920240"/>
+            <a:ext cx="73152" cy="3566160"/>
+          </a:xfrm>
+          <a:prstGeom prst="rect">
+            <a:avLst/>
+          </a:prstGeom>
+          <a:solidFill>
             <a:srgbClr val="7C3AED"/>
           </a:solidFill>
           <a:ln>
@@ -5753,14 +6234,94 @@
       </p:sp>
       <p:sp>
         <p:nvSpPr>
-          <p:cNvPr id="4" name="TextBox 3"/>
+          <p:cNvPr id="22" name="Rounded Rectangle 21"/>
+          <p:cNvSpPr/>
+          <p:nvPr/>
+        </p:nvSpPr>
+        <p:spPr>
+          <a:xfrm>
+            <a:off x="5283403" y="2139696"/>
+            <a:ext cx="438912" cy="438912"/>
+          </a:xfrm>
+          <a:prstGeom prst="roundRect">
+            <a:avLst/>
+          </a:prstGeom>
+          <a:solidFill>
+            <a:srgbClr val="7C3AED"/>
+          </a:solidFill>
+          <a:ln>
+            <a:solidFill>
+              <a:srgbClr val="7C3AED"/>
+            </a:solidFill>
+          </a:ln>
+        </p:spPr>
+        <p:style>
+          <a:lnRef idx="1">
+            <a:schemeClr val="accent1"/>
+          </a:lnRef>
+          <a:fillRef idx="3">
+            <a:schemeClr val="accent1"/>
+          </a:fillRef>
+          <a:effectRef idx="2">
+            <a:schemeClr val="accent1"/>
+          </a:effectRef>
+          <a:fontRef idx="minor">
+            <a:schemeClr val="lt1"/>
+          </a:fontRef>
+        </p:style>
+        <p:txBody>
+          <a:bodyPr rtlCol="0" anchor="ctr"/>
+          <a:lstStyle/>
+          <a:p>
+            <a:pPr algn="ctr"/>
+          </a:p>
+        </p:txBody>
+      </p:sp>
+      <p:sp>
+        <p:nvSpPr>
+          <p:cNvPr id="23" name="TextBox 22"/>
           <p:cNvSpPr txBox="1"/>
           <p:nvPr/>
         </p:nvSpPr>
         <p:spPr>
           <a:xfrm>
-            <a:off x="658368" y="384048"/>
-            <a:ext cx="10789920" cy="320040"/>
+            <a:off x="5283403" y="2148840"/>
+            <a:ext cx="438912" cy="420624"/>
+          </a:xfrm>
+          <a:prstGeom prst="rect">
+            <a:avLst/>
+          </a:prstGeom>
+          <a:noFill/>
+        </p:spPr>
+        <p:txBody>
+          <a:bodyPr wrap="square" anchor="ctr">
+            <a:spAutoFit/>
+          </a:bodyPr>
+          <a:lstStyle/>
+          <a:p>
+            <a:pPr algn="ctr"/>
+            <a:r>
+              <a:rPr sz="1400" b="1">
+                <a:solidFill>
+                  <a:srgbClr val="FFFFFF"/>
+                </a:solidFill>
+                <a:latin typeface="Arial"/>
+              </a:rPr>
+              <a:t>3</a:t>
+            </a:r>
+          </a:p>
+        </p:txBody>
+      </p:sp>
+      <p:sp>
+        <p:nvSpPr>
+          <p:cNvPr id="24" name="TextBox 23"/>
+          <p:cNvSpPr txBox="1"/>
+          <p:nvPr/>
+        </p:nvSpPr>
+        <p:spPr>
+          <a:xfrm>
+            <a:off x="5886907" y="2103120"/>
+            <a:ext cx="1009497" cy="329184"/>
           </a:xfrm>
           <a:prstGeom prst="rect">
             <a:avLst/>
@@ -5775,27 +6336,27 @@
           <a:p>
             <a:pPr algn="l"/>
             <a:r>
-              <a:rPr sz="1100" b="1">
+              <a:rPr sz="1400" b="1">
                 <a:solidFill>
                   <a:srgbClr val="7C3AED"/>
                 </a:solidFill>
                 <a:latin typeface="Arial"/>
               </a:rPr>
-              <a:t>ACTIVITY 06 · EXAMPLE</a:t>
-            </a:r>
-          </a:p>
-        </p:txBody>
-      </p:sp>
-      <p:sp>
-        <p:nvSpPr>
-          <p:cNvPr id="5" name="TextBox 4"/>
+              <a:t>Gemini Notebook</a:t>
+            </a:r>
+          </a:p>
+        </p:txBody>
+      </p:sp>
+      <p:sp>
+        <p:nvSpPr>
+          <p:cNvPr id="25" name="TextBox 24"/>
           <p:cNvSpPr txBox="1"/>
           <p:nvPr/>
         </p:nvSpPr>
         <p:spPr>
           <a:xfrm>
-            <a:off x="658368" y="749808"/>
-            <a:ext cx="10789920" cy="658368"/>
+            <a:off x="5886907" y="2487168"/>
+            <a:ext cx="1009497" cy="2852928"/>
           </a:xfrm>
           <a:prstGeom prst="rect">
             <a:avLst/>
@@ -5810,33 +6371,33 @@
           <a:p>
             <a:pPr algn="l"/>
             <a:r>
-              <a:rPr sz="2700" b="1">
+              <a:rPr sz="1150" b="0">
                 <a:solidFill>
                   <a:srgbClr val="161B26"/>
                 </a:solidFill>
                 <a:latin typeface="Arial"/>
               </a:rPr>
-              <a:t>Worked Output</a:t>
-            </a:r>
-          </a:p>
-        </p:txBody>
-      </p:sp>
-      <p:sp>
-        <p:nvSpPr>
-          <p:cNvPr id="6" name="Rectangle 5"/>
+              <a:t>Generate an infographic and Presenter Slides; download PowerPoint where available, with PDF fallback.</a:t>
+            </a:r>
+          </a:p>
+        </p:txBody>
+      </p:sp>
+      <p:sp>
+        <p:nvSpPr>
+          <p:cNvPr id="26" name="Rounded Rectangle 25"/>
           <p:cNvSpPr/>
           <p:nvPr/>
         </p:nvSpPr>
         <p:spPr>
           <a:xfrm>
-            <a:off x="658368" y="1444752"/>
-            <a:ext cx="10881360" cy="18288"/>
-          </a:xfrm>
-          <a:prstGeom prst="rect">
-            <a:avLst/>
-          </a:prstGeom>
-          <a:solidFill>
-            <a:srgbClr val="E2E8F0"/>
+            <a:off x="7280452" y="1920240"/>
+            <a:ext cx="1997049" cy="3566160"/>
+          </a:xfrm>
+          <a:prstGeom prst="roundRect">
+            <a:avLst/>
+          </a:prstGeom>
+          <a:solidFill>
+            <a:srgbClr val="F5F8FC"/>
           </a:solidFill>
           <a:ln>
             <a:solidFill>
@@ -5868,14 +6429,139 @@
       </p:sp>
       <p:sp>
         <p:nvSpPr>
-          <p:cNvPr id="7" name="TextBox 6"/>
+          <p:cNvPr id="27" name="Rectangle 26"/>
+          <p:cNvSpPr/>
+          <p:nvPr/>
+        </p:nvSpPr>
+        <p:spPr>
+          <a:xfrm>
+            <a:off x="7280452" y="1920240"/>
+            <a:ext cx="73152" cy="3566160"/>
+          </a:xfrm>
+          <a:prstGeom prst="rect">
+            <a:avLst/>
+          </a:prstGeom>
+          <a:solidFill>
+            <a:srgbClr val="F59E0B"/>
+          </a:solidFill>
+          <a:ln>
+            <a:solidFill>
+              <a:srgbClr val="F59E0B"/>
+            </a:solidFill>
+          </a:ln>
+        </p:spPr>
+        <p:style>
+          <a:lnRef idx="1">
+            <a:schemeClr val="accent1"/>
+          </a:lnRef>
+          <a:fillRef idx="3">
+            <a:schemeClr val="accent1"/>
+          </a:fillRef>
+          <a:effectRef idx="2">
+            <a:schemeClr val="accent1"/>
+          </a:effectRef>
+          <a:fontRef idx="minor">
+            <a:schemeClr val="lt1"/>
+          </a:fontRef>
+        </p:style>
+        <p:txBody>
+          <a:bodyPr rtlCol="0" anchor="ctr"/>
+          <a:lstStyle/>
+          <a:p>
+            <a:pPr algn="ctr"/>
+          </a:p>
+        </p:txBody>
+      </p:sp>
+      <p:sp>
+        <p:nvSpPr>
+          <p:cNvPr id="28" name="Rounded Rectangle 27"/>
+          <p:cNvSpPr/>
+          <p:nvPr/>
+        </p:nvSpPr>
+        <p:spPr>
+          <a:xfrm>
+            <a:off x="7481620" y="2139696"/>
+            <a:ext cx="438912" cy="438912"/>
+          </a:xfrm>
+          <a:prstGeom prst="roundRect">
+            <a:avLst/>
+          </a:prstGeom>
+          <a:solidFill>
+            <a:srgbClr val="F59E0B"/>
+          </a:solidFill>
+          <a:ln>
+            <a:solidFill>
+              <a:srgbClr val="F59E0B"/>
+            </a:solidFill>
+          </a:ln>
+        </p:spPr>
+        <p:style>
+          <a:lnRef idx="1">
+            <a:schemeClr val="accent1"/>
+          </a:lnRef>
+          <a:fillRef idx="3">
+            <a:schemeClr val="accent1"/>
+          </a:fillRef>
+          <a:effectRef idx="2">
+            <a:schemeClr val="accent1"/>
+          </a:effectRef>
+          <a:fontRef idx="minor">
+            <a:schemeClr val="lt1"/>
+          </a:fontRef>
+        </p:style>
+        <p:txBody>
+          <a:bodyPr rtlCol="0" anchor="ctr"/>
+          <a:lstStyle/>
+          <a:p>
+            <a:pPr algn="ctr"/>
+          </a:p>
+        </p:txBody>
+      </p:sp>
+      <p:sp>
+        <p:nvSpPr>
+          <p:cNvPr id="29" name="TextBox 28"/>
           <p:cNvSpPr txBox="1"/>
           <p:nvPr/>
         </p:nvSpPr>
         <p:spPr>
           <a:xfrm>
-            <a:off x="658368" y="6473952"/>
-            <a:ext cx="9875520" cy="201168"/>
+            <a:off x="7481620" y="2148840"/>
+            <a:ext cx="438912" cy="420624"/>
+          </a:xfrm>
+          <a:prstGeom prst="rect">
+            <a:avLst/>
+          </a:prstGeom>
+          <a:noFill/>
+        </p:spPr>
+        <p:txBody>
+          <a:bodyPr wrap="square" anchor="ctr">
+            <a:spAutoFit/>
+          </a:bodyPr>
+          <a:lstStyle/>
+          <a:p>
+            <a:pPr algn="ctr"/>
+            <a:r>
+              <a:rPr sz="1400" b="1">
+                <a:solidFill>
+                  <a:srgbClr val="FFFFFF"/>
+                </a:solidFill>
+                <a:latin typeface="Arial"/>
+              </a:rPr>
+              <a:t>4</a:t>
+            </a:r>
+          </a:p>
+        </p:txBody>
+      </p:sp>
+      <p:sp>
+        <p:nvSpPr>
+          <p:cNvPr id="30" name="TextBox 29"/>
+          <p:cNvSpPr txBox="1"/>
+          <p:nvPr/>
+        </p:nvSpPr>
+        <p:spPr>
+          <a:xfrm>
+            <a:off x="8085124" y="2103120"/>
+            <a:ext cx="1009497" cy="329184"/>
           </a:xfrm>
           <a:prstGeom prst="rect">
             <a:avLst/>
@@ -5890,27 +6576,62 @@
           <a:p>
             <a:pPr algn="l"/>
             <a:r>
-              <a:rPr sz="800" b="0">
-                <a:solidFill>
-                  <a:srgbClr val="5B6372"/>
+              <a:rPr sz="1400" b="1">
+                <a:solidFill>
+                  <a:srgbClr val="F59E0B"/>
                 </a:solidFill>
                 <a:latin typeface="Arial"/>
               </a:rPr>
-              <a:t>TGS-2024048310 · ACTIVITY PRACTICE · Tertiary Infotech Academy Pte Ltd</a:t>
-            </a:r>
-          </a:p>
-        </p:txBody>
-      </p:sp>
-      <p:sp>
-        <p:nvSpPr>
-          <p:cNvPr id="8" name="Rounded Rectangle 7"/>
+              <a:t>Compare</a:t>
+            </a:r>
+          </a:p>
+        </p:txBody>
+      </p:sp>
+      <p:sp>
+        <p:nvSpPr>
+          <p:cNvPr id="31" name="TextBox 30"/>
+          <p:cNvSpPr txBox="1"/>
+          <p:nvPr/>
+        </p:nvSpPr>
+        <p:spPr>
+          <a:xfrm>
+            <a:off x="8085124" y="2487168"/>
+            <a:ext cx="1009497" cy="2852928"/>
+          </a:xfrm>
+          <a:prstGeom prst="rect">
+            <a:avLst/>
+          </a:prstGeom>
+          <a:noFill/>
+        </p:spPr>
+        <p:txBody>
+          <a:bodyPr wrap="square" anchor="t">
+            <a:spAutoFit/>
+          </a:bodyPr>
+          <a:lstStyle/>
+          <a:p>
+            <a:pPr algn="l"/>
+            <a:r>
+              <a:rPr sz="1150" b="0">
+                <a:solidFill>
+                  <a:srgbClr val="161B26"/>
+                </a:solidFill>
+                <a:latin typeface="Arial"/>
+              </a:rPr>
+              <a:t>Score accuracy, citations, hierarchy, editability, brand, access and speed.</a:t>
+            </a:r>
+          </a:p>
+        </p:txBody>
+      </p:sp>
+      <p:sp>
+        <p:nvSpPr>
+          <p:cNvPr id="32" name="Rounded Rectangle 31"/>
           <p:cNvSpPr/>
           <p:nvPr/>
         </p:nvSpPr>
         <p:spPr>
           <a:xfrm>
-            <a:off x="731520" y="1783080"/>
-            <a:ext cx="3401568" cy="1719072"/>
+            <a:off x="9478670" y="1920240"/>
+            <a:ext cx="1997049" cy="3566160"/>
           </a:xfrm>
           <a:prstGeom prst="roundRect">
             <a:avLst/>
@@ -5948,14 +6669,14 @@
       </p:sp>
       <p:sp>
         <p:nvSpPr>
-          <p:cNvPr id="9" name="Rectangle 8"/>
+          <p:cNvPr id="33" name="Rectangle 32"/>
           <p:cNvSpPr/>
           <p:nvPr/>
         </p:nvSpPr>
         <p:spPr>
           <a:xfrm>
-            <a:off x="731520" y="1783080"/>
-            <a:ext cx="73152" cy="1719072"/>
+            <a:off x="9478670" y="1920240"/>
+            <a:ext cx="73152" cy="3566160"/>
           </a:xfrm>
           <a:prstGeom prst="rect">
             <a:avLst/>
@@ -5993,13 +6714,13 @@
       </p:sp>
       <p:sp>
         <p:nvSpPr>
-          <p:cNvPr id="10" name="Rounded Rectangle 9"/>
+          <p:cNvPr id="34" name="Rounded Rectangle 33"/>
           <p:cNvSpPr/>
           <p:nvPr/>
         </p:nvSpPr>
         <p:spPr>
           <a:xfrm>
-            <a:off x="932688" y="2002536"/>
+            <a:off x="9679838" y="2139696"/>
             <a:ext cx="438912" cy="438912"/>
           </a:xfrm>
           <a:prstGeom prst="roundRect">
@@ -6038,13 +6759,13 @@
       </p:sp>
       <p:sp>
         <p:nvSpPr>
-          <p:cNvPr id="11" name="TextBox 10"/>
+          <p:cNvPr id="35" name="TextBox 34"/>
           <p:cNvSpPr txBox="1"/>
           <p:nvPr/>
         </p:nvSpPr>
         <p:spPr>
           <a:xfrm>
-            <a:off x="932688" y="2011680"/>
+            <a:off x="9679838" y="2148840"/>
             <a:ext cx="438912" cy="420624"/>
           </a:xfrm>
           <a:prstGeom prst="rect">
@@ -6066,21 +6787,21 @@
                 </a:solidFill>
                 <a:latin typeface="Arial"/>
               </a:rPr>
-              <a:t>1</a:t>
-            </a:r>
-          </a:p>
-        </p:txBody>
-      </p:sp>
-      <p:sp>
-        <p:nvSpPr>
-          <p:cNvPr id="12" name="TextBox 11"/>
+              <a:t>5</a:t>
+            </a:r>
+          </a:p>
+        </p:txBody>
+      </p:sp>
+      <p:sp>
+        <p:nvSpPr>
+          <p:cNvPr id="36" name="TextBox 35"/>
           <p:cNvSpPr txBox="1"/>
           <p:nvPr/>
         </p:nvSpPr>
         <p:spPr>
           <a:xfrm>
-            <a:off x="1536192" y="1965960"/>
-            <a:ext cx="2414016" cy="329184"/>
+            <a:off x="10283342" y="2103120"/>
+            <a:ext cx="1009497" cy="329184"/>
           </a:xfrm>
           <a:prstGeom prst="rect">
             <a:avLst/>
@@ -6101,21 +6822,21 @@
                 </a:solidFill>
                 <a:latin typeface="Arial"/>
               </a:rPr>
-              <a:t>Truth</a:t>
-            </a:r>
-          </a:p>
-        </p:txBody>
-      </p:sp>
-      <p:sp>
-        <p:nvSpPr>
-          <p:cNvPr id="13" name="TextBox 12"/>
+              <a:t>Refine</a:t>
+            </a:r>
+          </a:p>
+        </p:txBody>
+      </p:sp>
+      <p:sp>
+        <p:nvSpPr>
+          <p:cNvPr id="37" name="TextBox 36"/>
           <p:cNvSpPr txBox="1"/>
           <p:nvPr/>
         </p:nvSpPr>
         <p:spPr>
           <a:xfrm>
-            <a:off x="1536192" y="2350008"/>
-            <a:ext cx="2414016" cy="1005839"/>
+            <a:off x="10283342" y="2487168"/>
+            <a:ext cx="1009497" cy="2852928"/>
           </a:xfrm>
           <a:prstGeom prst="rect">
             <a:avLst/>
@@ -6136,1207 +6857,7 @@
                 </a:solidFill>
                 <a:latin typeface="Arial"/>
               </a:rPr>
-              <a:t>Every fact and number matches the approved source.</a:t>
-            </a:r>
-          </a:p>
-        </p:txBody>
-      </p:sp>
-      <p:sp>
-        <p:nvSpPr>
-          <p:cNvPr id="14" name="Rounded Rectangle 13"/>
-          <p:cNvSpPr/>
-          <p:nvPr/>
-        </p:nvSpPr>
-        <p:spPr>
-          <a:xfrm>
-            <a:off x="4315968" y="1783080"/>
-            <a:ext cx="3401568" cy="1719072"/>
-          </a:xfrm>
-          <a:prstGeom prst="roundRect">
-            <a:avLst/>
-          </a:prstGeom>
-          <a:solidFill>
-            <a:srgbClr val="F5F8FC"/>
-          </a:solidFill>
-          <a:ln>
-            <a:solidFill>
-              <a:srgbClr val="E2E8F0"/>
-            </a:solidFill>
-          </a:ln>
-        </p:spPr>
-        <p:style>
-          <a:lnRef idx="1">
-            <a:schemeClr val="accent1"/>
-          </a:lnRef>
-          <a:fillRef idx="3">
-            <a:schemeClr val="accent1"/>
-          </a:fillRef>
-          <a:effectRef idx="2">
-            <a:schemeClr val="accent1"/>
-          </a:effectRef>
-          <a:fontRef idx="minor">
-            <a:schemeClr val="lt1"/>
-          </a:fontRef>
-        </p:style>
-        <p:txBody>
-          <a:bodyPr rtlCol="0" anchor="ctr"/>
-          <a:lstStyle/>
-          <a:p>
-            <a:pPr algn="ctr"/>
-          </a:p>
-        </p:txBody>
-      </p:sp>
-      <p:sp>
-        <p:nvSpPr>
-          <p:cNvPr id="15" name="Rectangle 14"/>
-          <p:cNvSpPr/>
-          <p:nvPr/>
-        </p:nvSpPr>
-        <p:spPr>
-          <a:xfrm>
-            <a:off x="4315968" y="1783080"/>
-            <a:ext cx="73152" cy="1719072"/>
-          </a:xfrm>
-          <a:prstGeom prst="rect">
-            <a:avLst/>
-          </a:prstGeom>
-          <a:solidFill>
-            <a:srgbClr val="10B981"/>
-          </a:solidFill>
-          <a:ln>
-            <a:solidFill>
-              <a:srgbClr val="10B981"/>
-            </a:solidFill>
-          </a:ln>
-        </p:spPr>
-        <p:style>
-          <a:lnRef idx="1">
-            <a:schemeClr val="accent1"/>
-          </a:lnRef>
-          <a:fillRef idx="3">
-            <a:schemeClr val="accent1"/>
-          </a:fillRef>
-          <a:effectRef idx="2">
-            <a:schemeClr val="accent1"/>
-          </a:effectRef>
-          <a:fontRef idx="minor">
-            <a:schemeClr val="lt1"/>
-          </a:fontRef>
-        </p:style>
-        <p:txBody>
-          <a:bodyPr rtlCol="0" anchor="ctr"/>
-          <a:lstStyle/>
-          <a:p>
-            <a:pPr algn="ctr"/>
-          </a:p>
-        </p:txBody>
-      </p:sp>
-      <p:sp>
-        <p:nvSpPr>
-          <p:cNvPr id="16" name="Rounded Rectangle 15"/>
-          <p:cNvSpPr/>
-          <p:nvPr/>
-        </p:nvSpPr>
-        <p:spPr>
-          <a:xfrm>
-            <a:off x="4517136" y="2002536"/>
-            <a:ext cx="438912" cy="438912"/>
-          </a:xfrm>
-          <a:prstGeom prst="roundRect">
-            <a:avLst/>
-          </a:prstGeom>
-          <a:solidFill>
-            <a:srgbClr val="10B981"/>
-          </a:solidFill>
-          <a:ln>
-            <a:solidFill>
-              <a:srgbClr val="10B981"/>
-            </a:solidFill>
-          </a:ln>
-        </p:spPr>
-        <p:style>
-          <a:lnRef idx="1">
-            <a:schemeClr val="accent1"/>
-          </a:lnRef>
-          <a:fillRef idx="3">
-            <a:schemeClr val="accent1"/>
-          </a:fillRef>
-          <a:effectRef idx="2">
-            <a:schemeClr val="accent1"/>
-          </a:effectRef>
-          <a:fontRef idx="minor">
-            <a:schemeClr val="lt1"/>
-          </a:fontRef>
-        </p:style>
-        <p:txBody>
-          <a:bodyPr rtlCol="0" anchor="ctr"/>
-          <a:lstStyle/>
-          <a:p>
-            <a:pPr algn="ctr"/>
-          </a:p>
-        </p:txBody>
-      </p:sp>
-      <p:sp>
-        <p:nvSpPr>
-          <p:cNvPr id="17" name="TextBox 16"/>
-          <p:cNvSpPr txBox="1"/>
-          <p:nvPr/>
-        </p:nvSpPr>
-        <p:spPr>
-          <a:xfrm>
-            <a:off x="4517136" y="2011680"/>
-            <a:ext cx="438912" cy="420624"/>
-          </a:xfrm>
-          <a:prstGeom prst="rect">
-            <a:avLst/>
-          </a:prstGeom>
-          <a:noFill/>
-        </p:spPr>
-        <p:txBody>
-          <a:bodyPr wrap="square" anchor="ctr">
-            <a:spAutoFit/>
-          </a:bodyPr>
-          <a:lstStyle/>
-          <a:p>
-            <a:pPr algn="ctr"/>
-            <a:r>
-              <a:rPr sz="1400" b="1">
-                <a:solidFill>
-                  <a:srgbClr val="FFFFFF"/>
-                </a:solidFill>
-                <a:latin typeface="Arial"/>
-              </a:rPr>
-              <a:t>2</a:t>
-            </a:r>
-          </a:p>
-        </p:txBody>
-      </p:sp>
-      <p:sp>
-        <p:nvSpPr>
-          <p:cNvPr id="18" name="TextBox 17"/>
-          <p:cNvSpPr txBox="1"/>
-          <p:nvPr/>
-        </p:nvSpPr>
-        <p:spPr>
-          <a:xfrm>
-            <a:off x="5120640" y="1965960"/>
-            <a:ext cx="2414016" cy="329184"/>
-          </a:xfrm>
-          <a:prstGeom prst="rect">
-            <a:avLst/>
-          </a:prstGeom>
-          <a:noFill/>
-        </p:spPr>
-        <p:txBody>
-          <a:bodyPr wrap="square" anchor="t">
-            <a:spAutoFit/>
-          </a:bodyPr>
-          <a:lstStyle/>
-          <a:p>
-            <a:pPr algn="l"/>
-            <a:r>
-              <a:rPr sz="1400" b="1">
-                <a:solidFill>
-                  <a:srgbClr val="10B981"/>
-                </a:solidFill>
-                <a:latin typeface="Arial"/>
-              </a:rPr>
-              <a:t>Privacy</a:t>
-            </a:r>
-          </a:p>
-        </p:txBody>
-      </p:sp>
-      <p:sp>
-        <p:nvSpPr>
-          <p:cNvPr id="19" name="TextBox 18"/>
-          <p:cNvSpPr txBox="1"/>
-          <p:nvPr/>
-        </p:nvSpPr>
-        <p:spPr>
-          <a:xfrm>
-            <a:off x="5120640" y="2350008"/>
-            <a:ext cx="2414016" cy="1005839"/>
-          </a:xfrm>
-          <a:prstGeom prst="rect">
-            <a:avLst/>
-          </a:prstGeom>
-          <a:noFill/>
-        </p:spPr>
-        <p:txBody>
-          <a:bodyPr wrap="square" anchor="t">
-            <a:spAutoFit/>
-          </a:bodyPr>
-          <a:lstStyle/>
-          <a:p>
-            <a:pPr algn="l"/>
-            <a:r>
-              <a:rPr sz="1150" b="0">
-                <a:solidFill>
-                  <a:srgbClr val="161B26"/>
-                </a:solidFill>
-                <a:latin typeface="Arial"/>
-              </a:rPr>
-              <a:t>No personal or restricted data enters an unapproved service.</a:t>
-            </a:r>
-          </a:p>
-        </p:txBody>
-      </p:sp>
-      <p:sp>
-        <p:nvSpPr>
-          <p:cNvPr id="20" name="Rounded Rectangle 19"/>
-          <p:cNvSpPr/>
-          <p:nvPr/>
-        </p:nvSpPr>
-        <p:spPr>
-          <a:xfrm>
-            <a:off x="7900416" y="1783080"/>
-            <a:ext cx="3401568" cy="1719072"/>
-          </a:xfrm>
-          <a:prstGeom prst="roundRect">
-            <a:avLst/>
-          </a:prstGeom>
-          <a:solidFill>
-            <a:srgbClr val="F5F8FC"/>
-          </a:solidFill>
-          <a:ln>
-            <a:solidFill>
-              <a:srgbClr val="E2E8F0"/>
-            </a:solidFill>
-          </a:ln>
-        </p:spPr>
-        <p:style>
-          <a:lnRef idx="1">
-            <a:schemeClr val="accent1"/>
-          </a:lnRef>
-          <a:fillRef idx="3">
-            <a:schemeClr val="accent1"/>
-          </a:fillRef>
-          <a:effectRef idx="2">
-            <a:schemeClr val="accent1"/>
-          </a:effectRef>
-          <a:fontRef idx="minor">
-            <a:schemeClr val="lt1"/>
-          </a:fontRef>
-        </p:style>
-        <p:txBody>
-          <a:bodyPr rtlCol="0" anchor="ctr"/>
-          <a:lstStyle/>
-          <a:p>
-            <a:pPr algn="ctr"/>
-          </a:p>
-        </p:txBody>
-      </p:sp>
-      <p:sp>
-        <p:nvSpPr>
-          <p:cNvPr id="21" name="Rectangle 20"/>
-          <p:cNvSpPr/>
-          <p:nvPr/>
-        </p:nvSpPr>
-        <p:spPr>
-          <a:xfrm>
-            <a:off x="7900416" y="1783080"/>
-            <a:ext cx="73152" cy="1719072"/>
-          </a:xfrm>
-          <a:prstGeom prst="rect">
-            <a:avLst/>
-          </a:prstGeom>
-          <a:solidFill>
-            <a:srgbClr val="7C3AED"/>
-          </a:solidFill>
-          <a:ln>
-            <a:solidFill>
-              <a:srgbClr val="7C3AED"/>
-            </a:solidFill>
-          </a:ln>
-        </p:spPr>
-        <p:style>
-          <a:lnRef idx="1">
-            <a:schemeClr val="accent1"/>
-          </a:lnRef>
-          <a:fillRef idx="3">
-            <a:schemeClr val="accent1"/>
-          </a:fillRef>
-          <a:effectRef idx="2">
-            <a:schemeClr val="accent1"/>
-          </a:effectRef>
-          <a:fontRef idx="minor">
-            <a:schemeClr val="lt1"/>
-          </a:fontRef>
-        </p:style>
-        <p:txBody>
-          <a:bodyPr rtlCol="0" anchor="ctr"/>
-          <a:lstStyle/>
-          <a:p>
-            <a:pPr algn="ctr"/>
-          </a:p>
-        </p:txBody>
-      </p:sp>
-      <p:sp>
-        <p:nvSpPr>
-          <p:cNvPr id="22" name="Rounded Rectangle 21"/>
-          <p:cNvSpPr/>
-          <p:nvPr/>
-        </p:nvSpPr>
-        <p:spPr>
-          <a:xfrm>
-            <a:off x="8101584" y="2002536"/>
-            <a:ext cx="438912" cy="438912"/>
-          </a:xfrm>
-          <a:prstGeom prst="roundRect">
-            <a:avLst/>
-          </a:prstGeom>
-          <a:solidFill>
-            <a:srgbClr val="7C3AED"/>
-          </a:solidFill>
-          <a:ln>
-            <a:solidFill>
-              <a:srgbClr val="7C3AED"/>
-            </a:solidFill>
-          </a:ln>
-        </p:spPr>
-        <p:style>
-          <a:lnRef idx="1">
-            <a:schemeClr val="accent1"/>
-          </a:lnRef>
-          <a:fillRef idx="3">
-            <a:schemeClr val="accent1"/>
-          </a:fillRef>
-          <a:effectRef idx="2">
-            <a:schemeClr val="accent1"/>
-          </a:effectRef>
-          <a:fontRef idx="minor">
-            <a:schemeClr val="lt1"/>
-          </a:fontRef>
-        </p:style>
-        <p:txBody>
-          <a:bodyPr rtlCol="0" anchor="ctr"/>
-          <a:lstStyle/>
-          <a:p>
-            <a:pPr algn="ctr"/>
-          </a:p>
-        </p:txBody>
-      </p:sp>
-      <p:sp>
-        <p:nvSpPr>
-          <p:cNvPr id="23" name="TextBox 22"/>
-          <p:cNvSpPr txBox="1"/>
-          <p:nvPr/>
-        </p:nvSpPr>
-        <p:spPr>
-          <a:xfrm>
-            <a:off x="8101584" y="2011680"/>
-            <a:ext cx="438912" cy="420624"/>
-          </a:xfrm>
-          <a:prstGeom prst="rect">
-            <a:avLst/>
-          </a:prstGeom>
-          <a:noFill/>
-        </p:spPr>
-        <p:txBody>
-          <a:bodyPr wrap="square" anchor="ctr">
-            <a:spAutoFit/>
-          </a:bodyPr>
-          <a:lstStyle/>
-          <a:p>
-            <a:pPr algn="ctr"/>
-            <a:r>
-              <a:rPr sz="1400" b="1">
-                <a:solidFill>
-                  <a:srgbClr val="FFFFFF"/>
-                </a:solidFill>
-                <a:latin typeface="Arial"/>
-              </a:rPr>
-              <a:t>3</a:t>
-            </a:r>
-          </a:p>
-        </p:txBody>
-      </p:sp>
-      <p:sp>
-        <p:nvSpPr>
-          <p:cNvPr id="24" name="TextBox 23"/>
-          <p:cNvSpPr txBox="1"/>
-          <p:nvPr/>
-        </p:nvSpPr>
-        <p:spPr>
-          <a:xfrm>
-            <a:off x="8705088" y="1965960"/>
-            <a:ext cx="2414016" cy="329184"/>
-          </a:xfrm>
-          <a:prstGeom prst="rect">
-            <a:avLst/>
-          </a:prstGeom>
-          <a:noFill/>
-        </p:spPr>
-        <p:txBody>
-          <a:bodyPr wrap="square" anchor="t">
-            <a:spAutoFit/>
-          </a:bodyPr>
-          <a:lstStyle/>
-          <a:p>
-            <a:pPr algn="l"/>
-            <a:r>
-              <a:rPr sz="1400" b="1">
-                <a:solidFill>
-                  <a:srgbClr val="7C3AED"/>
-                </a:solidFill>
-                <a:latin typeface="Arial"/>
-              </a:rPr>
-              <a:t>Rights</a:t>
-            </a:r>
-          </a:p>
-        </p:txBody>
-      </p:sp>
-      <p:sp>
-        <p:nvSpPr>
-          <p:cNvPr id="25" name="TextBox 24"/>
-          <p:cNvSpPr txBox="1"/>
-          <p:nvPr/>
-        </p:nvSpPr>
-        <p:spPr>
-          <a:xfrm>
-            <a:off x="8705088" y="2350008"/>
-            <a:ext cx="2414016" cy="1005839"/>
-          </a:xfrm>
-          <a:prstGeom prst="rect">
-            <a:avLst/>
-          </a:prstGeom>
-          <a:noFill/>
-        </p:spPr>
-        <p:txBody>
-          <a:bodyPr wrap="square" anchor="t">
-            <a:spAutoFit/>
-          </a:bodyPr>
-          <a:lstStyle/>
-          <a:p>
-            <a:pPr algn="l"/>
-            <a:r>
-              <a:rPr sz="1150" b="0">
-                <a:solidFill>
-                  <a:srgbClr val="161B26"/>
-                </a:solidFill>
-                <a:latin typeface="Arial"/>
-              </a:rPr>
-              <a:t>Images, icons, fonts and templates are permitted.</a:t>
-            </a:r>
-          </a:p>
-        </p:txBody>
-      </p:sp>
-      <p:sp>
-        <p:nvSpPr>
-          <p:cNvPr id="26" name="Rounded Rectangle 25"/>
-          <p:cNvSpPr/>
-          <p:nvPr/>
-        </p:nvSpPr>
-        <p:spPr>
-          <a:xfrm>
-            <a:off x="731520" y="3776472"/>
-            <a:ext cx="3401568" cy="1719072"/>
-          </a:xfrm>
-          <a:prstGeom prst="roundRect">
-            <a:avLst/>
-          </a:prstGeom>
-          <a:solidFill>
-            <a:srgbClr val="F5F8FC"/>
-          </a:solidFill>
-          <a:ln>
-            <a:solidFill>
-              <a:srgbClr val="E2E8F0"/>
-            </a:solidFill>
-          </a:ln>
-        </p:spPr>
-        <p:style>
-          <a:lnRef idx="1">
-            <a:schemeClr val="accent1"/>
-          </a:lnRef>
-          <a:fillRef idx="3">
-            <a:schemeClr val="accent1"/>
-          </a:fillRef>
-          <a:effectRef idx="2">
-            <a:schemeClr val="accent1"/>
-          </a:effectRef>
-          <a:fontRef idx="minor">
-            <a:schemeClr val="lt1"/>
-          </a:fontRef>
-        </p:style>
-        <p:txBody>
-          <a:bodyPr rtlCol="0" anchor="ctr"/>
-          <a:lstStyle/>
-          <a:p>
-            <a:pPr algn="ctr"/>
-          </a:p>
-        </p:txBody>
-      </p:sp>
-      <p:sp>
-        <p:nvSpPr>
-          <p:cNvPr id="27" name="Rectangle 26"/>
-          <p:cNvSpPr/>
-          <p:nvPr/>
-        </p:nvSpPr>
-        <p:spPr>
-          <a:xfrm>
-            <a:off x="731520" y="3776472"/>
-            <a:ext cx="73152" cy="1719072"/>
-          </a:xfrm>
-          <a:prstGeom prst="rect">
-            <a:avLst/>
-          </a:prstGeom>
-          <a:solidFill>
-            <a:srgbClr val="F59E0B"/>
-          </a:solidFill>
-          <a:ln>
-            <a:solidFill>
-              <a:srgbClr val="F59E0B"/>
-            </a:solidFill>
-          </a:ln>
-        </p:spPr>
-        <p:style>
-          <a:lnRef idx="1">
-            <a:schemeClr val="accent1"/>
-          </a:lnRef>
-          <a:fillRef idx="3">
-            <a:schemeClr val="accent1"/>
-          </a:fillRef>
-          <a:effectRef idx="2">
-            <a:schemeClr val="accent1"/>
-          </a:effectRef>
-          <a:fontRef idx="minor">
-            <a:schemeClr val="lt1"/>
-          </a:fontRef>
-        </p:style>
-        <p:txBody>
-          <a:bodyPr rtlCol="0" anchor="ctr"/>
-          <a:lstStyle/>
-          <a:p>
-            <a:pPr algn="ctr"/>
-          </a:p>
-        </p:txBody>
-      </p:sp>
-      <p:sp>
-        <p:nvSpPr>
-          <p:cNvPr id="28" name="Rounded Rectangle 27"/>
-          <p:cNvSpPr/>
-          <p:nvPr/>
-        </p:nvSpPr>
-        <p:spPr>
-          <a:xfrm>
-            <a:off x="932688" y="3995928"/>
-            <a:ext cx="438912" cy="438912"/>
-          </a:xfrm>
-          <a:prstGeom prst="roundRect">
-            <a:avLst/>
-          </a:prstGeom>
-          <a:solidFill>
-            <a:srgbClr val="F59E0B"/>
-          </a:solidFill>
-          <a:ln>
-            <a:solidFill>
-              <a:srgbClr val="F59E0B"/>
-            </a:solidFill>
-          </a:ln>
-        </p:spPr>
-        <p:style>
-          <a:lnRef idx="1">
-            <a:schemeClr val="accent1"/>
-          </a:lnRef>
-          <a:fillRef idx="3">
-            <a:schemeClr val="accent1"/>
-          </a:fillRef>
-          <a:effectRef idx="2">
-            <a:schemeClr val="accent1"/>
-          </a:effectRef>
-          <a:fontRef idx="minor">
-            <a:schemeClr val="lt1"/>
-          </a:fontRef>
-        </p:style>
-        <p:txBody>
-          <a:bodyPr rtlCol="0" anchor="ctr"/>
-          <a:lstStyle/>
-          <a:p>
-            <a:pPr algn="ctr"/>
-          </a:p>
-        </p:txBody>
-      </p:sp>
-      <p:sp>
-        <p:nvSpPr>
-          <p:cNvPr id="29" name="TextBox 28"/>
-          <p:cNvSpPr txBox="1"/>
-          <p:nvPr/>
-        </p:nvSpPr>
-        <p:spPr>
-          <a:xfrm>
-            <a:off x="932688" y="4005072"/>
-            <a:ext cx="438912" cy="420624"/>
-          </a:xfrm>
-          <a:prstGeom prst="rect">
-            <a:avLst/>
-          </a:prstGeom>
-          <a:noFill/>
-        </p:spPr>
-        <p:txBody>
-          <a:bodyPr wrap="square" anchor="ctr">
-            <a:spAutoFit/>
-          </a:bodyPr>
-          <a:lstStyle/>
-          <a:p>
-            <a:pPr algn="ctr"/>
-            <a:r>
-              <a:rPr sz="1400" b="1">
-                <a:solidFill>
-                  <a:srgbClr val="FFFFFF"/>
-                </a:solidFill>
-                <a:latin typeface="Arial"/>
-              </a:rPr>
-              <a:t>4</a:t>
-            </a:r>
-          </a:p>
-        </p:txBody>
-      </p:sp>
-      <p:sp>
-        <p:nvSpPr>
-          <p:cNvPr id="30" name="TextBox 29"/>
-          <p:cNvSpPr txBox="1"/>
-          <p:nvPr/>
-        </p:nvSpPr>
-        <p:spPr>
-          <a:xfrm>
-            <a:off x="1536192" y="3959352"/>
-            <a:ext cx="2414016" cy="329184"/>
-          </a:xfrm>
-          <a:prstGeom prst="rect">
-            <a:avLst/>
-          </a:prstGeom>
-          <a:noFill/>
-        </p:spPr>
-        <p:txBody>
-          <a:bodyPr wrap="square" anchor="t">
-            <a:spAutoFit/>
-          </a:bodyPr>
-          <a:lstStyle/>
-          <a:p>
-            <a:pPr algn="l"/>
-            <a:r>
-              <a:rPr sz="1400" b="1">
-                <a:solidFill>
-                  <a:srgbClr val="F59E0B"/>
-                </a:solidFill>
-                <a:latin typeface="Arial"/>
-              </a:rPr>
-              <a:t>Access</a:t>
-            </a:r>
-          </a:p>
-        </p:txBody>
-      </p:sp>
-      <p:sp>
-        <p:nvSpPr>
-          <p:cNvPr id="31" name="TextBox 30"/>
-          <p:cNvSpPr txBox="1"/>
-          <p:nvPr/>
-        </p:nvSpPr>
-        <p:spPr>
-          <a:xfrm>
-            <a:off x="1536192" y="4343400"/>
-            <a:ext cx="2414016" cy="1005839"/>
-          </a:xfrm>
-          <a:prstGeom prst="rect">
-            <a:avLst/>
-          </a:prstGeom>
-          <a:noFill/>
-        </p:spPr>
-        <p:txBody>
-          <a:bodyPr wrap="square" anchor="t">
-            <a:spAutoFit/>
-          </a:bodyPr>
-          <a:lstStyle/>
-          <a:p>
-            <a:pPr algn="l"/>
-            <a:r>
-              <a:rPr sz="1150" b="0">
-                <a:solidFill>
-                  <a:srgbClr val="161B26"/>
-                </a:solidFill>
-                <a:latin typeface="Arial"/>
-              </a:rPr>
-              <a:t>Reading order, contrast, labels and alt text are checked.</a:t>
-            </a:r>
-          </a:p>
-        </p:txBody>
-      </p:sp>
-      <p:sp>
-        <p:nvSpPr>
-          <p:cNvPr id="32" name="Rounded Rectangle 31"/>
-          <p:cNvSpPr/>
-          <p:nvPr/>
-        </p:nvSpPr>
-        <p:spPr>
-          <a:xfrm>
-            <a:off x="4315968" y="3776472"/>
-            <a:ext cx="3401568" cy="1719072"/>
-          </a:xfrm>
-          <a:prstGeom prst="roundRect">
-            <a:avLst/>
-          </a:prstGeom>
-          <a:solidFill>
-            <a:srgbClr val="F5F8FC"/>
-          </a:solidFill>
-          <a:ln>
-            <a:solidFill>
-              <a:srgbClr val="E2E8F0"/>
-            </a:solidFill>
-          </a:ln>
-        </p:spPr>
-        <p:style>
-          <a:lnRef idx="1">
-            <a:schemeClr val="accent1"/>
-          </a:lnRef>
-          <a:fillRef idx="3">
-            <a:schemeClr val="accent1"/>
-          </a:fillRef>
-          <a:effectRef idx="2">
-            <a:schemeClr val="accent1"/>
-          </a:effectRef>
-          <a:fontRef idx="minor">
-            <a:schemeClr val="lt1"/>
-          </a:fontRef>
-        </p:style>
-        <p:txBody>
-          <a:bodyPr rtlCol="0" anchor="ctr"/>
-          <a:lstStyle/>
-          <a:p>
-            <a:pPr algn="ctr"/>
-          </a:p>
-        </p:txBody>
-      </p:sp>
-      <p:sp>
-        <p:nvSpPr>
-          <p:cNvPr id="33" name="Rectangle 32"/>
-          <p:cNvSpPr/>
-          <p:nvPr/>
-        </p:nvSpPr>
-        <p:spPr>
-          <a:xfrm>
-            <a:off x="4315968" y="3776472"/>
-            <a:ext cx="73152" cy="1719072"/>
-          </a:xfrm>
-          <a:prstGeom prst="rect">
-            <a:avLst/>
-          </a:prstGeom>
-          <a:solidFill>
-            <a:srgbClr val="1F6FEB"/>
-          </a:solidFill>
-          <a:ln>
-            <a:solidFill>
-              <a:srgbClr val="1F6FEB"/>
-            </a:solidFill>
-          </a:ln>
-        </p:spPr>
-        <p:style>
-          <a:lnRef idx="1">
-            <a:schemeClr val="accent1"/>
-          </a:lnRef>
-          <a:fillRef idx="3">
-            <a:schemeClr val="accent1"/>
-          </a:fillRef>
-          <a:effectRef idx="2">
-            <a:schemeClr val="accent1"/>
-          </a:effectRef>
-          <a:fontRef idx="minor">
-            <a:schemeClr val="lt1"/>
-          </a:fontRef>
-        </p:style>
-        <p:txBody>
-          <a:bodyPr rtlCol="0" anchor="ctr"/>
-          <a:lstStyle/>
-          <a:p>
-            <a:pPr algn="ctr"/>
-          </a:p>
-        </p:txBody>
-      </p:sp>
-      <p:sp>
-        <p:nvSpPr>
-          <p:cNvPr id="34" name="Rounded Rectangle 33"/>
-          <p:cNvSpPr/>
-          <p:nvPr/>
-        </p:nvSpPr>
-        <p:spPr>
-          <a:xfrm>
-            <a:off x="4517136" y="3995928"/>
-            <a:ext cx="438912" cy="438912"/>
-          </a:xfrm>
-          <a:prstGeom prst="roundRect">
-            <a:avLst/>
-          </a:prstGeom>
-          <a:solidFill>
-            <a:srgbClr val="1F6FEB"/>
-          </a:solidFill>
-          <a:ln>
-            <a:solidFill>
-              <a:srgbClr val="1F6FEB"/>
-            </a:solidFill>
-          </a:ln>
-        </p:spPr>
-        <p:style>
-          <a:lnRef idx="1">
-            <a:schemeClr val="accent1"/>
-          </a:lnRef>
-          <a:fillRef idx="3">
-            <a:schemeClr val="accent1"/>
-          </a:fillRef>
-          <a:effectRef idx="2">
-            <a:schemeClr val="accent1"/>
-          </a:effectRef>
-          <a:fontRef idx="minor">
-            <a:schemeClr val="lt1"/>
-          </a:fontRef>
-        </p:style>
-        <p:txBody>
-          <a:bodyPr rtlCol="0" anchor="ctr"/>
-          <a:lstStyle/>
-          <a:p>
-            <a:pPr algn="ctr"/>
-          </a:p>
-        </p:txBody>
-      </p:sp>
-      <p:sp>
-        <p:nvSpPr>
-          <p:cNvPr id="35" name="TextBox 34"/>
-          <p:cNvSpPr txBox="1"/>
-          <p:nvPr/>
-        </p:nvSpPr>
-        <p:spPr>
-          <a:xfrm>
-            <a:off x="4517136" y="4005072"/>
-            <a:ext cx="438912" cy="420624"/>
-          </a:xfrm>
-          <a:prstGeom prst="rect">
-            <a:avLst/>
-          </a:prstGeom>
-          <a:noFill/>
-        </p:spPr>
-        <p:txBody>
-          <a:bodyPr wrap="square" anchor="ctr">
-            <a:spAutoFit/>
-          </a:bodyPr>
-          <a:lstStyle/>
-          <a:p>
-            <a:pPr algn="ctr"/>
-            <a:r>
-              <a:rPr sz="1400" b="1">
-                <a:solidFill>
-                  <a:srgbClr val="FFFFFF"/>
-                </a:solidFill>
-                <a:latin typeface="Arial"/>
-              </a:rPr>
-              <a:t>5</a:t>
-            </a:r>
-          </a:p>
-        </p:txBody>
-      </p:sp>
-      <p:sp>
-        <p:nvSpPr>
-          <p:cNvPr id="36" name="TextBox 35"/>
-          <p:cNvSpPr txBox="1"/>
-          <p:nvPr/>
-        </p:nvSpPr>
-        <p:spPr>
-          <a:xfrm>
-            <a:off x="5120640" y="3959352"/>
-            <a:ext cx="2414016" cy="329184"/>
-          </a:xfrm>
-          <a:prstGeom prst="rect">
-            <a:avLst/>
-          </a:prstGeom>
-          <a:noFill/>
-        </p:spPr>
-        <p:txBody>
-          <a:bodyPr wrap="square" anchor="t">
-            <a:spAutoFit/>
-          </a:bodyPr>
-          <a:lstStyle/>
-          <a:p>
-            <a:pPr algn="l"/>
-            <a:r>
-              <a:rPr sz="1400" b="1">
-                <a:solidFill>
-                  <a:srgbClr val="1F6FEB"/>
-                </a:solidFill>
-                <a:latin typeface="Arial"/>
-              </a:rPr>
-              <a:t>Brand</a:t>
-            </a:r>
-          </a:p>
-        </p:txBody>
-      </p:sp>
-      <p:sp>
-        <p:nvSpPr>
-          <p:cNvPr id="37" name="TextBox 36"/>
-          <p:cNvSpPr txBox="1"/>
-          <p:nvPr/>
-        </p:nvSpPr>
-        <p:spPr>
-          <a:xfrm>
-            <a:off x="5120640" y="4343400"/>
-            <a:ext cx="2414016" cy="1005839"/>
-          </a:xfrm>
-          <a:prstGeom prst="rect">
-            <a:avLst/>
-          </a:prstGeom>
-          <a:noFill/>
-        </p:spPr>
-        <p:txBody>
-          <a:bodyPr wrap="square" anchor="t">
-            <a:spAutoFit/>
-          </a:bodyPr>
-          <a:lstStyle/>
-          <a:p>
-            <a:pPr algn="l"/>
-            <a:r>
-              <a:rPr sz="1150" b="0">
-                <a:solidFill>
-                  <a:srgbClr val="161B26"/>
-                </a:solidFill>
-                <a:latin typeface="Arial"/>
-              </a:rPr>
-              <a:t>The approved master, voice and assets are applied.</a:t>
-            </a:r>
-          </a:p>
-        </p:txBody>
-      </p:sp>
-      <p:sp>
-        <p:nvSpPr>
-          <p:cNvPr id="38" name="Rounded Rectangle 37"/>
-          <p:cNvSpPr/>
-          <p:nvPr/>
-        </p:nvSpPr>
-        <p:spPr>
-          <a:xfrm>
-            <a:off x="7900416" y="3776472"/>
-            <a:ext cx="3401568" cy="1719072"/>
-          </a:xfrm>
-          <a:prstGeom prst="roundRect">
-            <a:avLst/>
-          </a:prstGeom>
-          <a:solidFill>
-            <a:srgbClr val="F5F8FC"/>
-          </a:solidFill>
-          <a:ln>
-            <a:solidFill>
-              <a:srgbClr val="E2E8F0"/>
-            </a:solidFill>
-          </a:ln>
-        </p:spPr>
-        <p:style>
-          <a:lnRef idx="1">
-            <a:schemeClr val="accent1"/>
-          </a:lnRef>
-          <a:fillRef idx="3">
-            <a:schemeClr val="accent1"/>
-          </a:fillRef>
-          <a:effectRef idx="2">
-            <a:schemeClr val="accent1"/>
-          </a:effectRef>
-          <a:fontRef idx="minor">
-            <a:schemeClr val="lt1"/>
-          </a:fontRef>
-        </p:style>
-        <p:txBody>
-          <a:bodyPr rtlCol="0" anchor="ctr"/>
-          <a:lstStyle/>
-          <a:p>
-            <a:pPr algn="ctr"/>
-          </a:p>
-        </p:txBody>
-      </p:sp>
-      <p:sp>
-        <p:nvSpPr>
-          <p:cNvPr id="39" name="Rectangle 38"/>
-          <p:cNvSpPr/>
-          <p:nvPr/>
-        </p:nvSpPr>
-        <p:spPr>
-          <a:xfrm>
-            <a:off x="7900416" y="3776472"/>
-            <a:ext cx="73152" cy="1719072"/>
-          </a:xfrm>
-          <a:prstGeom prst="rect">
-            <a:avLst/>
-          </a:prstGeom>
-          <a:solidFill>
-            <a:srgbClr val="10B981"/>
-          </a:solidFill>
-          <a:ln>
-            <a:solidFill>
-              <a:srgbClr val="10B981"/>
-            </a:solidFill>
-          </a:ln>
-        </p:spPr>
-        <p:style>
-          <a:lnRef idx="1">
-            <a:schemeClr val="accent1"/>
-          </a:lnRef>
-          <a:fillRef idx="3">
-            <a:schemeClr val="accent1"/>
-          </a:fillRef>
-          <a:effectRef idx="2">
-            <a:schemeClr val="accent1"/>
-          </a:effectRef>
-          <a:fontRef idx="minor">
-            <a:schemeClr val="lt1"/>
-          </a:fontRef>
-        </p:style>
-        <p:txBody>
-          <a:bodyPr rtlCol="0" anchor="ctr"/>
-          <a:lstStyle/>
-          <a:p>
-            <a:pPr algn="ctr"/>
-          </a:p>
-        </p:txBody>
-      </p:sp>
-      <p:sp>
-        <p:nvSpPr>
-          <p:cNvPr id="40" name="Rounded Rectangle 39"/>
-          <p:cNvSpPr/>
-          <p:nvPr/>
-        </p:nvSpPr>
-        <p:spPr>
-          <a:xfrm>
-            <a:off x="8101584" y="3995928"/>
-            <a:ext cx="438912" cy="438912"/>
-          </a:xfrm>
-          <a:prstGeom prst="roundRect">
-            <a:avLst/>
-          </a:prstGeom>
-          <a:solidFill>
-            <a:srgbClr val="10B981"/>
-          </a:solidFill>
-          <a:ln>
-            <a:solidFill>
-              <a:srgbClr val="10B981"/>
-            </a:solidFill>
-          </a:ln>
-        </p:spPr>
-        <p:style>
-          <a:lnRef idx="1">
-            <a:schemeClr val="accent1"/>
-          </a:lnRef>
-          <a:fillRef idx="3">
-            <a:schemeClr val="accent1"/>
-          </a:fillRef>
-          <a:effectRef idx="2">
-            <a:schemeClr val="accent1"/>
-          </a:effectRef>
-          <a:fontRef idx="minor">
-            <a:schemeClr val="lt1"/>
-          </a:fontRef>
-        </p:style>
-        <p:txBody>
-          <a:bodyPr rtlCol="0" anchor="ctr"/>
-          <a:lstStyle/>
-          <a:p>
-            <a:pPr algn="ctr"/>
-          </a:p>
-        </p:txBody>
-      </p:sp>
-      <p:sp>
-        <p:nvSpPr>
-          <p:cNvPr id="41" name="TextBox 40"/>
-          <p:cNvSpPr txBox="1"/>
-          <p:nvPr/>
-        </p:nvSpPr>
-        <p:spPr>
-          <a:xfrm>
-            <a:off x="8101584" y="4005072"/>
-            <a:ext cx="438912" cy="420624"/>
-          </a:xfrm>
-          <a:prstGeom prst="rect">
-            <a:avLst/>
-          </a:prstGeom>
-          <a:noFill/>
-        </p:spPr>
-        <p:txBody>
-          <a:bodyPr wrap="square" anchor="ctr">
-            <a:spAutoFit/>
-          </a:bodyPr>
-          <a:lstStyle/>
-          <a:p>
-            <a:pPr algn="ctr"/>
-            <a:r>
-              <a:rPr sz="1400" b="1">
-                <a:solidFill>
-                  <a:srgbClr val="FFFFFF"/>
-                </a:solidFill>
-                <a:latin typeface="Arial"/>
-              </a:rPr>
-              <a:t>6</a:t>
-            </a:r>
-          </a:p>
-        </p:txBody>
-      </p:sp>
-      <p:sp>
-        <p:nvSpPr>
-          <p:cNvPr id="42" name="TextBox 41"/>
-          <p:cNvSpPr txBox="1"/>
-          <p:nvPr/>
-        </p:nvSpPr>
-        <p:spPr>
-          <a:xfrm>
-            <a:off x="8705088" y="3959352"/>
-            <a:ext cx="2414016" cy="329184"/>
-          </a:xfrm>
-          <a:prstGeom prst="rect">
-            <a:avLst/>
-          </a:prstGeom>
-          <a:noFill/>
-        </p:spPr>
-        <p:txBody>
-          <a:bodyPr wrap="square" anchor="t">
-            <a:spAutoFit/>
-          </a:bodyPr>
-          <a:lstStyle/>
-          <a:p>
-            <a:pPr algn="l"/>
-            <a:r>
-              <a:rPr sz="1400" b="1">
-                <a:solidFill>
-                  <a:srgbClr val="10B981"/>
-                </a:solidFill>
-                <a:latin typeface="Arial"/>
-              </a:rPr>
-              <a:t>Owner</a:t>
-            </a:r>
-          </a:p>
-        </p:txBody>
-      </p:sp>
-      <p:sp>
-        <p:nvSpPr>
-          <p:cNvPr id="43" name="TextBox 42"/>
-          <p:cNvSpPr txBox="1"/>
-          <p:nvPr/>
-        </p:nvSpPr>
-        <p:spPr>
-          <a:xfrm>
-            <a:off x="8705088" y="4343400"/>
-            <a:ext cx="2414016" cy="1005839"/>
-          </a:xfrm>
-          <a:prstGeom prst="rect">
-            <a:avLst/>
-          </a:prstGeom>
-          <a:noFill/>
-        </p:spPr>
-        <p:txBody>
-          <a:bodyPr wrap="square" anchor="t">
-            <a:spAutoFit/>
-          </a:bodyPr>
-          <a:lstStyle/>
-          <a:p>
-            <a:pPr algn="l"/>
-            <a:r>
-              <a:rPr sz="1150" b="0">
-                <a:solidFill>
-                  <a:srgbClr val="161B26"/>
-                </a:solidFill>
-                <a:latin typeface="Arial"/>
-              </a:rPr>
-              <a:t>A named human approves and remains accountable.</a:t>
+              <a:t>Choose, verify and rebuild the accountable PowerPoint master.</a:t>
             </a:r>
           </a:p>
         </p:txBody>
@@ -7419,6 +6940,246 @@
             <a:avLst/>
           </a:prstGeom>
           <a:solidFill>
+            <a:srgbClr val="7C3AED"/>
+          </a:solidFill>
+          <a:ln>
+            <a:solidFill>
+              <a:srgbClr val="7C3AED"/>
+            </a:solidFill>
+          </a:ln>
+        </p:spPr>
+        <p:style>
+          <a:lnRef idx="1">
+            <a:schemeClr val="accent1"/>
+          </a:lnRef>
+          <a:fillRef idx="3">
+            <a:schemeClr val="accent1"/>
+          </a:fillRef>
+          <a:effectRef idx="2">
+            <a:schemeClr val="accent1"/>
+          </a:effectRef>
+          <a:fontRef idx="minor">
+            <a:schemeClr val="lt1"/>
+          </a:fontRef>
+        </p:style>
+        <p:txBody>
+          <a:bodyPr rtlCol="0" anchor="ctr"/>
+          <a:lstStyle/>
+          <a:p>
+            <a:pPr algn="ctr"/>
+          </a:p>
+        </p:txBody>
+      </p:sp>
+      <p:sp>
+        <p:nvSpPr>
+          <p:cNvPr id="4" name="TextBox 3"/>
+          <p:cNvSpPr txBox="1"/>
+          <p:nvPr/>
+        </p:nvSpPr>
+        <p:spPr>
+          <a:xfrm>
+            <a:off x="658368" y="384048"/>
+            <a:ext cx="10789920" cy="320040"/>
+          </a:xfrm>
+          <a:prstGeom prst="rect">
+            <a:avLst/>
+          </a:prstGeom>
+          <a:noFill/>
+        </p:spPr>
+        <p:txBody>
+          <a:bodyPr wrap="square" anchor="t">
+            <a:spAutoFit/>
+          </a:bodyPr>
+          <a:lstStyle/>
+          <a:p>
+            <a:pPr algn="l"/>
+            <a:r>
+              <a:rPr sz="1100" b="1">
+                <a:solidFill>
+                  <a:srgbClr val="7C3AED"/>
+                </a:solidFill>
+                <a:latin typeface="Arial"/>
+              </a:rPr>
+              <a:t>ACTIVITY 06 · EXAMPLE</a:t>
+            </a:r>
+          </a:p>
+        </p:txBody>
+      </p:sp>
+      <p:sp>
+        <p:nvSpPr>
+          <p:cNvPr id="5" name="TextBox 4"/>
+          <p:cNvSpPr txBox="1"/>
+          <p:nvPr/>
+        </p:nvSpPr>
+        <p:spPr>
+          <a:xfrm>
+            <a:off x="658368" y="749808"/>
+            <a:ext cx="10789920" cy="658368"/>
+          </a:xfrm>
+          <a:prstGeom prst="rect">
+            <a:avLst/>
+          </a:prstGeom>
+          <a:noFill/>
+        </p:spPr>
+        <p:txBody>
+          <a:bodyPr wrap="square" anchor="t">
+            <a:spAutoFit/>
+          </a:bodyPr>
+          <a:lstStyle/>
+          <a:p>
+            <a:pPr algn="l"/>
+            <a:r>
+              <a:rPr sz="2700" b="1">
+                <a:solidFill>
+                  <a:srgbClr val="161B26"/>
+                </a:solidFill>
+                <a:latin typeface="Arial"/>
+              </a:rPr>
+              <a:t>Worked Output</a:t>
+            </a:r>
+          </a:p>
+        </p:txBody>
+      </p:sp>
+      <p:sp>
+        <p:nvSpPr>
+          <p:cNvPr id="6" name="Rectangle 5"/>
+          <p:cNvSpPr/>
+          <p:nvPr/>
+        </p:nvSpPr>
+        <p:spPr>
+          <a:xfrm>
+            <a:off x="658368" y="1444752"/>
+            <a:ext cx="10881360" cy="18288"/>
+          </a:xfrm>
+          <a:prstGeom prst="rect">
+            <a:avLst/>
+          </a:prstGeom>
+          <a:solidFill>
+            <a:srgbClr val="E2E8F0"/>
+          </a:solidFill>
+          <a:ln>
+            <a:solidFill>
+              <a:srgbClr val="E2E8F0"/>
+            </a:solidFill>
+          </a:ln>
+        </p:spPr>
+        <p:style>
+          <a:lnRef idx="1">
+            <a:schemeClr val="accent1"/>
+          </a:lnRef>
+          <a:fillRef idx="3">
+            <a:schemeClr val="accent1"/>
+          </a:fillRef>
+          <a:effectRef idx="2">
+            <a:schemeClr val="accent1"/>
+          </a:effectRef>
+          <a:fontRef idx="minor">
+            <a:schemeClr val="lt1"/>
+          </a:fontRef>
+        </p:style>
+        <p:txBody>
+          <a:bodyPr rtlCol="0" anchor="ctr"/>
+          <a:lstStyle/>
+          <a:p>
+            <a:pPr algn="ctr"/>
+          </a:p>
+        </p:txBody>
+      </p:sp>
+      <p:sp>
+        <p:nvSpPr>
+          <p:cNvPr id="7" name="TextBox 6"/>
+          <p:cNvSpPr txBox="1"/>
+          <p:nvPr/>
+        </p:nvSpPr>
+        <p:spPr>
+          <a:xfrm>
+            <a:off x="658368" y="6473952"/>
+            <a:ext cx="9875520" cy="201168"/>
+          </a:xfrm>
+          <a:prstGeom prst="rect">
+            <a:avLst/>
+          </a:prstGeom>
+          <a:noFill/>
+        </p:spPr>
+        <p:txBody>
+          <a:bodyPr wrap="square" anchor="t">
+            <a:spAutoFit/>
+          </a:bodyPr>
+          <a:lstStyle/>
+          <a:p>
+            <a:pPr algn="l"/>
+            <a:r>
+              <a:rPr sz="800" b="0">
+                <a:solidFill>
+                  <a:srgbClr val="5B6372"/>
+                </a:solidFill>
+                <a:latin typeface="Arial"/>
+              </a:rPr>
+              <a:t>TGS-2026064178 · ACTIVITY PRACTICE · Tertiary Infotech Academy Pte Ltd</a:t>
+            </a:r>
+          </a:p>
+        </p:txBody>
+      </p:sp>
+      <p:sp>
+        <p:nvSpPr>
+          <p:cNvPr id="8" name="Rounded Rectangle 7"/>
+          <p:cNvSpPr/>
+          <p:nvPr/>
+        </p:nvSpPr>
+        <p:spPr>
+          <a:xfrm>
+            <a:off x="731520" y="1783080"/>
+            <a:ext cx="3401568" cy="1719072"/>
+          </a:xfrm>
+          <a:prstGeom prst="roundRect">
+            <a:avLst/>
+          </a:prstGeom>
+          <a:solidFill>
+            <a:srgbClr val="F5F8FC"/>
+          </a:solidFill>
+          <a:ln>
+            <a:solidFill>
+              <a:srgbClr val="E2E8F0"/>
+            </a:solidFill>
+          </a:ln>
+        </p:spPr>
+        <p:style>
+          <a:lnRef idx="1">
+            <a:schemeClr val="accent1"/>
+          </a:lnRef>
+          <a:fillRef idx="3">
+            <a:schemeClr val="accent1"/>
+          </a:fillRef>
+          <a:effectRef idx="2">
+            <a:schemeClr val="accent1"/>
+          </a:effectRef>
+          <a:fontRef idx="minor">
+            <a:schemeClr val="lt1"/>
+          </a:fontRef>
+        </p:style>
+        <p:txBody>
+          <a:bodyPr rtlCol="0" anchor="ctr"/>
+          <a:lstStyle/>
+          <a:p>
+            <a:pPr algn="ctr"/>
+          </a:p>
+        </p:txBody>
+      </p:sp>
+      <p:sp>
+        <p:nvSpPr>
+          <p:cNvPr id="9" name="Rectangle 8"/>
+          <p:cNvSpPr/>
+          <p:nvPr/>
+        </p:nvSpPr>
+        <p:spPr>
+          <a:xfrm>
+            <a:off x="731520" y="1783080"/>
+            <a:ext cx="73152" cy="1719072"/>
+          </a:xfrm>
+          <a:prstGeom prst="rect">
+            <a:avLst/>
+          </a:prstGeom>
+          <a:solidFill>
             <a:srgbClr val="1F6FEB"/>
           </a:solidFill>
           <a:ln>
@@ -7451,14 +7212,94 @@
       </p:sp>
       <p:sp>
         <p:nvSpPr>
-          <p:cNvPr id="4" name="TextBox 3"/>
+          <p:cNvPr id="10" name="Rounded Rectangle 9"/>
+          <p:cNvSpPr/>
+          <p:nvPr/>
+        </p:nvSpPr>
+        <p:spPr>
+          <a:xfrm>
+            <a:off x="932688" y="2002536"/>
+            <a:ext cx="438912" cy="438912"/>
+          </a:xfrm>
+          <a:prstGeom prst="roundRect">
+            <a:avLst/>
+          </a:prstGeom>
+          <a:solidFill>
+            <a:srgbClr val="1F6FEB"/>
+          </a:solidFill>
+          <a:ln>
+            <a:solidFill>
+              <a:srgbClr val="1F6FEB"/>
+            </a:solidFill>
+          </a:ln>
+        </p:spPr>
+        <p:style>
+          <a:lnRef idx="1">
+            <a:schemeClr val="accent1"/>
+          </a:lnRef>
+          <a:fillRef idx="3">
+            <a:schemeClr val="accent1"/>
+          </a:fillRef>
+          <a:effectRef idx="2">
+            <a:schemeClr val="accent1"/>
+          </a:effectRef>
+          <a:fontRef idx="minor">
+            <a:schemeClr val="lt1"/>
+          </a:fontRef>
+        </p:style>
+        <p:txBody>
+          <a:bodyPr rtlCol="0" anchor="ctr"/>
+          <a:lstStyle/>
+          <a:p>
+            <a:pPr algn="ctr"/>
+          </a:p>
+        </p:txBody>
+      </p:sp>
+      <p:sp>
+        <p:nvSpPr>
+          <p:cNvPr id="11" name="TextBox 10"/>
           <p:cNvSpPr txBox="1"/>
           <p:nvPr/>
         </p:nvSpPr>
         <p:spPr>
           <a:xfrm>
-            <a:off x="658368" y="384048"/>
-            <a:ext cx="10789920" cy="320040"/>
+            <a:off x="932688" y="2011680"/>
+            <a:ext cx="438912" cy="420624"/>
+          </a:xfrm>
+          <a:prstGeom prst="rect">
+            <a:avLst/>
+          </a:prstGeom>
+          <a:noFill/>
+        </p:spPr>
+        <p:txBody>
+          <a:bodyPr wrap="square" anchor="ctr">
+            <a:spAutoFit/>
+          </a:bodyPr>
+          <a:lstStyle/>
+          <a:p>
+            <a:pPr algn="ctr"/>
+            <a:r>
+              <a:rPr sz="1400" b="1">
+                <a:solidFill>
+                  <a:srgbClr val="FFFFFF"/>
+                </a:solidFill>
+                <a:latin typeface="Arial"/>
+              </a:rPr>
+              <a:t>1</a:t>
+            </a:r>
+          </a:p>
+        </p:txBody>
+      </p:sp>
+      <p:sp>
+        <p:nvSpPr>
+          <p:cNvPr id="12" name="TextBox 11"/>
+          <p:cNvSpPr txBox="1"/>
+          <p:nvPr/>
+        </p:nvSpPr>
+        <p:spPr>
+          <a:xfrm>
+            <a:off x="1536192" y="1965960"/>
+            <a:ext cx="2414016" cy="329184"/>
           </a:xfrm>
           <a:prstGeom prst="rect">
             <a:avLst/>
@@ -7473,27 +7314,27 @@
           <a:p>
             <a:pPr algn="l"/>
             <a:r>
-              <a:rPr sz="1100" b="1">
+              <a:rPr sz="1400" b="1">
                 <a:solidFill>
                   <a:srgbClr val="1F6FEB"/>
                 </a:solidFill>
                 <a:latin typeface="Arial"/>
               </a:rPr>
-              <a:t>ACTIVITY 06 · ACCEPTANCE</a:t>
-            </a:r>
-          </a:p>
-        </p:txBody>
-      </p:sp>
-      <p:sp>
-        <p:nvSpPr>
-          <p:cNvPr id="5" name="TextBox 4"/>
+              <a:t>Truth</a:t>
+            </a:r>
+          </a:p>
+        </p:txBody>
+      </p:sp>
+      <p:sp>
+        <p:nvSpPr>
+          <p:cNvPr id="13" name="TextBox 12"/>
           <p:cNvSpPr txBox="1"/>
           <p:nvPr/>
         </p:nvSpPr>
         <p:spPr>
           <a:xfrm>
-            <a:off x="658368" y="749808"/>
-            <a:ext cx="10789920" cy="658368"/>
+            <a:off x="1536192" y="2350008"/>
+            <a:ext cx="2414016" cy="1005839"/>
           </a:xfrm>
           <a:prstGeom prst="rect">
             <a:avLst/>
@@ -7508,33 +7349,33 @@
           <a:p>
             <a:pPr algn="l"/>
             <a:r>
-              <a:rPr sz="2700" b="1">
+              <a:rPr sz="1150" b="0">
                 <a:solidFill>
                   <a:srgbClr val="161B26"/>
                 </a:solidFill>
                 <a:latin typeface="Arial"/>
               </a:rPr>
-              <a:t>What Good Looks Like</a:t>
-            </a:r>
-          </a:p>
-        </p:txBody>
-      </p:sp>
-      <p:sp>
-        <p:nvSpPr>
-          <p:cNvPr id="6" name="Rectangle 5"/>
+              <a:t>Every fact and number matches the approved source.</a:t>
+            </a:r>
+          </a:p>
+        </p:txBody>
+      </p:sp>
+      <p:sp>
+        <p:nvSpPr>
+          <p:cNvPr id="14" name="Rounded Rectangle 13"/>
           <p:cNvSpPr/>
           <p:nvPr/>
         </p:nvSpPr>
         <p:spPr>
           <a:xfrm>
-            <a:off x="658368" y="1444752"/>
-            <a:ext cx="10881360" cy="18288"/>
-          </a:xfrm>
-          <a:prstGeom prst="rect">
-            <a:avLst/>
-          </a:prstGeom>
-          <a:solidFill>
-            <a:srgbClr val="E2E8F0"/>
+            <a:off x="4315968" y="1783080"/>
+            <a:ext cx="3401568" cy="1719072"/>
+          </a:xfrm>
+          <a:prstGeom prst="roundRect">
+            <a:avLst/>
+          </a:prstGeom>
+          <a:solidFill>
+            <a:srgbClr val="F5F8FC"/>
           </a:solidFill>
           <a:ln>
             <a:solidFill>
@@ -7566,14 +7407,139 @@
       </p:sp>
       <p:sp>
         <p:nvSpPr>
-          <p:cNvPr id="7" name="TextBox 6"/>
+          <p:cNvPr id="15" name="Rectangle 14"/>
+          <p:cNvSpPr/>
+          <p:nvPr/>
+        </p:nvSpPr>
+        <p:spPr>
+          <a:xfrm>
+            <a:off x="4315968" y="1783080"/>
+            <a:ext cx="73152" cy="1719072"/>
+          </a:xfrm>
+          <a:prstGeom prst="rect">
+            <a:avLst/>
+          </a:prstGeom>
+          <a:solidFill>
+            <a:srgbClr val="10B981"/>
+          </a:solidFill>
+          <a:ln>
+            <a:solidFill>
+              <a:srgbClr val="10B981"/>
+            </a:solidFill>
+          </a:ln>
+        </p:spPr>
+        <p:style>
+          <a:lnRef idx="1">
+            <a:schemeClr val="accent1"/>
+          </a:lnRef>
+          <a:fillRef idx="3">
+            <a:schemeClr val="accent1"/>
+          </a:fillRef>
+          <a:effectRef idx="2">
+            <a:schemeClr val="accent1"/>
+          </a:effectRef>
+          <a:fontRef idx="minor">
+            <a:schemeClr val="lt1"/>
+          </a:fontRef>
+        </p:style>
+        <p:txBody>
+          <a:bodyPr rtlCol="0" anchor="ctr"/>
+          <a:lstStyle/>
+          <a:p>
+            <a:pPr algn="ctr"/>
+          </a:p>
+        </p:txBody>
+      </p:sp>
+      <p:sp>
+        <p:nvSpPr>
+          <p:cNvPr id="16" name="Rounded Rectangle 15"/>
+          <p:cNvSpPr/>
+          <p:nvPr/>
+        </p:nvSpPr>
+        <p:spPr>
+          <a:xfrm>
+            <a:off x="4517136" y="2002536"/>
+            <a:ext cx="438912" cy="438912"/>
+          </a:xfrm>
+          <a:prstGeom prst="roundRect">
+            <a:avLst/>
+          </a:prstGeom>
+          <a:solidFill>
+            <a:srgbClr val="10B981"/>
+          </a:solidFill>
+          <a:ln>
+            <a:solidFill>
+              <a:srgbClr val="10B981"/>
+            </a:solidFill>
+          </a:ln>
+        </p:spPr>
+        <p:style>
+          <a:lnRef idx="1">
+            <a:schemeClr val="accent1"/>
+          </a:lnRef>
+          <a:fillRef idx="3">
+            <a:schemeClr val="accent1"/>
+          </a:fillRef>
+          <a:effectRef idx="2">
+            <a:schemeClr val="accent1"/>
+          </a:effectRef>
+          <a:fontRef idx="minor">
+            <a:schemeClr val="lt1"/>
+          </a:fontRef>
+        </p:style>
+        <p:txBody>
+          <a:bodyPr rtlCol="0" anchor="ctr"/>
+          <a:lstStyle/>
+          <a:p>
+            <a:pPr algn="ctr"/>
+          </a:p>
+        </p:txBody>
+      </p:sp>
+      <p:sp>
+        <p:nvSpPr>
+          <p:cNvPr id="17" name="TextBox 16"/>
           <p:cNvSpPr txBox="1"/>
           <p:nvPr/>
         </p:nvSpPr>
         <p:spPr>
           <a:xfrm>
-            <a:off x="658368" y="6473952"/>
-            <a:ext cx="9875520" cy="201168"/>
+            <a:off x="4517136" y="2011680"/>
+            <a:ext cx="438912" cy="420624"/>
+          </a:xfrm>
+          <a:prstGeom prst="rect">
+            <a:avLst/>
+          </a:prstGeom>
+          <a:noFill/>
+        </p:spPr>
+        <p:txBody>
+          <a:bodyPr wrap="square" anchor="ctr">
+            <a:spAutoFit/>
+          </a:bodyPr>
+          <a:lstStyle/>
+          <a:p>
+            <a:pPr algn="ctr"/>
+            <a:r>
+              <a:rPr sz="1400" b="1">
+                <a:solidFill>
+                  <a:srgbClr val="FFFFFF"/>
+                </a:solidFill>
+                <a:latin typeface="Arial"/>
+              </a:rPr>
+              <a:t>2</a:t>
+            </a:r>
+          </a:p>
+        </p:txBody>
+      </p:sp>
+      <p:sp>
+        <p:nvSpPr>
+          <p:cNvPr id="18" name="TextBox 17"/>
+          <p:cNvSpPr txBox="1"/>
+          <p:nvPr/>
+        </p:nvSpPr>
+        <p:spPr>
+          <a:xfrm>
+            <a:off x="5120640" y="1965960"/>
+            <a:ext cx="2414016" cy="329184"/>
           </a:xfrm>
           <a:prstGeom prst="rect">
             <a:avLst/>
@@ -7588,29 +7554,589 @@
           <a:p>
             <a:pPr algn="l"/>
             <a:r>
-              <a:rPr sz="800" b="0">
-                <a:solidFill>
-                  <a:srgbClr val="5B6372"/>
+              <a:rPr sz="1400" b="1">
+                <a:solidFill>
+                  <a:srgbClr val="10B981"/>
                 </a:solidFill>
                 <a:latin typeface="Arial"/>
               </a:rPr>
-              <a:t>TGS-2024048310 · ACTIVITY PRACTICE · Tertiary Infotech Academy Pte Ltd</a:t>
-            </a:r>
-          </a:p>
-        </p:txBody>
-      </p:sp>
-      <p:sp>
-        <p:nvSpPr>
-          <p:cNvPr id="8" name="Rounded Rectangle 7"/>
+              <a:t>Privacy</a:t>
+            </a:r>
+          </a:p>
+        </p:txBody>
+      </p:sp>
+      <p:sp>
+        <p:nvSpPr>
+          <p:cNvPr id="19" name="TextBox 18"/>
+          <p:cNvSpPr txBox="1"/>
+          <p:nvPr/>
+        </p:nvSpPr>
+        <p:spPr>
+          <a:xfrm>
+            <a:off x="5120640" y="2350008"/>
+            <a:ext cx="2414016" cy="1005839"/>
+          </a:xfrm>
+          <a:prstGeom prst="rect">
+            <a:avLst/>
+          </a:prstGeom>
+          <a:noFill/>
+        </p:spPr>
+        <p:txBody>
+          <a:bodyPr wrap="square" anchor="t">
+            <a:spAutoFit/>
+          </a:bodyPr>
+          <a:lstStyle/>
+          <a:p>
+            <a:pPr algn="l"/>
+            <a:r>
+              <a:rPr sz="1150" b="0">
+                <a:solidFill>
+                  <a:srgbClr val="161B26"/>
+                </a:solidFill>
+                <a:latin typeface="Arial"/>
+              </a:rPr>
+              <a:t>No personal or restricted data enters an unapproved service.</a:t>
+            </a:r>
+          </a:p>
+        </p:txBody>
+      </p:sp>
+      <p:sp>
+        <p:nvSpPr>
+          <p:cNvPr id="20" name="Rounded Rectangle 19"/>
           <p:cNvSpPr/>
           <p:nvPr/>
         </p:nvSpPr>
         <p:spPr>
           <a:xfrm>
-            <a:off x="749808" y="1810512"/>
-            <a:ext cx="10652760" cy="1005840"/>
+            <a:off x="7900416" y="1783080"/>
+            <a:ext cx="3401568" cy="1719072"/>
           </a:xfrm>
           <a:prstGeom prst="roundRect">
+            <a:avLst/>
+          </a:prstGeom>
+          <a:solidFill>
+            <a:srgbClr val="F5F8FC"/>
+          </a:solidFill>
+          <a:ln>
+            <a:solidFill>
+              <a:srgbClr val="E2E8F0"/>
+            </a:solidFill>
+          </a:ln>
+        </p:spPr>
+        <p:style>
+          <a:lnRef idx="1">
+            <a:schemeClr val="accent1"/>
+          </a:lnRef>
+          <a:fillRef idx="3">
+            <a:schemeClr val="accent1"/>
+          </a:fillRef>
+          <a:effectRef idx="2">
+            <a:schemeClr val="accent1"/>
+          </a:effectRef>
+          <a:fontRef idx="minor">
+            <a:schemeClr val="lt1"/>
+          </a:fontRef>
+        </p:style>
+        <p:txBody>
+          <a:bodyPr rtlCol="0" anchor="ctr"/>
+          <a:lstStyle/>
+          <a:p>
+            <a:pPr algn="ctr"/>
+          </a:p>
+        </p:txBody>
+      </p:sp>
+      <p:sp>
+        <p:nvSpPr>
+          <p:cNvPr id="21" name="Rectangle 20"/>
+          <p:cNvSpPr/>
+          <p:nvPr/>
+        </p:nvSpPr>
+        <p:spPr>
+          <a:xfrm>
+            <a:off x="7900416" y="1783080"/>
+            <a:ext cx="73152" cy="1719072"/>
+          </a:xfrm>
+          <a:prstGeom prst="rect">
+            <a:avLst/>
+          </a:prstGeom>
+          <a:solidFill>
+            <a:srgbClr val="7C3AED"/>
+          </a:solidFill>
+          <a:ln>
+            <a:solidFill>
+              <a:srgbClr val="7C3AED"/>
+            </a:solidFill>
+          </a:ln>
+        </p:spPr>
+        <p:style>
+          <a:lnRef idx="1">
+            <a:schemeClr val="accent1"/>
+          </a:lnRef>
+          <a:fillRef idx="3">
+            <a:schemeClr val="accent1"/>
+          </a:fillRef>
+          <a:effectRef idx="2">
+            <a:schemeClr val="accent1"/>
+          </a:effectRef>
+          <a:fontRef idx="minor">
+            <a:schemeClr val="lt1"/>
+          </a:fontRef>
+        </p:style>
+        <p:txBody>
+          <a:bodyPr rtlCol="0" anchor="ctr"/>
+          <a:lstStyle/>
+          <a:p>
+            <a:pPr algn="ctr"/>
+          </a:p>
+        </p:txBody>
+      </p:sp>
+      <p:sp>
+        <p:nvSpPr>
+          <p:cNvPr id="22" name="Rounded Rectangle 21"/>
+          <p:cNvSpPr/>
+          <p:nvPr/>
+        </p:nvSpPr>
+        <p:spPr>
+          <a:xfrm>
+            <a:off x="8101584" y="2002536"/>
+            <a:ext cx="438912" cy="438912"/>
+          </a:xfrm>
+          <a:prstGeom prst="roundRect">
+            <a:avLst/>
+          </a:prstGeom>
+          <a:solidFill>
+            <a:srgbClr val="7C3AED"/>
+          </a:solidFill>
+          <a:ln>
+            <a:solidFill>
+              <a:srgbClr val="7C3AED"/>
+            </a:solidFill>
+          </a:ln>
+        </p:spPr>
+        <p:style>
+          <a:lnRef idx="1">
+            <a:schemeClr val="accent1"/>
+          </a:lnRef>
+          <a:fillRef idx="3">
+            <a:schemeClr val="accent1"/>
+          </a:fillRef>
+          <a:effectRef idx="2">
+            <a:schemeClr val="accent1"/>
+          </a:effectRef>
+          <a:fontRef idx="minor">
+            <a:schemeClr val="lt1"/>
+          </a:fontRef>
+        </p:style>
+        <p:txBody>
+          <a:bodyPr rtlCol="0" anchor="ctr"/>
+          <a:lstStyle/>
+          <a:p>
+            <a:pPr algn="ctr"/>
+          </a:p>
+        </p:txBody>
+      </p:sp>
+      <p:sp>
+        <p:nvSpPr>
+          <p:cNvPr id="23" name="TextBox 22"/>
+          <p:cNvSpPr txBox="1"/>
+          <p:nvPr/>
+        </p:nvSpPr>
+        <p:spPr>
+          <a:xfrm>
+            <a:off x="8101584" y="2011680"/>
+            <a:ext cx="438912" cy="420624"/>
+          </a:xfrm>
+          <a:prstGeom prst="rect">
+            <a:avLst/>
+          </a:prstGeom>
+          <a:noFill/>
+        </p:spPr>
+        <p:txBody>
+          <a:bodyPr wrap="square" anchor="ctr">
+            <a:spAutoFit/>
+          </a:bodyPr>
+          <a:lstStyle/>
+          <a:p>
+            <a:pPr algn="ctr"/>
+            <a:r>
+              <a:rPr sz="1400" b="1">
+                <a:solidFill>
+                  <a:srgbClr val="FFFFFF"/>
+                </a:solidFill>
+                <a:latin typeface="Arial"/>
+              </a:rPr>
+              <a:t>3</a:t>
+            </a:r>
+          </a:p>
+        </p:txBody>
+      </p:sp>
+      <p:sp>
+        <p:nvSpPr>
+          <p:cNvPr id="24" name="TextBox 23"/>
+          <p:cNvSpPr txBox="1"/>
+          <p:nvPr/>
+        </p:nvSpPr>
+        <p:spPr>
+          <a:xfrm>
+            <a:off x="8705088" y="1965960"/>
+            <a:ext cx="2414016" cy="329184"/>
+          </a:xfrm>
+          <a:prstGeom prst="rect">
+            <a:avLst/>
+          </a:prstGeom>
+          <a:noFill/>
+        </p:spPr>
+        <p:txBody>
+          <a:bodyPr wrap="square" anchor="t">
+            <a:spAutoFit/>
+          </a:bodyPr>
+          <a:lstStyle/>
+          <a:p>
+            <a:pPr algn="l"/>
+            <a:r>
+              <a:rPr sz="1400" b="1">
+                <a:solidFill>
+                  <a:srgbClr val="7C3AED"/>
+                </a:solidFill>
+                <a:latin typeface="Arial"/>
+              </a:rPr>
+              <a:t>Rights</a:t>
+            </a:r>
+          </a:p>
+        </p:txBody>
+      </p:sp>
+      <p:sp>
+        <p:nvSpPr>
+          <p:cNvPr id="25" name="TextBox 24"/>
+          <p:cNvSpPr txBox="1"/>
+          <p:nvPr/>
+        </p:nvSpPr>
+        <p:spPr>
+          <a:xfrm>
+            <a:off x="8705088" y="2350008"/>
+            <a:ext cx="2414016" cy="1005839"/>
+          </a:xfrm>
+          <a:prstGeom prst="rect">
+            <a:avLst/>
+          </a:prstGeom>
+          <a:noFill/>
+        </p:spPr>
+        <p:txBody>
+          <a:bodyPr wrap="square" anchor="t">
+            <a:spAutoFit/>
+          </a:bodyPr>
+          <a:lstStyle/>
+          <a:p>
+            <a:pPr algn="l"/>
+            <a:r>
+              <a:rPr sz="1150" b="0">
+                <a:solidFill>
+                  <a:srgbClr val="161B26"/>
+                </a:solidFill>
+                <a:latin typeface="Arial"/>
+              </a:rPr>
+              <a:t>Images, icons, fonts and templates are permitted.</a:t>
+            </a:r>
+          </a:p>
+        </p:txBody>
+      </p:sp>
+      <p:sp>
+        <p:nvSpPr>
+          <p:cNvPr id="26" name="Rounded Rectangle 25"/>
+          <p:cNvSpPr/>
+          <p:nvPr/>
+        </p:nvSpPr>
+        <p:spPr>
+          <a:xfrm>
+            <a:off x="731520" y="3776472"/>
+            <a:ext cx="3401568" cy="1719072"/>
+          </a:xfrm>
+          <a:prstGeom prst="roundRect">
+            <a:avLst/>
+          </a:prstGeom>
+          <a:solidFill>
+            <a:srgbClr val="F5F8FC"/>
+          </a:solidFill>
+          <a:ln>
+            <a:solidFill>
+              <a:srgbClr val="E2E8F0"/>
+            </a:solidFill>
+          </a:ln>
+        </p:spPr>
+        <p:style>
+          <a:lnRef idx="1">
+            <a:schemeClr val="accent1"/>
+          </a:lnRef>
+          <a:fillRef idx="3">
+            <a:schemeClr val="accent1"/>
+          </a:fillRef>
+          <a:effectRef idx="2">
+            <a:schemeClr val="accent1"/>
+          </a:effectRef>
+          <a:fontRef idx="minor">
+            <a:schemeClr val="lt1"/>
+          </a:fontRef>
+        </p:style>
+        <p:txBody>
+          <a:bodyPr rtlCol="0" anchor="ctr"/>
+          <a:lstStyle/>
+          <a:p>
+            <a:pPr algn="ctr"/>
+          </a:p>
+        </p:txBody>
+      </p:sp>
+      <p:sp>
+        <p:nvSpPr>
+          <p:cNvPr id="27" name="Rectangle 26"/>
+          <p:cNvSpPr/>
+          <p:nvPr/>
+        </p:nvSpPr>
+        <p:spPr>
+          <a:xfrm>
+            <a:off x="731520" y="3776472"/>
+            <a:ext cx="73152" cy="1719072"/>
+          </a:xfrm>
+          <a:prstGeom prst="rect">
+            <a:avLst/>
+          </a:prstGeom>
+          <a:solidFill>
+            <a:srgbClr val="F59E0B"/>
+          </a:solidFill>
+          <a:ln>
+            <a:solidFill>
+              <a:srgbClr val="F59E0B"/>
+            </a:solidFill>
+          </a:ln>
+        </p:spPr>
+        <p:style>
+          <a:lnRef idx="1">
+            <a:schemeClr val="accent1"/>
+          </a:lnRef>
+          <a:fillRef idx="3">
+            <a:schemeClr val="accent1"/>
+          </a:fillRef>
+          <a:effectRef idx="2">
+            <a:schemeClr val="accent1"/>
+          </a:effectRef>
+          <a:fontRef idx="minor">
+            <a:schemeClr val="lt1"/>
+          </a:fontRef>
+        </p:style>
+        <p:txBody>
+          <a:bodyPr rtlCol="0" anchor="ctr"/>
+          <a:lstStyle/>
+          <a:p>
+            <a:pPr algn="ctr"/>
+          </a:p>
+        </p:txBody>
+      </p:sp>
+      <p:sp>
+        <p:nvSpPr>
+          <p:cNvPr id="28" name="Rounded Rectangle 27"/>
+          <p:cNvSpPr/>
+          <p:nvPr/>
+        </p:nvSpPr>
+        <p:spPr>
+          <a:xfrm>
+            <a:off x="932688" y="3995928"/>
+            <a:ext cx="438912" cy="438912"/>
+          </a:xfrm>
+          <a:prstGeom prst="roundRect">
+            <a:avLst/>
+          </a:prstGeom>
+          <a:solidFill>
+            <a:srgbClr val="F59E0B"/>
+          </a:solidFill>
+          <a:ln>
+            <a:solidFill>
+              <a:srgbClr val="F59E0B"/>
+            </a:solidFill>
+          </a:ln>
+        </p:spPr>
+        <p:style>
+          <a:lnRef idx="1">
+            <a:schemeClr val="accent1"/>
+          </a:lnRef>
+          <a:fillRef idx="3">
+            <a:schemeClr val="accent1"/>
+          </a:fillRef>
+          <a:effectRef idx="2">
+            <a:schemeClr val="accent1"/>
+          </a:effectRef>
+          <a:fontRef idx="minor">
+            <a:schemeClr val="lt1"/>
+          </a:fontRef>
+        </p:style>
+        <p:txBody>
+          <a:bodyPr rtlCol="0" anchor="ctr"/>
+          <a:lstStyle/>
+          <a:p>
+            <a:pPr algn="ctr"/>
+          </a:p>
+        </p:txBody>
+      </p:sp>
+      <p:sp>
+        <p:nvSpPr>
+          <p:cNvPr id="29" name="TextBox 28"/>
+          <p:cNvSpPr txBox="1"/>
+          <p:nvPr/>
+        </p:nvSpPr>
+        <p:spPr>
+          <a:xfrm>
+            <a:off x="932688" y="4005072"/>
+            <a:ext cx="438912" cy="420624"/>
+          </a:xfrm>
+          <a:prstGeom prst="rect">
+            <a:avLst/>
+          </a:prstGeom>
+          <a:noFill/>
+        </p:spPr>
+        <p:txBody>
+          <a:bodyPr wrap="square" anchor="ctr">
+            <a:spAutoFit/>
+          </a:bodyPr>
+          <a:lstStyle/>
+          <a:p>
+            <a:pPr algn="ctr"/>
+            <a:r>
+              <a:rPr sz="1400" b="1">
+                <a:solidFill>
+                  <a:srgbClr val="FFFFFF"/>
+                </a:solidFill>
+                <a:latin typeface="Arial"/>
+              </a:rPr>
+              <a:t>4</a:t>
+            </a:r>
+          </a:p>
+        </p:txBody>
+      </p:sp>
+      <p:sp>
+        <p:nvSpPr>
+          <p:cNvPr id="30" name="TextBox 29"/>
+          <p:cNvSpPr txBox="1"/>
+          <p:nvPr/>
+        </p:nvSpPr>
+        <p:spPr>
+          <a:xfrm>
+            <a:off x="1536192" y="3959352"/>
+            <a:ext cx="2414016" cy="329184"/>
+          </a:xfrm>
+          <a:prstGeom prst="rect">
+            <a:avLst/>
+          </a:prstGeom>
+          <a:noFill/>
+        </p:spPr>
+        <p:txBody>
+          <a:bodyPr wrap="square" anchor="t">
+            <a:spAutoFit/>
+          </a:bodyPr>
+          <a:lstStyle/>
+          <a:p>
+            <a:pPr algn="l"/>
+            <a:r>
+              <a:rPr sz="1400" b="1">
+                <a:solidFill>
+                  <a:srgbClr val="F59E0B"/>
+                </a:solidFill>
+                <a:latin typeface="Arial"/>
+              </a:rPr>
+              <a:t>Access</a:t>
+            </a:r>
+          </a:p>
+        </p:txBody>
+      </p:sp>
+      <p:sp>
+        <p:nvSpPr>
+          <p:cNvPr id="31" name="TextBox 30"/>
+          <p:cNvSpPr txBox="1"/>
+          <p:nvPr/>
+        </p:nvSpPr>
+        <p:spPr>
+          <a:xfrm>
+            <a:off x="1536192" y="4343400"/>
+            <a:ext cx="2414016" cy="1005839"/>
+          </a:xfrm>
+          <a:prstGeom prst="rect">
+            <a:avLst/>
+          </a:prstGeom>
+          <a:noFill/>
+        </p:spPr>
+        <p:txBody>
+          <a:bodyPr wrap="square" anchor="t">
+            <a:spAutoFit/>
+          </a:bodyPr>
+          <a:lstStyle/>
+          <a:p>
+            <a:pPr algn="l"/>
+            <a:r>
+              <a:rPr sz="1150" b="0">
+                <a:solidFill>
+                  <a:srgbClr val="161B26"/>
+                </a:solidFill>
+                <a:latin typeface="Arial"/>
+              </a:rPr>
+              <a:t>Reading order, contrast, labels and alt text are checked.</a:t>
+            </a:r>
+          </a:p>
+        </p:txBody>
+      </p:sp>
+      <p:sp>
+        <p:nvSpPr>
+          <p:cNvPr id="32" name="Rounded Rectangle 31"/>
+          <p:cNvSpPr/>
+          <p:nvPr/>
+        </p:nvSpPr>
+        <p:spPr>
+          <a:xfrm>
+            <a:off x="4315968" y="3776472"/>
+            <a:ext cx="3401568" cy="1719072"/>
+          </a:xfrm>
+          <a:prstGeom prst="roundRect">
+            <a:avLst/>
+          </a:prstGeom>
+          <a:solidFill>
+            <a:srgbClr val="F5F8FC"/>
+          </a:solidFill>
+          <a:ln>
+            <a:solidFill>
+              <a:srgbClr val="E2E8F0"/>
+            </a:solidFill>
+          </a:ln>
+        </p:spPr>
+        <p:style>
+          <a:lnRef idx="1">
+            <a:schemeClr val="accent1"/>
+          </a:lnRef>
+          <a:fillRef idx="3">
+            <a:schemeClr val="accent1"/>
+          </a:fillRef>
+          <a:effectRef idx="2">
+            <a:schemeClr val="accent1"/>
+          </a:effectRef>
+          <a:fontRef idx="minor">
+            <a:schemeClr val="lt1"/>
+          </a:fontRef>
+        </p:style>
+        <p:txBody>
+          <a:bodyPr rtlCol="0" anchor="ctr"/>
+          <a:lstStyle/>
+          <a:p>
+            <a:pPr algn="ctr"/>
+          </a:p>
+        </p:txBody>
+      </p:sp>
+      <p:sp>
+        <p:nvSpPr>
+          <p:cNvPr id="33" name="Rectangle 32"/>
+          <p:cNvSpPr/>
+          <p:nvPr/>
+        </p:nvSpPr>
+        <p:spPr>
+          <a:xfrm>
+            <a:off x="4315968" y="3776472"/>
+            <a:ext cx="73152" cy="1719072"/>
+          </a:xfrm>
+          <a:prstGeom prst="rect">
             <a:avLst/>
           </a:prstGeom>
           <a:solidFill>
@@ -7646,14 +8172,59 @@
       </p:sp>
       <p:sp>
         <p:nvSpPr>
-          <p:cNvPr id="9" name="TextBox 8"/>
+          <p:cNvPr id="34" name="Rounded Rectangle 33"/>
+          <p:cNvSpPr/>
+          <p:nvPr/>
+        </p:nvSpPr>
+        <p:spPr>
+          <a:xfrm>
+            <a:off x="4517136" y="3995928"/>
+            <a:ext cx="438912" cy="438912"/>
+          </a:xfrm>
+          <a:prstGeom prst="roundRect">
+            <a:avLst/>
+          </a:prstGeom>
+          <a:solidFill>
+            <a:srgbClr val="1F6FEB"/>
+          </a:solidFill>
+          <a:ln>
+            <a:solidFill>
+              <a:srgbClr val="1F6FEB"/>
+            </a:solidFill>
+          </a:ln>
+        </p:spPr>
+        <p:style>
+          <a:lnRef idx="1">
+            <a:schemeClr val="accent1"/>
+          </a:lnRef>
+          <a:fillRef idx="3">
+            <a:schemeClr val="accent1"/>
+          </a:fillRef>
+          <a:effectRef idx="2">
+            <a:schemeClr val="accent1"/>
+          </a:effectRef>
+          <a:fontRef idx="minor">
+            <a:schemeClr val="lt1"/>
+          </a:fontRef>
+        </p:style>
+        <p:txBody>
+          <a:bodyPr rtlCol="0" anchor="ctr"/>
+          <a:lstStyle/>
+          <a:p>
+            <a:pPr algn="ctr"/>
+          </a:p>
+        </p:txBody>
+      </p:sp>
+      <p:sp>
+        <p:nvSpPr>
+          <p:cNvPr id="35" name="TextBox 34"/>
           <p:cNvSpPr txBox="1"/>
           <p:nvPr/>
         </p:nvSpPr>
         <p:spPr>
           <a:xfrm>
-            <a:off x="1051560" y="2011680"/>
-            <a:ext cx="10058400" cy="566928"/>
+            <a:off x="4517136" y="4005072"/>
+            <a:ext cx="438912" cy="420624"/>
           </a:xfrm>
           <a:prstGeom prst="rect">
             <a:avLst/>
@@ -7668,27 +8239,97 @@
           <a:p>
             <a:pPr algn="ctr"/>
             <a:r>
-              <a:rPr sz="1900" b="1">
+              <a:rPr sz="1400" b="1">
                 <a:solidFill>
                   <a:srgbClr val="FFFFFF"/>
                 </a:solidFill>
                 <a:latin typeface="Arial"/>
               </a:rPr>
-              <a:t>Two AI layout options, one reviewed final infographic and a prompt/source log</a:t>
-            </a:r>
-          </a:p>
-        </p:txBody>
-      </p:sp>
-      <p:sp>
-        <p:nvSpPr>
-          <p:cNvPr id="10" name="Rounded Rectangle 9"/>
+              <a:t>5</a:t>
+            </a:r>
+          </a:p>
+        </p:txBody>
+      </p:sp>
+      <p:sp>
+        <p:nvSpPr>
+          <p:cNvPr id="36" name="TextBox 35"/>
+          <p:cNvSpPr txBox="1"/>
+          <p:nvPr/>
+        </p:nvSpPr>
+        <p:spPr>
+          <a:xfrm>
+            <a:off x="5120640" y="3959352"/>
+            <a:ext cx="2414016" cy="329184"/>
+          </a:xfrm>
+          <a:prstGeom prst="rect">
+            <a:avLst/>
+          </a:prstGeom>
+          <a:noFill/>
+        </p:spPr>
+        <p:txBody>
+          <a:bodyPr wrap="square" anchor="t">
+            <a:spAutoFit/>
+          </a:bodyPr>
+          <a:lstStyle/>
+          <a:p>
+            <a:pPr algn="l"/>
+            <a:r>
+              <a:rPr sz="1400" b="1">
+                <a:solidFill>
+                  <a:srgbClr val="1F6FEB"/>
+                </a:solidFill>
+                <a:latin typeface="Arial"/>
+              </a:rPr>
+              <a:t>Brand</a:t>
+            </a:r>
+          </a:p>
+        </p:txBody>
+      </p:sp>
+      <p:sp>
+        <p:nvSpPr>
+          <p:cNvPr id="37" name="TextBox 36"/>
+          <p:cNvSpPr txBox="1"/>
+          <p:nvPr/>
+        </p:nvSpPr>
+        <p:spPr>
+          <a:xfrm>
+            <a:off x="5120640" y="4343400"/>
+            <a:ext cx="2414016" cy="1005839"/>
+          </a:xfrm>
+          <a:prstGeom prst="rect">
+            <a:avLst/>
+          </a:prstGeom>
+          <a:noFill/>
+        </p:spPr>
+        <p:txBody>
+          <a:bodyPr wrap="square" anchor="t">
+            <a:spAutoFit/>
+          </a:bodyPr>
+          <a:lstStyle/>
+          <a:p>
+            <a:pPr algn="l"/>
+            <a:r>
+              <a:rPr sz="1150" b="0">
+                <a:solidFill>
+                  <a:srgbClr val="161B26"/>
+                </a:solidFill>
+                <a:latin typeface="Arial"/>
+              </a:rPr>
+              <a:t>The approved master, voice and assets are applied.</a:t>
+            </a:r>
+          </a:p>
+        </p:txBody>
+      </p:sp>
+      <p:sp>
+        <p:nvSpPr>
+          <p:cNvPr id="38" name="Rounded Rectangle 37"/>
           <p:cNvSpPr/>
           <p:nvPr/>
         </p:nvSpPr>
         <p:spPr>
           <a:xfrm>
-            <a:off x="777240" y="3154680"/>
-            <a:ext cx="5074920" cy="749808"/>
+            <a:off x="7900416" y="3776472"/>
+            <a:ext cx="3401568" cy="1719072"/>
           </a:xfrm>
           <a:prstGeom prst="roundRect">
             <a:avLst/>
@@ -7726,14 +8367,14 @@
       </p:sp>
       <p:sp>
         <p:nvSpPr>
-          <p:cNvPr id="11" name="Rectangle 10"/>
+          <p:cNvPr id="39" name="Rectangle 38"/>
           <p:cNvSpPr/>
           <p:nvPr/>
         </p:nvSpPr>
         <p:spPr>
           <a:xfrm>
-            <a:off x="777240" y="3154680"/>
-            <a:ext cx="73152" cy="749808"/>
+            <a:off x="7900416" y="3776472"/>
+            <a:ext cx="73152" cy="1719072"/>
           </a:xfrm>
           <a:prstGeom prst="rect">
             <a:avLst/>
@@ -7771,13 +8412,13 @@
       </p:sp>
       <p:sp>
         <p:nvSpPr>
-          <p:cNvPr id="12" name="Rounded Rectangle 11"/>
+          <p:cNvPr id="40" name="Rounded Rectangle 39"/>
           <p:cNvSpPr/>
           <p:nvPr/>
         </p:nvSpPr>
         <p:spPr>
           <a:xfrm>
-            <a:off x="978408" y="3374136"/>
+            <a:off x="8101584" y="3995928"/>
             <a:ext cx="438912" cy="438912"/>
           </a:xfrm>
           <a:prstGeom prst="roundRect">
@@ -7816,13 +8457,13 @@
       </p:sp>
       <p:sp>
         <p:nvSpPr>
-          <p:cNvPr id="13" name="TextBox 12"/>
+          <p:cNvPr id="41" name="TextBox 40"/>
           <p:cNvSpPr txBox="1"/>
           <p:nvPr/>
         </p:nvSpPr>
         <p:spPr>
           <a:xfrm>
-            <a:off x="978408" y="3383280"/>
+            <a:off x="8101584" y="4005072"/>
             <a:ext cx="438912" cy="420624"/>
           </a:xfrm>
           <a:prstGeom prst="rect">
@@ -7844,21 +8485,21 @@
                 </a:solidFill>
                 <a:latin typeface="Arial"/>
               </a:rPr>
-              <a:t>1</a:t>
-            </a:r>
-          </a:p>
-        </p:txBody>
-      </p:sp>
-      <p:sp>
-        <p:nvSpPr>
-          <p:cNvPr id="14" name="TextBox 13"/>
+              <a:t>6</a:t>
+            </a:r>
+          </a:p>
+        </p:txBody>
+      </p:sp>
+      <p:sp>
+        <p:nvSpPr>
+          <p:cNvPr id="42" name="TextBox 41"/>
           <p:cNvSpPr txBox="1"/>
           <p:nvPr/>
         </p:nvSpPr>
         <p:spPr>
           <a:xfrm>
-            <a:off x="1581912" y="3337560"/>
-            <a:ext cx="4087368" cy="329184"/>
+            <a:off x="8705088" y="3959352"/>
+            <a:ext cx="2414016" cy="329184"/>
           </a:xfrm>
           <a:prstGeom prst="rect">
             <a:avLst/>
@@ -7879,21 +8520,21 @@
                 </a:solidFill>
                 <a:latin typeface="Arial"/>
               </a:rPr>
-              <a:t>CHECK</a:t>
-            </a:r>
-          </a:p>
-        </p:txBody>
-      </p:sp>
-      <p:sp>
-        <p:nvSpPr>
-          <p:cNvPr id="15" name="TextBox 14"/>
+              <a:t>Owner</a:t>
+            </a:r>
+          </a:p>
+        </p:txBody>
+      </p:sp>
+      <p:sp>
+        <p:nvSpPr>
+          <p:cNvPr id="43" name="TextBox 42"/>
           <p:cNvSpPr txBox="1"/>
           <p:nvPr/>
         </p:nvSpPr>
         <p:spPr>
           <a:xfrm>
-            <a:off x="1581912" y="3721608"/>
-            <a:ext cx="4087368" cy="36575"/>
+            <a:off x="8705088" y="4343400"/>
+            <a:ext cx="2414016" cy="1005839"/>
           </a:xfrm>
           <a:prstGeom prst="rect">
             <a:avLst/>
@@ -7914,27 +8555,205 @@
                 </a:solidFill>
                 <a:latin typeface="Arial"/>
               </a:rPr>
-              <a:t>Prompt names audience, objective, data and constraints</a:t>
-            </a:r>
-          </a:p>
-        </p:txBody>
-      </p:sp>
-      <p:sp>
-        <p:nvSpPr>
-          <p:cNvPr id="16" name="Rounded Rectangle 15"/>
+              <a:t>A named human approves and remains accountable.</a:t>
+            </a:r>
+          </a:p>
+        </p:txBody>
+      </p:sp>
+    </p:spTree>
+  </p:cSld>
+  <p:clrMapOvr>
+    <a:masterClrMapping/>
+  </p:clrMapOvr>
+</p:sld>
+</file>
+
+<file path=ppt/slides/slide6.xml><?xml version="1.0" encoding="utf-8"?>
+<p:sld xmlns:a="http://schemas.openxmlformats.org/drawingml/2006/main" xmlns:p="http://schemas.openxmlformats.org/presentationml/2006/main" xmlns:r="http://schemas.openxmlformats.org/officeDocument/2006/relationships">
+  <p:cSld>
+    <p:spTree>
+      <p:nvGrpSpPr>
+        <p:cNvPr id="1" name=""/>
+        <p:cNvGrpSpPr/>
+        <p:nvPr/>
+      </p:nvGrpSpPr>
+      <p:grpSpPr/>
+      <p:sp>
+        <p:nvSpPr>
+          <p:cNvPr id="2" name="Rectangle 1"/>
           <p:cNvSpPr/>
           <p:nvPr/>
         </p:nvSpPr>
         <p:spPr>
           <a:xfrm>
-            <a:off x="6126479" y="3154680"/>
-            <a:ext cx="5074920" cy="749808"/>
-          </a:xfrm>
-          <a:prstGeom prst="roundRect">
-            <a:avLst/>
-          </a:prstGeom>
-          <a:solidFill>
-            <a:srgbClr val="F5F8FC"/>
+            <a:off x="0" y="0"/>
+            <a:ext cx="12191695" cy="6858000"/>
+          </a:xfrm>
+          <a:prstGeom prst="rect">
+            <a:avLst/>
+          </a:prstGeom>
+          <a:solidFill>
+            <a:srgbClr val="FFFFFF"/>
+          </a:solidFill>
+          <a:ln>
+            <a:solidFill>
+              <a:srgbClr val="FFFFFF"/>
+            </a:solidFill>
+          </a:ln>
+        </p:spPr>
+        <p:style>
+          <a:lnRef idx="1">
+            <a:schemeClr val="accent1"/>
+          </a:lnRef>
+          <a:fillRef idx="3">
+            <a:schemeClr val="accent1"/>
+          </a:fillRef>
+          <a:effectRef idx="2">
+            <a:schemeClr val="accent1"/>
+          </a:effectRef>
+          <a:fontRef idx="minor">
+            <a:schemeClr val="lt1"/>
+          </a:fontRef>
+        </p:style>
+        <p:txBody>
+          <a:bodyPr rtlCol="0" anchor="ctr"/>
+          <a:lstStyle/>
+          <a:p>
+            <a:pPr algn="ctr"/>
+          </a:p>
+        </p:txBody>
+      </p:sp>
+      <p:sp>
+        <p:nvSpPr>
+          <p:cNvPr id="3" name="Rectangle 2"/>
+          <p:cNvSpPr/>
+          <p:nvPr/>
+        </p:nvSpPr>
+        <p:spPr>
+          <a:xfrm>
+            <a:off x="0" y="0"/>
+            <a:ext cx="164592" cy="6858000"/>
+          </a:xfrm>
+          <a:prstGeom prst="rect">
+            <a:avLst/>
+          </a:prstGeom>
+          <a:solidFill>
+            <a:srgbClr val="1F6FEB"/>
+          </a:solidFill>
+          <a:ln>
+            <a:solidFill>
+              <a:srgbClr val="1F6FEB"/>
+            </a:solidFill>
+          </a:ln>
+        </p:spPr>
+        <p:style>
+          <a:lnRef idx="1">
+            <a:schemeClr val="accent1"/>
+          </a:lnRef>
+          <a:fillRef idx="3">
+            <a:schemeClr val="accent1"/>
+          </a:fillRef>
+          <a:effectRef idx="2">
+            <a:schemeClr val="accent1"/>
+          </a:effectRef>
+          <a:fontRef idx="minor">
+            <a:schemeClr val="lt1"/>
+          </a:fontRef>
+        </p:style>
+        <p:txBody>
+          <a:bodyPr rtlCol="0" anchor="ctr"/>
+          <a:lstStyle/>
+          <a:p>
+            <a:pPr algn="ctr"/>
+          </a:p>
+        </p:txBody>
+      </p:sp>
+      <p:sp>
+        <p:nvSpPr>
+          <p:cNvPr id="4" name="TextBox 3"/>
+          <p:cNvSpPr txBox="1"/>
+          <p:nvPr/>
+        </p:nvSpPr>
+        <p:spPr>
+          <a:xfrm>
+            <a:off x="658368" y="384048"/>
+            <a:ext cx="10789920" cy="320040"/>
+          </a:xfrm>
+          <a:prstGeom prst="rect">
+            <a:avLst/>
+          </a:prstGeom>
+          <a:noFill/>
+        </p:spPr>
+        <p:txBody>
+          <a:bodyPr wrap="square" anchor="t">
+            <a:spAutoFit/>
+          </a:bodyPr>
+          <a:lstStyle/>
+          <a:p>
+            <a:pPr algn="l"/>
+            <a:r>
+              <a:rPr sz="1100" b="1">
+                <a:solidFill>
+                  <a:srgbClr val="1F6FEB"/>
+                </a:solidFill>
+                <a:latin typeface="Arial"/>
+              </a:rPr>
+              <a:t>ACTIVITY 06 · ACCEPTANCE</a:t>
+            </a:r>
+          </a:p>
+        </p:txBody>
+      </p:sp>
+      <p:sp>
+        <p:nvSpPr>
+          <p:cNvPr id="5" name="TextBox 4"/>
+          <p:cNvSpPr txBox="1"/>
+          <p:nvPr/>
+        </p:nvSpPr>
+        <p:spPr>
+          <a:xfrm>
+            <a:off x="658368" y="749808"/>
+            <a:ext cx="10789920" cy="658368"/>
+          </a:xfrm>
+          <a:prstGeom prst="rect">
+            <a:avLst/>
+          </a:prstGeom>
+          <a:noFill/>
+        </p:spPr>
+        <p:txBody>
+          <a:bodyPr wrap="square" anchor="t">
+            <a:spAutoFit/>
+          </a:bodyPr>
+          <a:lstStyle/>
+          <a:p>
+            <a:pPr algn="l"/>
+            <a:r>
+              <a:rPr sz="2700" b="1">
+                <a:solidFill>
+                  <a:srgbClr val="161B26"/>
+                </a:solidFill>
+                <a:latin typeface="Arial"/>
+              </a:rPr>
+              <a:t>What Good Looks Like</a:t>
+            </a:r>
+          </a:p>
+        </p:txBody>
+      </p:sp>
+      <p:sp>
+        <p:nvSpPr>
+          <p:cNvPr id="6" name="Rectangle 5"/>
+          <p:cNvSpPr/>
+          <p:nvPr/>
+        </p:nvSpPr>
+        <p:spPr>
+          <a:xfrm>
+            <a:off x="658368" y="1444752"/>
+            <a:ext cx="10881360" cy="18288"/>
+          </a:xfrm>
+          <a:prstGeom prst="rect">
+            <a:avLst/>
+          </a:prstGeom>
+          <a:solidFill>
+            <a:srgbClr val="E2E8F0"/>
           </a:solidFill>
           <a:ln>
             <a:solidFill>
@@ -7966,13 +8785,173 @@
       </p:sp>
       <p:sp>
         <p:nvSpPr>
-          <p:cNvPr id="17" name="Rectangle 16"/>
+          <p:cNvPr id="7" name="TextBox 6"/>
+          <p:cNvSpPr txBox="1"/>
+          <p:nvPr/>
+        </p:nvSpPr>
+        <p:spPr>
+          <a:xfrm>
+            <a:off x="658368" y="6473952"/>
+            <a:ext cx="9875520" cy="201168"/>
+          </a:xfrm>
+          <a:prstGeom prst="rect">
+            <a:avLst/>
+          </a:prstGeom>
+          <a:noFill/>
+        </p:spPr>
+        <p:txBody>
+          <a:bodyPr wrap="square" anchor="t">
+            <a:spAutoFit/>
+          </a:bodyPr>
+          <a:lstStyle/>
+          <a:p>
+            <a:pPr algn="l"/>
+            <a:r>
+              <a:rPr sz="800" b="0">
+                <a:solidFill>
+                  <a:srgbClr val="5B6372"/>
+                </a:solidFill>
+                <a:latin typeface="Arial"/>
+              </a:rPr>
+              <a:t>TGS-2026064178 · ACTIVITY PRACTICE · Tertiary Infotech Academy Pte Ltd</a:t>
+            </a:r>
+          </a:p>
+        </p:txBody>
+      </p:sp>
+      <p:sp>
+        <p:nvSpPr>
+          <p:cNvPr id="8" name="Rounded Rectangle 7"/>
           <p:cNvSpPr/>
           <p:nvPr/>
         </p:nvSpPr>
         <p:spPr>
           <a:xfrm>
-            <a:off x="6126479" y="3154680"/>
+            <a:off x="749808" y="1810512"/>
+            <a:ext cx="10652760" cy="1005840"/>
+          </a:xfrm>
+          <a:prstGeom prst="roundRect">
+            <a:avLst/>
+          </a:prstGeom>
+          <a:solidFill>
+            <a:srgbClr val="1F6FEB"/>
+          </a:solidFill>
+          <a:ln>
+            <a:solidFill>
+              <a:srgbClr val="1F6FEB"/>
+            </a:solidFill>
+          </a:ln>
+        </p:spPr>
+        <p:style>
+          <a:lnRef idx="1">
+            <a:schemeClr val="accent1"/>
+          </a:lnRef>
+          <a:fillRef idx="3">
+            <a:schemeClr val="accent1"/>
+          </a:fillRef>
+          <a:effectRef idx="2">
+            <a:schemeClr val="accent1"/>
+          </a:effectRef>
+          <a:fontRef idx="minor">
+            <a:schemeClr val="lt1"/>
+          </a:fontRef>
+        </p:style>
+        <p:txBody>
+          <a:bodyPr rtlCol="0" anchor="ctr"/>
+          <a:lstStyle/>
+          <a:p>
+            <a:pPr algn="ctr"/>
+          </a:p>
+        </p:txBody>
+      </p:sp>
+      <p:sp>
+        <p:nvSpPr>
+          <p:cNvPr id="9" name="TextBox 8"/>
+          <p:cNvSpPr txBox="1"/>
+          <p:nvPr/>
+        </p:nvSpPr>
+        <p:spPr>
+          <a:xfrm>
+            <a:off x="1051560" y="2011680"/>
+            <a:ext cx="10058400" cy="566928"/>
+          </a:xfrm>
+          <a:prstGeom prst="rect">
+            <a:avLst/>
+          </a:prstGeom>
+          <a:noFill/>
+        </p:spPr>
+        <p:txBody>
+          <a:bodyPr wrap="square" anchor="ctr">
+            <a:spAutoFit/>
+          </a:bodyPr>
+          <a:lstStyle/>
+          <a:p>
+            <a:pPr algn="ctr"/>
+            <a:r>
+              <a:rPr sz="1900" b="1">
+                <a:solidFill>
+                  <a:srgbClr val="FFFFFF"/>
+                </a:solidFill>
+                <a:latin typeface="Arial"/>
+              </a:rPr>
+              <a:t>A Microsoft output, Gemini Notebook infographic and downloaded PPTX or PDF, comparison scorecard, reviewed final PowerPoint and prompt/source log</a:t>
+            </a:r>
+          </a:p>
+        </p:txBody>
+      </p:sp>
+      <p:sp>
+        <p:nvSpPr>
+          <p:cNvPr id="10" name="Rounded Rectangle 9"/>
+          <p:cNvSpPr/>
+          <p:nvPr/>
+        </p:nvSpPr>
+        <p:spPr>
+          <a:xfrm>
+            <a:off x="777240" y="3154680"/>
+            <a:ext cx="5074920" cy="749808"/>
+          </a:xfrm>
+          <a:prstGeom prst="roundRect">
+            <a:avLst/>
+          </a:prstGeom>
+          <a:solidFill>
+            <a:srgbClr val="F5F8FC"/>
+          </a:solidFill>
+          <a:ln>
+            <a:solidFill>
+              <a:srgbClr val="E2E8F0"/>
+            </a:solidFill>
+          </a:ln>
+        </p:spPr>
+        <p:style>
+          <a:lnRef idx="1">
+            <a:schemeClr val="accent1"/>
+          </a:lnRef>
+          <a:fillRef idx="3">
+            <a:schemeClr val="accent1"/>
+          </a:fillRef>
+          <a:effectRef idx="2">
+            <a:schemeClr val="accent1"/>
+          </a:effectRef>
+          <a:fontRef idx="minor">
+            <a:schemeClr val="lt1"/>
+          </a:fontRef>
+        </p:style>
+        <p:txBody>
+          <a:bodyPr rtlCol="0" anchor="ctr"/>
+          <a:lstStyle/>
+          <a:p>
+            <a:pPr algn="ctr"/>
+          </a:p>
+        </p:txBody>
+      </p:sp>
+      <p:sp>
+        <p:nvSpPr>
+          <p:cNvPr id="11" name="Rectangle 10"/>
+          <p:cNvSpPr/>
+          <p:nvPr/>
+        </p:nvSpPr>
+        <p:spPr>
+          <a:xfrm>
+            <a:off x="777240" y="3154680"/>
             <a:ext cx="73152" cy="749808"/>
           </a:xfrm>
           <a:prstGeom prst="rect">
@@ -8011,13 +8990,13 @@
       </p:sp>
       <p:sp>
         <p:nvSpPr>
-          <p:cNvPr id="18" name="Rounded Rectangle 17"/>
+          <p:cNvPr id="12" name="Rounded Rectangle 11"/>
           <p:cNvSpPr/>
           <p:nvPr/>
         </p:nvSpPr>
         <p:spPr>
           <a:xfrm>
-            <a:off x="6327647" y="3374136"/>
+            <a:off x="978408" y="3374136"/>
             <a:ext cx="438912" cy="438912"/>
           </a:xfrm>
           <a:prstGeom prst="roundRect">
@@ -8056,13 +9035,13 @@
       </p:sp>
       <p:sp>
         <p:nvSpPr>
-          <p:cNvPr id="19" name="TextBox 18"/>
+          <p:cNvPr id="13" name="TextBox 12"/>
           <p:cNvSpPr txBox="1"/>
           <p:nvPr/>
         </p:nvSpPr>
         <p:spPr>
           <a:xfrm>
-            <a:off x="6327647" y="3383280"/>
+            <a:off x="978408" y="3383280"/>
             <a:ext cx="438912" cy="420624"/>
           </a:xfrm>
           <a:prstGeom prst="rect">
@@ -8084,20 +9063,20 @@
                 </a:solidFill>
                 <a:latin typeface="Arial"/>
               </a:rPr>
-              <a:t>2</a:t>
-            </a:r>
-          </a:p>
-        </p:txBody>
-      </p:sp>
-      <p:sp>
-        <p:nvSpPr>
-          <p:cNvPr id="20" name="TextBox 19"/>
+              <a:t>1</a:t>
+            </a:r>
+          </a:p>
+        </p:txBody>
+      </p:sp>
+      <p:sp>
+        <p:nvSpPr>
+          <p:cNvPr id="14" name="TextBox 13"/>
           <p:cNvSpPr txBox="1"/>
           <p:nvPr/>
         </p:nvSpPr>
         <p:spPr>
           <a:xfrm>
-            <a:off x="6931151" y="3337560"/>
+            <a:off x="1581912" y="3337560"/>
             <a:ext cx="4087368" cy="329184"/>
           </a:xfrm>
           <a:prstGeom prst="rect">
@@ -8126,13 +9105,13 @@
       </p:sp>
       <p:sp>
         <p:nvSpPr>
-          <p:cNvPr id="21" name="TextBox 20"/>
+          <p:cNvPr id="15" name="TextBox 14"/>
           <p:cNvSpPr txBox="1"/>
           <p:nvPr/>
         </p:nvSpPr>
         <p:spPr>
           <a:xfrm>
-            <a:off x="6931151" y="3721608"/>
+            <a:off x="1581912" y="3721608"/>
             <a:ext cx="4087368" cy="36575"/>
           </a:xfrm>
           <a:prstGeom prst="rect">
@@ -8154,20 +9133,20 @@
                 </a:solidFill>
                 <a:latin typeface="Arial"/>
               </a:rPr>
-              <a:t>Every claim matches the source workbook</a:t>
-            </a:r>
-          </a:p>
-        </p:txBody>
-      </p:sp>
-      <p:sp>
-        <p:nvSpPr>
-          <p:cNvPr id="22" name="Rounded Rectangle 21"/>
+              <a:t>Both tools used the same approved brief and source scope</a:t>
+            </a:r>
+          </a:p>
+        </p:txBody>
+      </p:sp>
+      <p:sp>
+        <p:nvSpPr>
+          <p:cNvPr id="16" name="Rounded Rectangle 15"/>
           <p:cNvSpPr/>
           <p:nvPr/>
         </p:nvSpPr>
         <p:spPr>
           <a:xfrm>
-            <a:off x="777240" y="4096512"/>
+            <a:off x="6126479" y="3154680"/>
             <a:ext cx="5074920" cy="749808"/>
           </a:xfrm>
           <a:prstGeom prst="roundRect">
@@ -8206,13 +9185,13 @@
       </p:sp>
       <p:sp>
         <p:nvSpPr>
-          <p:cNvPr id="23" name="Rectangle 22"/>
+          <p:cNvPr id="17" name="Rectangle 16"/>
           <p:cNvSpPr/>
           <p:nvPr/>
         </p:nvSpPr>
         <p:spPr>
           <a:xfrm>
-            <a:off x="777240" y="4096512"/>
+            <a:off x="6126479" y="3154680"/>
             <a:ext cx="73152" cy="749808"/>
           </a:xfrm>
           <a:prstGeom prst="rect">
@@ -8251,13 +9230,13 @@
       </p:sp>
       <p:sp>
         <p:nvSpPr>
-          <p:cNvPr id="24" name="Rounded Rectangle 23"/>
+          <p:cNvPr id="18" name="Rounded Rectangle 17"/>
           <p:cNvSpPr/>
           <p:nvPr/>
         </p:nvSpPr>
         <p:spPr>
           <a:xfrm>
-            <a:off x="978408" y="4315968"/>
+            <a:off x="6327647" y="3374136"/>
             <a:ext cx="438912" cy="438912"/>
           </a:xfrm>
           <a:prstGeom prst="roundRect">
@@ -8296,13 +9275,13 @@
       </p:sp>
       <p:sp>
         <p:nvSpPr>
-          <p:cNvPr id="25" name="TextBox 24"/>
+          <p:cNvPr id="19" name="TextBox 18"/>
           <p:cNvSpPr txBox="1"/>
           <p:nvPr/>
         </p:nvSpPr>
         <p:spPr>
           <a:xfrm>
-            <a:off x="978408" y="4325112"/>
+            <a:off x="6327647" y="3383280"/>
             <a:ext cx="438912" cy="420624"/>
           </a:xfrm>
           <a:prstGeom prst="rect">
@@ -8324,20 +9303,20 @@
                 </a:solidFill>
                 <a:latin typeface="Arial"/>
               </a:rPr>
-              <a:t>3</a:t>
-            </a:r>
-          </a:p>
-        </p:txBody>
-      </p:sp>
-      <p:sp>
-        <p:nvSpPr>
-          <p:cNvPr id="26" name="TextBox 25"/>
+              <a:t>2</a:t>
+            </a:r>
+          </a:p>
+        </p:txBody>
+      </p:sp>
+      <p:sp>
+        <p:nvSpPr>
+          <p:cNvPr id="20" name="TextBox 19"/>
           <p:cNvSpPr txBox="1"/>
           <p:nvPr/>
         </p:nvSpPr>
         <p:spPr>
           <a:xfrm>
-            <a:off x="1581912" y="4279392"/>
+            <a:off x="6931151" y="3337560"/>
             <a:ext cx="4087368" cy="329184"/>
           </a:xfrm>
           <a:prstGeom prst="rect">
@@ -8366,13 +9345,13 @@
       </p:sp>
       <p:sp>
         <p:nvSpPr>
-          <p:cNvPr id="27" name="TextBox 26"/>
+          <p:cNvPr id="21" name="TextBox 20"/>
           <p:cNvSpPr txBox="1"/>
           <p:nvPr/>
         </p:nvSpPr>
         <p:spPr>
           <a:xfrm>
-            <a:off x="1581912" y="4663440"/>
+            <a:off x="6931151" y="3721608"/>
             <a:ext cx="4087368" cy="36575"/>
           </a:xfrm>
           <a:prstGeom prst="rect">
@@ -8394,20 +9373,20 @@
                 </a:solidFill>
                 <a:latin typeface="Arial"/>
               </a:rPr>
-              <a:t>Critical evidence is editable</a:t>
-            </a:r>
-          </a:p>
-        </p:txBody>
-      </p:sp>
-      <p:sp>
-        <p:nvSpPr>
-          <p:cNvPr id="28" name="Rounded Rectangle 27"/>
+              <a:t>Gemini Notebook deck was preserved as PPTX where available or PDF with a documented rebuild route</a:t>
+            </a:r>
+          </a:p>
+        </p:txBody>
+      </p:sp>
+      <p:sp>
+        <p:nvSpPr>
+          <p:cNvPr id="22" name="Rounded Rectangle 21"/>
           <p:cNvSpPr/>
           <p:nvPr/>
         </p:nvSpPr>
         <p:spPr>
           <a:xfrm>
-            <a:off x="6126479" y="4096512"/>
+            <a:off x="777240" y="4096512"/>
             <a:ext cx="5074920" cy="749808"/>
           </a:xfrm>
           <a:prstGeom prst="roundRect">
@@ -8446,13 +9425,13 @@
       </p:sp>
       <p:sp>
         <p:nvSpPr>
-          <p:cNvPr id="29" name="Rectangle 28"/>
+          <p:cNvPr id="23" name="Rectangle 22"/>
           <p:cNvSpPr/>
           <p:nvPr/>
         </p:nvSpPr>
         <p:spPr>
           <a:xfrm>
-            <a:off x="6126479" y="4096512"/>
+            <a:off x="777240" y="4096512"/>
             <a:ext cx="73152" cy="749808"/>
           </a:xfrm>
           <a:prstGeom prst="rect">
@@ -8491,13 +9470,13 @@
       </p:sp>
       <p:sp>
         <p:nvSpPr>
-          <p:cNvPr id="30" name="Rounded Rectangle 29"/>
+          <p:cNvPr id="24" name="Rounded Rectangle 23"/>
           <p:cNvSpPr/>
           <p:nvPr/>
         </p:nvSpPr>
         <p:spPr>
           <a:xfrm>
-            <a:off x="6327647" y="4315968"/>
+            <a:off x="978408" y="4315968"/>
             <a:ext cx="438912" cy="438912"/>
           </a:xfrm>
           <a:prstGeom prst="roundRect">
@@ -8536,13 +9515,13 @@
       </p:sp>
       <p:sp>
         <p:nvSpPr>
-          <p:cNvPr id="31" name="TextBox 30"/>
+          <p:cNvPr id="25" name="TextBox 24"/>
           <p:cNvSpPr txBox="1"/>
           <p:nvPr/>
         </p:nvSpPr>
         <p:spPr>
           <a:xfrm>
-            <a:off x="6327647" y="4325112"/>
+            <a:off x="978408" y="4325112"/>
             <a:ext cx="438912" cy="420624"/>
           </a:xfrm>
           <a:prstGeom prst="rect">
@@ -8564,20 +9543,20 @@
                 </a:solidFill>
                 <a:latin typeface="Arial"/>
               </a:rPr>
-              <a:t>4</a:t>
-            </a:r>
-          </a:p>
-        </p:txBody>
-      </p:sp>
-      <p:sp>
-        <p:nvSpPr>
-          <p:cNvPr id="32" name="TextBox 31"/>
+              <a:t>3</a:t>
+            </a:r>
+          </a:p>
+        </p:txBody>
+      </p:sp>
+      <p:sp>
+        <p:nvSpPr>
+          <p:cNvPr id="26" name="TextBox 25"/>
           <p:cNvSpPr txBox="1"/>
           <p:nvPr/>
         </p:nvSpPr>
         <p:spPr>
           <a:xfrm>
-            <a:off x="6931151" y="4279392"/>
+            <a:off x="1581912" y="4279392"/>
             <a:ext cx="4087368" cy="329184"/>
           </a:xfrm>
           <a:prstGeom prst="rect">
@@ -8606,13 +9585,13 @@
       </p:sp>
       <p:sp>
         <p:nvSpPr>
-          <p:cNvPr id="33" name="TextBox 32"/>
+          <p:cNvPr id="27" name="TextBox 26"/>
           <p:cNvSpPr txBox="1"/>
           <p:nvPr/>
         </p:nvSpPr>
         <p:spPr>
           <a:xfrm>
-            <a:off x="6931151" y="4663440"/>
+            <a:off x="1581912" y="4663440"/>
             <a:ext cx="4087368" cy="36575"/>
           </a:xfrm>
           <a:prstGeom prst="rect">
@@ -8634,20 +9613,20 @@
                 </a:solidFill>
                 <a:latin typeface="Arial"/>
               </a:rPr>
-              <a:t>Privacy, rights, brand and accessibility are checked</a:t>
-            </a:r>
-          </a:p>
-        </p:txBody>
-      </p:sp>
-      <p:sp>
-        <p:nvSpPr>
-          <p:cNvPr id="34" name="Rounded Rectangle 33"/>
+              <a:t>Every claim matches the source pack</a:t>
+            </a:r>
+          </a:p>
+        </p:txBody>
+      </p:sp>
+      <p:sp>
+        <p:nvSpPr>
+          <p:cNvPr id="28" name="Rounded Rectangle 27"/>
           <p:cNvSpPr/>
           <p:nvPr/>
         </p:nvSpPr>
         <p:spPr>
           <a:xfrm>
-            <a:off x="777240" y="5038344"/>
+            <a:off x="6126479" y="4096512"/>
             <a:ext cx="5074920" cy="749808"/>
           </a:xfrm>
           <a:prstGeom prst="roundRect">
@@ -8686,13 +9665,13 @@
       </p:sp>
       <p:sp>
         <p:nvSpPr>
-          <p:cNvPr id="35" name="Rectangle 34"/>
+          <p:cNvPr id="29" name="Rectangle 28"/>
           <p:cNvSpPr/>
           <p:nvPr/>
         </p:nvSpPr>
         <p:spPr>
           <a:xfrm>
-            <a:off x="777240" y="5038344"/>
+            <a:off x="6126479" y="4096512"/>
             <a:ext cx="73152" cy="749808"/>
           </a:xfrm>
           <a:prstGeom prst="rect">
@@ -8731,13 +9710,13 @@
       </p:sp>
       <p:sp>
         <p:nvSpPr>
-          <p:cNvPr id="36" name="Rounded Rectangle 35"/>
+          <p:cNvPr id="30" name="Rounded Rectangle 29"/>
           <p:cNvSpPr/>
           <p:nvPr/>
         </p:nvSpPr>
         <p:spPr>
           <a:xfrm>
-            <a:off x="978408" y="5257800"/>
+            <a:off x="6327647" y="4315968"/>
             <a:ext cx="438912" cy="438912"/>
           </a:xfrm>
           <a:prstGeom prst="roundRect">
@@ -8776,13 +9755,13 @@
       </p:sp>
       <p:sp>
         <p:nvSpPr>
-          <p:cNvPr id="37" name="TextBox 36"/>
+          <p:cNvPr id="31" name="TextBox 30"/>
           <p:cNvSpPr txBox="1"/>
           <p:nvPr/>
         </p:nvSpPr>
         <p:spPr>
           <a:xfrm>
-            <a:off x="978408" y="5266944"/>
+            <a:off x="6327647" y="4325112"/>
             <a:ext cx="438912" cy="420624"/>
           </a:xfrm>
           <a:prstGeom prst="rect">
@@ -8804,20 +9783,20 @@
                 </a:solidFill>
                 <a:latin typeface="Arial"/>
               </a:rPr>
-              <a:t>5</a:t>
-            </a:r>
-          </a:p>
-        </p:txBody>
-      </p:sp>
-      <p:sp>
-        <p:nvSpPr>
-          <p:cNvPr id="38" name="TextBox 37"/>
+              <a:t>4</a:t>
+            </a:r>
+          </a:p>
+        </p:txBody>
+      </p:sp>
+      <p:sp>
+        <p:nvSpPr>
+          <p:cNvPr id="32" name="TextBox 31"/>
           <p:cNvSpPr txBox="1"/>
           <p:nvPr/>
         </p:nvSpPr>
         <p:spPr>
           <a:xfrm>
-            <a:off x="1581912" y="5221224"/>
+            <a:off x="6931151" y="4279392"/>
             <a:ext cx="4087368" cy="329184"/>
           </a:xfrm>
           <a:prstGeom prst="rect">
@@ -8846,13 +9825,13 @@
       </p:sp>
       <p:sp>
         <p:nvSpPr>
-          <p:cNvPr id="39" name="TextBox 38"/>
+          <p:cNvPr id="33" name="TextBox 32"/>
           <p:cNvSpPr txBox="1"/>
           <p:nvPr/>
         </p:nvSpPr>
         <p:spPr>
           <a:xfrm>
-            <a:off x="1581912" y="5605272"/>
+            <a:off x="6931151" y="4663440"/>
             <a:ext cx="4087368" cy="36575"/>
           </a:xfrm>
           <a:prstGeom prst="rect">
@@ -8874,7 +9853,247 @@
                 </a:solidFill>
                 <a:latin typeface="Arial"/>
               </a:rPr>
-              <a:t>Prompt, human changes, reviewer and owner are recorded</a:t>
+              <a:t>Critical evidence is editable in the final PowerPoint</a:t>
+            </a:r>
+          </a:p>
+        </p:txBody>
+      </p:sp>
+      <p:sp>
+        <p:nvSpPr>
+          <p:cNvPr id="34" name="Rounded Rectangle 33"/>
+          <p:cNvSpPr/>
+          <p:nvPr/>
+        </p:nvSpPr>
+        <p:spPr>
+          <a:xfrm>
+            <a:off x="777240" y="5038344"/>
+            <a:ext cx="5074920" cy="749808"/>
+          </a:xfrm>
+          <a:prstGeom prst="roundRect">
+            <a:avLst/>
+          </a:prstGeom>
+          <a:solidFill>
+            <a:srgbClr val="F5F8FC"/>
+          </a:solidFill>
+          <a:ln>
+            <a:solidFill>
+              <a:srgbClr val="E2E8F0"/>
+            </a:solidFill>
+          </a:ln>
+        </p:spPr>
+        <p:style>
+          <a:lnRef idx="1">
+            <a:schemeClr val="accent1"/>
+          </a:lnRef>
+          <a:fillRef idx="3">
+            <a:schemeClr val="accent1"/>
+          </a:fillRef>
+          <a:effectRef idx="2">
+            <a:schemeClr val="accent1"/>
+          </a:effectRef>
+          <a:fontRef idx="minor">
+            <a:schemeClr val="lt1"/>
+          </a:fontRef>
+        </p:style>
+        <p:txBody>
+          <a:bodyPr rtlCol="0" anchor="ctr"/>
+          <a:lstStyle/>
+          <a:p>
+            <a:pPr algn="ctr"/>
+          </a:p>
+        </p:txBody>
+      </p:sp>
+      <p:sp>
+        <p:nvSpPr>
+          <p:cNvPr id="35" name="Rectangle 34"/>
+          <p:cNvSpPr/>
+          <p:nvPr/>
+        </p:nvSpPr>
+        <p:spPr>
+          <a:xfrm>
+            <a:off x="777240" y="5038344"/>
+            <a:ext cx="73152" cy="749808"/>
+          </a:xfrm>
+          <a:prstGeom prst="rect">
+            <a:avLst/>
+          </a:prstGeom>
+          <a:solidFill>
+            <a:srgbClr val="10B981"/>
+          </a:solidFill>
+          <a:ln>
+            <a:solidFill>
+              <a:srgbClr val="10B981"/>
+            </a:solidFill>
+          </a:ln>
+        </p:spPr>
+        <p:style>
+          <a:lnRef idx="1">
+            <a:schemeClr val="accent1"/>
+          </a:lnRef>
+          <a:fillRef idx="3">
+            <a:schemeClr val="accent1"/>
+          </a:fillRef>
+          <a:effectRef idx="2">
+            <a:schemeClr val="accent1"/>
+          </a:effectRef>
+          <a:fontRef idx="minor">
+            <a:schemeClr val="lt1"/>
+          </a:fontRef>
+        </p:style>
+        <p:txBody>
+          <a:bodyPr rtlCol="0" anchor="ctr"/>
+          <a:lstStyle/>
+          <a:p>
+            <a:pPr algn="ctr"/>
+          </a:p>
+        </p:txBody>
+      </p:sp>
+      <p:sp>
+        <p:nvSpPr>
+          <p:cNvPr id="36" name="Rounded Rectangle 35"/>
+          <p:cNvSpPr/>
+          <p:nvPr/>
+        </p:nvSpPr>
+        <p:spPr>
+          <a:xfrm>
+            <a:off x="978408" y="5257800"/>
+            <a:ext cx="438912" cy="438912"/>
+          </a:xfrm>
+          <a:prstGeom prst="roundRect">
+            <a:avLst/>
+          </a:prstGeom>
+          <a:solidFill>
+            <a:srgbClr val="10B981"/>
+          </a:solidFill>
+          <a:ln>
+            <a:solidFill>
+              <a:srgbClr val="10B981"/>
+            </a:solidFill>
+          </a:ln>
+        </p:spPr>
+        <p:style>
+          <a:lnRef idx="1">
+            <a:schemeClr val="accent1"/>
+          </a:lnRef>
+          <a:fillRef idx="3">
+            <a:schemeClr val="accent1"/>
+          </a:fillRef>
+          <a:effectRef idx="2">
+            <a:schemeClr val="accent1"/>
+          </a:effectRef>
+          <a:fontRef idx="minor">
+            <a:schemeClr val="lt1"/>
+          </a:fontRef>
+        </p:style>
+        <p:txBody>
+          <a:bodyPr rtlCol="0" anchor="ctr"/>
+          <a:lstStyle/>
+          <a:p>
+            <a:pPr algn="ctr"/>
+          </a:p>
+        </p:txBody>
+      </p:sp>
+      <p:sp>
+        <p:nvSpPr>
+          <p:cNvPr id="37" name="TextBox 36"/>
+          <p:cNvSpPr txBox="1"/>
+          <p:nvPr/>
+        </p:nvSpPr>
+        <p:spPr>
+          <a:xfrm>
+            <a:off x="978408" y="5266944"/>
+            <a:ext cx="438912" cy="420624"/>
+          </a:xfrm>
+          <a:prstGeom prst="rect">
+            <a:avLst/>
+          </a:prstGeom>
+          <a:noFill/>
+        </p:spPr>
+        <p:txBody>
+          <a:bodyPr wrap="square" anchor="ctr">
+            <a:spAutoFit/>
+          </a:bodyPr>
+          <a:lstStyle/>
+          <a:p>
+            <a:pPr algn="ctr"/>
+            <a:r>
+              <a:rPr sz="1400" b="1">
+                <a:solidFill>
+                  <a:srgbClr val="FFFFFF"/>
+                </a:solidFill>
+                <a:latin typeface="Arial"/>
+              </a:rPr>
+              <a:t>5</a:t>
+            </a:r>
+          </a:p>
+        </p:txBody>
+      </p:sp>
+      <p:sp>
+        <p:nvSpPr>
+          <p:cNvPr id="38" name="TextBox 37"/>
+          <p:cNvSpPr txBox="1"/>
+          <p:nvPr/>
+        </p:nvSpPr>
+        <p:spPr>
+          <a:xfrm>
+            <a:off x="1581912" y="5221224"/>
+            <a:ext cx="4087368" cy="329184"/>
+          </a:xfrm>
+          <a:prstGeom prst="rect">
+            <a:avLst/>
+          </a:prstGeom>
+          <a:noFill/>
+        </p:spPr>
+        <p:txBody>
+          <a:bodyPr wrap="square" anchor="t">
+            <a:spAutoFit/>
+          </a:bodyPr>
+          <a:lstStyle/>
+          <a:p>
+            <a:pPr algn="l"/>
+            <a:r>
+              <a:rPr sz="1400" b="1">
+                <a:solidFill>
+                  <a:srgbClr val="10B981"/>
+                </a:solidFill>
+                <a:latin typeface="Arial"/>
+              </a:rPr>
+              <a:t>CHECK</a:t>
+            </a:r>
+          </a:p>
+        </p:txBody>
+      </p:sp>
+      <p:sp>
+        <p:nvSpPr>
+          <p:cNvPr id="39" name="TextBox 38"/>
+          <p:cNvSpPr txBox="1"/>
+          <p:nvPr/>
+        </p:nvSpPr>
+        <p:spPr>
+          <a:xfrm>
+            <a:off x="1581912" y="5605272"/>
+            <a:ext cx="4087368" cy="36575"/>
+          </a:xfrm>
+          <a:prstGeom prst="rect">
+            <a:avLst/>
+          </a:prstGeom>
+          <a:noFill/>
+        </p:spPr>
+        <p:txBody>
+          <a:bodyPr wrap="square" anchor="t">
+            <a:spAutoFit/>
+          </a:bodyPr>
+          <a:lstStyle/>
+          <a:p>
+            <a:pPr algn="l"/>
+            <a:r>
+              <a:rPr sz="1150" b="0">
+                <a:solidFill>
+                  <a:srgbClr val="161B26"/>
+                </a:solidFill>
+                <a:latin typeface="Arial"/>
+              </a:rPr>
+              <a:t>Both prompts, human changes, reviewer and owner are recorded</a:t>
             </a:r>
           </a:p>
         </p:txBody>

--- a/activities/Activity-06-Generate-and-Refine-an-AI-Assisted-Infographic/A06-Generate-and-Refine-an-AI-Assisted-Infographic-Sample.pptx
+++ b/activities/Activity-06-Generate-and-Refine-an-AI-Assisted-Infographic/A06-Generate-and-Refine-an-AI-Assisted-Infographic-Sample.pptx
@@ -11,6 +11,7 @@
     <p:sldId id="259" r:id="rId10"/>
     <p:sldId id="260" r:id="rId11"/>
     <p:sldId id="261" r:id="rId12"/>
+    <p:sldId id="262" r:id="rId13"/>
   </p:sldIdLst>
   <p:sldSz cx="12191695" cy="6858000" type="screen4x3"/>
   <p:notesSz cx="6858000" cy="9144000"/>
@@ -3293,7 +3294,7 @@
                 </a:solidFill>
                 <a:latin typeface="Arial"/>
               </a:rPr>
-              <a:t>Compare Microsoft 365 Copilot and Gemini Notebook</a:t>
+              <a:t>Create a Hierarchy Infographic with Microsoft 365 Copilot</a:t>
             </a:r>
           </a:p>
         </p:txBody>
@@ -3443,7 +3444,7 @@
                 </a:solidFill>
                 <a:latin typeface="Arial"/>
               </a:rPr>
-              <a:t>Microsoft 365 Copilot + Gemini Notebook + PowerPoint</a:t>
+              <a:t>Microsoft 365 Copilot app + PowerPoint</a:t>
             </a:r>
           </a:p>
         </p:txBody>
@@ -3906,7 +3907,7 @@
                 </a:solidFill>
                 <a:latin typeface="Arial"/>
               </a:rPr>
-              <a:t>Data analyst</a:t>
+              <a:t>Analyse the evidence</a:t>
             </a:r>
           </a:p>
         </p:txBody>
@@ -3941,7 +3942,7 @@
                 </a:solidFill>
                 <a:latin typeface="Arial"/>
               </a:rPr>
-              <a:t>Using only the attached approved sources, create a source register, identify duplicates or conflicting definitions, clean the table, show formulas or transformations, and return five candidate insights with citations, caveats and a con…</a:t>
+              <a:t>Using only the attached approved source, identify the three strongest patterns, the denominator for each metric, one limitation and one proportionate business action. Cite the source field or row for every number. Do not invent missing…</a:t>
             </a:r>
           </a:p>
         </p:txBody>
@@ -4146,7 +4147,7 @@
                 </a:solidFill>
                 <a:latin typeface="Arial"/>
               </a:rPr>
-              <a:t>Infographic</a:t>
+              <a:t>Create the infographic</a:t>
             </a:r>
           </a:p>
         </p:txBody>
@@ -4181,7 +4182,7 @@
                 </a:solidFill>
                 <a:latin typeface="Arial"/>
               </a:rPr>
-              <a:t>Create a one-page executive infographic for Singapore retail managers. Lead with one decision insight, show three supporting metrics, include a five-stage flow and a source footer. Use a clean professional style, strong hierarchy and n…</a:t>
+              <a:t>Create a one-page [TYPE] infographic about [TOPIC]. Sections: 1. [SECTION ONE] 2. [SECTION TWO] 3. [SECTION THREE] 4. [SECTION FOUR] 5. [SECTION FIVE]. Audience: [AUDIENCE]. Decision: [DECISION]. Style: professional, high contrast, con…</a:t>
             </a:r>
           </a:p>
         </p:txBody>
@@ -4386,7 +4387,7 @@
                 </a:solidFill>
                 <a:latin typeface="Arial"/>
               </a:rPr>
-              <a:t>Text to image</a:t>
+              <a:t>Refine in PowerPoint</a:t>
             </a:r>
           </a:p>
         </p:txBody>
@@ -4421,7 +4422,7 @@
                 </a:solidFill>
                 <a:latin typeface="Arial"/>
               </a:rPr>
-              <a:t>Create a clean vector-like sustainability delivery illustration for a PowerPoint infographic: one electric van, one reusable parcel, a simple route and a feedback symbol. Transparent background, consistent blue/teal/violet/amber palett…</a:t>
+              <a:t>Turn the selected infographic direction into one editable PowerPoint slide. Keep the action title, labels, numbers, chart or process, source footer and accessibility notes editable. Remove decoration that does not support the message. …</a:t>
             </a:r>
           </a:p>
         </p:txBody>
@@ -4626,7 +4627,7 @@
                 </a:solidFill>
                 <a:latin typeface="Arial"/>
               </a:rPr>
-              <a:t>Gemini Notebook deck</a:t>
+              <a:t>Quality review</a:t>
             </a:r>
           </a:p>
         </p:txBody>
@@ -4661,7 +4662,7 @@
                 </a:solidFill>
                 <a:latin typeface="Arial"/>
               </a:rPr>
-              <a:t>Create Presenter Slides for business stakeholders. Focus on the verified decision insight, use a concise professional style, include source-grounded comparisons and a final recommendation. Avoid claims not supported by selected sources…</a:t>
+              <a:t>Review this infographic against message clarity, data accuracy, visual hierarchy, audience fit, accessibility, editability and business goal. List each issue with evidence, its impact, the proposed change and a pass/fail acceptance che…</a:t>
             </a:r>
           </a:p>
         </p:txBody>
@@ -4744,11 +4745,11 @@
             <a:avLst/>
           </a:prstGeom>
           <a:solidFill>
-            <a:srgbClr val="1F6FEB"/>
+            <a:srgbClr val="7C3AED"/>
           </a:solidFill>
           <a:ln>
             <a:solidFill>
-              <a:srgbClr val="1F6FEB"/>
+              <a:srgbClr val="7C3AED"/>
             </a:solidFill>
           </a:ln>
         </p:spPr>
@@ -4800,11 +4801,11 @@
             <a:r>
               <a:rPr sz="1100" b="1">
                 <a:solidFill>
-                  <a:srgbClr val="1F6FEB"/>
+                  <a:srgbClr val="7C3AED"/>
                 </a:solidFill>
                 <a:latin typeface="Arial"/>
               </a:rPr>
-              <a:t>ACTIVITY 06 · CONTEXT</a:t>
+              <a:t>ACTIVITY 06 · COPY, ADAPT AND VERIFY</a:t>
             </a:r>
           </a:p>
         </p:txBody>
@@ -4839,7 +4840,7 @@
                 </a:solidFill>
                 <a:latin typeface="Arial"/>
               </a:rPr>
-              <a:t>The Scenario</a:t>
+              <a:t>Structured Microsoft 365 Copilot Prompt</a:t>
             </a:r>
           </a:p>
         </p:txBody>
@@ -4932,8 +4933,8 @@
         </p:nvSpPr>
         <p:spPr>
           <a:xfrm>
-            <a:off x="731520" y="1783080"/>
-            <a:ext cx="10698480" cy="1691640"/>
+            <a:off x="749808" y="1700784"/>
+            <a:ext cx="10698480" cy="4370832"/>
           </a:xfrm>
           <a:prstGeom prst="roundRect">
             <a:avLst/>
@@ -4971,104 +4972,14 @@
       </p:sp>
       <p:sp>
         <p:nvSpPr>
-          <p:cNvPr id="9" name="Rectangle 8"/>
-          <p:cNvSpPr/>
-          <p:nvPr/>
-        </p:nvSpPr>
-        <p:spPr>
-          <a:xfrm>
-            <a:off x="731520" y="1783080"/>
-            <a:ext cx="73152" cy="1691640"/>
-          </a:xfrm>
-          <a:prstGeom prst="rect">
-            <a:avLst/>
-          </a:prstGeom>
-          <a:solidFill>
-            <a:srgbClr val="1F6FEB"/>
-          </a:solidFill>
-          <a:ln>
-            <a:solidFill>
-              <a:srgbClr val="1F6FEB"/>
-            </a:solidFill>
-          </a:ln>
-        </p:spPr>
-        <p:style>
-          <a:lnRef idx="1">
-            <a:schemeClr val="accent1"/>
-          </a:lnRef>
-          <a:fillRef idx="3">
-            <a:schemeClr val="accent1"/>
-          </a:fillRef>
-          <a:effectRef idx="2">
-            <a:schemeClr val="accent1"/>
-          </a:effectRef>
-          <a:fontRef idx="minor">
-            <a:schemeClr val="lt1"/>
-          </a:fontRef>
-        </p:style>
-        <p:txBody>
-          <a:bodyPr rtlCol="0" anchor="ctr"/>
-          <a:lstStyle/>
-          <a:p>
-            <a:pPr algn="ctr"/>
-          </a:p>
-        </p:txBody>
-      </p:sp>
-      <p:sp>
-        <p:nvSpPr>
-          <p:cNvPr id="10" name="Rounded Rectangle 9"/>
-          <p:cNvSpPr/>
-          <p:nvPr/>
-        </p:nvSpPr>
-        <p:spPr>
-          <a:xfrm>
-            <a:off x="932688" y="2002536"/>
-            <a:ext cx="438912" cy="438912"/>
-          </a:xfrm>
-          <a:prstGeom prst="roundRect">
-            <a:avLst/>
-          </a:prstGeom>
-          <a:solidFill>
-            <a:srgbClr val="1F6FEB"/>
-          </a:solidFill>
-          <a:ln>
-            <a:solidFill>
-              <a:srgbClr val="1F6FEB"/>
-            </a:solidFill>
-          </a:ln>
-        </p:spPr>
-        <p:style>
-          <a:lnRef idx="1">
-            <a:schemeClr val="accent1"/>
-          </a:lnRef>
-          <a:fillRef idx="3">
-            <a:schemeClr val="accent1"/>
-          </a:fillRef>
-          <a:effectRef idx="2">
-            <a:schemeClr val="accent1"/>
-          </a:effectRef>
-          <a:fontRef idx="minor">
-            <a:schemeClr val="lt1"/>
-          </a:fontRef>
-        </p:style>
-        <p:txBody>
-          <a:bodyPr rtlCol="0" anchor="ctr"/>
-          <a:lstStyle/>
-          <a:p>
-            <a:pPr algn="ctr"/>
-          </a:p>
-        </p:txBody>
-      </p:sp>
-      <p:sp>
-        <p:nvSpPr>
-          <p:cNvPr id="11" name="TextBox 10"/>
+          <p:cNvPr id="9" name="TextBox 8"/>
           <p:cNvSpPr txBox="1"/>
           <p:nvPr/>
         </p:nvSpPr>
         <p:spPr>
           <a:xfrm>
-            <a:off x="932688" y="2011680"/>
-            <a:ext cx="438912" cy="420624"/>
+            <a:off x="960120" y="1874519"/>
+            <a:ext cx="384048" cy="246888"/>
           </a:xfrm>
           <a:prstGeom prst="rect">
             <a:avLst/>
@@ -5076,16 +4987,16 @@
           <a:noFill/>
         </p:spPr>
         <p:txBody>
-          <a:bodyPr wrap="square" anchor="ctr">
+          <a:bodyPr wrap="square" anchor="t">
             <a:spAutoFit/>
           </a:bodyPr>
           <a:lstStyle/>
           <a:p>
-            <a:pPr algn="ctr"/>
-            <a:r>
-              <a:rPr sz="1400" b="1">
-                <a:solidFill>
-                  <a:srgbClr val="FFFFFF"/>
+            <a:pPr algn="r"/>
+            <a:r>
+              <a:rPr sz="900" b="0">
+                <a:solidFill>
+                  <a:srgbClr val="5B6372"/>
                 </a:solidFill>
                 <a:latin typeface="Arial"/>
               </a:rPr>
@@ -5096,14 +5007,14 @@
       </p:sp>
       <p:sp>
         <p:nvSpPr>
-          <p:cNvPr id="12" name="TextBox 11"/>
+          <p:cNvPr id="10" name="TextBox 9"/>
           <p:cNvSpPr txBox="1"/>
           <p:nvPr/>
         </p:nvSpPr>
         <p:spPr>
           <a:xfrm>
-            <a:off x="1536192" y="1965960"/>
-            <a:ext cx="9710928" cy="329184"/>
+            <a:off x="1554480" y="1874519"/>
+            <a:ext cx="9418320" cy="256032"/>
           </a:xfrm>
           <a:prstGeom prst="rect">
             <a:avLst/>
@@ -5118,27 +5029,27 @@
           <a:p>
             <a:pPr algn="l"/>
             <a:r>
-              <a:rPr sz="1400" b="1">
-                <a:solidFill>
-                  <a:srgbClr val="1F6FEB"/>
+              <a:rPr sz="1050" b="0">
+                <a:solidFill>
+                  <a:srgbClr val="161B26"/>
                 </a:solidFill>
                 <a:latin typeface="Arial"/>
               </a:rPr>
-              <a:t>Context</a:t>
-            </a:r>
-          </a:p>
-        </p:txBody>
-      </p:sp>
-      <p:sp>
-        <p:nvSpPr>
-          <p:cNvPr id="13" name="TextBox 12"/>
+              <a:t>Create a one-page hierarchy infographic about Create a Hierarchy Infographic with Microsoft 365 Copilot.</a:t>
+            </a:r>
+          </a:p>
+        </p:txBody>
+      </p:sp>
+      <p:sp>
+        <p:nvSpPr>
+          <p:cNvPr id="11" name="TextBox 10"/>
           <p:cNvSpPr txBox="1"/>
           <p:nvPr/>
         </p:nvSpPr>
         <p:spPr>
           <a:xfrm>
-            <a:off x="1536192" y="2350008"/>
-            <a:ext cx="9710928" cy="978408"/>
+            <a:off x="960120" y="2157984"/>
+            <a:ext cx="384048" cy="246888"/>
           </a:xfrm>
           <a:prstGeom prst="rect">
             <a:avLst/>
@@ -5151,181 +5062,11 @@
           </a:bodyPr>
           <a:lstStyle/>
           <a:p>
-            <a:pPr algn="l"/>
-            <a:r>
-              <a:rPr sz="1150" b="0">
-                <a:solidFill>
-                  <a:srgbClr val="161B26"/>
-                </a:solidFill>
-                <a:latin typeface="Arial"/>
-              </a:rPr>
-              <a:t>Northstar wants an executive infographic and short slide narrative summarising the sustainable-delivery pilot from a spreadsheet, policy note and stakeholder feedback summary.</a:t>
-            </a:r>
-          </a:p>
-        </p:txBody>
-      </p:sp>
-      <p:sp>
-        <p:nvSpPr>
-          <p:cNvPr id="14" name="Rounded Rectangle 13"/>
-          <p:cNvSpPr/>
-          <p:nvPr/>
-        </p:nvSpPr>
-        <p:spPr>
-          <a:xfrm>
-            <a:off x="731520" y="3776472"/>
-            <a:ext cx="10698480" cy="1691640"/>
-          </a:xfrm>
-          <a:prstGeom prst="roundRect">
-            <a:avLst/>
-          </a:prstGeom>
-          <a:solidFill>
-            <a:srgbClr val="F5F8FC"/>
-          </a:solidFill>
-          <a:ln>
-            <a:solidFill>
-              <a:srgbClr val="E2E8F0"/>
-            </a:solidFill>
-          </a:ln>
-        </p:spPr>
-        <p:style>
-          <a:lnRef idx="1">
-            <a:schemeClr val="accent1"/>
-          </a:lnRef>
-          <a:fillRef idx="3">
-            <a:schemeClr val="accent1"/>
-          </a:fillRef>
-          <a:effectRef idx="2">
-            <a:schemeClr val="accent1"/>
-          </a:effectRef>
-          <a:fontRef idx="minor">
-            <a:schemeClr val="lt1"/>
-          </a:fontRef>
-        </p:style>
-        <p:txBody>
-          <a:bodyPr rtlCol="0" anchor="ctr"/>
-          <a:lstStyle/>
-          <a:p>
-            <a:pPr algn="ctr"/>
-          </a:p>
-        </p:txBody>
-      </p:sp>
-      <p:sp>
-        <p:nvSpPr>
-          <p:cNvPr id="15" name="Rectangle 14"/>
-          <p:cNvSpPr/>
-          <p:nvPr/>
-        </p:nvSpPr>
-        <p:spPr>
-          <a:xfrm>
-            <a:off x="731520" y="3776472"/>
-            <a:ext cx="73152" cy="1691640"/>
-          </a:xfrm>
-          <a:prstGeom prst="rect">
-            <a:avLst/>
-          </a:prstGeom>
-          <a:solidFill>
-            <a:srgbClr val="10B981"/>
-          </a:solidFill>
-          <a:ln>
-            <a:solidFill>
-              <a:srgbClr val="10B981"/>
-            </a:solidFill>
-          </a:ln>
-        </p:spPr>
-        <p:style>
-          <a:lnRef idx="1">
-            <a:schemeClr val="accent1"/>
-          </a:lnRef>
-          <a:fillRef idx="3">
-            <a:schemeClr val="accent1"/>
-          </a:fillRef>
-          <a:effectRef idx="2">
-            <a:schemeClr val="accent1"/>
-          </a:effectRef>
-          <a:fontRef idx="minor">
-            <a:schemeClr val="lt1"/>
-          </a:fontRef>
-        </p:style>
-        <p:txBody>
-          <a:bodyPr rtlCol="0" anchor="ctr"/>
-          <a:lstStyle/>
-          <a:p>
-            <a:pPr algn="ctr"/>
-          </a:p>
-        </p:txBody>
-      </p:sp>
-      <p:sp>
-        <p:nvSpPr>
-          <p:cNvPr id="16" name="Rounded Rectangle 15"/>
-          <p:cNvSpPr/>
-          <p:nvPr/>
-        </p:nvSpPr>
-        <p:spPr>
-          <a:xfrm>
-            <a:off x="932688" y="3995928"/>
-            <a:ext cx="438912" cy="438912"/>
-          </a:xfrm>
-          <a:prstGeom prst="roundRect">
-            <a:avLst/>
-          </a:prstGeom>
-          <a:solidFill>
-            <a:srgbClr val="10B981"/>
-          </a:solidFill>
-          <a:ln>
-            <a:solidFill>
-              <a:srgbClr val="10B981"/>
-            </a:solidFill>
-          </a:ln>
-        </p:spPr>
-        <p:style>
-          <a:lnRef idx="1">
-            <a:schemeClr val="accent1"/>
-          </a:lnRef>
-          <a:fillRef idx="3">
-            <a:schemeClr val="accent1"/>
-          </a:fillRef>
-          <a:effectRef idx="2">
-            <a:schemeClr val="accent1"/>
-          </a:effectRef>
-          <a:fontRef idx="minor">
-            <a:schemeClr val="lt1"/>
-          </a:fontRef>
-        </p:style>
-        <p:txBody>
-          <a:bodyPr rtlCol="0" anchor="ctr"/>
-          <a:lstStyle/>
-          <a:p>
-            <a:pPr algn="ctr"/>
-          </a:p>
-        </p:txBody>
-      </p:sp>
-      <p:sp>
-        <p:nvSpPr>
-          <p:cNvPr id="17" name="TextBox 16"/>
-          <p:cNvSpPr txBox="1"/>
-          <p:nvPr/>
-        </p:nvSpPr>
-        <p:spPr>
-          <a:xfrm>
-            <a:off x="932688" y="4005072"/>
-            <a:ext cx="438912" cy="420624"/>
-          </a:xfrm>
-          <a:prstGeom prst="rect">
-            <a:avLst/>
-          </a:prstGeom>
-          <a:noFill/>
-        </p:spPr>
-        <p:txBody>
-          <a:bodyPr wrap="square" anchor="ctr">
-            <a:spAutoFit/>
-          </a:bodyPr>
-          <a:lstStyle/>
-          <a:p>
-            <a:pPr algn="ctr"/>
-            <a:r>
-              <a:rPr sz="1400" b="1">
-                <a:solidFill>
-                  <a:srgbClr val="FFFFFF"/>
+            <a:pPr algn="r"/>
+            <a:r>
+              <a:rPr sz="900" b="0">
+                <a:solidFill>
+                  <a:srgbClr val="5B6372"/>
                 </a:solidFill>
                 <a:latin typeface="Arial"/>
               </a:rPr>
@@ -5336,14 +5077,14 @@
       </p:sp>
       <p:sp>
         <p:nvSpPr>
-          <p:cNvPr id="18" name="TextBox 17"/>
+          <p:cNvPr id="12" name="TextBox 11"/>
           <p:cNvSpPr txBox="1"/>
           <p:nvPr/>
         </p:nvSpPr>
         <p:spPr>
           <a:xfrm>
-            <a:off x="1536192" y="3959352"/>
-            <a:ext cx="9710928" cy="329184"/>
+            <a:off x="1554480" y="2157984"/>
+            <a:ext cx="9418320" cy="256032"/>
           </a:xfrm>
           <a:prstGeom prst="rect">
             <a:avLst/>
@@ -5358,27 +5099,27 @@
           <a:p>
             <a:pPr algn="l"/>
             <a:r>
-              <a:rPr sz="1400" b="1">
-                <a:solidFill>
-                  <a:srgbClr val="10B981"/>
+              <a:rPr sz="1050" b="1">
+                <a:solidFill>
+                  <a:srgbClr val="161B26"/>
                 </a:solidFill>
                 <a:latin typeface="Arial"/>
               </a:rPr>
-              <a:t>Decision pressure</a:t>
-            </a:r>
-          </a:p>
-        </p:txBody>
-      </p:sp>
-      <p:sp>
-        <p:nvSpPr>
-          <p:cNvPr id="19" name="TextBox 18"/>
+              <a:t>Sections:</a:t>
+            </a:r>
+          </a:p>
+        </p:txBody>
+      </p:sp>
+      <p:sp>
+        <p:nvSpPr>
+          <p:cNvPr id="13" name="TextBox 12"/>
           <p:cNvSpPr txBox="1"/>
           <p:nvPr/>
         </p:nvSpPr>
         <p:spPr>
           <a:xfrm>
-            <a:off x="1536192" y="4343400"/>
-            <a:ext cx="9710928" cy="978408"/>
+            <a:off x="960120" y="2441448"/>
+            <a:ext cx="384048" cy="246888"/>
           </a:xfrm>
           <a:prstGeom prst="rect">
             <a:avLst/>
@@ -5391,15 +5132,680 @@
           </a:bodyPr>
           <a:lstStyle/>
           <a:p>
-            <a:pPr algn="l"/>
-            <a:r>
-              <a:rPr sz="1150" b="0">
-                <a:solidFill>
-                  <a:srgbClr val="161B26"/>
+            <a:pPr algn="r"/>
+            <a:r>
+              <a:rPr sz="900" b="0">
+                <a:solidFill>
+                  <a:srgbClr val="5B6372"/>
                 </a:solidFill>
                 <a:latin typeface="Arial"/>
               </a:rPr>
-              <a:t>Run the same verified brief through Microsoft 365 Copilot and Gemini Notebook. Generate a Gemini Notebook Infographic plus Presenter Slides, preserve the deck as PPTX where available or PDF with a documented rebuild route, compare both routes and refine the selected master in PowerPoint.</a:t>
+              <a:t>3</a:t>
+            </a:r>
+          </a:p>
+        </p:txBody>
+      </p:sp>
+      <p:sp>
+        <p:nvSpPr>
+          <p:cNvPr id="14" name="TextBox 13"/>
+          <p:cNvSpPr txBox="1"/>
+          <p:nvPr/>
+        </p:nvSpPr>
+        <p:spPr>
+          <a:xfrm>
+            <a:off x="1554480" y="2441448"/>
+            <a:ext cx="9418320" cy="256032"/>
+          </a:xfrm>
+          <a:prstGeom prst="rect">
+            <a:avLst/>
+          </a:prstGeom>
+          <a:noFill/>
+        </p:spPr>
+        <p:txBody>
+          <a:bodyPr wrap="square" anchor="t">
+            <a:spAutoFit/>
+          </a:bodyPr>
+          <a:lstStyle/>
+          <a:p>
+            <a:pPr algn="l"/>
+            <a:r>
+              <a:rPr sz="1050" b="0">
+                <a:solidFill>
+                  <a:srgbClr val="161B26"/>
+                </a:solidFill>
+                <a:latin typeface="Arial"/>
+              </a:rPr>
+              <a:t>1. Goal</a:t>
+            </a:r>
+          </a:p>
+        </p:txBody>
+      </p:sp>
+      <p:sp>
+        <p:nvSpPr>
+          <p:cNvPr id="15" name="TextBox 14"/>
+          <p:cNvSpPr txBox="1"/>
+          <p:nvPr/>
+        </p:nvSpPr>
+        <p:spPr>
+          <a:xfrm>
+            <a:off x="960120" y="2724911"/>
+            <a:ext cx="384048" cy="246888"/>
+          </a:xfrm>
+          <a:prstGeom prst="rect">
+            <a:avLst/>
+          </a:prstGeom>
+          <a:noFill/>
+        </p:spPr>
+        <p:txBody>
+          <a:bodyPr wrap="square" anchor="t">
+            <a:spAutoFit/>
+          </a:bodyPr>
+          <a:lstStyle/>
+          <a:p>
+            <a:pPr algn="r"/>
+            <a:r>
+              <a:rPr sz="900" b="0">
+                <a:solidFill>
+                  <a:srgbClr val="5B6372"/>
+                </a:solidFill>
+                <a:latin typeface="Arial"/>
+              </a:rPr>
+              <a:t>4</a:t>
+            </a:r>
+          </a:p>
+        </p:txBody>
+      </p:sp>
+      <p:sp>
+        <p:nvSpPr>
+          <p:cNvPr id="16" name="TextBox 15"/>
+          <p:cNvSpPr txBox="1"/>
+          <p:nvPr/>
+        </p:nvSpPr>
+        <p:spPr>
+          <a:xfrm>
+            <a:off x="1554480" y="2724911"/>
+            <a:ext cx="9418320" cy="256032"/>
+          </a:xfrm>
+          <a:prstGeom prst="rect">
+            <a:avLst/>
+          </a:prstGeom>
+          <a:noFill/>
+        </p:spPr>
+        <p:txBody>
+          <a:bodyPr wrap="square" anchor="t">
+            <a:spAutoFit/>
+          </a:bodyPr>
+          <a:lstStyle/>
+          <a:p>
+            <a:pPr algn="l"/>
+            <a:r>
+              <a:rPr sz="1050" b="0">
+                <a:solidFill>
+                  <a:srgbClr val="161B26"/>
+                </a:solidFill>
+                <a:latin typeface="Arial"/>
+              </a:rPr>
+              <a:t>2. Outcome</a:t>
+            </a:r>
+          </a:p>
+        </p:txBody>
+      </p:sp>
+      <p:sp>
+        <p:nvSpPr>
+          <p:cNvPr id="17" name="TextBox 16"/>
+          <p:cNvSpPr txBox="1"/>
+          <p:nvPr/>
+        </p:nvSpPr>
+        <p:spPr>
+          <a:xfrm>
+            <a:off x="960120" y="3008376"/>
+            <a:ext cx="384048" cy="246888"/>
+          </a:xfrm>
+          <a:prstGeom prst="rect">
+            <a:avLst/>
+          </a:prstGeom>
+          <a:noFill/>
+        </p:spPr>
+        <p:txBody>
+          <a:bodyPr wrap="square" anchor="t">
+            <a:spAutoFit/>
+          </a:bodyPr>
+          <a:lstStyle/>
+          <a:p>
+            <a:pPr algn="r"/>
+            <a:r>
+              <a:rPr sz="900" b="0">
+                <a:solidFill>
+                  <a:srgbClr val="5B6372"/>
+                </a:solidFill>
+                <a:latin typeface="Arial"/>
+              </a:rPr>
+              <a:t>5</a:t>
+            </a:r>
+          </a:p>
+        </p:txBody>
+      </p:sp>
+      <p:sp>
+        <p:nvSpPr>
+          <p:cNvPr id="18" name="TextBox 17"/>
+          <p:cNvSpPr txBox="1"/>
+          <p:nvPr/>
+        </p:nvSpPr>
+        <p:spPr>
+          <a:xfrm>
+            <a:off x="1554480" y="3008376"/>
+            <a:ext cx="9418320" cy="256032"/>
+          </a:xfrm>
+          <a:prstGeom prst="rect">
+            <a:avLst/>
+          </a:prstGeom>
+          <a:noFill/>
+        </p:spPr>
+        <p:txBody>
+          <a:bodyPr wrap="square" anchor="t">
+            <a:spAutoFit/>
+          </a:bodyPr>
+          <a:lstStyle/>
+          <a:p>
+            <a:pPr algn="l"/>
+            <a:r>
+              <a:rPr sz="1050" b="0">
+                <a:solidFill>
+                  <a:srgbClr val="161B26"/>
+                </a:solidFill>
+                <a:latin typeface="Arial"/>
+              </a:rPr>
+              <a:t>3. Measure</a:t>
+            </a:r>
+          </a:p>
+        </p:txBody>
+      </p:sp>
+      <p:sp>
+        <p:nvSpPr>
+          <p:cNvPr id="19" name="TextBox 18"/>
+          <p:cNvSpPr txBox="1"/>
+          <p:nvPr/>
+        </p:nvSpPr>
+        <p:spPr>
+          <a:xfrm>
+            <a:off x="960120" y="3291839"/>
+            <a:ext cx="384048" cy="246888"/>
+          </a:xfrm>
+          <a:prstGeom prst="rect">
+            <a:avLst/>
+          </a:prstGeom>
+          <a:noFill/>
+        </p:spPr>
+        <p:txBody>
+          <a:bodyPr wrap="square" anchor="t">
+            <a:spAutoFit/>
+          </a:bodyPr>
+          <a:lstStyle/>
+          <a:p>
+            <a:pPr algn="r"/>
+            <a:r>
+              <a:rPr sz="900" b="0">
+                <a:solidFill>
+                  <a:srgbClr val="5B6372"/>
+                </a:solidFill>
+                <a:latin typeface="Arial"/>
+              </a:rPr>
+              <a:t>6</a:t>
+            </a:r>
+          </a:p>
+        </p:txBody>
+      </p:sp>
+      <p:sp>
+        <p:nvSpPr>
+          <p:cNvPr id="20" name="TextBox 19"/>
+          <p:cNvSpPr txBox="1"/>
+          <p:nvPr/>
+        </p:nvSpPr>
+        <p:spPr>
+          <a:xfrm>
+            <a:off x="1554480" y="3291839"/>
+            <a:ext cx="9418320" cy="256032"/>
+          </a:xfrm>
+          <a:prstGeom prst="rect">
+            <a:avLst/>
+          </a:prstGeom>
+          <a:noFill/>
+        </p:spPr>
+        <p:txBody>
+          <a:bodyPr wrap="square" anchor="t">
+            <a:spAutoFit/>
+          </a:bodyPr>
+          <a:lstStyle/>
+          <a:p>
+            <a:pPr algn="l"/>
+            <a:r>
+              <a:rPr sz="1050" b="0">
+                <a:solidFill>
+                  <a:srgbClr val="161B26"/>
+                </a:solidFill>
+                <a:latin typeface="Arial"/>
+              </a:rPr>
+              <a:t>4. Owner</a:t>
+            </a:r>
+          </a:p>
+        </p:txBody>
+      </p:sp>
+      <p:sp>
+        <p:nvSpPr>
+          <p:cNvPr id="21" name="TextBox 20"/>
+          <p:cNvSpPr txBox="1"/>
+          <p:nvPr/>
+        </p:nvSpPr>
+        <p:spPr>
+          <a:xfrm>
+            <a:off x="960120" y="3575303"/>
+            <a:ext cx="384048" cy="246888"/>
+          </a:xfrm>
+          <a:prstGeom prst="rect">
+            <a:avLst/>
+          </a:prstGeom>
+          <a:noFill/>
+        </p:spPr>
+        <p:txBody>
+          <a:bodyPr wrap="square" anchor="t">
+            <a:spAutoFit/>
+          </a:bodyPr>
+          <a:lstStyle/>
+          <a:p>
+            <a:pPr algn="r"/>
+            <a:r>
+              <a:rPr sz="900" b="0">
+                <a:solidFill>
+                  <a:srgbClr val="5B6372"/>
+                </a:solidFill>
+                <a:latin typeface="Arial"/>
+              </a:rPr>
+              <a:t>7</a:t>
+            </a:r>
+          </a:p>
+        </p:txBody>
+      </p:sp>
+      <p:sp>
+        <p:nvSpPr>
+          <p:cNvPr id="22" name="TextBox 21"/>
+          <p:cNvSpPr txBox="1"/>
+          <p:nvPr/>
+        </p:nvSpPr>
+        <p:spPr>
+          <a:xfrm>
+            <a:off x="1554480" y="3575303"/>
+            <a:ext cx="9418320" cy="256032"/>
+          </a:xfrm>
+          <a:prstGeom prst="rect">
+            <a:avLst/>
+          </a:prstGeom>
+          <a:noFill/>
+        </p:spPr>
+        <p:txBody>
+          <a:bodyPr wrap="square" anchor="t">
+            <a:spAutoFit/>
+          </a:bodyPr>
+          <a:lstStyle/>
+          <a:p>
+            <a:pPr algn="l"/>
+            <a:r>
+              <a:rPr sz="1050" b="0">
+                <a:solidFill>
+                  <a:srgbClr val="161B26"/>
+                </a:solidFill>
+                <a:latin typeface="Arial"/>
+              </a:rPr>
+              <a:t>5. Review</a:t>
+            </a:r>
+          </a:p>
+        </p:txBody>
+      </p:sp>
+      <p:sp>
+        <p:nvSpPr>
+          <p:cNvPr id="23" name="TextBox 22"/>
+          <p:cNvSpPr txBox="1"/>
+          <p:nvPr/>
+        </p:nvSpPr>
+        <p:spPr>
+          <a:xfrm>
+            <a:off x="960120" y="3858768"/>
+            <a:ext cx="384048" cy="246888"/>
+          </a:xfrm>
+          <a:prstGeom prst="rect">
+            <a:avLst/>
+          </a:prstGeom>
+          <a:noFill/>
+        </p:spPr>
+        <p:txBody>
+          <a:bodyPr wrap="square" anchor="t">
+            <a:spAutoFit/>
+          </a:bodyPr>
+          <a:lstStyle/>
+          <a:p>
+            <a:pPr algn="r"/>
+            <a:r>
+              <a:rPr sz="900" b="0">
+                <a:solidFill>
+                  <a:srgbClr val="5B6372"/>
+                </a:solidFill>
+                <a:latin typeface="Arial"/>
+              </a:rPr>
+              <a:t>8</a:t>
+            </a:r>
+          </a:p>
+        </p:txBody>
+      </p:sp>
+      <p:sp>
+        <p:nvSpPr>
+          <p:cNvPr id="24" name="TextBox 23"/>
+          <p:cNvSpPr txBox="1"/>
+          <p:nvPr/>
+        </p:nvSpPr>
+        <p:spPr>
+          <a:xfrm>
+            <a:off x="1554480" y="3858768"/>
+            <a:ext cx="9418320" cy="256032"/>
+          </a:xfrm>
+          <a:prstGeom prst="rect">
+            <a:avLst/>
+          </a:prstGeom>
+          <a:noFill/>
+        </p:spPr>
+        <p:txBody>
+          <a:bodyPr wrap="square" anchor="t">
+            <a:spAutoFit/>
+          </a:bodyPr>
+          <a:lstStyle/>
+          <a:p>
+            <a:pPr algn="l"/>
+            <a:r>
+              <a:rPr sz="1050" b="0">
+                <a:solidFill>
+                  <a:srgbClr val="7C3AED"/>
+                </a:solidFill>
+                <a:latin typeface="Arial"/>
+              </a:rPr>
+              <a:t>Audience: executive leadership team</a:t>
+            </a:r>
+          </a:p>
+        </p:txBody>
+      </p:sp>
+      <p:sp>
+        <p:nvSpPr>
+          <p:cNvPr id="25" name="TextBox 24"/>
+          <p:cNvSpPr txBox="1"/>
+          <p:nvPr/>
+        </p:nvSpPr>
+        <p:spPr>
+          <a:xfrm>
+            <a:off x="960120" y="4142231"/>
+            <a:ext cx="384048" cy="246888"/>
+          </a:xfrm>
+          <a:prstGeom prst="rect">
+            <a:avLst/>
+          </a:prstGeom>
+          <a:noFill/>
+        </p:spPr>
+        <p:txBody>
+          <a:bodyPr wrap="square" anchor="t">
+            <a:spAutoFit/>
+          </a:bodyPr>
+          <a:lstStyle/>
+          <a:p>
+            <a:pPr algn="r"/>
+            <a:r>
+              <a:rPr sz="900" b="0">
+                <a:solidFill>
+                  <a:srgbClr val="5B6372"/>
+                </a:solidFill>
+                <a:latin typeface="Arial"/>
+              </a:rPr>
+              <a:t>9</a:t>
+            </a:r>
+          </a:p>
+        </p:txBody>
+      </p:sp>
+      <p:sp>
+        <p:nvSpPr>
+          <p:cNvPr id="26" name="TextBox 25"/>
+          <p:cNvSpPr txBox="1"/>
+          <p:nvPr/>
+        </p:nvSpPr>
+        <p:spPr>
+          <a:xfrm>
+            <a:off x="1554480" y="4142231"/>
+            <a:ext cx="9418320" cy="256032"/>
+          </a:xfrm>
+          <a:prstGeom prst="rect">
+            <a:avLst/>
+          </a:prstGeom>
+          <a:noFill/>
+        </p:spPr>
+        <p:txBody>
+          <a:bodyPr wrap="square" anchor="t">
+            <a:spAutoFit/>
+          </a:bodyPr>
+          <a:lstStyle/>
+          <a:p>
+            <a:pPr algn="l"/>
+            <a:r>
+              <a:rPr sz="1050" b="0">
+                <a:solidFill>
+                  <a:srgbClr val="7C3AED"/>
+                </a:solidFill>
+                <a:latin typeface="Arial"/>
+              </a:rPr>
+              <a:t>Decision: The final slide records the prompt, sources and human changes; all claims are verified and the decision evidence remains editable.</a:t>
+            </a:r>
+          </a:p>
+        </p:txBody>
+      </p:sp>
+      <p:sp>
+        <p:nvSpPr>
+          <p:cNvPr id="27" name="TextBox 26"/>
+          <p:cNvSpPr txBox="1"/>
+          <p:nvPr/>
+        </p:nvSpPr>
+        <p:spPr>
+          <a:xfrm>
+            <a:off x="960120" y="4425696"/>
+            <a:ext cx="384048" cy="246888"/>
+          </a:xfrm>
+          <a:prstGeom prst="rect">
+            <a:avLst/>
+          </a:prstGeom>
+          <a:noFill/>
+        </p:spPr>
+        <p:txBody>
+          <a:bodyPr wrap="square" anchor="t">
+            <a:spAutoFit/>
+          </a:bodyPr>
+          <a:lstStyle/>
+          <a:p>
+            <a:pPr algn="r"/>
+            <a:r>
+              <a:rPr sz="900" b="0">
+                <a:solidFill>
+                  <a:srgbClr val="5B6372"/>
+                </a:solidFill>
+                <a:latin typeface="Arial"/>
+              </a:rPr>
+              <a:t>10</a:t>
+            </a:r>
+          </a:p>
+        </p:txBody>
+      </p:sp>
+      <p:sp>
+        <p:nvSpPr>
+          <p:cNvPr id="28" name="TextBox 27"/>
+          <p:cNvSpPr txBox="1"/>
+          <p:nvPr/>
+        </p:nvSpPr>
+        <p:spPr>
+          <a:xfrm>
+            <a:off x="1554480" y="4425696"/>
+            <a:ext cx="9418320" cy="256032"/>
+          </a:xfrm>
+          <a:prstGeom prst="rect">
+            <a:avLst/>
+          </a:prstGeom>
+          <a:noFill/>
+        </p:spPr>
+        <p:txBody>
+          <a:bodyPr wrap="square" anchor="t">
+            <a:spAutoFit/>
+          </a:bodyPr>
+          <a:lstStyle/>
+          <a:p>
+            <a:pPr algn="l"/>
+            <a:r>
+              <a:rPr sz="1050" b="0">
+                <a:solidFill>
+                  <a:srgbClr val="7C3AED"/>
+                </a:solidFill>
+                <a:latin typeface="Arial"/>
+              </a:rPr>
+              <a:t>Style: professional, concise, high contrast and accessible</a:t>
+            </a:r>
+          </a:p>
+        </p:txBody>
+      </p:sp>
+      <p:sp>
+        <p:nvSpPr>
+          <p:cNvPr id="29" name="TextBox 28"/>
+          <p:cNvSpPr txBox="1"/>
+          <p:nvPr/>
+        </p:nvSpPr>
+        <p:spPr>
+          <a:xfrm>
+            <a:off x="960120" y="4709160"/>
+            <a:ext cx="384048" cy="246888"/>
+          </a:xfrm>
+          <a:prstGeom prst="rect">
+            <a:avLst/>
+          </a:prstGeom>
+          <a:noFill/>
+        </p:spPr>
+        <p:txBody>
+          <a:bodyPr wrap="square" anchor="t">
+            <a:spAutoFit/>
+          </a:bodyPr>
+          <a:lstStyle/>
+          <a:p>
+            <a:pPr algn="r"/>
+            <a:r>
+              <a:rPr sz="900" b="0">
+                <a:solidFill>
+                  <a:srgbClr val="5B6372"/>
+                </a:solidFill>
+                <a:latin typeface="Arial"/>
+              </a:rPr>
+              <a:t>11</a:t>
+            </a:r>
+          </a:p>
+        </p:txBody>
+      </p:sp>
+      <p:sp>
+        <p:nvSpPr>
+          <p:cNvPr id="30" name="TextBox 29"/>
+          <p:cNvSpPr txBox="1"/>
+          <p:nvPr/>
+        </p:nvSpPr>
+        <p:spPr>
+          <a:xfrm>
+            <a:off x="1554480" y="4709160"/>
+            <a:ext cx="9418320" cy="256032"/>
+          </a:xfrm>
+          <a:prstGeom prst="rect">
+            <a:avLst/>
+          </a:prstGeom>
+          <a:noFill/>
+        </p:spPr>
+        <p:txBody>
+          <a:bodyPr wrap="square" anchor="t">
+            <a:spAutoFit/>
+          </a:bodyPr>
+          <a:lstStyle/>
+          <a:p>
+            <a:pPr algn="l"/>
+            <a:r>
+              <a:rPr sz="1050" b="0">
+                <a:solidFill>
+                  <a:srgbClr val="7C3AED"/>
+                </a:solidFill>
+                <a:latin typeface="Arial"/>
+              </a:rPr>
+              <a:t>Format: Wide for PowerPoint unless the brief requires Portrait</a:t>
+            </a:r>
+          </a:p>
+        </p:txBody>
+      </p:sp>
+      <p:sp>
+        <p:nvSpPr>
+          <p:cNvPr id="31" name="TextBox 30"/>
+          <p:cNvSpPr txBox="1"/>
+          <p:nvPr/>
+        </p:nvSpPr>
+        <p:spPr>
+          <a:xfrm>
+            <a:off x="960120" y="4992624"/>
+            <a:ext cx="384048" cy="246888"/>
+          </a:xfrm>
+          <a:prstGeom prst="rect">
+            <a:avLst/>
+          </a:prstGeom>
+          <a:noFill/>
+        </p:spPr>
+        <p:txBody>
+          <a:bodyPr wrap="square" anchor="t">
+            <a:spAutoFit/>
+          </a:bodyPr>
+          <a:lstStyle/>
+          <a:p>
+            <a:pPr algn="r"/>
+            <a:r>
+              <a:rPr sz="900" b="0">
+                <a:solidFill>
+                  <a:srgbClr val="5B6372"/>
+                </a:solidFill>
+                <a:latin typeface="Arial"/>
+              </a:rPr>
+              <a:t>12</a:t>
+            </a:r>
+          </a:p>
+        </p:txBody>
+      </p:sp>
+      <p:sp>
+        <p:nvSpPr>
+          <p:cNvPr id="32" name="TextBox 31"/>
+          <p:cNvSpPr txBox="1"/>
+          <p:nvPr/>
+        </p:nvSpPr>
+        <p:spPr>
+          <a:xfrm>
+            <a:off x="1554480" y="4992624"/>
+            <a:ext cx="9418320" cy="256032"/>
+          </a:xfrm>
+          <a:prstGeom prst="rect">
+            <a:avLst/>
+          </a:prstGeom>
+          <a:noFill/>
+        </p:spPr>
+        <p:txBody>
+          <a:bodyPr wrap="square" anchor="t">
+            <a:spAutoFit/>
+          </a:bodyPr>
+          <a:lstStyle/>
+          <a:p>
+            <a:pPr algn="l"/>
+            <a:r>
+              <a:rPr sz="1050" b="0">
+                <a:solidFill>
+                  <a:srgbClr val="7C3AED"/>
+                </a:solidFill>
+                <a:latin typeface="Arial"/>
+              </a:rPr>
+              <a:t>Source rule: use only the attached approved or synthetic course data; include period and source; do not invent facts</a:t>
             </a:r>
           </a:p>
         </p:txBody>
@@ -5482,11 +5888,11 @@
             <a:avLst/>
           </a:prstGeom>
           <a:solidFill>
-            <a:srgbClr val="10B981"/>
+            <a:srgbClr val="1F6FEB"/>
           </a:solidFill>
           <a:ln>
             <a:solidFill>
-              <a:srgbClr val="10B981"/>
+              <a:srgbClr val="1F6FEB"/>
             </a:solidFill>
           </a:ln>
         </p:spPr>
@@ -5538,11 +5944,11 @@
             <a:r>
               <a:rPr sz="1100" b="1">
                 <a:solidFill>
-                  <a:srgbClr val="10B981"/>
+                  <a:srgbClr val="1F6FEB"/>
                 </a:solidFill>
                 <a:latin typeface="Arial"/>
               </a:rPr>
-              <a:t>ACTIVITY 06 · FRAMEWORK</a:t>
+              <a:t>ACTIVITY 06 · CONTEXT</a:t>
             </a:r>
           </a:p>
         </p:txBody>
@@ -5577,7 +5983,7 @@
                 </a:solidFill>
                 <a:latin typeface="Arial"/>
               </a:rPr>
-              <a:t>One Brief, Two AI Routes, One PPTX Master</a:t>
+              <a:t>The Scenario</a:t>
             </a:r>
           </a:p>
         </p:txBody>
@@ -5670,8 +6076,8 @@
         </p:nvSpPr>
         <p:spPr>
           <a:xfrm>
-            <a:off x="685800" y="1920240"/>
-            <a:ext cx="1997049" cy="3566160"/>
+            <a:off x="731520" y="1783080"/>
+            <a:ext cx="10698480" cy="1691640"/>
           </a:xfrm>
           <a:prstGeom prst="roundRect">
             <a:avLst/>
@@ -5715,8 +6121,8 @@
         </p:nvSpPr>
         <p:spPr>
           <a:xfrm>
-            <a:off x="685800" y="1920240"/>
-            <a:ext cx="73152" cy="3566160"/>
+            <a:off x="731520" y="1783080"/>
+            <a:ext cx="73152" cy="1691640"/>
           </a:xfrm>
           <a:prstGeom prst="rect">
             <a:avLst/>
@@ -5760,7 +6166,7 @@
         </p:nvSpPr>
         <p:spPr>
           <a:xfrm>
-            <a:off x="886968" y="2139696"/>
+            <a:off x="932688" y="2002536"/>
             <a:ext cx="438912" cy="438912"/>
           </a:xfrm>
           <a:prstGeom prst="roundRect">
@@ -5805,7 +6211,7 @@
         </p:nvSpPr>
         <p:spPr>
           <a:xfrm>
-            <a:off x="886968" y="2148840"/>
+            <a:off x="932688" y="2011680"/>
             <a:ext cx="438912" cy="420624"/>
           </a:xfrm>
           <a:prstGeom prst="rect">
@@ -5840,8 +6246,8 @@
         </p:nvSpPr>
         <p:spPr>
           <a:xfrm>
-            <a:off x="1490472" y="2103120"/>
-            <a:ext cx="1009497" cy="329184"/>
+            <a:off x="1536192" y="1965960"/>
+            <a:ext cx="9710928" cy="329184"/>
           </a:xfrm>
           <a:prstGeom prst="rect">
             <a:avLst/>
@@ -5862,7 +6268,7 @@
                 </a:solidFill>
                 <a:latin typeface="Arial"/>
               </a:rPr>
-              <a:t>Ground</a:t>
+              <a:t>Context</a:t>
             </a:r>
           </a:p>
         </p:txBody>
@@ -5875,8 +6281,8 @@
         </p:nvSpPr>
         <p:spPr>
           <a:xfrm>
-            <a:off x="1490472" y="2487168"/>
-            <a:ext cx="1009497" cy="2852928"/>
+            <a:off x="1536192" y="2350008"/>
+            <a:ext cx="9710928" cy="978408"/>
           </a:xfrm>
           <a:prstGeom prst="rect">
             <a:avLst/>
@@ -5897,7 +6303,7 @@
                 </a:solidFill>
                 <a:latin typeface="Arial"/>
               </a:rPr>
-              <a:t>Load the approved source pack and freeze one comparison brief.</a:t>
+              <a:t>Northstar wants an executive hierarchy infographic connecting its service-trust goal to a recovery outcome, a four-hour measure, the customer-operations owner and a monthly review.</a:t>
             </a:r>
           </a:p>
         </p:txBody>
@@ -5910,8 +6316,8 @@
         </p:nvSpPr>
         <p:spPr>
           <a:xfrm>
-            <a:off x="2884017" y="1920240"/>
-            <a:ext cx="1997049" cy="3566160"/>
+            <a:off x="731520" y="3776472"/>
+            <a:ext cx="10698480" cy="1691640"/>
           </a:xfrm>
           <a:prstGeom prst="roundRect">
             <a:avLst/>
@@ -5955,8 +6361,8 @@
         </p:nvSpPr>
         <p:spPr>
           <a:xfrm>
-            <a:off x="2884017" y="1920240"/>
-            <a:ext cx="73152" cy="3566160"/>
+            <a:off x="731520" y="3776472"/>
+            <a:ext cx="73152" cy="1691640"/>
           </a:xfrm>
           <a:prstGeom prst="rect">
             <a:avLst/>
@@ -6000,7 +6406,7 @@
         </p:nvSpPr>
         <p:spPr>
           <a:xfrm>
-            <a:off x="3085185" y="2139696"/>
+            <a:off x="932688" y="3995928"/>
             <a:ext cx="438912" cy="438912"/>
           </a:xfrm>
           <a:prstGeom prst="roundRect">
@@ -6045,7 +6451,7 @@
         </p:nvSpPr>
         <p:spPr>
           <a:xfrm>
-            <a:off x="3085185" y="2148840"/>
+            <a:off x="932688" y="4005072"/>
             <a:ext cx="438912" cy="420624"/>
           </a:xfrm>
           <a:prstGeom prst="rect">
@@ -6080,8 +6486,8 @@
         </p:nvSpPr>
         <p:spPr>
           <a:xfrm>
-            <a:off x="3688689" y="2103120"/>
-            <a:ext cx="1009497" cy="329184"/>
+            <a:off x="1536192" y="3959352"/>
+            <a:ext cx="9710928" cy="329184"/>
           </a:xfrm>
           <a:prstGeom prst="rect">
             <a:avLst/>
@@ -6102,7 +6508,7 @@
                 </a:solidFill>
                 <a:latin typeface="Arial"/>
               </a:rPr>
-              <a:t>Microsoft</a:t>
+              <a:t>Decision pressure</a:t>
             </a:r>
           </a:p>
         </p:txBody>
@@ -6115,8 +6521,8 @@
         </p:nvSpPr>
         <p:spPr>
           <a:xfrm>
-            <a:off x="3688689" y="2487168"/>
-            <a:ext cx="1009497" cy="2852928"/>
+            <a:off x="1536192" y="4343400"/>
+            <a:ext cx="9710928" cy="978408"/>
           </a:xfrm>
           <a:prstGeom prst="rect">
             <a:avLst/>
@@ -6137,727 +6543,7 @@
                 </a:solidFill>
                 <a:latin typeface="Arial"/>
               </a:rPr>
-              <a:t>Generate an infographic or presentation direction with Copilot.</a:t>
-            </a:r>
-          </a:p>
-        </p:txBody>
-      </p:sp>
-      <p:sp>
-        <p:nvSpPr>
-          <p:cNvPr id="20" name="Rounded Rectangle 19"/>
-          <p:cNvSpPr/>
-          <p:nvPr/>
-        </p:nvSpPr>
-        <p:spPr>
-          <a:xfrm>
-            <a:off x="5082235" y="1920240"/>
-            <a:ext cx="1997049" cy="3566160"/>
-          </a:xfrm>
-          <a:prstGeom prst="roundRect">
-            <a:avLst/>
-          </a:prstGeom>
-          <a:solidFill>
-            <a:srgbClr val="F5F8FC"/>
-          </a:solidFill>
-          <a:ln>
-            <a:solidFill>
-              <a:srgbClr val="E2E8F0"/>
-            </a:solidFill>
-          </a:ln>
-        </p:spPr>
-        <p:style>
-          <a:lnRef idx="1">
-            <a:schemeClr val="accent1"/>
-          </a:lnRef>
-          <a:fillRef idx="3">
-            <a:schemeClr val="accent1"/>
-          </a:fillRef>
-          <a:effectRef idx="2">
-            <a:schemeClr val="accent1"/>
-          </a:effectRef>
-          <a:fontRef idx="minor">
-            <a:schemeClr val="lt1"/>
-          </a:fontRef>
-        </p:style>
-        <p:txBody>
-          <a:bodyPr rtlCol="0" anchor="ctr"/>
-          <a:lstStyle/>
-          <a:p>
-            <a:pPr algn="ctr"/>
-          </a:p>
-        </p:txBody>
-      </p:sp>
-      <p:sp>
-        <p:nvSpPr>
-          <p:cNvPr id="21" name="Rectangle 20"/>
-          <p:cNvSpPr/>
-          <p:nvPr/>
-        </p:nvSpPr>
-        <p:spPr>
-          <a:xfrm>
-            <a:off x="5082235" y="1920240"/>
-            <a:ext cx="73152" cy="3566160"/>
-          </a:xfrm>
-          <a:prstGeom prst="rect">
-            <a:avLst/>
-          </a:prstGeom>
-          <a:solidFill>
-            <a:srgbClr val="7C3AED"/>
-          </a:solidFill>
-          <a:ln>
-            <a:solidFill>
-              <a:srgbClr val="7C3AED"/>
-            </a:solidFill>
-          </a:ln>
-        </p:spPr>
-        <p:style>
-          <a:lnRef idx="1">
-            <a:schemeClr val="accent1"/>
-          </a:lnRef>
-          <a:fillRef idx="3">
-            <a:schemeClr val="accent1"/>
-          </a:fillRef>
-          <a:effectRef idx="2">
-            <a:schemeClr val="accent1"/>
-          </a:effectRef>
-          <a:fontRef idx="minor">
-            <a:schemeClr val="lt1"/>
-          </a:fontRef>
-        </p:style>
-        <p:txBody>
-          <a:bodyPr rtlCol="0" anchor="ctr"/>
-          <a:lstStyle/>
-          <a:p>
-            <a:pPr algn="ctr"/>
-          </a:p>
-        </p:txBody>
-      </p:sp>
-      <p:sp>
-        <p:nvSpPr>
-          <p:cNvPr id="22" name="Rounded Rectangle 21"/>
-          <p:cNvSpPr/>
-          <p:nvPr/>
-        </p:nvSpPr>
-        <p:spPr>
-          <a:xfrm>
-            <a:off x="5283403" y="2139696"/>
-            <a:ext cx="438912" cy="438912"/>
-          </a:xfrm>
-          <a:prstGeom prst="roundRect">
-            <a:avLst/>
-          </a:prstGeom>
-          <a:solidFill>
-            <a:srgbClr val="7C3AED"/>
-          </a:solidFill>
-          <a:ln>
-            <a:solidFill>
-              <a:srgbClr val="7C3AED"/>
-            </a:solidFill>
-          </a:ln>
-        </p:spPr>
-        <p:style>
-          <a:lnRef idx="1">
-            <a:schemeClr val="accent1"/>
-          </a:lnRef>
-          <a:fillRef idx="3">
-            <a:schemeClr val="accent1"/>
-          </a:fillRef>
-          <a:effectRef idx="2">
-            <a:schemeClr val="accent1"/>
-          </a:effectRef>
-          <a:fontRef idx="minor">
-            <a:schemeClr val="lt1"/>
-          </a:fontRef>
-        </p:style>
-        <p:txBody>
-          <a:bodyPr rtlCol="0" anchor="ctr"/>
-          <a:lstStyle/>
-          <a:p>
-            <a:pPr algn="ctr"/>
-          </a:p>
-        </p:txBody>
-      </p:sp>
-      <p:sp>
-        <p:nvSpPr>
-          <p:cNvPr id="23" name="TextBox 22"/>
-          <p:cNvSpPr txBox="1"/>
-          <p:nvPr/>
-        </p:nvSpPr>
-        <p:spPr>
-          <a:xfrm>
-            <a:off x="5283403" y="2148840"/>
-            <a:ext cx="438912" cy="420624"/>
-          </a:xfrm>
-          <a:prstGeom prst="rect">
-            <a:avLst/>
-          </a:prstGeom>
-          <a:noFill/>
-        </p:spPr>
-        <p:txBody>
-          <a:bodyPr wrap="square" anchor="ctr">
-            <a:spAutoFit/>
-          </a:bodyPr>
-          <a:lstStyle/>
-          <a:p>
-            <a:pPr algn="ctr"/>
-            <a:r>
-              <a:rPr sz="1400" b="1">
-                <a:solidFill>
-                  <a:srgbClr val="FFFFFF"/>
-                </a:solidFill>
-                <a:latin typeface="Arial"/>
-              </a:rPr>
-              <a:t>3</a:t>
-            </a:r>
-          </a:p>
-        </p:txBody>
-      </p:sp>
-      <p:sp>
-        <p:nvSpPr>
-          <p:cNvPr id="24" name="TextBox 23"/>
-          <p:cNvSpPr txBox="1"/>
-          <p:nvPr/>
-        </p:nvSpPr>
-        <p:spPr>
-          <a:xfrm>
-            <a:off x="5886907" y="2103120"/>
-            <a:ext cx="1009497" cy="329184"/>
-          </a:xfrm>
-          <a:prstGeom prst="rect">
-            <a:avLst/>
-          </a:prstGeom>
-          <a:noFill/>
-        </p:spPr>
-        <p:txBody>
-          <a:bodyPr wrap="square" anchor="t">
-            <a:spAutoFit/>
-          </a:bodyPr>
-          <a:lstStyle/>
-          <a:p>
-            <a:pPr algn="l"/>
-            <a:r>
-              <a:rPr sz="1400" b="1">
-                <a:solidFill>
-                  <a:srgbClr val="7C3AED"/>
-                </a:solidFill>
-                <a:latin typeface="Arial"/>
-              </a:rPr>
-              <a:t>Gemini Notebook</a:t>
-            </a:r>
-          </a:p>
-        </p:txBody>
-      </p:sp>
-      <p:sp>
-        <p:nvSpPr>
-          <p:cNvPr id="25" name="TextBox 24"/>
-          <p:cNvSpPr txBox="1"/>
-          <p:nvPr/>
-        </p:nvSpPr>
-        <p:spPr>
-          <a:xfrm>
-            <a:off x="5886907" y="2487168"/>
-            <a:ext cx="1009497" cy="2852928"/>
-          </a:xfrm>
-          <a:prstGeom prst="rect">
-            <a:avLst/>
-          </a:prstGeom>
-          <a:noFill/>
-        </p:spPr>
-        <p:txBody>
-          <a:bodyPr wrap="square" anchor="t">
-            <a:spAutoFit/>
-          </a:bodyPr>
-          <a:lstStyle/>
-          <a:p>
-            <a:pPr algn="l"/>
-            <a:r>
-              <a:rPr sz="1150" b="0">
-                <a:solidFill>
-                  <a:srgbClr val="161B26"/>
-                </a:solidFill>
-                <a:latin typeface="Arial"/>
-              </a:rPr>
-              <a:t>Generate an infographic and Presenter Slides; download PowerPoint where available, with PDF fallback.</a:t>
-            </a:r>
-          </a:p>
-        </p:txBody>
-      </p:sp>
-      <p:sp>
-        <p:nvSpPr>
-          <p:cNvPr id="26" name="Rounded Rectangle 25"/>
-          <p:cNvSpPr/>
-          <p:nvPr/>
-        </p:nvSpPr>
-        <p:spPr>
-          <a:xfrm>
-            <a:off x="7280452" y="1920240"/>
-            <a:ext cx="1997049" cy="3566160"/>
-          </a:xfrm>
-          <a:prstGeom prst="roundRect">
-            <a:avLst/>
-          </a:prstGeom>
-          <a:solidFill>
-            <a:srgbClr val="F5F8FC"/>
-          </a:solidFill>
-          <a:ln>
-            <a:solidFill>
-              <a:srgbClr val="E2E8F0"/>
-            </a:solidFill>
-          </a:ln>
-        </p:spPr>
-        <p:style>
-          <a:lnRef idx="1">
-            <a:schemeClr val="accent1"/>
-          </a:lnRef>
-          <a:fillRef idx="3">
-            <a:schemeClr val="accent1"/>
-          </a:fillRef>
-          <a:effectRef idx="2">
-            <a:schemeClr val="accent1"/>
-          </a:effectRef>
-          <a:fontRef idx="minor">
-            <a:schemeClr val="lt1"/>
-          </a:fontRef>
-        </p:style>
-        <p:txBody>
-          <a:bodyPr rtlCol="0" anchor="ctr"/>
-          <a:lstStyle/>
-          <a:p>
-            <a:pPr algn="ctr"/>
-          </a:p>
-        </p:txBody>
-      </p:sp>
-      <p:sp>
-        <p:nvSpPr>
-          <p:cNvPr id="27" name="Rectangle 26"/>
-          <p:cNvSpPr/>
-          <p:nvPr/>
-        </p:nvSpPr>
-        <p:spPr>
-          <a:xfrm>
-            <a:off x="7280452" y="1920240"/>
-            <a:ext cx="73152" cy="3566160"/>
-          </a:xfrm>
-          <a:prstGeom prst="rect">
-            <a:avLst/>
-          </a:prstGeom>
-          <a:solidFill>
-            <a:srgbClr val="F59E0B"/>
-          </a:solidFill>
-          <a:ln>
-            <a:solidFill>
-              <a:srgbClr val="F59E0B"/>
-            </a:solidFill>
-          </a:ln>
-        </p:spPr>
-        <p:style>
-          <a:lnRef idx="1">
-            <a:schemeClr val="accent1"/>
-          </a:lnRef>
-          <a:fillRef idx="3">
-            <a:schemeClr val="accent1"/>
-          </a:fillRef>
-          <a:effectRef idx="2">
-            <a:schemeClr val="accent1"/>
-          </a:effectRef>
-          <a:fontRef idx="minor">
-            <a:schemeClr val="lt1"/>
-          </a:fontRef>
-        </p:style>
-        <p:txBody>
-          <a:bodyPr rtlCol="0" anchor="ctr"/>
-          <a:lstStyle/>
-          <a:p>
-            <a:pPr algn="ctr"/>
-          </a:p>
-        </p:txBody>
-      </p:sp>
-      <p:sp>
-        <p:nvSpPr>
-          <p:cNvPr id="28" name="Rounded Rectangle 27"/>
-          <p:cNvSpPr/>
-          <p:nvPr/>
-        </p:nvSpPr>
-        <p:spPr>
-          <a:xfrm>
-            <a:off x="7481620" y="2139696"/>
-            <a:ext cx="438912" cy="438912"/>
-          </a:xfrm>
-          <a:prstGeom prst="roundRect">
-            <a:avLst/>
-          </a:prstGeom>
-          <a:solidFill>
-            <a:srgbClr val="F59E0B"/>
-          </a:solidFill>
-          <a:ln>
-            <a:solidFill>
-              <a:srgbClr val="F59E0B"/>
-            </a:solidFill>
-          </a:ln>
-        </p:spPr>
-        <p:style>
-          <a:lnRef idx="1">
-            <a:schemeClr val="accent1"/>
-          </a:lnRef>
-          <a:fillRef idx="3">
-            <a:schemeClr val="accent1"/>
-          </a:fillRef>
-          <a:effectRef idx="2">
-            <a:schemeClr val="accent1"/>
-          </a:effectRef>
-          <a:fontRef idx="minor">
-            <a:schemeClr val="lt1"/>
-          </a:fontRef>
-        </p:style>
-        <p:txBody>
-          <a:bodyPr rtlCol="0" anchor="ctr"/>
-          <a:lstStyle/>
-          <a:p>
-            <a:pPr algn="ctr"/>
-          </a:p>
-        </p:txBody>
-      </p:sp>
-      <p:sp>
-        <p:nvSpPr>
-          <p:cNvPr id="29" name="TextBox 28"/>
-          <p:cNvSpPr txBox="1"/>
-          <p:nvPr/>
-        </p:nvSpPr>
-        <p:spPr>
-          <a:xfrm>
-            <a:off x="7481620" y="2148840"/>
-            <a:ext cx="438912" cy="420624"/>
-          </a:xfrm>
-          <a:prstGeom prst="rect">
-            <a:avLst/>
-          </a:prstGeom>
-          <a:noFill/>
-        </p:spPr>
-        <p:txBody>
-          <a:bodyPr wrap="square" anchor="ctr">
-            <a:spAutoFit/>
-          </a:bodyPr>
-          <a:lstStyle/>
-          <a:p>
-            <a:pPr algn="ctr"/>
-            <a:r>
-              <a:rPr sz="1400" b="1">
-                <a:solidFill>
-                  <a:srgbClr val="FFFFFF"/>
-                </a:solidFill>
-                <a:latin typeface="Arial"/>
-              </a:rPr>
-              <a:t>4</a:t>
-            </a:r>
-          </a:p>
-        </p:txBody>
-      </p:sp>
-      <p:sp>
-        <p:nvSpPr>
-          <p:cNvPr id="30" name="TextBox 29"/>
-          <p:cNvSpPr txBox="1"/>
-          <p:nvPr/>
-        </p:nvSpPr>
-        <p:spPr>
-          <a:xfrm>
-            <a:off x="8085124" y="2103120"/>
-            <a:ext cx="1009497" cy="329184"/>
-          </a:xfrm>
-          <a:prstGeom prst="rect">
-            <a:avLst/>
-          </a:prstGeom>
-          <a:noFill/>
-        </p:spPr>
-        <p:txBody>
-          <a:bodyPr wrap="square" anchor="t">
-            <a:spAutoFit/>
-          </a:bodyPr>
-          <a:lstStyle/>
-          <a:p>
-            <a:pPr algn="l"/>
-            <a:r>
-              <a:rPr sz="1400" b="1">
-                <a:solidFill>
-                  <a:srgbClr val="F59E0B"/>
-                </a:solidFill>
-                <a:latin typeface="Arial"/>
-              </a:rPr>
-              <a:t>Compare</a:t>
-            </a:r>
-          </a:p>
-        </p:txBody>
-      </p:sp>
-      <p:sp>
-        <p:nvSpPr>
-          <p:cNvPr id="31" name="TextBox 30"/>
-          <p:cNvSpPr txBox="1"/>
-          <p:nvPr/>
-        </p:nvSpPr>
-        <p:spPr>
-          <a:xfrm>
-            <a:off x="8085124" y="2487168"/>
-            <a:ext cx="1009497" cy="2852928"/>
-          </a:xfrm>
-          <a:prstGeom prst="rect">
-            <a:avLst/>
-          </a:prstGeom>
-          <a:noFill/>
-        </p:spPr>
-        <p:txBody>
-          <a:bodyPr wrap="square" anchor="t">
-            <a:spAutoFit/>
-          </a:bodyPr>
-          <a:lstStyle/>
-          <a:p>
-            <a:pPr algn="l"/>
-            <a:r>
-              <a:rPr sz="1150" b="0">
-                <a:solidFill>
-                  <a:srgbClr val="161B26"/>
-                </a:solidFill>
-                <a:latin typeface="Arial"/>
-              </a:rPr>
-              <a:t>Score accuracy, citations, hierarchy, editability, brand, access and speed.</a:t>
-            </a:r>
-          </a:p>
-        </p:txBody>
-      </p:sp>
-      <p:sp>
-        <p:nvSpPr>
-          <p:cNvPr id="32" name="Rounded Rectangle 31"/>
-          <p:cNvSpPr/>
-          <p:nvPr/>
-        </p:nvSpPr>
-        <p:spPr>
-          <a:xfrm>
-            <a:off x="9478670" y="1920240"/>
-            <a:ext cx="1997049" cy="3566160"/>
-          </a:xfrm>
-          <a:prstGeom prst="roundRect">
-            <a:avLst/>
-          </a:prstGeom>
-          <a:solidFill>
-            <a:srgbClr val="F5F8FC"/>
-          </a:solidFill>
-          <a:ln>
-            <a:solidFill>
-              <a:srgbClr val="E2E8F0"/>
-            </a:solidFill>
-          </a:ln>
-        </p:spPr>
-        <p:style>
-          <a:lnRef idx="1">
-            <a:schemeClr val="accent1"/>
-          </a:lnRef>
-          <a:fillRef idx="3">
-            <a:schemeClr val="accent1"/>
-          </a:fillRef>
-          <a:effectRef idx="2">
-            <a:schemeClr val="accent1"/>
-          </a:effectRef>
-          <a:fontRef idx="minor">
-            <a:schemeClr val="lt1"/>
-          </a:fontRef>
-        </p:style>
-        <p:txBody>
-          <a:bodyPr rtlCol="0" anchor="ctr"/>
-          <a:lstStyle/>
-          <a:p>
-            <a:pPr algn="ctr"/>
-          </a:p>
-        </p:txBody>
-      </p:sp>
-      <p:sp>
-        <p:nvSpPr>
-          <p:cNvPr id="33" name="Rectangle 32"/>
-          <p:cNvSpPr/>
-          <p:nvPr/>
-        </p:nvSpPr>
-        <p:spPr>
-          <a:xfrm>
-            <a:off x="9478670" y="1920240"/>
-            <a:ext cx="73152" cy="3566160"/>
-          </a:xfrm>
-          <a:prstGeom prst="rect">
-            <a:avLst/>
-          </a:prstGeom>
-          <a:solidFill>
-            <a:srgbClr val="1F6FEB"/>
-          </a:solidFill>
-          <a:ln>
-            <a:solidFill>
-              <a:srgbClr val="1F6FEB"/>
-            </a:solidFill>
-          </a:ln>
-        </p:spPr>
-        <p:style>
-          <a:lnRef idx="1">
-            <a:schemeClr val="accent1"/>
-          </a:lnRef>
-          <a:fillRef idx="3">
-            <a:schemeClr val="accent1"/>
-          </a:fillRef>
-          <a:effectRef idx="2">
-            <a:schemeClr val="accent1"/>
-          </a:effectRef>
-          <a:fontRef idx="minor">
-            <a:schemeClr val="lt1"/>
-          </a:fontRef>
-        </p:style>
-        <p:txBody>
-          <a:bodyPr rtlCol="0" anchor="ctr"/>
-          <a:lstStyle/>
-          <a:p>
-            <a:pPr algn="ctr"/>
-          </a:p>
-        </p:txBody>
-      </p:sp>
-      <p:sp>
-        <p:nvSpPr>
-          <p:cNvPr id="34" name="Rounded Rectangle 33"/>
-          <p:cNvSpPr/>
-          <p:nvPr/>
-        </p:nvSpPr>
-        <p:spPr>
-          <a:xfrm>
-            <a:off x="9679838" y="2139696"/>
-            <a:ext cx="438912" cy="438912"/>
-          </a:xfrm>
-          <a:prstGeom prst="roundRect">
-            <a:avLst/>
-          </a:prstGeom>
-          <a:solidFill>
-            <a:srgbClr val="1F6FEB"/>
-          </a:solidFill>
-          <a:ln>
-            <a:solidFill>
-              <a:srgbClr val="1F6FEB"/>
-            </a:solidFill>
-          </a:ln>
-        </p:spPr>
-        <p:style>
-          <a:lnRef idx="1">
-            <a:schemeClr val="accent1"/>
-          </a:lnRef>
-          <a:fillRef idx="3">
-            <a:schemeClr val="accent1"/>
-          </a:fillRef>
-          <a:effectRef idx="2">
-            <a:schemeClr val="accent1"/>
-          </a:effectRef>
-          <a:fontRef idx="minor">
-            <a:schemeClr val="lt1"/>
-          </a:fontRef>
-        </p:style>
-        <p:txBody>
-          <a:bodyPr rtlCol="0" anchor="ctr"/>
-          <a:lstStyle/>
-          <a:p>
-            <a:pPr algn="ctr"/>
-          </a:p>
-        </p:txBody>
-      </p:sp>
-      <p:sp>
-        <p:nvSpPr>
-          <p:cNvPr id="35" name="TextBox 34"/>
-          <p:cNvSpPr txBox="1"/>
-          <p:nvPr/>
-        </p:nvSpPr>
-        <p:spPr>
-          <a:xfrm>
-            <a:off x="9679838" y="2148840"/>
-            <a:ext cx="438912" cy="420624"/>
-          </a:xfrm>
-          <a:prstGeom prst="rect">
-            <a:avLst/>
-          </a:prstGeom>
-          <a:noFill/>
-        </p:spPr>
-        <p:txBody>
-          <a:bodyPr wrap="square" anchor="ctr">
-            <a:spAutoFit/>
-          </a:bodyPr>
-          <a:lstStyle/>
-          <a:p>
-            <a:pPr algn="ctr"/>
-            <a:r>
-              <a:rPr sz="1400" b="1">
-                <a:solidFill>
-                  <a:srgbClr val="FFFFFF"/>
-                </a:solidFill>
-                <a:latin typeface="Arial"/>
-              </a:rPr>
-              <a:t>5</a:t>
-            </a:r>
-          </a:p>
-        </p:txBody>
-      </p:sp>
-      <p:sp>
-        <p:nvSpPr>
-          <p:cNvPr id="36" name="TextBox 35"/>
-          <p:cNvSpPr txBox="1"/>
-          <p:nvPr/>
-        </p:nvSpPr>
-        <p:spPr>
-          <a:xfrm>
-            <a:off x="10283342" y="2103120"/>
-            <a:ext cx="1009497" cy="329184"/>
-          </a:xfrm>
-          <a:prstGeom prst="rect">
-            <a:avLst/>
-          </a:prstGeom>
-          <a:noFill/>
-        </p:spPr>
-        <p:txBody>
-          <a:bodyPr wrap="square" anchor="t">
-            <a:spAutoFit/>
-          </a:bodyPr>
-          <a:lstStyle/>
-          <a:p>
-            <a:pPr algn="l"/>
-            <a:r>
-              <a:rPr sz="1400" b="1">
-                <a:solidFill>
-                  <a:srgbClr val="1F6FEB"/>
-                </a:solidFill>
-                <a:latin typeface="Arial"/>
-              </a:rPr>
-              <a:t>Refine</a:t>
-            </a:r>
-          </a:p>
-        </p:txBody>
-      </p:sp>
-      <p:sp>
-        <p:nvSpPr>
-          <p:cNvPr id="37" name="TextBox 36"/>
-          <p:cNvSpPr txBox="1"/>
-          <p:nvPr/>
-        </p:nvSpPr>
-        <p:spPr>
-          <a:xfrm>
-            <a:off x="10283342" y="2487168"/>
-            <a:ext cx="1009497" cy="2852928"/>
-          </a:xfrm>
-          <a:prstGeom prst="rect">
-            <a:avLst/>
-          </a:prstGeom>
-          <a:noFill/>
-        </p:spPr>
-        <p:txBody>
-          <a:bodyPr wrap="square" anchor="t">
-            <a:spAutoFit/>
-          </a:bodyPr>
-          <a:lstStyle/>
-          <a:p>
-            <a:pPr algn="l"/>
-            <a:r>
-              <a:rPr sz="1150" b="0">
-                <a:solidFill>
-                  <a:srgbClr val="161B26"/>
-                </a:solidFill>
-                <a:latin typeface="Arial"/>
-              </a:rPr>
-              <a:t>Choose, verify and rebuild the accountable PowerPoint master.</a:t>
+              <a:t>Use Microsoft 365 Copilot with the approved strategy note to create two hierarchy directions. Verify the relationships, then rebuild the selected direction as an editable PowerPoint hierarchy.</a:t>
             </a:r>
           </a:p>
         </p:txBody>
@@ -6940,11 +6626,11 @@
             <a:avLst/>
           </a:prstGeom>
           <a:solidFill>
-            <a:srgbClr val="7C3AED"/>
+            <a:srgbClr val="10B981"/>
           </a:solidFill>
           <a:ln>
             <a:solidFill>
-              <a:srgbClr val="7C3AED"/>
+              <a:srgbClr val="10B981"/>
             </a:solidFill>
           </a:ln>
         </p:spPr>
@@ -6996,11 +6682,11 @@
             <a:r>
               <a:rPr sz="1100" b="1">
                 <a:solidFill>
-                  <a:srgbClr val="7C3AED"/>
+                  <a:srgbClr val="10B981"/>
                 </a:solidFill>
                 <a:latin typeface="Arial"/>
               </a:rPr>
-              <a:t>ACTIVITY 06 · EXAMPLE</a:t>
+              <a:t>ACTIVITY 06 · FRAMEWORK</a:t>
             </a:r>
           </a:p>
         </p:txBody>
@@ -7035,7 +6721,7 @@
                 </a:solidFill>
                 <a:latin typeface="Arial"/>
               </a:rPr>
-              <a:t>Worked Output</a:t>
+              <a:t>Goal-to-Measure Hierarchy</a:t>
             </a:r>
           </a:p>
         </p:txBody>
@@ -7128,8 +6814,8 @@
         </p:nvSpPr>
         <p:spPr>
           <a:xfrm>
-            <a:off x="731520" y="1783080"/>
-            <a:ext cx="3401568" cy="1719072"/>
+            <a:off x="685800" y="1920240"/>
+            <a:ext cx="1997049" cy="3566160"/>
           </a:xfrm>
           <a:prstGeom prst="roundRect">
             <a:avLst/>
@@ -7173,8 +6859,8 @@
         </p:nvSpPr>
         <p:spPr>
           <a:xfrm>
-            <a:off x="731520" y="1783080"/>
-            <a:ext cx="73152" cy="1719072"/>
+            <a:off x="685800" y="1920240"/>
+            <a:ext cx="73152" cy="3566160"/>
           </a:xfrm>
           <a:prstGeom prst="rect">
             <a:avLst/>
@@ -7218,7 +6904,7 @@
         </p:nvSpPr>
         <p:spPr>
           <a:xfrm>
-            <a:off x="932688" y="2002536"/>
+            <a:off x="886968" y="2139696"/>
             <a:ext cx="438912" cy="438912"/>
           </a:xfrm>
           <a:prstGeom prst="roundRect">
@@ -7263,7 +6949,7 @@
         </p:nvSpPr>
         <p:spPr>
           <a:xfrm>
-            <a:off x="932688" y="2011680"/>
+            <a:off x="886968" y="2148840"/>
             <a:ext cx="438912" cy="420624"/>
           </a:xfrm>
           <a:prstGeom prst="rect">
@@ -7298,8 +6984,8 @@
         </p:nvSpPr>
         <p:spPr>
           <a:xfrm>
-            <a:off x="1536192" y="1965960"/>
-            <a:ext cx="2414016" cy="329184"/>
+            <a:off x="1490472" y="2103120"/>
+            <a:ext cx="1009497" cy="329184"/>
           </a:xfrm>
           <a:prstGeom prst="rect">
             <a:avLst/>
@@ -7320,7 +7006,7 @@
                 </a:solidFill>
                 <a:latin typeface="Arial"/>
               </a:rPr>
-              <a:t>Truth</a:t>
+              <a:t>Ground</a:t>
             </a:r>
           </a:p>
         </p:txBody>
@@ -7333,8 +7019,8 @@
         </p:nvSpPr>
         <p:spPr>
           <a:xfrm>
-            <a:off x="1536192" y="2350008"/>
-            <a:ext cx="2414016" cy="1005839"/>
+            <a:off x="1490472" y="2487168"/>
+            <a:ext cx="1009497" cy="2852928"/>
           </a:xfrm>
           <a:prstGeom prst="rect">
             <a:avLst/>
@@ -7355,7 +7041,7 @@
                 </a:solidFill>
                 <a:latin typeface="Arial"/>
               </a:rPr>
-              <a:t>Every fact and number matches the approved source.</a:t>
+              <a:t>Load the approved strategy note and metric definitions.</a:t>
             </a:r>
           </a:p>
         </p:txBody>
@@ -7368,8 +7054,8 @@
         </p:nvSpPr>
         <p:spPr>
           <a:xfrm>
-            <a:off x="4315968" y="1783080"/>
-            <a:ext cx="3401568" cy="1719072"/>
+            <a:off x="2884017" y="1920240"/>
+            <a:ext cx="1997049" cy="3566160"/>
           </a:xfrm>
           <a:prstGeom prst="roundRect">
             <a:avLst/>
@@ -7413,8 +7099,8 @@
         </p:nvSpPr>
         <p:spPr>
           <a:xfrm>
-            <a:off x="4315968" y="1783080"/>
-            <a:ext cx="73152" cy="1719072"/>
+            <a:off x="2884017" y="1920240"/>
+            <a:ext cx="73152" cy="3566160"/>
           </a:xfrm>
           <a:prstGeom prst="rect">
             <a:avLst/>
@@ -7458,7 +7144,7 @@
         </p:nvSpPr>
         <p:spPr>
           <a:xfrm>
-            <a:off x="4517136" y="2002536"/>
+            <a:off x="3085185" y="2139696"/>
             <a:ext cx="438912" cy="438912"/>
           </a:xfrm>
           <a:prstGeom prst="roundRect">
@@ -7503,7 +7189,7 @@
         </p:nvSpPr>
         <p:spPr>
           <a:xfrm>
-            <a:off x="4517136" y="2011680"/>
+            <a:off x="3085185" y="2148840"/>
             <a:ext cx="438912" cy="420624"/>
           </a:xfrm>
           <a:prstGeom prst="rect">
@@ -7538,8 +7224,8 @@
         </p:nvSpPr>
         <p:spPr>
           <a:xfrm>
-            <a:off x="5120640" y="1965960"/>
-            <a:ext cx="2414016" cy="329184"/>
+            <a:off x="3688689" y="2103120"/>
+            <a:ext cx="1009497" cy="329184"/>
           </a:xfrm>
           <a:prstGeom prst="rect">
             <a:avLst/>
@@ -7560,7 +7246,7 @@
                 </a:solidFill>
                 <a:latin typeface="Arial"/>
               </a:rPr>
-              <a:t>Privacy</a:t>
+              <a:t>Prompt</a:t>
             </a:r>
           </a:p>
         </p:txBody>
@@ -7573,8 +7259,8 @@
         </p:nvSpPr>
         <p:spPr>
           <a:xfrm>
-            <a:off x="5120640" y="2350008"/>
-            <a:ext cx="2414016" cy="1005839"/>
+            <a:off x="3688689" y="2487168"/>
+            <a:ext cx="1009497" cy="2852928"/>
           </a:xfrm>
           <a:prstGeom prst="rect">
             <a:avLst/>
@@ -7595,7 +7281,7 @@
                 </a:solidFill>
                 <a:latin typeface="Arial"/>
               </a:rPr>
-              <a:t>No personal or restricted data enters an unapproved service.</a:t>
+              <a:t>Specify a five-level hierarchy, audience, decision and source rule.</a:t>
             </a:r>
           </a:p>
         </p:txBody>
@@ -7608,8 +7294,8 @@
         </p:nvSpPr>
         <p:spPr>
           <a:xfrm>
-            <a:off x="7900416" y="1783080"/>
-            <a:ext cx="3401568" cy="1719072"/>
+            <a:off x="5082235" y="1920240"/>
+            <a:ext cx="1997049" cy="3566160"/>
           </a:xfrm>
           <a:prstGeom prst="roundRect">
             <a:avLst/>
@@ -7653,8 +7339,8 @@
         </p:nvSpPr>
         <p:spPr>
           <a:xfrm>
-            <a:off x="7900416" y="1783080"/>
-            <a:ext cx="73152" cy="1719072"/>
+            <a:off x="5082235" y="1920240"/>
+            <a:ext cx="73152" cy="3566160"/>
           </a:xfrm>
           <a:prstGeom prst="rect">
             <a:avLst/>
@@ -7698,7 +7384,7 @@
         </p:nvSpPr>
         <p:spPr>
           <a:xfrm>
-            <a:off x="8101584" y="2002536"/>
+            <a:off x="5283403" y="2139696"/>
             <a:ext cx="438912" cy="438912"/>
           </a:xfrm>
           <a:prstGeom prst="roundRect">
@@ -7743,7 +7429,7 @@
         </p:nvSpPr>
         <p:spPr>
           <a:xfrm>
-            <a:off x="8101584" y="2011680"/>
+            <a:off x="5283403" y="2148840"/>
             <a:ext cx="438912" cy="420624"/>
           </a:xfrm>
           <a:prstGeom prst="rect">
@@ -7778,8 +7464,8 @@
         </p:nvSpPr>
         <p:spPr>
           <a:xfrm>
-            <a:off x="8705088" y="1965960"/>
-            <a:ext cx="2414016" cy="329184"/>
+            <a:off x="5886907" y="2103120"/>
+            <a:ext cx="1009497" cy="329184"/>
           </a:xfrm>
           <a:prstGeom prst="rect">
             <a:avLst/>
@@ -7800,7 +7486,7 @@
                 </a:solidFill>
                 <a:latin typeface="Arial"/>
               </a:rPr>
-              <a:t>Rights</a:t>
+              <a:t>Generate</a:t>
             </a:r>
           </a:p>
         </p:txBody>
@@ -7813,8 +7499,8 @@
         </p:nvSpPr>
         <p:spPr>
           <a:xfrm>
-            <a:off x="8705088" y="2350008"/>
-            <a:ext cx="2414016" cy="1005839"/>
+            <a:off x="5886907" y="2487168"/>
+            <a:ext cx="1009497" cy="2852928"/>
           </a:xfrm>
           <a:prstGeom prst="rect">
             <a:avLst/>
@@ -7835,7 +7521,7 @@
                 </a:solidFill>
                 <a:latin typeface="Arial"/>
               </a:rPr>
-              <a:t>Images, icons, fonts and templates are permitted.</a:t>
+              <a:t>Create two Copilot hierarchy directions in Wide format.</a:t>
             </a:r>
           </a:p>
         </p:txBody>
@@ -7848,8 +7534,8 @@
         </p:nvSpPr>
         <p:spPr>
           <a:xfrm>
-            <a:off x="731520" y="3776472"/>
-            <a:ext cx="3401568" cy="1719072"/>
+            <a:off x="7280452" y="1920240"/>
+            <a:ext cx="1997049" cy="3566160"/>
           </a:xfrm>
           <a:prstGeom prst="roundRect">
             <a:avLst/>
@@ -7893,8 +7579,8 @@
         </p:nvSpPr>
         <p:spPr>
           <a:xfrm>
-            <a:off x="731520" y="3776472"/>
-            <a:ext cx="73152" cy="1719072"/>
+            <a:off x="7280452" y="1920240"/>
+            <a:ext cx="73152" cy="3566160"/>
           </a:xfrm>
           <a:prstGeom prst="rect">
             <a:avLst/>
@@ -7938,7 +7624,7 @@
         </p:nvSpPr>
         <p:spPr>
           <a:xfrm>
-            <a:off x="932688" y="3995928"/>
+            <a:off x="7481620" y="2139696"/>
             <a:ext cx="438912" cy="438912"/>
           </a:xfrm>
           <a:prstGeom prst="roundRect">
@@ -7983,7 +7669,7 @@
         </p:nvSpPr>
         <p:spPr>
           <a:xfrm>
-            <a:off x="932688" y="4005072"/>
+            <a:off x="7481620" y="2148840"/>
             <a:ext cx="438912" cy="420624"/>
           </a:xfrm>
           <a:prstGeom prst="rect">
@@ -8018,8 +7704,8 @@
         </p:nvSpPr>
         <p:spPr>
           <a:xfrm>
-            <a:off x="1536192" y="3959352"/>
-            <a:ext cx="2414016" cy="329184"/>
+            <a:off x="8085124" y="2103120"/>
+            <a:ext cx="1009497" cy="329184"/>
           </a:xfrm>
           <a:prstGeom prst="rect">
             <a:avLst/>
@@ -8040,7 +7726,7 @@
                 </a:solidFill>
                 <a:latin typeface="Arial"/>
               </a:rPr>
-              <a:t>Access</a:t>
+              <a:t>Rebuild</a:t>
             </a:r>
           </a:p>
         </p:txBody>
@@ -8053,8 +7739,8 @@
         </p:nvSpPr>
         <p:spPr>
           <a:xfrm>
-            <a:off x="1536192" y="4343400"/>
-            <a:ext cx="2414016" cy="1005839"/>
+            <a:off x="8085124" y="2487168"/>
+            <a:ext cx="1009497" cy="2852928"/>
           </a:xfrm>
           <a:prstGeom prst="rect">
             <a:avLst/>
@@ -8075,7 +7761,7 @@
                 </a:solidFill>
                 <a:latin typeface="Arial"/>
               </a:rPr>
-              <a:t>Reading order, contrast, labels and alt text are checked.</a:t>
+              <a:t>Make goal, outcome, measure, owner and review editable in PowerPoint.</a:t>
             </a:r>
           </a:p>
         </p:txBody>
@@ -8088,8 +7774,8 @@
         </p:nvSpPr>
         <p:spPr>
           <a:xfrm>
-            <a:off x="4315968" y="3776472"/>
-            <a:ext cx="3401568" cy="1719072"/>
+            <a:off x="9478670" y="1920240"/>
+            <a:ext cx="1997049" cy="3566160"/>
           </a:xfrm>
           <a:prstGeom prst="roundRect">
             <a:avLst/>
@@ -8133,8 +7819,8 @@
         </p:nvSpPr>
         <p:spPr>
           <a:xfrm>
-            <a:off x="4315968" y="3776472"/>
-            <a:ext cx="73152" cy="1719072"/>
+            <a:off x="9478670" y="1920240"/>
+            <a:ext cx="73152" cy="3566160"/>
           </a:xfrm>
           <a:prstGeom prst="rect">
             <a:avLst/>
@@ -8178,7 +7864,7 @@
         </p:nvSpPr>
         <p:spPr>
           <a:xfrm>
-            <a:off x="4517136" y="3995928"/>
+            <a:off x="9679838" y="2139696"/>
             <a:ext cx="438912" cy="438912"/>
           </a:xfrm>
           <a:prstGeom prst="roundRect">
@@ -8223,7 +7909,7 @@
         </p:nvSpPr>
         <p:spPr>
           <a:xfrm>
-            <a:off x="4517136" y="4005072"/>
+            <a:off x="9679838" y="2148840"/>
             <a:ext cx="438912" cy="420624"/>
           </a:xfrm>
           <a:prstGeom prst="rect">
@@ -8258,8 +7944,8 @@
         </p:nvSpPr>
         <p:spPr>
           <a:xfrm>
-            <a:off x="5120640" y="3959352"/>
-            <a:ext cx="2414016" cy="329184"/>
+            <a:off x="10283342" y="2103120"/>
+            <a:ext cx="1009497" cy="329184"/>
           </a:xfrm>
           <a:prstGeom prst="rect">
             <a:avLst/>
@@ -8280,7 +7966,7 @@
                 </a:solidFill>
                 <a:latin typeface="Arial"/>
               </a:rPr>
-              <a:t>Brand</a:t>
+              <a:t>Verify</a:t>
             </a:r>
           </a:p>
         </p:txBody>
@@ -8293,8 +7979,8 @@
         </p:nvSpPr>
         <p:spPr>
           <a:xfrm>
-            <a:off x="5120640" y="4343400"/>
-            <a:ext cx="2414016" cy="1005839"/>
+            <a:off x="10283342" y="2487168"/>
+            <a:ext cx="1009497" cy="2852928"/>
           </a:xfrm>
           <a:prstGeom prst="rect">
             <a:avLst/>
@@ -8315,247 +8001,7 @@
                 </a:solidFill>
                 <a:latin typeface="Arial"/>
               </a:rPr>
-              <a:t>The approved master, voice and assets are applied.</a:t>
-            </a:r>
-          </a:p>
-        </p:txBody>
-      </p:sp>
-      <p:sp>
-        <p:nvSpPr>
-          <p:cNvPr id="38" name="Rounded Rectangle 37"/>
-          <p:cNvSpPr/>
-          <p:nvPr/>
-        </p:nvSpPr>
-        <p:spPr>
-          <a:xfrm>
-            <a:off x="7900416" y="3776472"/>
-            <a:ext cx="3401568" cy="1719072"/>
-          </a:xfrm>
-          <a:prstGeom prst="roundRect">
-            <a:avLst/>
-          </a:prstGeom>
-          <a:solidFill>
-            <a:srgbClr val="F5F8FC"/>
-          </a:solidFill>
-          <a:ln>
-            <a:solidFill>
-              <a:srgbClr val="E2E8F0"/>
-            </a:solidFill>
-          </a:ln>
-        </p:spPr>
-        <p:style>
-          <a:lnRef idx="1">
-            <a:schemeClr val="accent1"/>
-          </a:lnRef>
-          <a:fillRef idx="3">
-            <a:schemeClr val="accent1"/>
-          </a:fillRef>
-          <a:effectRef idx="2">
-            <a:schemeClr val="accent1"/>
-          </a:effectRef>
-          <a:fontRef idx="minor">
-            <a:schemeClr val="lt1"/>
-          </a:fontRef>
-        </p:style>
-        <p:txBody>
-          <a:bodyPr rtlCol="0" anchor="ctr"/>
-          <a:lstStyle/>
-          <a:p>
-            <a:pPr algn="ctr"/>
-          </a:p>
-        </p:txBody>
-      </p:sp>
-      <p:sp>
-        <p:nvSpPr>
-          <p:cNvPr id="39" name="Rectangle 38"/>
-          <p:cNvSpPr/>
-          <p:nvPr/>
-        </p:nvSpPr>
-        <p:spPr>
-          <a:xfrm>
-            <a:off x="7900416" y="3776472"/>
-            <a:ext cx="73152" cy="1719072"/>
-          </a:xfrm>
-          <a:prstGeom prst="rect">
-            <a:avLst/>
-          </a:prstGeom>
-          <a:solidFill>
-            <a:srgbClr val="10B981"/>
-          </a:solidFill>
-          <a:ln>
-            <a:solidFill>
-              <a:srgbClr val="10B981"/>
-            </a:solidFill>
-          </a:ln>
-        </p:spPr>
-        <p:style>
-          <a:lnRef idx="1">
-            <a:schemeClr val="accent1"/>
-          </a:lnRef>
-          <a:fillRef idx="3">
-            <a:schemeClr val="accent1"/>
-          </a:fillRef>
-          <a:effectRef idx="2">
-            <a:schemeClr val="accent1"/>
-          </a:effectRef>
-          <a:fontRef idx="minor">
-            <a:schemeClr val="lt1"/>
-          </a:fontRef>
-        </p:style>
-        <p:txBody>
-          <a:bodyPr rtlCol="0" anchor="ctr"/>
-          <a:lstStyle/>
-          <a:p>
-            <a:pPr algn="ctr"/>
-          </a:p>
-        </p:txBody>
-      </p:sp>
-      <p:sp>
-        <p:nvSpPr>
-          <p:cNvPr id="40" name="Rounded Rectangle 39"/>
-          <p:cNvSpPr/>
-          <p:nvPr/>
-        </p:nvSpPr>
-        <p:spPr>
-          <a:xfrm>
-            <a:off x="8101584" y="3995928"/>
-            <a:ext cx="438912" cy="438912"/>
-          </a:xfrm>
-          <a:prstGeom prst="roundRect">
-            <a:avLst/>
-          </a:prstGeom>
-          <a:solidFill>
-            <a:srgbClr val="10B981"/>
-          </a:solidFill>
-          <a:ln>
-            <a:solidFill>
-              <a:srgbClr val="10B981"/>
-            </a:solidFill>
-          </a:ln>
-        </p:spPr>
-        <p:style>
-          <a:lnRef idx="1">
-            <a:schemeClr val="accent1"/>
-          </a:lnRef>
-          <a:fillRef idx="3">
-            <a:schemeClr val="accent1"/>
-          </a:fillRef>
-          <a:effectRef idx="2">
-            <a:schemeClr val="accent1"/>
-          </a:effectRef>
-          <a:fontRef idx="minor">
-            <a:schemeClr val="lt1"/>
-          </a:fontRef>
-        </p:style>
-        <p:txBody>
-          <a:bodyPr rtlCol="0" anchor="ctr"/>
-          <a:lstStyle/>
-          <a:p>
-            <a:pPr algn="ctr"/>
-          </a:p>
-        </p:txBody>
-      </p:sp>
-      <p:sp>
-        <p:nvSpPr>
-          <p:cNvPr id="41" name="TextBox 40"/>
-          <p:cNvSpPr txBox="1"/>
-          <p:nvPr/>
-        </p:nvSpPr>
-        <p:spPr>
-          <a:xfrm>
-            <a:off x="8101584" y="4005072"/>
-            <a:ext cx="438912" cy="420624"/>
-          </a:xfrm>
-          <a:prstGeom prst="rect">
-            <a:avLst/>
-          </a:prstGeom>
-          <a:noFill/>
-        </p:spPr>
-        <p:txBody>
-          <a:bodyPr wrap="square" anchor="ctr">
-            <a:spAutoFit/>
-          </a:bodyPr>
-          <a:lstStyle/>
-          <a:p>
-            <a:pPr algn="ctr"/>
-            <a:r>
-              <a:rPr sz="1400" b="1">
-                <a:solidFill>
-                  <a:srgbClr val="FFFFFF"/>
-                </a:solidFill>
-                <a:latin typeface="Arial"/>
-              </a:rPr>
-              <a:t>6</a:t>
-            </a:r>
-          </a:p>
-        </p:txBody>
-      </p:sp>
-      <p:sp>
-        <p:nvSpPr>
-          <p:cNvPr id="42" name="TextBox 41"/>
-          <p:cNvSpPr txBox="1"/>
-          <p:nvPr/>
-        </p:nvSpPr>
-        <p:spPr>
-          <a:xfrm>
-            <a:off x="8705088" y="3959352"/>
-            <a:ext cx="2414016" cy="329184"/>
-          </a:xfrm>
-          <a:prstGeom prst="rect">
-            <a:avLst/>
-          </a:prstGeom>
-          <a:noFill/>
-        </p:spPr>
-        <p:txBody>
-          <a:bodyPr wrap="square" anchor="t">
-            <a:spAutoFit/>
-          </a:bodyPr>
-          <a:lstStyle/>
-          <a:p>
-            <a:pPr algn="l"/>
-            <a:r>
-              <a:rPr sz="1400" b="1">
-                <a:solidFill>
-                  <a:srgbClr val="10B981"/>
-                </a:solidFill>
-                <a:latin typeface="Arial"/>
-              </a:rPr>
-              <a:t>Owner</a:t>
-            </a:r>
-          </a:p>
-        </p:txBody>
-      </p:sp>
-      <p:sp>
-        <p:nvSpPr>
-          <p:cNvPr id="43" name="TextBox 42"/>
-          <p:cNvSpPr txBox="1"/>
-          <p:nvPr/>
-        </p:nvSpPr>
-        <p:spPr>
-          <a:xfrm>
-            <a:off x="8705088" y="4343400"/>
-            <a:ext cx="2414016" cy="1005839"/>
-          </a:xfrm>
-          <a:prstGeom prst="rect">
-            <a:avLst/>
-          </a:prstGeom>
-          <a:noFill/>
-        </p:spPr>
-        <p:txBody>
-          <a:bodyPr wrap="square" anchor="t">
-            <a:spAutoFit/>
-          </a:bodyPr>
-          <a:lstStyle/>
-          <a:p>
-            <a:pPr algn="l"/>
-            <a:r>
-              <a:rPr sz="1150" b="0">
-                <a:solidFill>
-                  <a:srgbClr val="161B26"/>
-                </a:solidFill>
-                <a:latin typeface="Arial"/>
-              </a:rPr>
-              <a:t>A named human approves and remains accountable.</a:t>
+              <a:t>Trace each relationship to the source and test reading order.</a:t>
             </a:r>
           </a:p>
         </p:txBody>
@@ -8638,11 +8084,11 @@
             <a:avLst/>
           </a:prstGeom>
           <a:solidFill>
-            <a:srgbClr val="1F6FEB"/>
+            <a:srgbClr val="7C3AED"/>
           </a:solidFill>
           <a:ln>
             <a:solidFill>
-              <a:srgbClr val="1F6FEB"/>
+              <a:srgbClr val="7C3AED"/>
             </a:solidFill>
           </a:ln>
         </p:spPr>
@@ -8694,11 +8140,11 @@
             <a:r>
               <a:rPr sz="1100" b="1">
                 <a:solidFill>
-                  <a:srgbClr val="1F6FEB"/>
+                  <a:srgbClr val="7C3AED"/>
                 </a:solidFill>
                 <a:latin typeface="Arial"/>
               </a:rPr>
-              <a:t>ACTIVITY 06 · ACCEPTANCE</a:t>
+              <a:t>ACTIVITY 06 · EXAMPLE</a:t>
             </a:r>
           </a:p>
         </p:txBody>
@@ -8733,7 +8179,7 @@
                 </a:solidFill>
                 <a:latin typeface="Arial"/>
               </a:rPr>
-              <a:t>What Good Looks Like</a:t>
+              <a:t>Worked Output</a:t>
             </a:r>
           </a:p>
         </p:txBody>
@@ -8826,10 +8272,55 @@
         </p:nvSpPr>
         <p:spPr>
           <a:xfrm>
-            <a:off x="749808" y="1810512"/>
-            <a:ext cx="10652760" cy="1005840"/>
+            <a:off x="731520" y="1783080"/>
+            <a:ext cx="3401568" cy="1719072"/>
           </a:xfrm>
           <a:prstGeom prst="roundRect">
+            <a:avLst/>
+          </a:prstGeom>
+          <a:solidFill>
+            <a:srgbClr val="F5F8FC"/>
+          </a:solidFill>
+          <a:ln>
+            <a:solidFill>
+              <a:srgbClr val="E2E8F0"/>
+            </a:solidFill>
+          </a:ln>
+        </p:spPr>
+        <p:style>
+          <a:lnRef idx="1">
+            <a:schemeClr val="accent1"/>
+          </a:lnRef>
+          <a:fillRef idx="3">
+            <a:schemeClr val="accent1"/>
+          </a:fillRef>
+          <a:effectRef idx="2">
+            <a:schemeClr val="accent1"/>
+          </a:effectRef>
+          <a:fontRef idx="minor">
+            <a:schemeClr val="lt1"/>
+          </a:fontRef>
+        </p:style>
+        <p:txBody>
+          <a:bodyPr rtlCol="0" anchor="ctr"/>
+          <a:lstStyle/>
+          <a:p>
+            <a:pPr algn="ctr"/>
+          </a:p>
+        </p:txBody>
+      </p:sp>
+      <p:sp>
+        <p:nvSpPr>
+          <p:cNvPr id="9" name="Rectangle 8"/>
+          <p:cNvSpPr/>
+          <p:nvPr/>
+        </p:nvSpPr>
+        <p:spPr>
+          <a:xfrm>
+            <a:off x="731520" y="1783080"/>
+            <a:ext cx="73152" cy="1719072"/>
+          </a:xfrm>
+          <a:prstGeom prst="rect">
             <a:avLst/>
           </a:prstGeom>
           <a:solidFill>
@@ -8865,14 +8356,59 @@
       </p:sp>
       <p:sp>
         <p:nvSpPr>
-          <p:cNvPr id="9" name="TextBox 8"/>
+          <p:cNvPr id="10" name="Rounded Rectangle 9"/>
+          <p:cNvSpPr/>
+          <p:nvPr/>
+        </p:nvSpPr>
+        <p:spPr>
+          <a:xfrm>
+            <a:off x="932688" y="2002536"/>
+            <a:ext cx="438912" cy="438912"/>
+          </a:xfrm>
+          <a:prstGeom prst="roundRect">
+            <a:avLst/>
+          </a:prstGeom>
+          <a:solidFill>
+            <a:srgbClr val="1F6FEB"/>
+          </a:solidFill>
+          <a:ln>
+            <a:solidFill>
+              <a:srgbClr val="1F6FEB"/>
+            </a:solidFill>
+          </a:ln>
+        </p:spPr>
+        <p:style>
+          <a:lnRef idx="1">
+            <a:schemeClr val="accent1"/>
+          </a:lnRef>
+          <a:fillRef idx="3">
+            <a:schemeClr val="accent1"/>
+          </a:fillRef>
+          <a:effectRef idx="2">
+            <a:schemeClr val="accent1"/>
+          </a:effectRef>
+          <a:fontRef idx="minor">
+            <a:schemeClr val="lt1"/>
+          </a:fontRef>
+        </p:style>
+        <p:txBody>
+          <a:bodyPr rtlCol="0" anchor="ctr"/>
+          <a:lstStyle/>
+          <a:p>
+            <a:pPr algn="ctr"/>
+          </a:p>
+        </p:txBody>
+      </p:sp>
+      <p:sp>
+        <p:nvSpPr>
+          <p:cNvPr id="11" name="TextBox 10"/>
           <p:cNvSpPr txBox="1"/>
           <p:nvPr/>
         </p:nvSpPr>
         <p:spPr>
           <a:xfrm>
-            <a:off x="1051560" y="2011680"/>
-            <a:ext cx="10058400" cy="566928"/>
+            <a:off x="932688" y="2011680"/>
+            <a:ext cx="438912" cy="420624"/>
           </a:xfrm>
           <a:prstGeom prst="rect">
             <a:avLst/>
@@ -8887,27 +8423,97 @@
           <a:p>
             <a:pPr algn="ctr"/>
             <a:r>
-              <a:rPr sz="1900" b="1">
+              <a:rPr sz="1400" b="1">
                 <a:solidFill>
                   <a:srgbClr val="FFFFFF"/>
                 </a:solidFill>
                 <a:latin typeface="Arial"/>
               </a:rPr>
-              <a:t>A Microsoft output, Gemini Notebook infographic and downloaded PPTX or PDF, comparison scorecard, reviewed final PowerPoint and prompt/source log</a:t>
-            </a:r>
-          </a:p>
-        </p:txBody>
-      </p:sp>
-      <p:sp>
-        <p:nvSpPr>
-          <p:cNvPr id="10" name="Rounded Rectangle 9"/>
+              <a:t>1</a:t>
+            </a:r>
+          </a:p>
+        </p:txBody>
+      </p:sp>
+      <p:sp>
+        <p:nvSpPr>
+          <p:cNvPr id="12" name="TextBox 11"/>
+          <p:cNvSpPr txBox="1"/>
+          <p:nvPr/>
+        </p:nvSpPr>
+        <p:spPr>
+          <a:xfrm>
+            <a:off x="1536192" y="1965960"/>
+            <a:ext cx="2414016" cy="329184"/>
+          </a:xfrm>
+          <a:prstGeom prst="rect">
+            <a:avLst/>
+          </a:prstGeom>
+          <a:noFill/>
+        </p:spPr>
+        <p:txBody>
+          <a:bodyPr wrap="square" anchor="t">
+            <a:spAutoFit/>
+          </a:bodyPr>
+          <a:lstStyle/>
+          <a:p>
+            <a:pPr algn="l"/>
+            <a:r>
+              <a:rPr sz="1400" b="1">
+                <a:solidFill>
+                  <a:srgbClr val="1F6FEB"/>
+                </a:solidFill>
+                <a:latin typeface="Arial"/>
+              </a:rPr>
+              <a:t>Goal</a:t>
+            </a:r>
+          </a:p>
+        </p:txBody>
+      </p:sp>
+      <p:sp>
+        <p:nvSpPr>
+          <p:cNvPr id="13" name="TextBox 12"/>
+          <p:cNvSpPr txBox="1"/>
+          <p:nvPr/>
+        </p:nvSpPr>
+        <p:spPr>
+          <a:xfrm>
+            <a:off x="1536192" y="2350008"/>
+            <a:ext cx="2414016" cy="1005839"/>
+          </a:xfrm>
+          <a:prstGeom prst="rect">
+            <a:avLst/>
+          </a:prstGeom>
+          <a:noFill/>
+        </p:spPr>
+        <p:txBody>
+          <a:bodyPr wrap="square" anchor="t">
+            <a:spAutoFit/>
+          </a:bodyPr>
+          <a:lstStyle/>
+          <a:p>
+            <a:pPr algn="l"/>
+            <a:r>
+              <a:rPr sz="1150" b="0">
+                <a:solidFill>
+                  <a:srgbClr val="161B26"/>
+                </a:solidFill>
+                <a:latin typeface="Arial"/>
+              </a:rPr>
+              <a:t>Improve service trust within the customer-support function.</a:t>
+            </a:r>
+          </a:p>
+        </p:txBody>
+      </p:sp>
+      <p:sp>
+        <p:nvSpPr>
+          <p:cNvPr id="14" name="Rounded Rectangle 13"/>
           <p:cNvSpPr/>
           <p:nvPr/>
         </p:nvSpPr>
         <p:spPr>
           <a:xfrm>
-            <a:off x="777240" y="3154680"/>
-            <a:ext cx="5074920" cy="749808"/>
+            <a:off x="4315968" y="1783080"/>
+            <a:ext cx="3401568" cy="1719072"/>
           </a:xfrm>
           <a:prstGeom prst="roundRect">
             <a:avLst/>
@@ -8945,14 +8551,14 @@
       </p:sp>
       <p:sp>
         <p:nvSpPr>
-          <p:cNvPr id="11" name="Rectangle 10"/>
+          <p:cNvPr id="15" name="Rectangle 14"/>
           <p:cNvSpPr/>
           <p:nvPr/>
         </p:nvSpPr>
         <p:spPr>
           <a:xfrm>
-            <a:off x="777240" y="3154680"/>
-            <a:ext cx="73152" cy="749808"/>
+            <a:off x="4315968" y="1783080"/>
+            <a:ext cx="73152" cy="1719072"/>
           </a:xfrm>
           <a:prstGeom prst="rect">
             <a:avLst/>
@@ -8990,13 +8596,13 @@
       </p:sp>
       <p:sp>
         <p:nvSpPr>
-          <p:cNvPr id="12" name="Rounded Rectangle 11"/>
+          <p:cNvPr id="16" name="Rounded Rectangle 15"/>
           <p:cNvSpPr/>
           <p:nvPr/>
         </p:nvSpPr>
         <p:spPr>
           <a:xfrm>
-            <a:off x="978408" y="3374136"/>
+            <a:off x="4517136" y="2002536"/>
             <a:ext cx="438912" cy="438912"/>
           </a:xfrm>
           <a:prstGeom prst="roundRect">
@@ -9035,13 +8641,13 @@
       </p:sp>
       <p:sp>
         <p:nvSpPr>
-          <p:cNvPr id="13" name="TextBox 12"/>
+          <p:cNvPr id="17" name="TextBox 16"/>
           <p:cNvSpPr txBox="1"/>
           <p:nvPr/>
         </p:nvSpPr>
         <p:spPr>
           <a:xfrm>
-            <a:off x="978408" y="3383280"/>
+            <a:off x="4517136" y="2011680"/>
             <a:ext cx="438912" cy="420624"/>
           </a:xfrm>
           <a:prstGeom prst="rect">
@@ -9063,21 +8669,21 @@
                 </a:solidFill>
                 <a:latin typeface="Arial"/>
               </a:rPr>
-              <a:t>1</a:t>
-            </a:r>
-          </a:p>
-        </p:txBody>
-      </p:sp>
-      <p:sp>
-        <p:nvSpPr>
-          <p:cNvPr id="14" name="TextBox 13"/>
+              <a:t>2</a:t>
+            </a:r>
+          </a:p>
+        </p:txBody>
+      </p:sp>
+      <p:sp>
+        <p:nvSpPr>
+          <p:cNvPr id="18" name="TextBox 17"/>
           <p:cNvSpPr txBox="1"/>
           <p:nvPr/>
         </p:nvSpPr>
         <p:spPr>
           <a:xfrm>
-            <a:off x="1581912" y="3337560"/>
-            <a:ext cx="4087368" cy="329184"/>
+            <a:off x="5120640" y="1965960"/>
+            <a:ext cx="2414016" cy="329184"/>
           </a:xfrm>
           <a:prstGeom prst="rect">
             <a:avLst/>
@@ -9098,21 +8704,21 @@
                 </a:solidFill>
                 <a:latin typeface="Arial"/>
               </a:rPr>
-              <a:t>CHECK</a:t>
-            </a:r>
-          </a:p>
-        </p:txBody>
-      </p:sp>
-      <p:sp>
-        <p:nvSpPr>
-          <p:cNvPr id="15" name="TextBox 14"/>
+              <a:t>Outcome</a:t>
+            </a:r>
+          </a:p>
+        </p:txBody>
+      </p:sp>
+      <p:sp>
+        <p:nvSpPr>
+          <p:cNvPr id="19" name="TextBox 18"/>
           <p:cNvSpPr txBox="1"/>
           <p:nvPr/>
         </p:nvSpPr>
         <p:spPr>
           <a:xfrm>
-            <a:off x="1581912" y="3721608"/>
-            <a:ext cx="4087368" cy="36575"/>
+            <a:off x="5120640" y="2350008"/>
+            <a:ext cx="2414016" cy="1005839"/>
           </a:xfrm>
           <a:prstGeom prst="rect">
             <a:avLst/>
@@ -9133,21 +8739,21 @@
                 </a:solidFill>
                 <a:latin typeface="Arial"/>
               </a:rPr>
-              <a:t>Both tools used the same approved brief and source scope</a:t>
-            </a:r>
-          </a:p>
-        </p:txBody>
-      </p:sp>
-      <p:sp>
-        <p:nvSpPr>
-          <p:cNvPr id="16" name="Rounded Rectangle 15"/>
+              <a:t>Customers receive faster, clearer recovery updates.</a:t>
+            </a:r>
+          </a:p>
+        </p:txBody>
+      </p:sp>
+      <p:sp>
+        <p:nvSpPr>
+          <p:cNvPr id="20" name="Rounded Rectangle 19"/>
           <p:cNvSpPr/>
           <p:nvPr/>
         </p:nvSpPr>
         <p:spPr>
           <a:xfrm>
-            <a:off x="6126479" y="3154680"/>
-            <a:ext cx="5074920" cy="749808"/>
+            <a:off x="7900416" y="1783080"/>
+            <a:ext cx="3401568" cy="1719072"/>
           </a:xfrm>
           <a:prstGeom prst="roundRect">
             <a:avLst/>
@@ -9185,14 +8791,734 @@
       </p:sp>
       <p:sp>
         <p:nvSpPr>
-          <p:cNvPr id="17" name="Rectangle 16"/>
+          <p:cNvPr id="21" name="Rectangle 20"/>
           <p:cNvSpPr/>
           <p:nvPr/>
         </p:nvSpPr>
         <p:spPr>
           <a:xfrm>
-            <a:off x="6126479" y="3154680"/>
-            <a:ext cx="73152" cy="749808"/>
+            <a:off x="7900416" y="1783080"/>
+            <a:ext cx="73152" cy="1719072"/>
+          </a:xfrm>
+          <a:prstGeom prst="rect">
+            <a:avLst/>
+          </a:prstGeom>
+          <a:solidFill>
+            <a:srgbClr val="7C3AED"/>
+          </a:solidFill>
+          <a:ln>
+            <a:solidFill>
+              <a:srgbClr val="7C3AED"/>
+            </a:solidFill>
+          </a:ln>
+        </p:spPr>
+        <p:style>
+          <a:lnRef idx="1">
+            <a:schemeClr val="accent1"/>
+          </a:lnRef>
+          <a:fillRef idx="3">
+            <a:schemeClr val="accent1"/>
+          </a:fillRef>
+          <a:effectRef idx="2">
+            <a:schemeClr val="accent1"/>
+          </a:effectRef>
+          <a:fontRef idx="minor">
+            <a:schemeClr val="lt1"/>
+          </a:fontRef>
+        </p:style>
+        <p:txBody>
+          <a:bodyPr rtlCol="0" anchor="ctr"/>
+          <a:lstStyle/>
+          <a:p>
+            <a:pPr algn="ctr"/>
+          </a:p>
+        </p:txBody>
+      </p:sp>
+      <p:sp>
+        <p:nvSpPr>
+          <p:cNvPr id="22" name="Rounded Rectangle 21"/>
+          <p:cNvSpPr/>
+          <p:nvPr/>
+        </p:nvSpPr>
+        <p:spPr>
+          <a:xfrm>
+            <a:off x="8101584" y="2002536"/>
+            <a:ext cx="438912" cy="438912"/>
+          </a:xfrm>
+          <a:prstGeom prst="roundRect">
+            <a:avLst/>
+          </a:prstGeom>
+          <a:solidFill>
+            <a:srgbClr val="7C3AED"/>
+          </a:solidFill>
+          <a:ln>
+            <a:solidFill>
+              <a:srgbClr val="7C3AED"/>
+            </a:solidFill>
+          </a:ln>
+        </p:spPr>
+        <p:style>
+          <a:lnRef idx="1">
+            <a:schemeClr val="accent1"/>
+          </a:lnRef>
+          <a:fillRef idx="3">
+            <a:schemeClr val="accent1"/>
+          </a:fillRef>
+          <a:effectRef idx="2">
+            <a:schemeClr val="accent1"/>
+          </a:effectRef>
+          <a:fontRef idx="minor">
+            <a:schemeClr val="lt1"/>
+          </a:fontRef>
+        </p:style>
+        <p:txBody>
+          <a:bodyPr rtlCol="0" anchor="ctr"/>
+          <a:lstStyle/>
+          <a:p>
+            <a:pPr algn="ctr"/>
+          </a:p>
+        </p:txBody>
+      </p:sp>
+      <p:sp>
+        <p:nvSpPr>
+          <p:cNvPr id="23" name="TextBox 22"/>
+          <p:cNvSpPr txBox="1"/>
+          <p:nvPr/>
+        </p:nvSpPr>
+        <p:spPr>
+          <a:xfrm>
+            <a:off x="8101584" y="2011680"/>
+            <a:ext cx="438912" cy="420624"/>
+          </a:xfrm>
+          <a:prstGeom prst="rect">
+            <a:avLst/>
+          </a:prstGeom>
+          <a:noFill/>
+        </p:spPr>
+        <p:txBody>
+          <a:bodyPr wrap="square" anchor="ctr">
+            <a:spAutoFit/>
+          </a:bodyPr>
+          <a:lstStyle/>
+          <a:p>
+            <a:pPr algn="ctr"/>
+            <a:r>
+              <a:rPr sz="1400" b="1">
+                <a:solidFill>
+                  <a:srgbClr val="FFFFFF"/>
+                </a:solidFill>
+                <a:latin typeface="Arial"/>
+              </a:rPr>
+              <a:t>3</a:t>
+            </a:r>
+          </a:p>
+        </p:txBody>
+      </p:sp>
+      <p:sp>
+        <p:nvSpPr>
+          <p:cNvPr id="24" name="TextBox 23"/>
+          <p:cNvSpPr txBox="1"/>
+          <p:nvPr/>
+        </p:nvSpPr>
+        <p:spPr>
+          <a:xfrm>
+            <a:off x="8705088" y="1965960"/>
+            <a:ext cx="2414016" cy="329184"/>
+          </a:xfrm>
+          <a:prstGeom prst="rect">
+            <a:avLst/>
+          </a:prstGeom>
+          <a:noFill/>
+        </p:spPr>
+        <p:txBody>
+          <a:bodyPr wrap="square" anchor="t">
+            <a:spAutoFit/>
+          </a:bodyPr>
+          <a:lstStyle/>
+          <a:p>
+            <a:pPr algn="l"/>
+            <a:r>
+              <a:rPr sz="1400" b="1">
+                <a:solidFill>
+                  <a:srgbClr val="7C3AED"/>
+                </a:solidFill>
+                <a:latin typeface="Arial"/>
+              </a:rPr>
+              <a:t>Measure</a:t>
+            </a:r>
+          </a:p>
+        </p:txBody>
+      </p:sp>
+      <p:sp>
+        <p:nvSpPr>
+          <p:cNvPr id="25" name="TextBox 24"/>
+          <p:cNvSpPr txBox="1"/>
+          <p:nvPr/>
+        </p:nvSpPr>
+        <p:spPr>
+          <a:xfrm>
+            <a:off x="8705088" y="2350008"/>
+            <a:ext cx="2414016" cy="1005839"/>
+          </a:xfrm>
+          <a:prstGeom prst="rect">
+            <a:avLst/>
+          </a:prstGeom>
+          <a:noFill/>
+        </p:spPr>
+        <p:txBody>
+          <a:bodyPr wrap="square" anchor="t">
+            <a:spAutoFit/>
+          </a:bodyPr>
+          <a:lstStyle/>
+          <a:p>
+            <a:pPr algn="l"/>
+            <a:r>
+              <a:rPr sz="1150" b="0">
+                <a:solidFill>
+                  <a:srgbClr val="161B26"/>
+                </a:solidFill>
+                <a:latin typeface="Arial"/>
+              </a:rPr>
+              <a:t>Priority cases resolved within four hours.</a:t>
+            </a:r>
+          </a:p>
+        </p:txBody>
+      </p:sp>
+      <p:sp>
+        <p:nvSpPr>
+          <p:cNvPr id="26" name="Rounded Rectangle 25"/>
+          <p:cNvSpPr/>
+          <p:nvPr/>
+        </p:nvSpPr>
+        <p:spPr>
+          <a:xfrm>
+            <a:off x="731520" y="3776472"/>
+            <a:ext cx="3401568" cy="1719072"/>
+          </a:xfrm>
+          <a:prstGeom prst="roundRect">
+            <a:avLst/>
+          </a:prstGeom>
+          <a:solidFill>
+            <a:srgbClr val="F5F8FC"/>
+          </a:solidFill>
+          <a:ln>
+            <a:solidFill>
+              <a:srgbClr val="E2E8F0"/>
+            </a:solidFill>
+          </a:ln>
+        </p:spPr>
+        <p:style>
+          <a:lnRef idx="1">
+            <a:schemeClr val="accent1"/>
+          </a:lnRef>
+          <a:fillRef idx="3">
+            <a:schemeClr val="accent1"/>
+          </a:fillRef>
+          <a:effectRef idx="2">
+            <a:schemeClr val="accent1"/>
+          </a:effectRef>
+          <a:fontRef idx="minor">
+            <a:schemeClr val="lt1"/>
+          </a:fontRef>
+        </p:style>
+        <p:txBody>
+          <a:bodyPr rtlCol="0" anchor="ctr"/>
+          <a:lstStyle/>
+          <a:p>
+            <a:pPr algn="ctr"/>
+          </a:p>
+        </p:txBody>
+      </p:sp>
+      <p:sp>
+        <p:nvSpPr>
+          <p:cNvPr id="27" name="Rectangle 26"/>
+          <p:cNvSpPr/>
+          <p:nvPr/>
+        </p:nvSpPr>
+        <p:spPr>
+          <a:xfrm>
+            <a:off x="731520" y="3776472"/>
+            <a:ext cx="73152" cy="1719072"/>
+          </a:xfrm>
+          <a:prstGeom prst="rect">
+            <a:avLst/>
+          </a:prstGeom>
+          <a:solidFill>
+            <a:srgbClr val="F59E0B"/>
+          </a:solidFill>
+          <a:ln>
+            <a:solidFill>
+              <a:srgbClr val="F59E0B"/>
+            </a:solidFill>
+          </a:ln>
+        </p:spPr>
+        <p:style>
+          <a:lnRef idx="1">
+            <a:schemeClr val="accent1"/>
+          </a:lnRef>
+          <a:fillRef idx="3">
+            <a:schemeClr val="accent1"/>
+          </a:fillRef>
+          <a:effectRef idx="2">
+            <a:schemeClr val="accent1"/>
+          </a:effectRef>
+          <a:fontRef idx="minor">
+            <a:schemeClr val="lt1"/>
+          </a:fontRef>
+        </p:style>
+        <p:txBody>
+          <a:bodyPr rtlCol="0" anchor="ctr"/>
+          <a:lstStyle/>
+          <a:p>
+            <a:pPr algn="ctr"/>
+          </a:p>
+        </p:txBody>
+      </p:sp>
+      <p:sp>
+        <p:nvSpPr>
+          <p:cNvPr id="28" name="Rounded Rectangle 27"/>
+          <p:cNvSpPr/>
+          <p:nvPr/>
+        </p:nvSpPr>
+        <p:spPr>
+          <a:xfrm>
+            <a:off x="932688" y="3995928"/>
+            <a:ext cx="438912" cy="438912"/>
+          </a:xfrm>
+          <a:prstGeom prst="roundRect">
+            <a:avLst/>
+          </a:prstGeom>
+          <a:solidFill>
+            <a:srgbClr val="F59E0B"/>
+          </a:solidFill>
+          <a:ln>
+            <a:solidFill>
+              <a:srgbClr val="F59E0B"/>
+            </a:solidFill>
+          </a:ln>
+        </p:spPr>
+        <p:style>
+          <a:lnRef idx="1">
+            <a:schemeClr val="accent1"/>
+          </a:lnRef>
+          <a:fillRef idx="3">
+            <a:schemeClr val="accent1"/>
+          </a:fillRef>
+          <a:effectRef idx="2">
+            <a:schemeClr val="accent1"/>
+          </a:effectRef>
+          <a:fontRef idx="minor">
+            <a:schemeClr val="lt1"/>
+          </a:fontRef>
+        </p:style>
+        <p:txBody>
+          <a:bodyPr rtlCol="0" anchor="ctr"/>
+          <a:lstStyle/>
+          <a:p>
+            <a:pPr algn="ctr"/>
+          </a:p>
+        </p:txBody>
+      </p:sp>
+      <p:sp>
+        <p:nvSpPr>
+          <p:cNvPr id="29" name="TextBox 28"/>
+          <p:cNvSpPr txBox="1"/>
+          <p:nvPr/>
+        </p:nvSpPr>
+        <p:spPr>
+          <a:xfrm>
+            <a:off x="932688" y="4005072"/>
+            <a:ext cx="438912" cy="420624"/>
+          </a:xfrm>
+          <a:prstGeom prst="rect">
+            <a:avLst/>
+          </a:prstGeom>
+          <a:noFill/>
+        </p:spPr>
+        <p:txBody>
+          <a:bodyPr wrap="square" anchor="ctr">
+            <a:spAutoFit/>
+          </a:bodyPr>
+          <a:lstStyle/>
+          <a:p>
+            <a:pPr algn="ctr"/>
+            <a:r>
+              <a:rPr sz="1400" b="1">
+                <a:solidFill>
+                  <a:srgbClr val="FFFFFF"/>
+                </a:solidFill>
+                <a:latin typeface="Arial"/>
+              </a:rPr>
+              <a:t>4</a:t>
+            </a:r>
+          </a:p>
+        </p:txBody>
+      </p:sp>
+      <p:sp>
+        <p:nvSpPr>
+          <p:cNvPr id="30" name="TextBox 29"/>
+          <p:cNvSpPr txBox="1"/>
+          <p:nvPr/>
+        </p:nvSpPr>
+        <p:spPr>
+          <a:xfrm>
+            <a:off x="1536192" y="3959352"/>
+            <a:ext cx="2414016" cy="329184"/>
+          </a:xfrm>
+          <a:prstGeom prst="rect">
+            <a:avLst/>
+          </a:prstGeom>
+          <a:noFill/>
+        </p:spPr>
+        <p:txBody>
+          <a:bodyPr wrap="square" anchor="t">
+            <a:spAutoFit/>
+          </a:bodyPr>
+          <a:lstStyle/>
+          <a:p>
+            <a:pPr algn="l"/>
+            <a:r>
+              <a:rPr sz="1400" b="1">
+                <a:solidFill>
+                  <a:srgbClr val="F59E0B"/>
+                </a:solidFill>
+                <a:latin typeface="Arial"/>
+              </a:rPr>
+              <a:t>Owner</a:t>
+            </a:r>
+          </a:p>
+        </p:txBody>
+      </p:sp>
+      <p:sp>
+        <p:nvSpPr>
+          <p:cNvPr id="31" name="TextBox 30"/>
+          <p:cNvSpPr txBox="1"/>
+          <p:nvPr/>
+        </p:nvSpPr>
+        <p:spPr>
+          <a:xfrm>
+            <a:off x="1536192" y="4343400"/>
+            <a:ext cx="2414016" cy="1005839"/>
+          </a:xfrm>
+          <a:prstGeom prst="rect">
+            <a:avLst/>
+          </a:prstGeom>
+          <a:noFill/>
+        </p:spPr>
+        <p:txBody>
+          <a:bodyPr wrap="square" anchor="t">
+            <a:spAutoFit/>
+          </a:bodyPr>
+          <a:lstStyle/>
+          <a:p>
+            <a:pPr algn="l"/>
+            <a:r>
+              <a:rPr sz="1150" b="0">
+                <a:solidFill>
+                  <a:srgbClr val="161B26"/>
+                </a:solidFill>
+                <a:latin typeface="Arial"/>
+              </a:rPr>
+              <a:t>Customer operations director.</a:t>
+            </a:r>
+          </a:p>
+        </p:txBody>
+      </p:sp>
+      <p:sp>
+        <p:nvSpPr>
+          <p:cNvPr id="32" name="Rounded Rectangle 31"/>
+          <p:cNvSpPr/>
+          <p:nvPr/>
+        </p:nvSpPr>
+        <p:spPr>
+          <a:xfrm>
+            <a:off x="4315968" y="3776472"/>
+            <a:ext cx="3401568" cy="1719072"/>
+          </a:xfrm>
+          <a:prstGeom prst="roundRect">
+            <a:avLst/>
+          </a:prstGeom>
+          <a:solidFill>
+            <a:srgbClr val="F5F8FC"/>
+          </a:solidFill>
+          <a:ln>
+            <a:solidFill>
+              <a:srgbClr val="E2E8F0"/>
+            </a:solidFill>
+          </a:ln>
+        </p:spPr>
+        <p:style>
+          <a:lnRef idx="1">
+            <a:schemeClr val="accent1"/>
+          </a:lnRef>
+          <a:fillRef idx="3">
+            <a:schemeClr val="accent1"/>
+          </a:fillRef>
+          <a:effectRef idx="2">
+            <a:schemeClr val="accent1"/>
+          </a:effectRef>
+          <a:fontRef idx="minor">
+            <a:schemeClr val="lt1"/>
+          </a:fontRef>
+        </p:style>
+        <p:txBody>
+          <a:bodyPr rtlCol="0" anchor="ctr"/>
+          <a:lstStyle/>
+          <a:p>
+            <a:pPr algn="ctr"/>
+          </a:p>
+        </p:txBody>
+      </p:sp>
+      <p:sp>
+        <p:nvSpPr>
+          <p:cNvPr id="33" name="Rectangle 32"/>
+          <p:cNvSpPr/>
+          <p:nvPr/>
+        </p:nvSpPr>
+        <p:spPr>
+          <a:xfrm>
+            <a:off x="4315968" y="3776472"/>
+            <a:ext cx="73152" cy="1719072"/>
+          </a:xfrm>
+          <a:prstGeom prst="rect">
+            <a:avLst/>
+          </a:prstGeom>
+          <a:solidFill>
+            <a:srgbClr val="1F6FEB"/>
+          </a:solidFill>
+          <a:ln>
+            <a:solidFill>
+              <a:srgbClr val="1F6FEB"/>
+            </a:solidFill>
+          </a:ln>
+        </p:spPr>
+        <p:style>
+          <a:lnRef idx="1">
+            <a:schemeClr val="accent1"/>
+          </a:lnRef>
+          <a:fillRef idx="3">
+            <a:schemeClr val="accent1"/>
+          </a:fillRef>
+          <a:effectRef idx="2">
+            <a:schemeClr val="accent1"/>
+          </a:effectRef>
+          <a:fontRef idx="minor">
+            <a:schemeClr val="lt1"/>
+          </a:fontRef>
+        </p:style>
+        <p:txBody>
+          <a:bodyPr rtlCol="0" anchor="ctr"/>
+          <a:lstStyle/>
+          <a:p>
+            <a:pPr algn="ctr"/>
+          </a:p>
+        </p:txBody>
+      </p:sp>
+      <p:sp>
+        <p:nvSpPr>
+          <p:cNvPr id="34" name="Rounded Rectangle 33"/>
+          <p:cNvSpPr/>
+          <p:nvPr/>
+        </p:nvSpPr>
+        <p:spPr>
+          <a:xfrm>
+            <a:off x="4517136" y="3995928"/>
+            <a:ext cx="438912" cy="438912"/>
+          </a:xfrm>
+          <a:prstGeom prst="roundRect">
+            <a:avLst/>
+          </a:prstGeom>
+          <a:solidFill>
+            <a:srgbClr val="1F6FEB"/>
+          </a:solidFill>
+          <a:ln>
+            <a:solidFill>
+              <a:srgbClr val="1F6FEB"/>
+            </a:solidFill>
+          </a:ln>
+        </p:spPr>
+        <p:style>
+          <a:lnRef idx="1">
+            <a:schemeClr val="accent1"/>
+          </a:lnRef>
+          <a:fillRef idx="3">
+            <a:schemeClr val="accent1"/>
+          </a:fillRef>
+          <a:effectRef idx="2">
+            <a:schemeClr val="accent1"/>
+          </a:effectRef>
+          <a:fontRef idx="minor">
+            <a:schemeClr val="lt1"/>
+          </a:fontRef>
+        </p:style>
+        <p:txBody>
+          <a:bodyPr rtlCol="0" anchor="ctr"/>
+          <a:lstStyle/>
+          <a:p>
+            <a:pPr algn="ctr"/>
+          </a:p>
+        </p:txBody>
+      </p:sp>
+      <p:sp>
+        <p:nvSpPr>
+          <p:cNvPr id="35" name="TextBox 34"/>
+          <p:cNvSpPr txBox="1"/>
+          <p:nvPr/>
+        </p:nvSpPr>
+        <p:spPr>
+          <a:xfrm>
+            <a:off x="4517136" y="4005072"/>
+            <a:ext cx="438912" cy="420624"/>
+          </a:xfrm>
+          <a:prstGeom prst="rect">
+            <a:avLst/>
+          </a:prstGeom>
+          <a:noFill/>
+        </p:spPr>
+        <p:txBody>
+          <a:bodyPr wrap="square" anchor="ctr">
+            <a:spAutoFit/>
+          </a:bodyPr>
+          <a:lstStyle/>
+          <a:p>
+            <a:pPr algn="ctr"/>
+            <a:r>
+              <a:rPr sz="1400" b="1">
+                <a:solidFill>
+                  <a:srgbClr val="FFFFFF"/>
+                </a:solidFill>
+                <a:latin typeface="Arial"/>
+              </a:rPr>
+              <a:t>5</a:t>
+            </a:r>
+          </a:p>
+        </p:txBody>
+      </p:sp>
+      <p:sp>
+        <p:nvSpPr>
+          <p:cNvPr id="36" name="TextBox 35"/>
+          <p:cNvSpPr txBox="1"/>
+          <p:nvPr/>
+        </p:nvSpPr>
+        <p:spPr>
+          <a:xfrm>
+            <a:off x="5120640" y="3959352"/>
+            <a:ext cx="2414016" cy="329184"/>
+          </a:xfrm>
+          <a:prstGeom prst="rect">
+            <a:avLst/>
+          </a:prstGeom>
+          <a:noFill/>
+        </p:spPr>
+        <p:txBody>
+          <a:bodyPr wrap="square" anchor="t">
+            <a:spAutoFit/>
+          </a:bodyPr>
+          <a:lstStyle/>
+          <a:p>
+            <a:pPr algn="l"/>
+            <a:r>
+              <a:rPr sz="1400" b="1">
+                <a:solidFill>
+                  <a:srgbClr val="1F6FEB"/>
+                </a:solidFill>
+                <a:latin typeface="Arial"/>
+              </a:rPr>
+              <a:t>Review</a:t>
+            </a:r>
+          </a:p>
+        </p:txBody>
+      </p:sp>
+      <p:sp>
+        <p:nvSpPr>
+          <p:cNvPr id="37" name="TextBox 36"/>
+          <p:cNvSpPr txBox="1"/>
+          <p:nvPr/>
+        </p:nvSpPr>
+        <p:spPr>
+          <a:xfrm>
+            <a:off x="5120640" y="4343400"/>
+            <a:ext cx="2414016" cy="1005839"/>
+          </a:xfrm>
+          <a:prstGeom prst="rect">
+            <a:avLst/>
+          </a:prstGeom>
+          <a:noFill/>
+        </p:spPr>
+        <p:txBody>
+          <a:bodyPr wrap="square" anchor="t">
+            <a:spAutoFit/>
+          </a:bodyPr>
+          <a:lstStyle/>
+          <a:p>
+            <a:pPr algn="l"/>
+            <a:r>
+              <a:rPr sz="1150" b="0">
+                <a:solidFill>
+                  <a:srgbClr val="161B26"/>
+                </a:solidFill>
+                <a:latin typeface="Arial"/>
+              </a:rPr>
+              <a:t>Monthly governance review with exception evidence.</a:t>
+            </a:r>
+          </a:p>
+        </p:txBody>
+      </p:sp>
+      <p:sp>
+        <p:nvSpPr>
+          <p:cNvPr id="38" name="Rounded Rectangle 37"/>
+          <p:cNvSpPr/>
+          <p:nvPr/>
+        </p:nvSpPr>
+        <p:spPr>
+          <a:xfrm>
+            <a:off x="7900416" y="3776472"/>
+            <a:ext cx="3401568" cy="1719072"/>
+          </a:xfrm>
+          <a:prstGeom prst="roundRect">
+            <a:avLst/>
+          </a:prstGeom>
+          <a:solidFill>
+            <a:srgbClr val="F5F8FC"/>
+          </a:solidFill>
+          <a:ln>
+            <a:solidFill>
+              <a:srgbClr val="E2E8F0"/>
+            </a:solidFill>
+          </a:ln>
+        </p:spPr>
+        <p:style>
+          <a:lnRef idx="1">
+            <a:schemeClr val="accent1"/>
+          </a:lnRef>
+          <a:fillRef idx="3">
+            <a:schemeClr val="accent1"/>
+          </a:fillRef>
+          <a:effectRef idx="2">
+            <a:schemeClr val="accent1"/>
+          </a:effectRef>
+          <a:fontRef idx="minor">
+            <a:schemeClr val="lt1"/>
+          </a:fontRef>
+        </p:style>
+        <p:txBody>
+          <a:bodyPr rtlCol="0" anchor="ctr"/>
+          <a:lstStyle/>
+          <a:p>
+            <a:pPr algn="ctr"/>
+          </a:p>
+        </p:txBody>
+      </p:sp>
+      <p:sp>
+        <p:nvSpPr>
+          <p:cNvPr id="39" name="Rectangle 38"/>
+          <p:cNvSpPr/>
+          <p:nvPr/>
+        </p:nvSpPr>
+        <p:spPr>
+          <a:xfrm>
+            <a:off x="7900416" y="3776472"/>
+            <a:ext cx="73152" cy="1719072"/>
           </a:xfrm>
           <a:prstGeom prst="rect">
             <a:avLst/>
@@ -9230,13 +9556,13 @@
       </p:sp>
       <p:sp>
         <p:nvSpPr>
-          <p:cNvPr id="18" name="Rounded Rectangle 17"/>
+          <p:cNvPr id="40" name="Rounded Rectangle 39"/>
           <p:cNvSpPr/>
           <p:nvPr/>
         </p:nvSpPr>
         <p:spPr>
           <a:xfrm>
-            <a:off x="6327647" y="3374136"/>
+            <a:off x="8101584" y="3995928"/>
             <a:ext cx="438912" cy="438912"/>
           </a:xfrm>
           <a:prstGeom prst="roundRect">
@@ -9275,13 +9601,13 @@
       </p:sp>
       <p:sp>
         <p:nvSpPr>
-          <p:cNvPr id="19" name="TextBox 18"/>
+          <p:cNvPr id="41" name="TextBox 40"/>
           <p:cNvSpPr txBox="1"/>
           <p:nvPr/>
         </p:nvSpPr>
         <p:spPr>
           <a:xfrm>
-            <a:off x="6327647" y="3383280"/>
+            <a:off x="8101584" y="4005072"/>
             <a:ext cx="438912" cy="420624"/>
           </a:xfrm>
           <a:prstGeom prst="rect">
@@ -9303,21 +9629,21 @@
                 </a:solidFill>
                 <a:latin typeface="Arial"/>
               </a:rPr>
-              <a:t>2</a:t>
-            </a:r>
-          </a:p>
-        </p:txBody>
-      </p:sp>
-      <p:sp>
-        <p:nvSpPr>
-          <p:cNvPr id="20" name="TextBox 19"/>
+              <a:t>6</a:t>
+            </a:r>
+          </a:p>
+        </p:txBody>
+      </p:sp>
+      <p:sp>
+        <p:nvSpPr>
+          <p:cNvPr id="42" name="TextBox 41"/>
           <p:cNvSpPr txBox="1"/>
           <p:nvPr/>
         </p:nvSpPr>
         <p:spPr>
           <a:xfrm>
-            <a:off x="6931151" y="3337560"/>
-            <a:ext cx="4087368" cy="329184"/>
+            <a:off x="8705088" y="3959352"/>
+            <a:ext cx="2414016" cy="329184"/>
           </a:xfrm>
           <a:prstGeom prst="rect">
             <a:avLst/>
@@ -9338,21 +9664,21 @@
                 </a:solidFill>
                 <a:latin typeface="Arial"/>
               </a:rPr>
-              <a:t>CHECK</a:t>
-            </a:r>
-          </a:p>
-        </p:txBody>
-      </p:sp>
-      <p:sp>
-        <p:nvSpPr>
-          <p:cNvPr id="21" name="TextBox 20"/>
+              <a:t>Gate</a:t>
+            </a:r>
+          </a:p>
+        </p:txBody>
+      </p:sp>
+      <p:sp>
+        <p:nvSpPr>
+          <p:cNvPr id="43" name="TextBox 42"/>
           <p:cNvSpPr txBox="1"/>
           <p:nvPr/>
         </p:nvSpPr>
         <p:spPr>
           <a:xfrm>
-            <a:off x="6931151" y="3721608"/>
-            <a:ext cx="4087368" cy="36575"/>
+            <a:off x="8705088" y="4343400"/>
+            <a:ext cx="2414016" cy="1005839"/>
           </a:xfrm>
           <a:prstGeom prst="rect">
             <a:avLst/>
@@ -9373,20 +9699,358 @@
                 </a:solidFill>
                 <a:latin typeface="Arial"/>
               </a:rPr>
-              <a:t>Gemini Notebook deck was preserved as PPTX where available or PDF with a documented rebuild route</a:t>
-            </a:r>
-          </a:p>
-        </p:txBody>
-      </p:sp>
-      <p:sp>
-        <p:nvSpPr>
-          <p:cNvPr id="22" name="Rounded Rectangle 21"/>
+              <a:t>No public claim without source, period and approval.</a:t>
+            </a:r>
+          </a:p>
+        </p:txBody>
+      </p:sp>
+    </p:spTree>
+  </p:cSld>
+  <p:clrMapOvr>
+    <a:masterClrMapping/>
+  </p:clrMapOvr>
+</p:sld>
+</file>
+
+<file path=ppt/slides/slide7.xml><?xml version="1.0" encoding="utf-8"?>
+<p:sld xmlns:a="http://schemas.openxmlformats.org/drawingml/2006/main" xmlns:p="http://schemas.openxmlformats.org/presentationml/2006/main" xmlns:r="http://schemas.openxmlformats.org/officeDocument/2006/relationships">
+  <p:cSld>
+    <p:spTree>
+      <p:nvGrpSpPr>
+        <p:cNvPr id="1" name=""/>
+        <p:cNvGrpSpPr/>
+        <p:nvPr/>
+      </p:nvGrpSpPr>
+      <p:grpSpPr/>
+      <p:sp>
+        <p:nvSpPr>
+          <p:cNvPr id="2" name="Rectangle 1"/>
           <p:cNvSpPr/>
           <p:nvPr/>
         </p:nvSpPr>
         <p:spPr>
           <a:xfrm>
-            <a:off x="777240" y="4096512"/>
+            <a:off x="0" y="0"/>
+            <a:ext cx="12191695" cy="6858000"/>
+          </a:xfrm>
+          <a:prstGeom prst="rect">
+            <a:avLst/>
+          </a:prstGeom>
+          <a:solidFill>
+            <a:srgbClr val="FFFFFF"/>
+          </a:solidFill>
+          <a:ln>
+            <a:solidFill>
+              <a:srgbClr val="FFFFFF"/>
+            </a:solidFill>
+          </a:ln>
+        </p:spPr>
+        <p:style>
+          <a:lnRef idx="1">
+            <a:schemeClr val="accent1"/>
+          </a:lnRef>
+          <a:fillRef idx="3">
+            <a:schemeClr val="accent1"/>
+          </a:fillRef>
+          <a:effectRef idx="2">
+            <a:schemeClr val="accent1"/>
+          </a:effectRef>
+          <a:fontRef idx="minor">
+            <a:schemeClr val="lt1"/>
+          </a:fontRef>
+        </p:style>
+        <p:txBody>
+          <a:bodyPr rtlCol="0" anchor="ctr"/>
+          <a:lstStyle/>
+          <a:p>
+            <a:pPr algn="ctr"/>
+          </a:p>
+        </p:txBody>
+      </p:sp>
+      <p:sp>
+        <p:nvSpPr>
+          <p:cNvPr id="3" name="Rectangle 2"/>
+          <p:cNvSpPr/>
+          <p:nvPr/>
+        </p:nvSpPr>
+        <p:spPr>
+          <a:xfrm>
+            <a:off x="0" y="0"/>
+            <a:ext cx="164592" cy="6858000"/>
+          </a:xfrm>
+          <a:prstGeom prst="rect">
+            <a:avLst/>
+          </a:prstGeom>
+          <a:solidFill>
+            <a:srgbClr val="1F6FEB"/>
+          </a:solidFill>
+          <a:ln>
+            <a:solidFill>
+              <a:srgbClr val="1F6FEB"/>
+            </a:solidFill>
+          </a:ln>
+        </p:spPr>
+        <p:style>
+          <a:lnRef idx="1">
+            <a:schemeClr val="accent1"/>
+          </a:lnRef>
+          <a:fillRef idx="3">
+            <a:schemeClr val="accent1"/>
+          </a:fillRef>
+          <a:effectRef idx="2">
+            <a:schemeClr val="accent1"/>
+          </a:effectRef>
+          <a:fontRef idx="minor">
+            <a:schemeClr val="lt1"/>
+          </a:fontRef>
+        </p:style>
+        <p:txBody>
+          <a:bodyPr rtlCol="0" anchor="ctr"/>
+          <a:lstStyle/>
+          <a:p>
+            <a:pPr algn="ctr"/>
+          </a:p>
+        </p:txBody>
+      </p:sp>
+      <p:sp>
+        <p:nvSpPr>
+          <p:cNvPr id="4" name="TextBox 3"/>
+          <p:cNvSpPr txBox="1"/>
+          <p:nvPr/>
+        </p:nvSpPr>
+        <p:spPr>
+          <a:xfrm>
+            <a:off x="658368" y="384048"/>
+            <a:ext cx="10789920" cy="320040"/>
+          </a:xfrm>
+          <a:prstGeom prst="rect">
+            <a:avLst/>
+          </a:prstGeom>
+          <a:noFill/>
+        </p:spPr>
+        <p:txBody>
+          <a:bodyPr wrap="square" anchor="t">
+            <a:spAutoFit/>
+          </a:bodyPr>
+          <a:lstStyle/>
+          <a:p>
+            <a:pPr algn="l"/>
+            <a:r>
+              <a:rPr sz="1100" b="1">
+                <a:solidFill>
+                  <a:srgbClr val="1F6FEB"/>
+                </a:solidFill>
+                <a:latin typeface="Arial"/>
+              </a:rPr>
+              <a:t>ACTIVITY 06 · ACCEPTANCE</a:t>
+            </a:r>
+          </a:p>
+        </p:txBody>
+      </p:sp>
+      <p:sp>
+        <p:nvSpPr>
+          <p:cNvPr id="5" name="TextBox 4"/>
+          <p:cNvSpPr txBox="1"/>
+          <p:nvPr/>
+        </p:nvSpPr>
+        <p:spPr>
+          <a:xfrm>
+            <a:off x="658368" y="749808"/>
+            <a:ext cx="10789920" cy="658368"/>
+          </a:xfrm>
+          <a:prstGeom prst="rect">
+            <a:avLst/>
+          </a:prstGeom>
+          <a:noFill/>
+        </p:spPr>
+        <p:txBody>
+          <a:bodyPr wrap="square" anchor="t">
+            <a:spAutoFit/>
+          </a:bodyPr>
+          <a:lstStyle/>
+          <a:p>
+            <a:pPr algn="l"/>
+            <a:r>
+              <a:rPr sz="2700" b="1">
+                <a:solidFill>
+                  <a:srgbClr val="161B26"/>
+                </a:solidFill>
+                <a:latin typeface="Arial"/>
+              </a:rPr>
+              <a:t>What Good Looks Like</a:t>
+            </a:r>
+          </a:p>
+        </p:txBody>
+      </p:sp>
+      <p:sp>
+        <p:nvSpPr>
+          <p:cNvPr id="6" name="Rectangle 5"/>
+          <p:cNvSpPr/>
+          <p:nvPr/>
+        </p:nvSpPr>
+        <p:spPr>
+          <a:xfrm>
+            <a:off x="658368" y="1444752"/>
+            <a:ext cx="10881360" cy="18288"/>
+          </a:xfrm>
+          <a:prstGeom prst="rect">
+            <a:avLst/>
+          </a:prstGeom>
+          <a:solidFill>
+            <a:srgbClr val="E2E8F0"/>
+          </a:solidFill>
+          <a:ln>
+            <a:solidFill>
+              <a:srgbClr val="E2E8F0"/>
+            </a:solidFill>
+          </a:ln>
+        </p:spPr>
+        <p:style>
+          <a:lnRef idx="1">
+            <a:schemeClr val="accent1"/>
+          </a:lnRef>
+          <a:fillRef idx="3">
+            <a:schemeClr val="accent1"/>
+          </a:fillRef>
+          <a:effectRef idx="2">
+            <a:schemeClr val="accent1"/>
+          </a:effectRef>
+          <a:fontRef idx="minor">
+            <a:schemeClr val="lt1"/>
+          </a:fontRef>
+        </p:style>
+        <p:txBody>
+          <a:bodyPr rtlCol="0" anchor="ctr"/>
+          <a:lstStyle/>
+          <a:p>
+            <a:pPr algn="ctr"/>
+          </a:p>
+        </p:txBody>
+      </p:sp>
+      <p:sp>
+        <p:nvSpPr>
+          <p:cNvPr id="7" name="TextBox 6"/>
+          <p:cNvSpPr txBox="1"/>
+          <p:nvPr/>
+        </p:nvSpPr>
+        <p:spPr>
+          <a:xfrm>
+            <a:off x="658368" y="6473952"/>
+            <a:ext cx="9875520" cy="201168"/>
+          </a:xfrm>
+          <a:prstGeom prst="rect">
+            <a:avLst/>
+          </a:prstGeom>
+          <a:noFill/>
+        </p:spPr>
+        <p:txBody>
+          <a:bodyPr wrap="square" anchor="t">
+            <a:spAutoFit/>
+          </a:bodyPr>
+          <a:lstStyle/>
+          <a:p>
+            <a:pPr algn="l"/>
+            <a:r>
+              <a:rPr sz="800" b="0">
+                <a:solidFill>
+                  <a:srgbClr val="5B6372"/>
+                </a:solidFill>
+                <a:latin typeface="Arial"/>
+              </a:rPr>
+              <a:t>TGS-2026064178 · ACTIVITY PRACTICE · Tertiary Infotech Academy Pte Ltd</a:t>
+            </a:r>
+          </a:p>
+        </p:txBody>
+      </p:sp>
+      <p:sp>
+        <p:nvSpPr>
+          <p:cNvPr id="8" name="Rounded Rectangle 7"/>
+          <p:cNvSpPr/>
+          <p:nvPr/>
+        </p:nvSpPr>
+        <p:spPr>
+          <a:xfrm>
+            <a:off x="749808" y="1810512"/>
+            <a:ext cx="10652760" cy="1005840"/>
+          </a:xfrm>
+          <a:prstGeom prst="roundRect">
+            <a:avLst/>
+          </a:prstGeom>
+          <a:solidFill>
+            <a:srgbClr val="1F6FEB"/>
+          </a:solidFill>
+          <a:ln>
+            <a:solidFill>
+              <a:srgbClr val="1F6FEB"/>
+            </a:solidFill>
+          </a:ln>
+        </p:spPr>
+        <p:style>
+          <a:lnRef idx="1">
+            <a:schemeClr val="accent1"/>
+          </a:lnRef>
+          <a:fillRef idx="3">
+            <a:schemeClr val="accent1"/>
+          </a:fillRef>
+          <a:effectRef idx="2">
+            <a:schemeClr val="accent1"/>
+          </a:effectRef>
+          <a:fontRef idx="minor">
+            <a:schemeClr val="lt1"/>
+          </a:fontRef>
+        </p:style>
+        <p:txBody>
+          <a:bodyPr rtlCol="0" anchor="ctr"/>
+          <a:lstStyle/>
+          <a:p>
+            <a:pPr algn="ctr"/>
+          </a:p>
+        </p:txBody>
+      </p:sp>
+      <p:sp>
+        <p:nvSpPr>
+          <p:cNvPr id="9" name="TextBox 8"/>
+          <p:cNvSpPr txBox="1"/>
+          <p:nvPr/>
+        </p:nvSpPr>
+        <p:spPr>
+          <a:xfrm>
+            <a:off x="1051560" y="2011680"/>
+            <a:ext cx="10058400" cy="566928"/>
+          </a:xfrm>
+          <a:prstGeom prst="rect">
+            <a:avLst/>
+          </a:prstGeom>
+          <a:noFill/>
+        </p:spPr>
+        <p:txBody>
+          <a:bodyPr wrap="square" anchor="ctr">
+            <a:spAutoFit/>
+          </a:bodyPr>
+          <a:lstStyle/>
+          <a:p>
+            <a:pPr algn="ctr"/>
+            <a:r>
+              <a:rPr sz="1900" b="1">
+                <a:solidFill>
+                  <a:srgbClr val="FFFFFF"/>
+                </a:solidFill>
+                <a:latin typeface="Arial"/>
+              </a:rPr>
+              <a:t>Two Copilot hierarchy directions, a reviewed editable PowerPoint hierarchy and a prompt/source log</a:t>
+            </a:r>
+          </a:p>
+        </p:txBody>
+      </p:sp>
+      <p:sp>
+        <p:nvSpPr>
+          <p:cNvPr id="10" name="Rounded Rectangle 9"/>
+          <p:cNvSpPr/>
+          <p:nvPr/>
+        </p:nvSpPr>
+        <p:spPr>
+          <a:xfrm>
+            <a:off x="777240" y="3154680"/>
             <a:ext cx="5074920" cy="749808"/>
           </a:xfrm>
           <a:prstGeom prst="roundRect">
@@ -9425,13 +10089,13 @@
       </p:sp>
       <p:sp>
         <p:nvSpPr>
-          <p:cNvPr id="23" name="Rectangle 22"/>
+          <p:cNvPr id="11" name="Rectangle 10"/>
           <p:cNvSpPr/>
           <p:nvPr/>
         </p:nvSpPr>
         <p:spPr>
           <a:xfrm>
-            <a:off x="777240" y="4096512"/>
+            <a:off x="777240" y="3154680"/>
             <a:ext cx="73152" cy="749808"/>
           </a:xfrm>
           <a:prstGeom prst="rect">
@@ -9470,13 +10134,13 @@
       </p:sp>
       <p:sp>
         <p:nvSpPr>
-          <p:cNvPr id="24" name="Rounded Rectangle 23"/>
+          <p:cNvPr id="12" name="Rounded Rectangle 11"/>
           <p:cNvSpPr/>
           <p:nvPr/>
         </p:nvSpPr>
         <p:spPr>
           <a:xfrm>
-            <a:off x="978408" y="4315968"/>
+            <a:off x="978408" y="3374136"/>
             <a:ext cx="438912" cy="438912"/>
           </a:xfrm>
           <a:prstGeom prst="roundRect">
@@ -9515,13 +10179,13 @@
       </p:sp>
       <p:sp>
         <p:nvSpPr>
-          <p:cNvPr id="25" name="TextBox 24"/>
+          <p:cNvPr id="13" name="TextBox 12"/>
           <p:cNvSpPr txBox="1"/>
           <p:nvPr/>
         </p:nvSpPr>
         <p:spPr>
           <a:xfrm>
-            <a:off x="978408" y="4325112"/>
+            <a:off x="978408" y="3383280"/>
             <a:ext cx="438912" cy="420624"/>
           </a:xfrm>
           <a:prstGeom prst="rect">
@@ -9543,20 +10207,20 @@
                 </a:solidFill>
                 <a:latin typeface="Arial"/>
               </a:rPr>
-              <a:t>3</a:t>
-            </a:r>
-          </a:p>
-        </p:txBody>
-      </p:sp>
-      <p:sp>
-        <p:nvSpPr>
-          <p:cNvPr id="26" name="TextBox 25"/>
+              <a:t>1</a:t>
+            </a:r>
+          </a:p>
+        </p:txBody>
+      </p:sp>
+      <p:sp>
+        <p:nvSpPr>
+          <p:cNvPr id="14" name="TextBox 13"/>
           <p:cNvSpPr txBox="1"/>
           <p:nvPr/>
         </p:nvSpPr>
         <p:spPr>
           <a:xfrm>
-            <a:off x="1581912" y="4279392"/>
+            <a:off x="1581912" y="3337560"/>
             <a:ext cx="4087368" cy="329184"/>
           </a:xfrm>
           <a:prstGeom prst="rect">
@@ -9585,13 +10249,13 @@
       </p:sp>
       <p:sp>
         <p:nvSpPr>
-          <p:cNvPr id="27" name="TextBox 26"/>
+          <p:cNvPr id="15" name="TextBox 14"/>
           <p:cNvSpPr txBox="1"/>
           <p:nvPr/>
         </p:nvSpPr>
         <p:spPr>
           <a:xfrm>
-            <a:off x="1581912" y="4663440"/>
+            <a:off x="1581912" y="3721608"/>
             <a:ext cx="4087368" cy="36575"/>
           </a:xfrm>
           <a:prstGeom prst="rect">
@@ -9613,20 +10277,20 @@
                 </a:solidFill>
                 <a:latin typeface="Arial"/>
               </a:rPr>
-              <a:t>Every claim matches the source pack</a:t>
-            </a:r>
-          </a:p>
-        </p:txBody>
-      </p:sp>
-      <p:sp>
-        <p:nvSpPr>
-          <p:cNvPr id="28" name="Rounded Rectangle 27"/>
+              <a:t>Both hierarchy directions use the same approved brief and source scope</a:t>
+            </a:r>
+          </a:p>
+        </p:txBody>
+      </p:sp>
+      <p:sp>
+        <p:nvSpPr>
+          <p:cNvPr id="16" name="Rounded Rectangle 15"/>
           <p:cNvSpPr/>
           <p:nvPr/>
         </p:nvSpPr>
         <p:spPr>
           <a:xfrm>
-            <a:off x="6126479" y="4096512"/>
+            <a:off x="6126479" y="3154680"/>
             <a:ext cx="5074920" cy="749808"/>
           </a:xfrm>
           <a:prstGeom prst="roundRect">
@@ -9665,13 +10329,13 @@
       </p:sp>
       <p:sp>
         <p:nvSpPr>
-          <p:cNvPr id="29" name="Rectangle 28"/>
+          <p:cNvPr id="17" name="Rectangle 16"/>
           <p:cNvSpPr/>
           <p:nvPr/>
         </p:nvSpPr>
         <p:spPr>
           <a:xfrm>
-            <a:off x="6126479" y="4096512"/>
+            <a:off x="6126479" y="3154680"/>
             <a:ext cx="73152" cy="749808"/>
           </a:xfrm>
           <a:prstGeom prst="rect">
@@ -9710,13 +10374,13 @@
       </p:sp>
       <p:sp>
         <p:nvSpPr>
-          <p:cNvPr id="30" name="Rounded Rectangle 29"/>
+          <p:cNvPr id="18" name="Rounded Rectangle 17"/>
           <p:cNvSpPr/>
           <p:nvPr/>
         </p:nvSpPr>
         <p:spPr>
           <a:xfrm>
-            <a:off x="6327647" y="4315968"/>
+            <a:off x="6327647" y="3374136"/>
             <a:ext cx="438912" cy="438912"/>
           </a:xfrm>
           <a:prstGeom prst="roundRect">
@@ -9755,13 +10419,13 @@
       </p:sp>
       <p:sp>
         <p:nvSpPr>
-          <p:cNvPr id="31" name="TextBox 30"/>
+          <p:cNvPr id="19" name="TextBox 18"/>
           <p:cNvSpPr txBox="1"/>
           <p:nvPr/>
         </p:nvSpPr>
         <p:spPr>
           <a:xfrm>
-            <a:off x="6327647" y="4325112"/>
+            <a:off x="6327647" y="3383280"/>
             <a:ext cx="438912" cy="420624"/>
           </a:xfrm>
           <a:prstGeom prst="rect">
@@ -9783,20 +10447,20 @@
                 </a:solidFill>
                 <a:latin typeface="Arial"/>
               </a:rPr>
-              <a:t>4</a:t>
-            </a:r>
-          </a:p>
-        </p:txBody>
-      </p:sp>
-      <p:sp>
-        <p:nvSpPr>
-          <p:cNvPr id="32" name="TextBox 31"/>
+              <a:t>2</a:t>
+            </a:r>
+          </a:p>
+        </p:txBody>
+      </p:sp>
+      <p:sp>
+        <p:nvSpPr>
+          <p:cNvPr id="20" name="TextBox 19"/>
           <p:cNvSpPr txBox="1"/>
           <p:nvPr/>
         </p:nvSpPr>
         <p:spPr>
           <a:xfrm>
-            <a:off x="6931151" y="4279392"/>
+            <a:off x="6931151" y="3337560"/>
             <a:ext cx="4087368" cy="329184"/>
           </a:xfrm>
           <a:prstGeom prst="rect">
@@ -9825,13 +10489,13 @@
       </p:sp>
       <p:sp>
         <p:nvSpPr>
-          <p:cNvPr id="33" name="TextBox 32"/>
+          <p:cNvPr id="21" name="TextBox 20"/>
           <p:cNvSpPr txBox="1"/>
           <p:nvPr/>
         </p:nvSpPr>
         <p:spPr>
           <a:xfrm>
-            <a:off x="6931151" y="4663440"/>
+            <a:off x="6931151" y="3721608"/>
             <a:ext cx="4087368" cy="36575"/>
           </a:xfrm>
           <a:prstGeom prst="rect">
@@ -9853,20 +10517,20 @@
                 </a:solidFill>
                 <a:latin typeface="Arial"/>
               </a:rPr>
-              <a:t>Critical evidence is editable in the final PowerPoint</a:t>
-            </a:r>
-          </a:p>
-        </p:txBody>
-      </p:sp>
-      <p:sp>
-        <p:nvSpPr>
-          <p:cNvPr id="34" name="Rounded Rectangle 33"/>
+              <a:t>Goal, outcome, measure, owner and review logic are visible</a:t>
+            </a:r>
+          </a:p>
+        </p:txBody>
+      </p:sp>
+      <p:sp>
+        <p:nvSpPr>
+          <p:cNvPr id="22" name="Rounded Rectangle 21"/>
           <p:cNvSpPr/>
           <p:nvPr/>
         </p:nvSpPr>
         <p:spPr>
           <a:xfrm>
-            <a:off x="777240" y="5038344"/>
+            <a:off x="777240" y="4096512"/>
             <a:ext cx="5074920" cy="749808"/>
           </a:xfrm>
           <a:prstGeom prst="roundRect">
@@ -9905,13 +10569,13 @@
       </p:sp>
       <p:sp>
         <p:nvSpPr>
-          <p:cNvPr id="35" name="Rectangle 34"/>
+          <p:cNvPr id="23" name="Rectangle 22"/>
           <p:cNvSpPr/>
           <p:nvPr/>
         </p:nvSpPr>
         <p:spPr>
           <a:xfrm>
-            <a:off x="777240" y="5038344"/>
+            <a:off x="777240" y="4096512"/>
             <a:ext cx="73152" cy="749808"/>
           </a:xfrm>
           <a:prstGeom prst="rect">
@@ -9950,13 +10614,13 @@
       </p:sp>
       <p:sp>
         <p:nvSpPr>
-          <p:cNvPr id="36" name="Rounded Rectangle 35"/>
+          <p:cNvPr id="24" name="Rounded Rectangle 23"/>
           <p:cNvSpPr/>
           <p:nvPr/>
         </p:nvSpPr>
         <p:spPr>
           <a:xfrm>
-            <a:off x="978408" y="5257800"/>
+            <a:off x="978408" y="4315968"/>
             <a:ext cx="438912" cy="438912"/>
           </a:xfrm>
           <a:prstGeom prst="roundRect">
@@ -9995,13 +10659,13 @@
       </p:sp>
       <p:sp>
         <p:nvSpPr>
-          <p:cNvPr id="37" name="TextBox 36"/>
+          <p:cNvPr id="25" name="TextBox 24"/>
           <p:cNvSpPr txBox="1"/>
           <p:nvPr/>
         </p:nvSpPr>
         <p:spPr>
           <a:xfrm>
-            <a:off x="978408" y="5266944"/>
+            <a:off x="978408" y="4325112"/>
             <a:ext cx="438912" cy="420624"/>
           </a:xfrm>
           <a:prstGeom prst="rect">
@@ -10023,20 +10687,20 @@
                 </a:solidFill>
                 <a:latin typeface="Arial"/>
               </a:rPr>
-              <a:t>5</a:t>
-            </a:r>
-          </a:p>
-        </p:txBody>
-      </p:sp>
-      <p:sp>
-        <p:nvSpPr>
-          <p:cNvPr id="38" name="TextBox 37"/>
+              <a:t>3</a:t>
+            </a:r>
+          </a:p>
+        </p:txBody>
+      </p:sp>
+      <p:sp>
+        <p:nvSpPr>
+          <p:cNvPr id="26" name="TextBox 25"/>
           <p:cNvSpPr txBox="1"/>
           <p:nvPr/>
         </p:nvSpPr>
         <p:spPr>
           <a:xfrm>
-            <a:off x="1581912" y="5221224"/>
+            <a:off x="1581912" y="4279392"/>
             <a:ext cx="4087368" cy="329184"/>
           </a:xfrm>
           <a:prstGeom prst="rect">
@@ -10065,13 +10729,13 @@
       </p:sp>
       <p:sp>
         <p:nvSpPr>
-          <p:cNvPr id="39" name="TextBox 38"/>
+          <p:cNvPr id="27" name="TextBox 26"/>
           <p:cNvSpPr txBox="1"/>
           <p:nvPr/>
         </p:nvSpPr>
         <p:spPr>
           <a:xfrm>
-            <a:off x="1581912" y="5605272"/>
+            <a:off x="1581912" y="4663440"/>
             <a:ext cx="4087368" cy="36575"/>
           </a:xfrm>
           <a:prstGeom prst="rect">
@@ -10093,7 +10757,487 @@
                 </a:solidFill>
                 <a:latin typeface="Arial"/>
               </a:rPr>
-              <a:t>Both prompts, human changes, reviewer and owner are recorded</a:t>
+              <a:t>Every claim matches the source pack</a:t>
+            </a:r>
+          </a:p>
+        </p:txBody>
+      </p:sp>
+      <p:sp>
+        <p:nvSpPr>
+          <p:cNvPr id="28" name="Rounded Rectangle 27"/>
+          <p:cNvSpPr/>
+          <p:nvPr/>
+        </p:nvSpPr>
+        <p:spPr>
+          <a:xfrm>
+            <a:off x="6126479" y="4096512"/>
+            <a:ext cx="5074920" cy="749808"/>
+          </a:xfrm>
+          <a:prstGeom prst="roundRect">
+            <a:avLst/>
+          </a:prstGeom>
+          <a:solidFill>
+            <a:srgbClr val="F5F8FC"/>
+          </a:solidFill>
+          <a:ln>
+            <a:solidFill>
+              <a:srgbClr val="E2E8F0"/>
+            </a:solidFill>
+          </a:ln>
+        </p:spPr>
+        <p:style>
+          <a:lnRef idx="1">
+            <a:schemeClr val="accent1"/>
+          </a:lnRef>
+          <a:fillRef idx="3">
+            <a:schemeClr val="accent1"/>
+          </a:fillRef>
+          <a:effectRef idx="2">
+            <a:schemeClr val="accent1"/>
+          </a:effectRef>
+          <a:fontRef idx="minor">
+            <a:schemeClr val="lt1"/>
+          </a:fontRef>
+        </p:style>
+        <p:txBody>
+          <a:bodyPr rtlCol="0" anchor="ctr"/>
+          <a:lstStyle/>
+          <a:p>
+            <a:pPr algn="ctr"/>
+          </a:p>
+        </p:txBody>
+      </p:sp>
+      <p:sp>
+        <p:nvSpPr>
+          <p:cNvPr id="29" name="Rectangle 28"/>
+          <p:cNvSpPr/>
+          <p:nvPr/>
+        </p:nvSpPr>
+        <p:spPr>
+          <a:xfrm>
+            <a:off x="6126479" y="4096512"/>
+            <a:ext cx="73152" cy="749808"/>
+          </a:xfrm>
+          <a:prstGeom prst="rect">
+            <a:avLst/>
+          </a:prstGeom>
+          <a:solidFill>
+            <a:srgbClr val="10B981"/>
+          </a:solidFill>
+          <a:ln>
+            <a:solidFill>
+              <a:srgbClr val="10B981"/>
+            </a:solidFill>
+          </a:ln>
+        </p:spPr>
+        <p:style>
+          <a:lnRef idx="1">
+            <a:schemeClr val="accent1"/>
+          </a:lnRef>
+          <a:fillRef idx="3">
+            <a:schemeClr val="accent1"/>
+          </a:fillRef>
+          <a:effectRef idx="2">
+            <a:schemeClr val="accent1"/>
+          </a:effectRef>
+          <a:fontRef idx="minor">
+            <a:schemeClr val="lt1"/>
+          </a:fontRef>
+        </p:style>
+        <p:txBody>
+          <a:bodyPr rtlCol="0" anchor="ctr"/>
+          <a:lstStyle/>
+          <a:p>
+            <a:pPr algn="ctr"/>
+          </a:p>
+        </p:txBody>
+      </p:sp>
+      <p:sp>
+        <p:nvSpPr>
+          <p:cNvPr id="30" name="Rounded Rectangle 29"/>
+          <p:cNvSpPr/>
+          <p:nvPr/>
+        </p:nvSpPr>
+        <p:spPr>
+          <a:xfrm>
+            <a:off x="6327647" y="4315968"/>
+            <a:ext cx="438912" cy="438912"/>
+          </a:xfrm>
+          <a:prstGeom prst="roundRect">
+            <a:avLst/>
+          </a:prstGeom>
+          <a:solidFill>
+            <a:srgbClr val="10B981"/>
+          </a:solidFill>
+          <a:ln>
+            <a:solidFill>
+              <a:srgbClr val="10B981"/>
+            </a:solidFill>
+          </a:ln>
+        </p:spPr>
+        <p:style>
+          <a:lnRef idx="1">
+            <a:schemeClr val="accent1"/>
+          </a:lnRef>
+          <a:fillRef idx="3">
+            <a:schemeClr val="accent1"/>
+          </a:fillRef>
+          <a:effectRef idx="2">
+            <a:schemeClr val="accent1"/>
+          </a:effectRef>
+          <a:fontRef idx="minor">
+            <a:schemeClr val="lt1"/>
+          </a:fontRef>
+        </p:style>
+        <p:txBody>
+          <a:bodyPr rtlCol="0" anchor="ctr"/>
+          <a:lstStyle/>
+          <a:p>
+            <a:pPr algn="ctr"/>
+          </a:p>
+        </p:txBody>
+      </p:sp>
+      <p:sp>
+        <p:nvSpPr>
+          <p:cNvPr id="31" name="TextBox 30"/>
+          <p:cNvSpPr txBox="1"/>
+          <p:nvPr/>
+        </p:nvSpPr>
+        <p:spPr>
+          <a:xfrm>
+            <a:off x="6327647" y="4325112"/>
+            <a:ext cx="438912" cy="420624"/>
+          </a:xfrm>
+          <a:prstGeom prst="rect">
+            <a:avLst/>
+          </a:prstGeom>
+          <a:noFill/>
+        </p:spPr>
+        <p:txBody>
+          <a:bodyPr wrap="square" anchor="ctr">
+            <a:spAutoFit/>
+          </a:bodyPr>
+          <a:lstStyle/>
+          <a:p>
+            <a:pPr algn="ctr"/>
+            <a:r>
+              <a:rPr sz="1400" b="1">
+                <a:solidFill>
+                  <a:srgbClr val="FFFFFF"/>
+                </a:solidFill>
+                <a:latin typeface="Arial"/>
+              </a:rPr>
+              <a:t>4</a:t>
+            </a:r>
+          </a:p>
+        </p:txBody>
+      </p:sp>
+      <p:sp>
+        <p:nvSpPr>
+          <p:cNvPr id="32" name="TextBox 31"/>
+          <p:cNvSpPr txBox="1"/>
+          <p:nvPr/>
+        </p:nvSpPr>
+        <p:spPr>
+          <a:xfrm>
+            <a:off x="6931151" y="4279392"/>
+            <a:ext cx="4087368" cy="329184"/>
+          </a:xfrm>
+          <a:prstGeom prst="rect">
+            <a:avLst/>
+          </a:prstGeom>
+          <a:noFill/>
+        </p:spPr>
+        <p:txBody>
+          <a:bodyPr wrap="square" anchor="t">
+            <a:spAutoFit/>
+          </a:bodyPr>
+          <a:lstStyle/>
+          <a:p>
+            <a:pPr algn="l"/>
+            <a:r>
+              <a:rPr sz="1400" b="1">
+                <a:solidFill>
+                  <a:srgbClr val="10B981"/>
+                </a:solidFill>
+                <a:latin typeface="Arial"/>
+              </a:rPr>
+              <a:t>CHECK</a:t>
+            </a:r>
+          </a:p>
+        </p:txBody>
+      </p:sp>
+      <p:sp>
+        <p:nvSpPr>
+          <p:cNvPr id="33" name="TextBox 32"/>
+          <p:cNvSpPr txBox="1"/>
+          <p:nvPr/>
+        </p:nvSpPr>
+        <p:spPr>
+          <a:xfrm>
+            <a:off x="6931151" y="4663440"/>
+            <a:ext cx="4087368" cy="36575"/>
+          </a:xfrm>
+          <a:prstGeom prst="rect">
+            <a:avLst/>
+          </a:prstGeom>
+          <a:noFill/>
+        </p:spPr>
+        <p:txBody>
+          <a:bodyPr wrap="square" anchor="t">
+            <a:spAutoFit/>
+          </a:bodyPr>
+          <a:lstStyle/>
+          <a:p>
+            <a:pPr algn="l"/>
+            <a:r>
+              <a:rPr sz="1150" b="0">
+                <a:solidFill>
+                  <a:srgbClr val="161B26"/>
+                </a:solidFill>
+                <a:latin typeface="Arial"/>
+              </a:rPr>
+              <a:t>Critical evidence is editable in the final PowerPoint</a:t>
+            </a:r>
+          </a:p>
+        </p:txBody>
+      </p:sp>
+      <p:sp>
+        <p:nvSpPr>
+          <p:cNvPr id="34" name="Rounded Rectangle 33"/>
+          <p:cNvSpPr/>
+          <p:nvPr/>
+        </p:nvSpPr>
+        <p:spPr>
+          <a:xfrm>
+            <a:off x="777240" y="5038344"/>
+            <a:ext cx="5074920" cy="749808"/>
+          </a:xfrm>
+          <a:prstGeom prst="roundRect">
+            <a:avLst/>
+          </a:prstGeom>
+          <a:solidFill>
+            <a:srgbClr val="F5F8FC"/>
+          </a:solidFill>
+          <a:ln>
+            <a:solidFill>
+              <a:srgbClr val="E2E8F0"/>
+            </a:solidFill>
+          </a:ln>
+        </p:spPr>
+        <p:style>
+          <a:lnRef idx="1">
+            <a:schemeClr val="accent1"/>
+          </a:lnRef>
+          <a:fillRef idx="3">
+            <a:schemeClr val="accent1"/>
+          </a:fillRef>
+          <a:effectRef idx="2">
+            <a:schemeClr val="accent1"/>
+          </a:effectRef>
+          <a:fontRef idx="minor">
+            <a:schemeClr val="lt1"/>
+          </a:fontRef>
+        </p:style>
+        <p:txBody>
+          <a:bodyPr rtlCol="0" anchor="ctr"/>
+          <a:lstStyle/>
+          <a:p>
+            <a:pPr algn="ctr"/>
+          </a:p>
+        </p:txBody>
+      </p:sp>
+      <p:sp>
+        <p:nvSpPr>
+          <p:cNvPr id="35" name="Rectangle 34"/>
+          <p:cNvSpPr/>
+          <p:nvPr/>
+        </p:nvSpPr>
+        <p:spPr>
+          <a:xfrm>
+            <a:off x="777240" y="5038344"/>
+            <a:ext cx="73152" cy="749808"/>
+          </a:xfrm>
+          <a:prstGeom prst="rect">
+            <a:avLst/>
+          </a:prstGeom>
+          <a:solidFill>
+            <a:srgbClr val="10B981"/>
+          </a:solidFill>
+          <a:ln>
+            <a:solidFill>
+              <a:srgbClr val="10B981"/>
+            </a:solidFill>
+          </a:ln>
+        </p:spPr>
+        <p:style>
+          <a:lnRef idx="1">
+            <a:schemeClr val="accent1"/>
+          </a:lnRef>
+          <a:fillRef idx="3">
+            <a:schemeClr val="accent1"/>
+          </a:fillRef>
+          <a:effectRef idx="2">
+            <a:schemeClr val="accent1"/>
+          </a:effectRef>
+          <a:fontRef idx="minor">
+            <a:schemeClr val="lt1"/>
+          </a:fontRef>
+        </p:style>
+        <p:txBody>
+          <a:bodyPr rtlCol="0" anchor="ctr"/>
+          <a:lstStyle/>
+          <a:p>
+            <a:pPr algn="ctr"/>
+          </a:p>
+        </p:txBody>
+      </p:sp>
+      <p:sp>
+        <p:nvSpPr>
+          <p:cNvPr id="36" name="Rounded Rectangle 35"/>
+          <p:cNvSpPr/>
+          <p:nvPr/>
+        </p:nvSpPr>
+        <p:spPr>
+          <a:xfrm>
+            <a:off x="978408" y="5257800"/>
+            <a:ext cx="438912" cy="438912"/>
+          </a:xfrm>
+          <a:prstGeom prst="roundRect">
+            <a:avLst/>
+          </a:prstGeom>
+          <a:solidFill>
+            <a:srgbClr val="10B981"/>
+          </a:solidFill>
+          <a:ln>
+            <a:solidFill>
+              <a:srgbClr val="10B981"/>
+            </a:solidFill>
+          </a:ln>
+        </p:spPr>
+        <p:style>
+          <a:lnRef idx="1">
+            <a:schemeClr val="accent1"/>
+          </a:lnRef>
+          <a:fillRef idx="3">
+            <a:schemeClr val="accent1"/>
+          </a:fillRef>
+          <a:effectRef idx="2">
+            <a:schemeClr val="accent1"/>
+          </a:effectRef>
+          <a:fontRef idx="minor">
+            <a:schemeClr val="lt1"/>
+          </a:fontRef>
+        </p:style>
+        <p:txBody>
+          <a:bodyPr rtlCol="0" anchor="ctr"/>
+          <a:lstStyle/>
+          <a:p>
+            <a:pPr algn="ctr"/>
+          </a:p>
+        </p:txBody>
+      </p:sp>
+      <p:sp>
+        <p:nvSpPr>
+          <p:cNvPr id="37" name="TextBox 36"/>
+          <p:cNvSpPr txBox="1"/>
+          <p:nvPr/>
+        </p:nvSpPr>
+        <p:spPr>
+          <a:xfrm>
+            <a:off x="978408" y="5266944"/>
+            <a:ext cx="438912" cy="420624"/>
+          </a:xfrm>
+          <a:prstGeom prst="rect">
+            <a:avLst/>
+          </a:prstGeom>
+          <a:noFill/>
+        </p:spPr>
+        <p:txBody>
+          <a:bodyPr wrap="square" anchor="ctr">
+            <a:spAutoFit/>
+          </a:bodyPr>
+          <a:lstStyle/>
+          <a:p>
+            <a:pPr algn="ctr"/>
+            <a:r>
+              <a:rPr sz="1400" b="1">
+                <a:solidFill>
+                  <a:srgbClr val="FFFFFF"/>
+                </a:solidFill>
+                <a:latin typeface="Arial"/>
+              </a:rPr>
+              <a:t>5</a:t>
+            </a:r>
+          </a:p>
+        </p:txBody>
+      </p:sp>
+      <p:sp>
+        <p:nvSpPr>
+          <p:cNvPr id="38" name="TextBox 37"/>
+          <p:cNvSpPr txBox="1"/>
+          <p:nvPr/>
+        </p:nvSpPr>
+        <p:spPr>
+          <a:xfrm>
+            <a:off x="1581912" y="5221224"/>
+            <a:ext cx="4087368" cy="329184"/>
+          </a:xfrm>
+          <a:prstGeom prst="rect">
+            <a:avLst/>
+          </a:prstGeom>
+          <a:noFill/>
+        </p:spPr>
+        <p:txBody>
+          <a:bodyPr wrap="square" anchor="t">
+            <a:spAutoFit/>
+          </a:bodyPr>
+          <a:lstStyle/>
+          <a:p>
+            <a:pPr algn="l"/>
+            <a:r>
+              <a:rPr sz="1400" b="1">
+                <a:solidFill>
+                  <a:srgbClr val="10B981"/>
+                </a:solidFill>
+                <a:latin typeface="Arial"/>
+              </a:rPr>
+              <a:t>CHECK</a:t>
+            </a:r>
+          </a:p>
+        </p:txBody>
+      </p:sp>
+      <p:sp>
+        <p:nvSpPr>
+          <p:cNvPr id="39" name="TextBox 38"/>
+          <p:cNvSpPr txBox="1"/>
+          <p:nvPr/>
+        </p:nvSpPr>
+        <p:spPr>
+          <a:xfrm>
+            <a:off x="1581912" y="5605272"/>
+            <a:ext cx="4087368" cy="36575"/>
+          </a:xfrm>
+          <a:prstGeom prst="rect">
+            <a:avLst/>
+          </a:prstGeom>
+          <a:noFill/>
+        </p:spPr>
+        <p:txBody>
+          <a:bodyPr wrap="square" anchor="t">
+            <a:spAutoFit/>
+          </a:bodyPr>
+          <a:lstStyle/>
+          <a:p>
+            <a:pPr algn="l"/>
+            <a:r>
+              <a:rPr sz="1150" b="0">
+                <a:solidFill>
+                  <a:srgbClr val="161B26"/>
+                </a:solidFill>
+                <a:latin typeface="Arial"/>
+              </a:rPr>
+              <a:t>Prompts, human changes, reviewer and owner are recorded</a:t>
             </a:r>
           </a:p>
         </p:txBody>
